--- a/PPT_Perception/content_process/template/knowledge/knowledge_content.pptx
+++ b/PPT_Perception/content_process/template/knowledge/knowledge_content.pptx
@@ -7490,842 +7490,761 @@
       </p:sp>
       <p:grpSp>
         <p:nvGrpSpPr>
-          <p:cNvPr id="10" name="组合 9" descr="7b0a202020202274657874626f78223a20227b5c2263617465676f72795f69645c223a31303732362c5c2269645c223a32303334323632387d220a7d0a"/>
+          <p:cNvPr id="11" name="组合 10"/>
           <p:cNvGrpSpPr/>
           <p:nvPr/>
         </p:nvGrpSpPr>
         <p:grpSpPr>
-          <a:xfrm>
+          <a:xfrm rot="0">
             <a:off x="4238625" y="1424305"/>
             <a:ext cx="7423785" cy="4859020"/>
-            <a:chOff x="6045" y="3315"/>
-            <a:chExt cx="6859" cy="3966"/>
+            <a:chOff x="3838575" y="2105025"/>
+            <a:chExt cx="4355782" cy="2518409"/>
           </a:xfrm>
         </p:grpSpPr>
-        <p:grpSp>
-          <p:nvGrpSpPr>
-            <p:cNvPr id="11" name="组合 10"/>
-            <p:cNvGrpSpPr/>
-            <p:nvPr/>
-          </p:nvGrpSpPr>
-          <p:grpSpPr>
-            <a:xfrm>
-              <a:off x="6045" y="3315"/>
-              <a:ext cx="6859" cy="3966"/>
-              <a:chOff x="3838575" y="2105025"/>
-              <a:chExt cx="4355782" cy="2518409"/>
-            </a:xfrm>
-          </p:grpSpPr>
-          <p:sp>
-            <p:nvSpPr>
-              <p:cNvPr id="13" name="图形 5"/>
-              <p:cNvSpPr/>
-              <p:nvPr>
-                <p:custDataLst>
-                  <p:tags r:id="rId1"/>
-                </p:custDataLst>
-              </p:nvPr>
-            </p:nvSpPr>
-            <p:spPr>
-              <a:xfrm>
-                <a:off x="3838575" y="2439352"/>
-                <a:ext cx="4278630" cy="2184082"/>
-              </a:xfrm>
-              <a:custGeom>
-                <a:avLst/>
-                <a:gdLst>
-                  <a:gd name="connsiteX0" fmla="*/ 0 w 4278630"/>
-                  <a:gd name="connsiteY0" fmla="*/ 0 h 2184082"/>
-                  <a:gd name="connsiteX1" fmla="*/ 4278630 w 4278630"/>
-                  <a:gd name="connsiteY1" fmla="*/ 0 h 2184082"/>
-                  <a:gd name="connsiteX2" fmla="*/ 4278630 w 4278630"/>
-                  <a:gd name="connsiteY2" fmla="*/ 2184083 h 2184082"/>
-                  <a:gd name="connsiteX3" fmla="*/ 0 w 4278630"/>
-                  <a:gd name="connsiteY3" fmla="*/ 2184083 h 2184082"/>
-                </a:gdLst>
-                <a:ahLst/>
-                <a:cxnLst>
-                  <a:cxn ang="0">
-                    <a:pos x="connsiteX0" y="connsiteY0"/>
-                  </a:cxn>
-                  <a:cxn ang="0">
-                    <a:pos x="connsiteX1" y="connsiteY1"/>
-                  </a:cxn>
-                  <a:cxn ang="0">
-                    <a:pos x="connsiteX2" y="connsiteY2"/>
-                  </a:cxn>
-                  <a:cxn ang="0">
-                    <a:pos x="connsiteX3" y="connsiteY3"/>
-                  </a:cxn>
-                </a:cxnLst>
-                <a:rect l="l" t="t" r="r" b="b"/>
-                <a:pathLst>
-                  <a:path w="4278630" h="2184082">
-                    <a:moveTo>
-                      <a:pt x="0" y="0"/>
-                    </a:moveTo>
-                    <a:lnTo>
-                      <a:pt x="4278630" y="0"/>
-                    </a:lnTo>
-                    <a:lnTo>
-                      <a:pt x="4278630" y="2184083"/>
-                    </a:lnTo>
-                    <a:lnTo>
-                      <a:pt x="0" y="2184083"/>
-                    </a:lnTo>
-                    <a:close/>
-                  </a:path>
-                </a:pathLst>
-              </a:custGeom>
-              <a:solidFill>
-                <a:srgbClr val="E8E8E8"/>
-              </a:solidFill>
-              <a:ln w="9525" cap="flat">
-                <a:noFill/>
-                <a:prstDash val="solid"/>
-                <a:miter/>
-              </a:ln>
-            </p:spPr>
-            <p:txBody>
-              <a:bodyPr rtlCol="0" anchor="ctr"/>
-              <a:lstStyle/>
-              <a:p>
-                <a:endParaRPr lang="zh-CN" altLang="en-US"/>
-              </a:p>
-            </p:txBody>
-          </p:sp>
-          <p:sp>
-            <p:nvSpPr>
-              <p:cNvPr id="14" name="图形 5"/>
-              <p:cNvSpPr/>
-              <p:nvPr>
-                <p:custDataLst>
-                  <p:tags r:id="rId2"/>
-                </p:custDataLst>
-              </p:nvPr>
-            </p:nvSpPr>
-            <p:spPr>
-              <a:xfrm>
-                <a:off x="7632382" y="2110740"/>
-                <a:ext cx="218122" cy="501967"/>
-              </a:xfrm>
-              <a:custGeom>
-                <a:avLst/>
-                <a:gdLst>
-                  <a:gd name="connsiteX0" fmla="*/ 184785 w 218122"/>
-                  <a:gd name="connsiteY0" fmla="*/ 501968 h 501967"/>
-                  <a:gd name="connsiteX1" fmla="*/ 0 w 218122"/>
-                  <a:gd name="connsiteY1" fmla="*/ 482918 h 501967"/>
-                  <a:gd name="connsiteX2" fmla="*/ 33338 w 218122"/>
-                  <a:gd name="connsiteY2" fmla="*/ 0 h 501967"/>
-                  <a:gd name="connsiteX3" fmla="*/ 218123 w 218122"/>
-                  <a:gd name="connsiteY3" fmla="*/ 18098 h 501967"/>
-                </a:gdLst>
-                <a:ahLst/>
-                <a:cxnLst>
-                  <a:cxn ang="0">
-                    <a:pos x="connsiteX0" y="connsiteY0"/>
-                  </a:cxn>
-                  <a:cxn ang="0">
-                    <a:pos x="connsiteX1" y="connsiteY1"/>
-                  </a:cxn>
-                  <a:cxn ang="0">
-                    <a:pos x="connsiteX2" y="connsiteY2"/>
-                  </a:cxn>
-                  <a:cxn ang="0">
-                    <a:pos x="connsiteX3" y="connsiteY3"/>
-                  </a:cxn>
-                </a:cxnLst>
-                <a:rect l="l" t="t" r="r" b="b"/>
-                <a:pathLst>
-                  <a:path w="218122" h="501967">
-                    <a:moveTo>
-                      <a:pt x="184785" y="501968"/>
-                    </a:moveTo>
-                    <a:lnTo>
-                      <a:pt x="0" y="482918"/>
-                    </a:lnTo>
-                    <a:lnTo>
-                      <a:pt x="33338" y="0"/>
-                    </a:lnTo>
-                    <a:lnTo>
-                      <a:pt x="218123" y="18098"/>
-                    </a:lnTo>
-                    <a:close/>
-                  </a:path>
-                </a:pathLst>
-              </a:custGeom>
-              <a:solidFill>
-                <a:srgbClr val="DEBF90"/>
-              </a:solidFill>
-              <a:ln w="9525" cap="flat">
-                <a:noFill/>
-                <a:prstDash val="solid"/>
-                <a:miter/>
-              </a:ln>
-            </p:spPr>
-            <p:txBody>
-              <a:bodyPr rtlCol="0" anchor="ctr"/>
-              <a:lstStyle/>
-              <a:p>
-                <a:endParaRPr lang="zh-CN" altLang="en-US"/>
-              </a:p>
-            </p:txBody>
-          </p:sp>
-          <p:sp>
-            <p:nvSpPr>
-              <p:cNvPr id="15" name="图形 5"/>
-              <p:cNvSpPr/>
-              <p:nvPr>
-                <p:custDataLst>
-                  <p:tags r:id="rId3"/>
-                </p:custDataLst>
-              </p:nvPr>
-            </p:nvSpPr>
-            <p:spPr>
-              <a:xfrm>
-                <a:off x="4259580" y="2110740"/>
-                <a:ext cx="217169" cy="501967"/>
-              </a:xfrm>
-              <a:custGeom>
-                <a:avLst/>
-                <a:gdLst>
-                  <a:gd name="connsiteX0" fmla="*/ 32385 w 217169"/>
-                  <a:gd name="connsiteY0" fmla="*/ 501968 h 501967"/>
-                  <a:gd name="connsiteX1" fmla="*/ 217170 w 217169"/>
-                  <a:gd name="connsiteY1" fmla="*/ 482918 h 501967"/>
-                  <a:gd name="connsiteX2" fmla="*/ 183833 w 217169"/>
-                  <a:gd name="connsiteY2" fmla="*/ 0 h 501967"/>
-                  <a:gd name="connsiteX3" fmla="*/ 0 w 217169"/>
-                  <a:gd name="connsiteY3" fmla="*/ 18098 h 501967"/>
-                </a:gdLst>
-                <a:ahLst/>
-                <a:cxnLst>
-                  <a:cxn ang="0">
-                    <a:pos x="connsiteX0" y="connsiteY0"/>
-                  </a:cxn>
-                  <a:cxn ang="0">
-                    <a:pos x="connsiteX1" y="connsiteY1"/>
-                  </a:cxn>
-                  <a:cxn ang="0">
-                    <a:pos x="connsiteX2" y="connsiteY2"/>
-                  </a:cxn>
-                  <a:cxn ang="0">
-                    <a:pos x="connsiteX3" y="connsiteY3"/>
-                  </a:cxn>
-                </a:cxnLst>
-                <a:rect l="l" t="t" r="r" b="b"/>
-                <a:pathLst>
-                  <a:path w="217169" h="501967">
-                    <a:moveTo>
-                      <a:pt x="32385" y="501968"/>
-                    </a:moveTo>
-                    <a:lnTo>
-                      <a:pt x="217170" y="482918"/>
-                    </a:lnTo>
-                    <a:lnTo>
-                      <a:pt x="183833" y="0"/>
-                    </a:lnTo>
-                    <a:lnTo>
-                      <a:pt x="0" y="18098"/>
-                    </a:lnTo>
-                    <a:close/>
-                  </a:path>
-                </a:pathLst>
-              </a:custGeom>
-              <a:solidFill>
-                <a:srgbClr val="DEBF90"/>
-              </a:solidFill>
-              <a:ln w="9525" cap="flat">
-                <a:noFill/>
-                <a:prstDash val="solid"/>
-                <a:miter/>
-              </a:ln>
-            </p:spPr>
-            <p:txBody>
-              <a:bodyPr rtlCol="0" anchor="ctr"/>
-              <a:lstStyle/>
-              <a:p>
-                <a:endParaRPr lang="zh-CN" altLang="en-US"/>
-              </a:p>
-            </p:txBody>
-          </p:sp>
-          <p:sp>
-            <p:nvSpPr>
-              <p:cNvPr id="16" name="图形 5"/>
-              <p:cNvSpPr/>
-              <p:nvPr>
-                <p:custDataLst>
-                  <p:tags r:id="rId4"/>
-                </p:custDataLst>
-              </p:nvPr>
-            </p:nvSpPr>
-            <p:spPr>
-              <a:xfrm>
-                <a:off x="3915727" y="2349817"/>
-                <a:ext cx="4278630" cy="2184082"/>
-              </a:xfrm>
-              <a:custGeom>
-                <a:avLst/>
-                <a:gdLst>
-                  <a:gd name="connsiteX0" fmla="*/ 0 w 4278630"/>
-                  <a:gd name="connsiteY0" fmla="*/ 0 h 2184082"/>
-                  <a:gd name="connsiteX1" fmla="*/ 4278630 w 4278630"/>
-                  <a:gd name="connsiteY1" fmla="*/ 0 h 2184082"/>
-                  <a:gd name="connsiteX2" fmla="*/ 4278630 w 4278630"/>
-                  <a:gd name="connsiteY2" fmla="*/ 2184083 h 2184082"/>
-                  <a:gd name="connsiteX3" fmla="*/ 0 w 4278630"/>
-                  <a:gd name="connsiteY3" fmla="*/ 2184083 h 2184082"/>
-                </a:gdLst>
-                <a:ahLst/>
-                <a:cxnLst>
-                  <a:cxn ang="0">
-                    <a:pos x="connsiteX0" y="connsiteY0"/>
-                  </a:cxn>
-                  <a:cxn ang="0">
-                    <a:pos x="connsiteX1" y="connsiteY1"/>
-                  </a:cxn>
-                  <a:cxn ang="0">
-                    <a:pos x="connsiteX2" y="connsiteY2"/>
-                  </a:cxn>
-                  <a:cxn ang="0">
-                    <a:pos x="connsiteX3" y="connsiteY3"/>
-                  </a:cxn>
-                </a:cxnLst>
-                <a:rect l="l" t="t" r="r" b="b"/>
-                <a:pathLst>
-                  <a:path w="4278630" h="2184082">
-                    <a:moveTo>
-                      <a:pt x="0" y="0"/>
-                    </a:moveTo>
-                    <a:lnTo>
-                      <a:pt x="4278630" y="0"/>
-                    </a:lnTo>
-                    <a:lnTo>
-                      <a:pt x="4278630" y="2184083"/>
-                    </a:lnTo>
-                    <a:lnTo>
-                      <a:pt x="0" y="2184083"/>
-                    </a:lnTo>
-                    <a:close/>
-                  </a:path>
-                </a:pathLst>
-              </a:custGeom>
-              <a:solidFill>
-                <a:srgbClr val="FFFFFF"/>
-              </a:solidFill>
-              <a:ln w="9525" cap="flat">
-                <a:solidFill>
-                  <a:srgbClr val="231815"/>
-                </a:solidFill>
-                <a:prstDash val="solid"/>
-                <a:miter/>
-              </a:ln>
-            </p:spPr>
-            <p:txBody>
-              <a:bodyPr rtlCol="0" anchor="ctr"/>
-              <a:lstStyle/>
-              <a:p>
-                <a:endParaRPr lang="zh-CN" altLang="en-US"/>
-              </a:p>
-            </p:txBody>
-          </p:sp>
-          <p:sp>
-            <p:nvSpPr>
-              <p:cNvPr id="17" name="图形 5"/>
-              <p:cNvSpPr/>
-              <p:nvPr>
-                <p:custDataLst>
-                  <p:tags r:id="rId5"/>
-                </p:custDataLst>
-              </p:nvPr>
-            </p:nvSpPr>
-            <p:spPr>
-              <a:xfrm>
-                <a:off x="7632382" y="2105025"/>
-                <a:ext cx="244792" cy="507682"/>
-              </a:xfrm>
-              <a:custGeom>
-                <a:avLst/>
-                <a:gdLst>
-                  <a:gd name="connsiteX0" fmla="*/ 184785 w 244792"/>
-                  <a:gd name="connsiteY0" fmla="*/ 507683 h 507682"/>
-                  <a:gd name="connsiteX1" fmla="*/ 0 w 244792"/>
-                  <a:gd name="connsiteY1" fmla="*/ 488633 h 507682"/>
-                  <a:gd name="connsiteX2" fmla="*/ 60960 w 244792"/>
-                  <a:gd name="connsiteY2" fmla="*/ 0 h 507682"/>
-                  <a:gd name="connsiteX3" fmla="*/ 244793 w 244792"/>
-                  <a:gd name="connsiteY3" fmla="*/ 19050 h 507682"/>
-                </a:gdLst>
-                <a:ahLst/>
-                <a:cxnLst>
-                  <a:cxn ang="0">
-                    <a:pos x="connsiteX0" y="connsiteY0"/>
-                  </a:cxn>
-                  <a:cxn ang="0">
-                    <a:pos x="connsiteX1" y="connsiteY1"/>
-                  </a:cxn>
-                  <a:cxn ang="0">
-                    <a:pos x="connsiteX2" y="connsiteY2"/>
-                  </a:cxn>
-                  <a:cxn ang="0">
-                    <a:pos x="connsiteX3" y="connsiteY3"/>
-                  </a:cxn>
-                </a:cxnLst>
-                <a:rect l="l" t="t" r="r" b="b"/>
-                <a:pathLst>
-                  <a:path w="244792" h="507682">
-                    <a:moveTo>
-                      <a:pt x="184785" y="507683"/>
-                    </a:moveTo>
-                    <a:lnTo>
-                      <a:pt x="0" y="488633"/>
-                    </a:lnTo>
-                    <a:lnTo>
-                      <a:pt x="60960" y="0"/>
-                    </a:lnTo>
-                    <a:lnTo>
-                      <a:pt x="244793" y="19050"/>
-                    </a:lnTo>
-                    <a:close/>
-                  </a:path>
-                </a:pathLst>
-              </a:custGeom>
-              <a:solidFill>
-                <a:srgbClr val="FFDBA6"/>
-              </a:solidFill>
-              <a:ln w="9525" cap="flat">
-                <a:noFill/>
-                <a:prstDash val="solid"/>
-                <a:miter/>
-              </a:ln>
-            </p:spPr>
-            <p:txBody>
-              <a:bodyPr rtlCol="0" anchor="ctr"/>
-              <a:lstStyle/>
-              <a:p>
-                <a:endParaRPr lang="zh-CN" altLang="en-US"/>
-              </a:p>
-            </p:txBody>
-          </p:sp>
-          <p:sp>
-            <p:nvSpPr>
-              <p:cNvPr id="18" name="图形 5"/>
-              <p:cNvSpPr/>
-              <p:nvPr>
-                <p:custDataLst>
-                  <p:tags r:id="rId6"/>
-                </p:custDataLst>
-              </p:nvPr>
-            </p:nvSpPr>
-            <p:spPr>
-              <a:xfrm>
-                <a:off x="7632382" y="2105025"/>
-                <a:ext cx="65722" cy="489585"/>
-              </a:xfrm>
-              <a:custGeom>
-                <a:avLst/>
-                <a:gdLst>
-                  <a:gd name="connsiteX0" fmla="*/ 60960 w 65722"/>
-                  <a:gd name="connsiteY0" fmla="*/ 0 h 489585"/>
-                  <a:gd name="connsiteX1" fmla="*/ 0 w 65722"/>
-                  <a:gd name="connsiteY1" fmla="*/ 488633 h 489585"/>
-                  <a:gd name="connsiteX2" fmla="*/ 5715 w 65722"/>
-                  <a:gd name="connsiteY2" fmla="*/ 489585 h 489585"/>
-                  <a:gd name="connsiteX3" fmla="*/ 65723 w 65722"/>
-                  <a:gd name="connsiteY3" fmla="*/ 953 h 489585"/>
-                </a:gdLst>
-                <a:ahLst/>
-                <a:cxnLst>
-                  <a:cxn ang="0">
-                    <a:pos x="connsiteX0" y="connsiteY0"/>
-                  </a:cxn>
-                  <a:cxn ang="0">
-                    <a:pos x="connsiteX1" y="connsiteY1"/>
-                  </a:cxn>
-                  <a:cxn ang="0">
-                    <a:pos x="connsiteX2" y="connsiteY2"/>
-                  </a:cxn>
-                  <a:cxn ang="0">
-                    <a:pos x="connsiteX3" y="connsiteY3"/>
-                  </a:cxn>
-                </a:cxnLst>
-                <a:rect l="l" t="t" r="r" b="b"/>
-                <a:pathLst>
-                  <a:path w="65722" h="489585">
-                    <a:moveTo>
-                      <a:pt x="60960" y="0"/>
-                    </a:moveTo>
-                    <a:lnTo>
-                      <a:pt x="0" y="488633"/>
-                    </a:lnTo>
-                    <a:lnTo>
-                      <a:pt x="5715" y="489585"/>
-                    </a:lnTo>
-                    <a:lnTo>
-                      <a:pt x="65723" y="953"/>
-                    </a:lnTo>
-                    <a:close/>
-                  </a:path>
-                </a:pathLst>
-              </a:custGeom>
-              <a:solidFill>
-                <a:srgbClr val="EBCA98"/>
-              </a:solidFill>
-              <a:ln w="9525" cap="flat">
-                <a:noFill/>
-                <a:prstDash val="solid"/>
-                <a:miter/>
-              </a:ln>
-            </p:spPr>
-            <p:txBody>
-              <a:bodyPr rtlCol="0" anchor="ctr"/>
-              <a:lstStyle/>
-              <a:p>
-                <a:endParaRPr lang="zh-CN" altLang="en-US"/>
-              </a:p>
-            </p:txBody>
-          </p:sp>
-          <p:sp>
-            <p:nvSpPr>
-              <p:cNvPr id="19" name="图形 5"/>
-              <p:cNvSpPr/>
-              <p:nvPr>
-                <p:custDataLst>
-                  <p:tags r:id="rId7"/>
-                </p:custDataLst>
-              </p:nvPr>
-            </p:nvSpPr>
-            <p:spPr>
-              <a:xfrm>
-                <a:off x="4231957" y="2105025"/>
-                <a:ext cx="244792" cy="507682"/>
-              </a:xfrm>
-              <a:custGeom>
-                <a:avLst/>
-                <a:gdLst>
-                  <a:gd name="connsiteX0" fmla="*/ 60007 w 244792"/>
-                  <a:gd name="connsiteY0" fmla="*/ 507683 h 507682"/>
-                  <a:gd name="connsiteX1" fmla="*/ 244793 w 244792"/>
-                  <a:gd name="connsiteY1" fmla="*/ 488633 h 507682"/>
-                  <a:gd name="connsiteX2" fmla="*/ 184785 w 244792"/>
-                  <a:gd name="connsiteY2" fmla="*/ 0 h 507682"/>
-                  <a:gd name="connsiteX3" fmla="*/ 0 w 244792"/>
-                  <a:gd name="connsiteY3" fmla="*/ 19050 h 507682"/>
-                </a:gdLst>
-                <a:ahLst/>
-                <a:cxnLst>
-                  <a:cxn ang="0">
-                    <a:pos x="connsiteX0" y="connsiteY0"/>
-                  </a:cxn>
-                  <a:cxn ang="0">
-                    <a:pos x="connsiteX1" y="connsiteY1"/>
-                  </a:cxn>
-                  <a:cxn ang="0">
-                    <a:pos x="connsiteX2" y="connsiteY2"/>
-                  </a:cxn>
-                  <a:cxn ang="0">
-                    <a:pos x="connsiteX3" y="connsiteY3"/>
-                  </a:cxn>
-                </a:cxnLst>
-                <a:rect l="l" t="t" r="r" b="b"/>
-                <a:pathLst>
-                  <a:path w="244792" h="507682">
-                    <a:moveTo>
-                      <a:pt x="60007" y="507683"/>
-                    </a:moveTo>
-                    <a:lnTo>
-                      <a:pt x="244793" y="488633"/>
-                    </a:lnTo>
-                    <a:lnTo>
-                      <a:pt x="184785" y="0"/>
-                    </a:lnTo>
-                    <a:lnTo>
-                      <a:pt x="0" y="19050"/>
-                    </a:lnTo>
-                    <a:close/>
-                  </a:path>
-                </a:pathLst>
-              </a:custGeom>
-              <a:solidFill>
-                <a:srgbClr val="FFDBA6"/>
-              </a:solidFill>
-              <a:ln w="9525" cap="flat">
-                <a:noFill/>
-                <a:prstDash val="solid"/>
-                <a:miter/>
-              </a:ln>
-            </p:spPr>
-            <p:txBody>
-              <a:bodyPr rtlCol="0" anchor="ctr"/>
-              <a:lstStyle/>
-              <a:p>
-                <a:endParaRPr lang="zh-CN" altLang="en-US"/>
-              </a:p>
-            </p:txBody>
-          </p:sp>
-          <p:sp>
-            <p:nvSpPr>
-              <p:cNvPr id="20" name="图形 5"/>
-              <p:cNvSpPr/>
-              <p:nvPr>
-                <p:custDataLst>
-                  <p:tags r:id="rId8"/>
-                </p:custDataLst>
-              </p:nvPr>
-            </p:nvSpPr>
-            <p:spPr>
-              <a:xfrm>
-                <a:off x="4411980" y="2105025"/>
-                <a:ext cx="64769" cy="489585"/>
-              </a:xfrm>
-              <a:custGeom>
-                <a:avLst/>
-                <a:gdLst>
-                  <a:gd name="connsiteX0" fmla="*/ 4763 w 64769"/>
-                  <a:gd name="connsiteY0" fmla="*/ 0 h 489585"/>
-                  <a:gd name="connsiteX1" fmla="*/ 64770 w 64769"/>
-                  <a:gd name="connsiteY1" fmla="*/ 488633 h 489585"/>
-                  <a:gd name="connsiteX2" fmla="*/ 60007 w 64769"/>
-                  <a:gd name="connsiteY2" fmla="*/ 489585 h 489585"/>
-                  <a:gd name="connsiteX3" fmla="*/ 0 w 64769"/>
-                  <a:gd name="connsiteY3" fmla="*/ 953 h 489585"/>
-                </a:gdLst>
-                <a:ahLst/>
-                <a:cxnLst>
-                  <a:cxn ang="0">
-                    <a:pos x="connsiteX0" y="connsiteY0"/>
-                  </a:cxn>
-                  <a:cxn ang="0">
-                    <a:pos x="connsiteX1" y="connsiteY1"/>
-                  </a:cxn>
-                  <a:cxn ang="0">
-                    <a:pos x="connsiteX2" y="connsiteY2"/>
-                  </a:cxn>
-                  <a:cxn ang="0">
-                    <a:pos x="connsiteX3" y="connsiteY3"/>
-                  </a:cxn>
-                </a:cxnLst>
-                <a:rect l="l" t="t" r="r" b="b"/>
-                <a:pathLst>
-                  <a:path w="64769" h="489585">
-                    <a:moveTo>
-                      <a:pt x="4763" y="0"/>
-                    </a:moveTo>
-                    <a:lnTo>
-                      <a:pt x="64770" y="488633"/>
-                    </a:lnTo>
-                    <a:lnTo>
-                      <a:pt x="60007" y="489585"/>
-                    </a:lnTo>
-                    <a:lnTo>
-                      <a:pt x="0" y="953"/>
-                    </a:lnTo>
-                    <a:close/>
-                  </a:path>
-                </a:pathLst>
-              </a:custGeom>
-              <a:solidFill>
-                <a:srgbClr val="EBCA98"/>
-              </a:solidFill>
-              <a:ln w="9525" cap="flat">
-                <a:noFill/>
-                <a:prstDash val="solid"/>
-                <a:miter/>
-              </a:ln>
-            </p:spPr>
-            <p:txBody>
-              <a:bodyPr rtlCol="0" anchor="ctr"/>
-              <a:lstStyle/>
-              <a:p>
-                <a:endParaRPr lang="zh-CN" altLang="en-US"/>
-              </a:p>
-            </p:txBody>
-          </p:sp>
-          <p:sp>
-            <p:nvSpPr>
-              <p:cNvPr id="21" name="图形 5"/>
-              <p:cNvSpPr/>
-              <p:nvPr>
-                <p:custDataLst>
-                  <p:tags r:id="rId9"/>
-                </p:custDataLst>
-              </p:nvPr>
-            </p:nvSpPr>
-            <p:spPr>
-              <a:xfrm>
-                <a:off x="4259580" y="2331720"/>
-                <a:ext cx="180022" cy="18097"/>
-              </a:xfrm>
-              <a:custGeom>
-                <a:avLst/>
-                <a:gdLst>
-                  <a:gd name="connsiteX0" fmla="*/ 0 w 180022"/>
-                  <a:gd name="connsiteY0" fmla="*/ 18098 h 18097"/>
-                  <a:gd name="connsiteX1" fmla="*/ 180022 w 180022"/>
-                  <a:gd name="connsiteY1" fmla="*/ 0 h 18097"/>
-                </a:gdLst>
-                <a:ahLst/>
-                <a:cxnLst>
-                  <a:cxn ang="0">
-                    <a:pos x="connsiteX0" y="connsiteY0"/>
-                  </a:cxn>
-                  <a:cxn ang="0">
-                    <a:pos x="connsiteX1" y="connsiteY1"/>
-                  </a:cxn>
-                </a:cxnLst>
-                <a:rect l="l" t="t" r="r" b="b"/>
-                <a:pathLst>
-                  <a:path w="180022" h="18097">
-                    <a:moveTo>
-                      <a:pt x="0" y="18098"/>
-                    </a:moveTo>
-                    <a:lnTo>
-                      <a:pt x="180022" y="0"/>
-                    </a:lnTo>
-                  </a:path>
-                </a:pathLst>
-              </a:custGeom>
-              <a:ln w="9525" cap="flat">
-                <a:solidFill>
-                  <a:srgbClr val="EBC999"/>
-                </a:solidFill>
-                <a:prstDash val="solid"/>
-                <a:miter/>
-              </a:ln>
-            </p:spPr>
-            <p:txBody>
-              <a:bodyPr rtlCol="0" anchor="ctr"/>
-              <a:lstStyle/>
-              <a:p>
-                <a:endParaRPr lang="zh-CN" altLang="en-US"/>
-              </a:p>
-            </p:txBody>
-          </p:sp>
-          <p:sp>
-            <p:nvSpPr>
-              <p:cNvPr id="22" name="图形 5"/>
-              <p:cNvSpPr/>
-              <p:nvPr>
-                <p:custDataLst>
-                  <p:tags r:id="rId10"/>
-                </p:custDataLst>
-              </p:nvPr>
-            </p:nvSpPr>
-            <p:spPr>
-              <a:xfrm>
-                <a:off x="7669530" y="2331720"/>
-                <a:ext cx="180022" cy="18097"/>
-              </a:xfrm>
-              <a:custGeom>
-                <a:avLst/>
-                <a:gdLst>
-                  <a:gd name="connsiteX0" fmla="*/ 180023 w 180022"/>
-                  <a:gd name="connsiteY0" fmla="*/ 18098 h 18097"/>
-                  <a:gd name="connsiteX1" fmla="*/ 0 w 180022"/>
-                  <a:gd name="connsiteY1" fmla="*/ 0 h 18097"/>
-                </a:gdLst>
-                <a:ahLst/>
-                <a:cxnLst>
-                  <a:cxn ang="0">
-                    <a:pos x="connsiteX0" y="connsiteY0"/>
-                  </a:cxn>
-                  <a:cxn ang="0">
-                    <a:pos x="connsiteX1" y="connsiteY1"/>
-                  </a:cxn>
-                </a:cxnLst>
-                <a:rect l="l" t="t" r="r" b="b"/>
-                <a:pathLst>
-                  <a:path w="180022" h="18097">
-                    <a:moveTo>
-                      <a:pt x="180023" y="18098"/>
-                    </a:moveTo>
-                    <a:lnTo>
-                      <a:pt x="0" y="0"/>
-                    </a:lnTo>
-                  </a:path>
-                </a:pathLst>
-              </a:custGeom>
-              <a:ln w="9525" cap="flat">
-                <a:solidFill>
-                  <a:srgbClr val="EBC999"/>
-                </a:solidFill>
-                <a:prstDash val="solid"/>
-                <a:miter/>
-              </a:ln>
-            </p:spPr>
-            <p:txBody>
-              <a:bodyPr rtlCol="0" anchor="ctr"/>
-              <a:lstStyle/>
-              <a:p>
-                <a:endParaRPr lang="zh-CN" altLang="en-US"/>
-              </a:p>
-            </p:txBody>
-          </p:sp>
-        </p:grpSp>
         <p:sp>
           <p:nvSpPr>
-            <p:cNvPr id="12" name="文本框 11"/>
-            <p:cNvSpPr txBox="1"/>
+            <p:cNvPr id="13" name="图形 5"/>
+            <p:cNvSpPr/>
             <p:nvPr>
               <p:custDataLst>
-                <p:tags r:id="rId11"/>
+                <p:tags r:id="rId1"/>
               </p:custDataLst>
             </p:nvPr>
           </p:nvSpPr>
           <p:spPr>
             <a:xfrm>
-              <a:off x="6283" y="4127"/>
-              <a:ext cx="6501" cy="2951"/>
+              <a:off x="3838575" y="2439352"/>
+              <a:ext cx="4278630" cy="2184082"/>
             </a:xfrm>
-            <a:prstGeom prst="rect">
+            <a:custGeom>
               <a:avLst/>
-            </a:prstGeom>
-            <a:noFill/>
+              <a:gdLst>
+                <a:gd name="connsiteX0" fmla="*/ 0 w 4278630"/>
+                <a:gd name="connsiteY0" fmla="*/ 0 h 2184082"/>
+                <a:gd name="connsiteX1" fmla="*/ 4278630 w 4278630"/>
+                <a:gd name="connsiteY1" fmla="*/ 0 h 2184082"/>
+                <a:gd name="connsiteX2" fmla="*/ 4278630 w 4278630"/>
+                <a:gd name="connsiteY2" fmla="*/ 2184083 h 2184082"/>
+                <a:gd name="connsiteX3" fmla="*/ 0 w 4278630"/>
+                <a:gd name="connsiteY3" fmla="*/ 2184083 h 2184082"/>
+              </a:gdLst>
+              <a:ahLst/>
+              <a:cxnLst>
+                <a:cxn ang="0">
+                  <a:pos x="connsiteX0" y="connsiteY0"/>
+                </a:cxn>
+                <a:cxn ang="0">
+                  <a:pos x="connsiteX1" y="connsiteY1"/>
+                </a:cxn>
+                <a:cxn ang="0">
+                  <a:pos x="connsiteX2" y="connsiteY2"/>
+                </a:cxn>
+                <a:cxn ang="0">
+                  <a:pos x="connsiteX3" y="connsiteY3"/>
+                </a:cxn>
+              </a:cxnLst>
+              <a:rect l="l" t="t" r="r" b="b"/>
+              <a:pathLst>
+                <a:path w="4278630" h="2184082">
+                  <a:moveTo>
+                    <a:pt x="0" y="0"/>
+                  </a:moveTo>
+                  <a:lnTo>
+                    <a:pt x="4278630" y="0"/>
+                  </a:lnTo>
+                  <a:lnTo>
+                    <a:pt x="4278630" y="2184083"/>
+                  </a:lnTo>
+                  <a:lnTo>
+                    <a:pt x="0" y="2184083"/>
+                  </a:lnTo>
+                  <a:close/>
+                </a:path>
+              </a:pathLst>
+            </a:custGeom>
+            <a:solidFill>
+              <a:srgbClr val="E8E8E8"/>
+            </a:solidFill>
+            <a:ln w="9525" cap="flat">
+              <a:noFill/>
+              <a:prstDash val="solid"/>
+              <a:miter/>
+            </a:ln>
           </p:spPr>
           <p:txBody>
-            <a:bodyPr wrap="square" rtlCol="0" anchor="t">
-              <a:noAutofit/>
-            </a:bodyPr>
+            <a:bodyPr rtlCol="0" anchor="ctr"/>
             <a:lstStyle/>
             <a:p>
-              <a:pPr indent="457200" fontAlgn="auto">
-                <a:lnSpc>
-                  <a:spcPct val="150000"/>
-                </a:lnSpc>
-              </a:pPr>
-              <a:r>
-                <a:rPr lang="en-US" dirty="0">
-                  <a:latin typeface="微软雅黑" panose="020B0503020204020204" pitchFamily="34" charset="-122"/>
-                  <a:ea typeface="微软雅黑" panose="020B0503020204020204" pitchFamily="34" charset="-122"/>
-                  <a:cs typeface="微软雅黑" panose="020B0503020204020204" pitchFamily="34" charset="-122"/>
-                  <a:sym typeface="+mn-ea"/>
-                </a:rPr>
-                <a:t>{{text:</a:t>
-              </a:r>
-              <a:r>
-                <a:rPr lang="en-US" altLang="zh-CN" dirty="0">
-                  <a:latin typeface="微软雅黑" panose="020B0503020204020204" pitchFamily="34" charset="-122"/>
-                  <a:ea typeface="微软雅黑" panose="020B0503020204020204" pitchFamily="34" charset="-122"/>
-                  <a:cs typeface="微软雅黑" panose="020B0503020204020204" pitchFamily="34" charset="-122"/>
-                  <a:sym typeface="+mn-ea"/>
-                </a:rPr>
-                <a:t>content</a:t>
-              </a:r>
-              <a:r>
-                <a:rPr lang="en-US" dirty="0">
-                  <a:latin typeface="微软雅黑" panose="020B0503020204020204" pitchFamily="34" charset="-122"/>
-                  <a:ea typeface="微软雅黑" panose="020B0503020204020204" pitchFamily="34" charset="-122"/>
-                  <a:cs typeface="微软雅黑" panose="020B0503020204020204" pitchFamily="34" charset="-122"/>
-                  <a:sym typeface="+mn-ea"/>
-                </a:rPr>
-                <a:t>}}</a:t>
-              </a:r>
-              <a:endParaRPr lang="en-US" dirty="0">
-                <a:latin typeface="微软雅黑" panose="020B0503020204020204" pitchFamily="34" charset="-122"/>
-                <a:ea typeface="微软雅黑" panose="020B0503020204020204" pitchFamily="34" charset="-122"/>
-                <a:cs typeface="微软雅黑" panose="020B0503020204020204" pitchFamily="34" charset="-122"/>
-              </a:endParaRPr>
+              <a:endParaRPr lang="zh-CN" altLang="en-US"/>
+            </a:p>
+          </p:txBody>
+        </p:sp>
+        <p:sp>
+          <p:nvSpPr>
+            <p:cNvPr id="14" name="图形 5"/>
+            <p:cNvSpPr/>
+            <p:nvPr>
+              <p:custDataLst>
+                <p:tags r:id="rId2"/>
+              </p:custDataLst>
+            </p:nvPr>
+          </p:nvSpPr>
+          <p:spPr>
+            <a:xfrm>
+              <a:off x="7632382" y="2110740"/>
+              <a:ext cx="218122" cy="501967"/>
+            </a:xfrm>
+            <a:custGeom>
+              <a:avLst/>
+              <a:gdLst>
+                <a:gd name="connsiteX0" fmla="*/ 184785 w 218122"/>
+                <a:gd name="connsiteY0" fmla="*/ 501968 h 501967"/>
+                <a:gd name="connsiteX1" fmla="*/ 0 w 218122"/>
+                <a:gd name="connsiteY1" fmla="*/ 482918 h 501967"/>
+                <a:gd name="connsiteX2" fmla="*/ 33338 w 218122"/>
+                <a:gd name="connsiteY2" fmla="*/ 0 h 501967"/>
+                <a:gd name="connsiteX3" fmla="*/ 218123 w 218122"/>
+                <a:gd name="connsiteY3" fmla="*/ 18098 h 501967"/>
+              </a:gdLst>
+              <a:ahLst/>
+              <a:cxnLst>
+                <a:cxn ang="0">
+                  <a:pos x="connsiteX0" y="connsiteY0"/>
+                </a:cxn>
+                <a:cxn ang="0">
+                  <a:pos x="connsiteX1" y="connsiteY1"/>
+                </a:cxn>
+                <a:cxn ang="0">
+                  <a:pos x="connsiteX2" y="connsiteY2"/>
+                </a:cxn>
+                <a:cxn ang="0">
+                  <a:pos x="connsiteX3" y="connsiteY3"/>
+                </a:cxn>
+              </a:cxnLst>
+              <a:rect l="l" t="t" r="r" b="b"/>
+              <a:pathLst>
+                <a:path w="218122" h="501967">
+                  <a:moveTo>
+                    <a:pt x="184785" y="501968"/>
+                  </a:moveTo>
+                  <a:lnTo>
+                    <a:pt x="0" y="482918"/>
+                  </a:lnTo>
+                  <a:lnTo>
+                    <a:pt x="33338" y="0"/>
+                  </a:lnTo>
+                  <a:lnTo>
+                    <a:pt x="218123" y="18098"/>
+                  </a:lnTo>
+                  <a:close/>
+                </a:path>
+              </a:pathLst>
+            </a:custGeom>
+            <a:solidFill>
+              <a:srgbClr val="DEBF90"/>
+            </a:solidFill>
+            <a:ln w="9525" cap="flat">
+              <a:noFill/>
+              <a:prstDash val="solid"/>
+              <a:miter/>
+            </a:ln>
+          </p:spPr>
+          <p:txBody>
+            <a:bodyPr rtlCol="0" anchor="ctr"/>
+            <a:lstStyle/>
+            <a:p>
+              <a:endParaRPr lang="zh-CN" altLang="en-US"/>
+            </a:p>
+          </p:txBody>
+        </p:sp>
+        <p:sp>
+          <p:nvSpPr>
+            <p:cNvPr id="15" name="图形 5"/>
+            <p:cNvSpPr/>
+            <p:nvPr>
+              <p:custDataLst>
+                <p:tags r:id="rId3"/>
+              </p:custDataLst>
+            </p:nvPr>
+          </p:nvSpPr>
+          <p:spPr>
+            <a:xfrm>
+              <a:off x="4259580" y="2110740"/>
+              <a:ext cx="217169" cy="501967"/>
+            </a:xfrm>
+            <a:custGeom>
+              <a:avLst/>
+              <a:gdLst>
+                <a:gd name="connsiteX0" fmla="*/ 32385 w 217169"/>
+                <a:gd name="connsiteY0" fmla="*/ 501968 h 501967"/>
+                <a:gd name="connsiteX1" fmla="*/ 217170 w 217169"/>
+                <a:gd name="connsiteY1" fmla="*/ 482918 h 501967"/>
+                <a:gd name="connsiteX2" fmla="*/ 183833 w 217169"/>
+                <a:gd name="connsiteY2" fmla="*/ 0 h 501967"/>
+                <a:gd name="connsiteX3" fmla="*/ 0 w 217169"/>
+                <a:gd name="connsiteY3" fmla="*/ 18098 h 501967"/>
+              </a:gdLst>
+              <a:ahLst/>
+              <a:cxnLst>
+                <a:cxn ang="0">
+                  <a:pos x="connsiteX0" y="connsiteY0"/>
+                </a:cxn>
+                <a:cxn ang="0">
+                  <a:pos x="connsiteX1" y="connsiteY1"/>
+                </a:cxn>
+                <a:cxn ang="0">
+                  <a:pos x="connsiteX2" y="connsiteY2"/>
+                </a:cxn>
+                <a:cxn ang="0">
+                  <a:pos x="connsiteX3" y="connsiteY3"/>
+                </a:cxn>
+              </a:cxnLst>
+              <a:rect l="l" t="t" r="r" b="b"/>
+              <a:pathLst>
+                <a:path w="217169" h="501967">
+                  <a:moveTo>
+                    <a:pt x="32385" y="501968"/>
+                  </a:moveTo>
+                  <a:lnTo>
+                    <a:pt x="217170" y="482918"/>
+                  </a:lnTo>
+                  <a:lnTo>
+                    <a:pt x="183833" y="0"/>
+                  </a:lnTo>
+                  <a:lnTo>
+                    <a:pt x="0" y="18098"/>
+                  </a:lnTo>
+                  <a:close/>
+                </a:path>
+              </a:pathLst>
+            </a:custGeom>
+            <a:solidFill>
+              <a:srgbClr val="DEBF90"/>
+            </a:solidFill>
+            <a:ln w="9525" cap="flat">
+              <a:noFill/>
+              <a:prstDash val="solid"/>
+              <a:miter/>
+            </a:ln>
+          </p:spPr>
+          <p:txBody>
+            <a:bodyPr rtlCol="0" anchor="ctr"/>
+            <a:lstStyle/>
+            <a:p>
+              <a:endParaRPr lang="zh-CN" altLang="en-US"/>
+            </a:p>
+          </p:txBody>
+        </p:sp>
+        <p:sp>
+          <p:nvSpPr>
+            <p:cNvPr id="16" name="图形 5"/>
+            <p:cNvSpPr/>
+            <p:nvPr>
+              <p:custDataLst>
+                <p:tags r:id="rId4"/>
+              </p:custDataLst>
+            </p:nvPr>
+          </p:nvSpPr>
+          <p:spPr>
+            <a:xfrm>
+              <a:off x="3915727" y="2349817"/>
+              <a:ext cx="4278630" cy="2184082"/>
+            </a:xfrm>
+            <a:custGeom>
+              <a:avLst/>
+              <a:gdLst>
+                <a:gd name="connsiteX0" fmla="*/ 0 w 4278630"/>
+                <a:gd name="connsiteY0" fmla="*/ 0 h 2184082"/>
+                <a:gd name="connsiteX1" fmla="*/ 4278630 w 4278630"/>
+                <a:gd name="connsiteY1" fmla="*/ 0 h 2184082"/>
+                <a:gd name="connsiteX2" fmla="*/ 4278630 w 4278630"/>
+                <a:gd name="connsiteY2" fmla="*/ 2184083 h 2184082"/>
+                <a:gd name="connsiteX3" fmla="*/ 0 w 4278630"/>
+                <a:gd name="connsiteY3" fmla="*/ 2184083 h 2184082"/>
+              </a:gdLst>
+              <a:ahLst/>
+              <a:cxnLst>
+                <a:cxn ang="0">
+                  <a:pos x="connsiteX0" y="connsiteY0"/>
+                </a:cxn>
+                <a:cxn ang="0">
+                  <a:pos x="connsiteX1" y="connsiteY1"/>
+                </a:cxn>
+                <a:cxn ang="0">
+                  <a:pos x="connsiteX2" y="connsiteY2"/>
+                </a:cxn>
+                <a:cxn ang="0">
+                  <a:pos x="connsiteX3" y="connsiteY3"/>
+                </a:cxn>
+              </a:cxnLst>
+              <a:rect l="l" t="t" r="r" b="b"/>
+              <a:pathLst>
+                <a:path w="4278630" h="2184082">
+                  <a:moveTo>
+                    <a:pt x="0" y="0"/>
+                  </a:moveTo>
+                  <a:lnTo>
+                    <a:pt x="4278630" y="0"/>
+                  </a:lnTo>
+                  <a:lnTo>
+                    <a:pt x="4278630" y="2184083"/>
+                  </a:lnTo>
+                  <a:lnTo>
+                    <a:pt x="0" y="2184083"/>
+                  </a:lnTo>
+                  <a:close/>
+                </a:path>
+              </a:pathLst>
+            </a:custGeom>
+            <a:solidFill>
+              <a:srgbClr val="FFFFFF"/>
+            </a:solidFill>
+            <a:ln w="9525" cap="flat">
+              <a:solidFill>
+                <a:srgbClr val="231815"/>
+              </a:solidFill>
+              <a:prstDash val="solid"/>
+              <a:miter/>
+            </a:ln>
+          </p:spPr>
+          <p:txBody>
+            <a:bodyPr rtlCol="0" anchor="ctr"/>
+            <a:lstStyle/>
+            <a:p>
+              <a:endParaRPr lang="zh-CN" altLang="en-US"/>
+            </a:p>
+          </p:txBody>
+        </p:sp>
+        <p:sp>
+          <p:nvSpPr>
+            <p:cNvPr id="17" name="图形 5"/>
+            <p:cNvSpPr/>
+            <p:nvPr>
+              <p:custDataLst>
+                <p:tags r:id="rId5"/>
+              </p:custDataLst>
+            </p:nvPr>
+          </p:nvSpPr>
+          <p:spPr>
+            <a:xfrm>
+              <a:off x="7632382" y="2105025"/>
+              <a:ext cx="244792" cy="507682"/>
+            </a:xfrm>
+            <a:custGeom>
+              <a:avLst/>
+              <a:gdLst>
+                <a:gd name="connsiteX0" fmla="*/ 184785 w 244792"/>
+                <a:gd name="connsiteY0" fmla="*/ 507683 h 507682"/>
+                <a:gd name="connsiteX1" fmla="*/ 0 w 244792"/>
+                <a:gd name="connsiteY1" fmla="*/ 488633 h 507682"/>
+                <a:gd name="connsiteX2" fmla="*/ 60960 w 244792"/>
+                <a:gd name="connsiteY2" fmla="*/ 0 h 507682"/>
+                <a:gd name="connsiteX3" fmla="*/ 244793 w 244792"/>
+                <a:gd name="connsiteY3" fmla="*/ 19050 h 507682"/>
+              </a:gdLst>
+              <a:ahLst/>
+              <a:cxnLst>
+                <a:cxn ang="0">
+                  <a:pos x="connsiteX0" y="connsiteY0"/>
+                </a:cxn>
+                <a:cxn ang="0">
+                  <a:pos x="connsiteX1" y="connsiteY1"/>
+                </a:cxn>
+                <a:cxn ang="0">
+                  <a:pos x="connsiteX2" y="connsiteY2"/>
+                </a:cxn>
+                <a:cxn ang="0">
+                  <a:pos x="connsiteX3" y="connsiteY3"/>
+                </a:cxn>
+              </a:cxnLst>
+              <a:rect l="l" t="t" r="r" b="b"/>
+              <a:pathLst>
+                <a:path w="244792" h="507682">
+                  <a:moveTo>
+                    <a:pt x="184785" y="507683"/>
+                  </a:moveTo>
+                  <a:lnTo>
+                    <a:pt x="0" y="488633"/>
+                  </a:lnTo>
+                  <a:lnTo>
+                    <a:pt x="60960" y="0"/>
+                  </a:lnTo>
+                  <a:lnTo>
+                    <a:pt x="244793" y="19050"/>
+                  </a:lnTo>
+                  <a:close/>
+                </a:path>
+              </a:pathLst>
+            </a:custGeom>
+            <a:solidFill>
+              <a:srgbClr val="FFDBA6"/>
+            </a:solidFill>
+            <a:ln w="9525" cap="flat">
+              <a:noFill/>
+              <a:prstDash val="solid"/>
+              <a:miter/>
+            </a:ln>
+          </p:spPr>
+          <p:txBody>
+            <a:bodyPr rtlCol="0" anchor="ctr"/>
+            <a:lstStyle/>
+            <a:p>
+              <a:endParaRPr lang="zh-CN" altLang="en-US"/>
+            </a:p>
+          </p:txBody>
+        </p:sp>
+        <p:sp>
+          <p:nvSpPr>
+            <p:cNvPr id="18" name="图形 5"/>
+            <p:cNvSpPr/>
+            <p:nvPr>
+              <p:custDataLst>
+                <p:tags r:id="rId6"/>
+              </p:custDataLst>
+            </p:nvPr>
+          </p:nvSpPr>
+          <p:spPr>
+            <a:xfrm>
+              <a:off x="7632382" y="2105025"/>
+              <a:ext cx="65722" cy="489585"/>
+            </a:xfrm>
+            <a:custGeom>
+              <a:avLst/>
+              <a:gdLst>
+                <a:gd name="connsiteX0" fmla="*/ 60960 w 65722"/>
+                <a:gd name="connsiteY0" fmla="*/ 0 h 489585"/>
+                <a:gd name="connsiteX1" fmla="*/ 0 w 65722"/>
+                <a:gd name="connsiteY1" fmla="*/ 488633 h 489585"/>
+                <a:gd name="connsiteX2" fmla="*/ 5715 w 65722"/>
+                <a:gd name="connsiteY2" fmla="*/ 489585 h 489585"/>
+                <a:gd name="connsiteX3" fmla="*/ 65723 w 65722"/>
+                <a:gd name="connsiteY3" fmla="*/ 953 h 489585"/>
+              </a:gdLst>
+              <a:ahLst/>
+              <a:cxnLst>
+                <a:cxn ang="0">
+                  <a:pos x="connsiteX0" y="connsiteY0"/>
+                </a:cxn>
+                <a:cxn ang="0">
+                  <a:pos x="connsiteX1" y="connsiteY1"/>
+                </a:cxn>
+                <a:cxn ang="0">
+                  <a:pos x="connsiteX2" y="connsiteY2"/>
+                </a:cxn>
+                <a:cxn ang="0">
+                  <a:pos x="connsiteX3" y="connsiteY3"/>
+                </a:cxn>
+              </a:cxnLst>
+              <a:rect l="l" t="t" r="r" b="b"/>
+              <a:pathLst>
+                <a:path w="65722" h="489585">
+                  <a:moveTo>
+                    <a:pt x="60960" y="0"/>
+                  </a:moveTo>
+                  <a:lnTo>
+                    <a:pt x="0" y="488633"/>
+                  </a:lnTo>
+                  <a:lnTo>
+                    <a:pt x="5715" y="489585"/>
+                  </a:lnTo>
+                  <a:lnTo>
+                    <a:pt x="65723" y="953"/>
+                  </a:lnTo>
+                  <a:close/>
+                </a:path>
+              </a:pathLst>
+            </a:custGeom>
+            <a:solidFill>
+              <a:srgbClr val="EBCA98"/>
+            </a:solidFill>
+            <a:ln w="9525" cap="flat">
+              <a:noFill/>
+              <a:prstDash val="solid"/>
+              <a:miter/>
+            </a:ln>
+          </p:spPr>
+          <p:txBody>
+            <a:bodyPr rtlCol="0" anchor="ctr"/>
+            <a:lstStyle/>
+            <a:p>
+              <a:endParaRPr lang="zh-CN" altLang="en-US"/>
+            </a:p>
+          </p:txBody>
+        </p:sp>
+        <p:sp>
+          <p:nvSpPr>
+            <p:cNvPr id="19" name="图形 5"/>
+            <p:cNvSpPr/>
+            <p:nvPr>
+              <p:custDataLst>
+                <p:tags r:id="rId7"/>
+              </p:custDataLst>
+            </p:nvPr>
+          </p:nvSpPr>
+          <p:spPr>
+            <a:xfrm>
+              <a:off x="4231957" y="2105025"/>
+              <a:ext cx="244792" cy="507682"/>
+            </a:xfrm>
+            <a:custGeom>
+              <a:avLst/>
+              <a:gdLst>
+                <a:gd name="connsiteX0" fmla="*/ 60007 w 244792"/>
+                <a:gd name="connsiteY0" fmla="*/ 507683 h 507682"/>
+                <a:gd name="connsiteX1" fmla="*/ 244793 w 244792"/>
+                <a:gd name="connsiteY1" fmla="*/ 488633 h 507682"/>
+                <a:gd name="connsiteX2" fmla="*/ 184785 w 244792"/>
+                <a:gd name="connsiteY2" fmla="*/ 0 h 507682"/>
+                <a:gd name="connsiteX3" fmla="*/ 0 w 244792"/>
+                <a:gd name="connsiteY3" fmla="*/ 19050 h 507682"/>
+              </a:gdLst>
+              <a:ahLst/>
+              <a:cxnLst>
+                <a:cxn ang="0">
+                  <a:pos x="connsiteX0" y="connsiteY0"/>
+                </a:cxn>
+                <a:cxn ang="0">
+                  <a:pos x="connsiteX1" y="connsiteY1"/>
+                </a:cxn>
+                <a:cxn ang="0">
+                  <a:pos x="connsiteX2" y="connsiteY2"/>
+                </a:cxn>
+                <a:cxn ang="0">
+                  <a:pos x="connsiteX3" y="connsiteY3"/>
+                </a:cxn>
+              </a:cxnLst>
+              <a:rect l="l" t="t" r="r" b="b"/>
+              <a:pathLst>
+                <a:path w="244792" h="507682">
+                  <a:moveTo>
+                    <a:pt x="60007" y="507683"/>
+                  </a:moveTo>
+                  <a:lnTo>
+                    <a:pt x="244793" y="488633"/>
+                  </a:lnTo>
+                  <a:lnTo>
+                    <a:pt x="184785" y="0"/>
+                  </a:lnTo>
+                  <a:lnTo>
+                    <a:pt x="0" y="19050"/>
+                  </a:lnTo>
+                  <a:close/>
+                </a:path>
+              </a:pathLst>
+            </a:custGeom>
+            <a:solidFill>
+              <a:srgbClr val="FFDBA6"/>
+            </a:solidFill>
+            <a:ln w="9525" cap="flat">
+              <a:noFill/>
+              <a:prstDash val="solid"/>
+              <a:miter/>
+            </a:ln>
+          </p:spPr>
+          <p:txBody>
+            <a:bodyPr rtlCol="0" anchor="ctr"/>
+            <a:lstStyle/>
+            <a:p>
+              <a:endParaRPr lang="zh-CN" altLang="en-US"/>
+            </a:p>
+          </p:txBody>
+        </p:sp>
+        <p:sp>
+          <p:nvSpPr>
+            <p:cNvPr id="20" name="图形 5"/>
+            <p:cNvSpPr/>
+            <p:nvPr>
+              <p:custDataLst>
+                <p:tags r:id="rId8"/>
+              </p:custDataLst>
+            </p:nvPr>
+          </p:nvSpPr>
+          <p:spPr>
+            <a:xfrm>
+              <a:off x="4411980" y="2105025"/>
+              <a:ext cx="64769" cy="489585"/>
+            </a:xfrm>
+            <a:custGeom>
+              <a:avLst/>
+              <a:gdLst>
+                <a:gd name="connsiteX0" fmla="*/ 4763 w 64769"/>
+                <a:gd name="connsiteY0" fmla="*/ 0 h 489585"/>
+                <a:gd name="connsiteX1" fmla="*/ 64770 w 64769"/>
+                <a:gd name="connsiteY1" fmla="*/ 488633 h 489585"/>
+                <a:gd name="connsiteX2" fmla="*/ 60007 w 64769"/>
+                <a:gd name="connsiteY2" fmla="*/ 489585 h 489585"/>
+                <a:gd name="connsiteX3" fmla="*/ 0 w 64769"/>
+                <a:gd name="connsiteY3" fmla="*/ 953 h 489585"/>
+              </a:gdLst>
+              <a:ahLst/>
+              <a:cxnLst>
+                <a:cxn ang="0">
+                  <a:pos x="connsiteX0" y="connsiteY0"/>
+                </a:cxn>
+                <a:cxn ang="0">
+                  <a:pos x="connsiteX1" y="connsiteY1"/>
+                </a:cxn>
+                <a:cxn ang="0">
+                  <a:pos x="connsiteX2" y="connsiteY2"/>
+                </a:cxn>
+                <a:cxn ang="0">
+                  <a:pos x="connsiteX3" y="connsiteY3"/>
+                </a:cxn>
+              </a:cxnLst>
+              <a:rect l="l" t="t" r="r" b="b"/>
+              <a:pathLst>
+                <a:path w="64769" h="489585">
+                  <a:moveTo>
+                    <a:pt x="4763" y="0"/>
+                  </a:moveTo>
+                  <a:lnTo>
+                    <a:pt x="64770" y="488633"/>
+                  </a:lnTo>
+                  <a:lnTo>
+                    <a:pt x="60007" y="489585"/>
+                  </a:lnTo>
+                  <a:lnTo>
+                    <a:pt x="0" y="953"/>
+                  </a:lnTo>
+                  <a:close/>
+                </a:path>
+              </a:pathLst>
+            </a:custGeom>
+            <a:solidFill>
+              <a:srgbClr val="EBCA98"/>
+            </a:solidFill>
+            <a:ln w="9525" cap="flat">
+              <a:noFill/>
+              <a:prstDash val="solid"/>
+              <a:miter/>
+            </a:ln>
+          </p:spPr>
+          <p:txBody>
+            <a:bodyPr rtlCol="0" anchor="ctr"/>
+            <a:lstStyle/>
+            <a:p>
+              <a:endParaRPr lang="zh-CN" altLang="en-US"/>
+            </a:p>
+          </p:txBody>
+        </p:sp>
+        <p:sp>
+          <p:nvSpPr>
+            <p:cNvPr id="21" name="图形 5"/>
+            <p:cNvSpPr/>
+            <p:nvPr>
+              <p:custDataLst>
+                <p:tags r:id="rId9"/>
+              </p:custDataLst>
+            </p:nvPr>
+          </p:nvSpPr>
+          <p:spPr>
+            <a:xfrm>
+              <a:off x="4259580" y="2331720"/>
+              <a:ext cx="180022" cy="18097"/>
+            </a:xfrm>
+            <a:custGeom>
+              <a:avLst/>
+              <a:gdLst>
+                <a:gd name="connsiteX0" fmla="*/ 0 w 180022"/>
+                <a:gd name="connsiteY0" fmla="*/ 18098 h 18097"/>
+                <a:gd name="connsiteX1" fmla="*/ 180022 w 180022"/>
+                <a:gd name="connsiteY1" fmla="*/ 0 h 18097"/>
+              </a:gdLst>
+              <a:ahLst/>
+              <a:cxnLst>
+                <a:cxn ang="0">
+                  <a:pos x="connsiteX0" y="connsiteY0"/>
+                </a:cxn>
+                <a:cxn ang="0">
+                  <a:pos x="connsiteX1" y="connsiteY1"/>
+                </a:cxn>
+              </a:cxnLst>
+              <a:rect l="l" t="t" r="r" b="b"/>
+              <a:pathLst>
+                <a:path w="180022" h="18097">
+                  <a:moveTo>
+                    <a:pt x="0" y="18098"/>
+                  </a:moveTo>
+                  <a:lnTo>
+                    <a:pt x="180022" y="0"/>
+                  </a:lnTo>
+                </a:path>
+              </a:pathLst>
+            </a:custGeom>
+            <a:ln w="9525" cap="flat">
+              <a:solidFill>
+                <a:srgbClr val="EBC999"/>
+              </a:solidFill>
+              <a:prstDash val="solid"/>
+              <a:miter/>
+            </a:ln>
+          </p:spPr>
+          <p:txBody>
+            <a:bodyPr rtlCol="0" anchor="ctr"/>
+            <a:lstStyle/>
+            <a:p>
+              <a:endParaRPr lang="zh-CN" altLang="en-US"/>
+            </a:p>
+          </p:txBody>
+        </p:sp>
+        <p:sp>
+          <p:nvSpPr>
+            <p:cNvPr id="22" name="图形 5"/>
+            <p:cNvSpPr/>
+            <p:nvPr>
+              <p:custDataLst>
+                <p:tags r:id="rId10"/>
+              </p:custDataLst>
+            </p:nvPr>
+          </p:nvSpPr>
+          <p:spPr>
+            <a:xfrm>
+              <a:off x="7669530" y="2331720"/>
+              <a:ext cx="180022" cy="18097"/>
+            </a:xfrm>
+            <a:custGeom>
+              <a:avLst/>
+              <a:gdLst>
+                <a:gd name="connsiteX0" fmla="*/ 180023 w 180022"/>
+                <a:gd name="connsiteY0" fmla="*/ 18098 h 18097"/>
+                <a:gd name="connsiteX1" fmla="*/ 0 w 180022"/>
+                <a:gd name="connsiteY1" fmla="*/ 0 h 18097"/>
+              </a:gdLst>
+              <a:ahLst/>
+              <a:cxnLst>
+                <a:cxn ang="0">
+                  <a:pos x="connsiteX0" y="connsiteY0"/>
+                </a:cxn>
+                <a:cxn ang="0">
+                  <a:pos x="connsiteX1" y="connsiteY1"/>
+                </a:cxn>
+              </a:cxnLst>
+              <a:rect l="l" t="t" r="r" b="b"/>
+              <a:pathLst>
+                <a:path w="180022" h="18097">
+                  <a:moveTo>
+                    <a:pt x="180023" y="18098"/>
+                  </a:moveTo>
+                  <a:lnTo>
+                    <a:pt x="0" y="0"/>
+                  </a:lnTo>
+                </a:path>
+              </a:pathLst>
+            </a:custGeom>
+            <a:ln w="9525" cap="flat">
+              <a:solidFill>
+                <a:srgbClr val="EBC999"/>
+              </a:solidFill>
+              <a:prstDash val="solid"/>
+              <a:miter/>
+            </a:ln>
+          </p:spPr>
+          <p:txBody>
+            <a:bodyPr rtlCol="0" anchor="ctr"/>
+            <a:lstStyle/>
+            <a:p>
+              <a:endParaRPr lang="zh-CN" altLang="en-US"/>
             </a:p>
           </p:txBody>
         </p:sp>
@@ -8447,7 +8366,7 @@
               <a:defRPr/>
             </a:pPr>
             <a:r>
-              <a:rPr lang="en-US" altLang="zh-CN" b="1" dirty="0">
+              <a:rPr lang="zh-CN" altLang="en-US" b="1" dirty="0">
                 <a:solidFill>
                   <a:schemeClr val="accent1">
                     <a:lumMod val="75000"/>
@@ -8458,7 +8377,7 @@
                 <a:cs typeface="微软雅黑" panose="020B0503020204020204" pitchFamily="34" charset="-122"/>
                 <a:sym typeface="+mn-lt"/>
               </a:rPr>
-              <a:t>{{text</a:t>
+              <a:t>知识</a:t>
             </a:r>
             <a:r>
               <a:rPr lang="zh-CN" altLang="en-US" b="1" dirty="0">
@@ -8472,23 +8391,9 @@
                 <a:cs typeface="微软雅黑" panose="020B0503020204020204" pitchFamily="34" charset="-122"/>
                 <a:sym typeface="+mn-lt"/>
               </a:rPr>
-              <a:t>：</a:t>
+              <a:t>储备</a:t>
             </a:r>
-            <a:r>
-              <a:rPr lang="en-US" altLang="zh-CN" b="1" dirty="0">
-                <a:solidFill>
-                  <a:schemeClr val="accent1">
-                    <a:lumMod val="75000"/>
-                  </a:schemeClr>
-                </a:solidFill>
-                <a:latin typeface="微软雅黑" panose="020B0503020204020204" pitchFamily="34" charset="-122"/>
-                <a:ea typeface="微软雅黑" panose="020B0503020204020204" pitchFamily="34" charset="-122"/>
-                <a:cs typeface="微软雅黑" panose="020B0503020204020204" pitchFamily="34" charset="-122"/>
-                <a:sym typeface="+mn-lt"/>
-              </a:rPr>
-              <a:t>replace}}</a:t>
-            </a:r>
-            <a:endParaRPr lang="en-US" altLang="zh-CN" b="1" dirty="0">
+            <a:endParaRPr lang="zh-CN" altLang="en-US" b="1" dirty="0">
               <a:solidFill>
                 <a:schemeClr val="accent1">
                   <a:lumMod val="75000"/>
@@ -8502,866 +8407,6 @@
           </a:p>
         </p:txBody>
       </p:sp>
-    </p:spTree>
-  </p:cSld>
-  <p:clrMapOvr>
-    <a:masterClrMapping/>
-  </p:clrMapOvr>
-</p:sld>
-</file>
-
-<file path=ppt/slides/slide10.xml><?xml version="1.0" encoding="utf-8"?>
-<p:sld xmlns:a="http://schemas.openxmlformats.org/drawingml/2006/main" xmlns:r="http://schemas.openxmlformats.org/officeDocument/2006/relationships" xmlns:p="http://schemas.openxmlformats.org/presentationml/2006/main">
-  <p:cSld>
-    <p:spTree>
-      <p:nvGrpSpPr>
-        <p:cNvPr id="1" name=""/>
-        <p:cNvGrpSpPr/>
-        <p:nvPr/>
-      </p:nvGrpSpPr>
-      <p:grpSpPr>
-        <a:xfrm>
-          <a:off x="0" y="0"/>
-          <a:ext cx="0" cy="0"/>
-          <a:chOff x="0" y="0"/>
-          <a:chExt cx="0" cy="0"/>
-        </a:xfrm>
-      </p:grpSpPr>
-      <p:grpSp>
-        <p:nvGrpSpPr>
-          <p:cNvPr id="9" name="组合 8" descr="7b0a202020202274657874626f78223a20227b5c2263617465676f72795f69645c223a31303738302c5c2269645c223a32303334343733387d220a7d0a"/>
-          <p:cNvGrpSpPr/>
-          <p:nvPr/>
-        </p:nvGrpSpPr>
-        <p:grpSpPr>
-          <a:xfrm>
-            <a:off x="385445" y="1786478"/>
-            <a:ext cx="7734935" cy="4715510"/>
-            <a:chOff x="5151" y="1940"/>
-            <a:chExt cx="9267" cy="5731"/>
-          </a:xfrm>
-        </p:grpSpPr>
-        <p:grpSp>
-          <p:nvGrpSpPr>
-            <p:cNvPr id="10" name="组合 9"/>
-            <p:cNvGrpSpPr/>
-            <p:nvPr/>
-          </p:nvGrpSpPr>
-          <p:grpSpPr>
-            <a:xfrm>
-              <a:off x="5151" y="1940"/>
-              <a:ext cx="9267" cy="5731"/>
-              <a:chOff x="5049" y="1927"/>
-              <a:chExt cx="9267" cy="5731"/>
-            </a:xfrm>
-            <a:solidFill>
-              <a:srgbClr val="1E8CE5"/>
-            </a:solidFill>
-          </p:grpSpPr>
-          <p:sp>
-            <p:nvSpPr>
-              <p:cNvPr id="16" name="任意多边形 15"/>
-              <p:cNvSpPr/>
-              <p:nvPr>
-                <p:custDataLst>
-                  <p:tags r:id="rId1"/>
-                </p:custDataLst>
-              </p:nvPr>
-            </p:nvSpPr>
-            <p:spPr>
-              <a:xfrm rot="10800000">
-                <a:off x="11403" y="7498"/>
-                <a:ext cx="1928" cy="150"/>
-              </a:xfrm>
-              <a:custGeom>
-                <a:avLst/>
-                <a:gdLst>
-                  <a:gd name="adj" fmla="val 104500"/>
-                  <a:gd name="maxAdj" fmla="*/ 50000 w ss"/>
-                  <a:gd name="a" fmla="pin 0 adj maxAdj"/>
-                  <a:gd name="x1" fmla="*/ ss a 200000"/>
-                  <a:gd name="x2" fmla="*/ ss a 100000"/>
-                  <a:gd name="x3" fmla="+- r 0 x2"/>
-                  <a:gd name="x4" fmla="+- r 0 x1"/>
-                  <a:gd name="il" fmla="*/ wd3 a maxAdj"/>
-                  <a:gd name="it" fmla="*/ hd3 a maxAdj"/>
-                  <a:gd name="ir" fmla="+- r 0 il"/>
-                </a:gdLst>
-                <a:ahLst/>
-                <a:cxnLst>
-                  <a:cxn ang="3">
-                    <a:pos x="hc" y="t"/>
-                  </a:cxn>
-                  <a:cxn ang="cd2">
-                    <a:pos x="x1" y="vc"/>
-                  </a:cxn>
-                  <a:cxn ang="cd4">
-                    <a:pos x="hc" y="b"/>
-                  </a:cxn>
-                  <a:cxn ang="0">
-                    <a:pos x="x4" y="vc"/>
-                  </a:cxn>
-                </a:cxnLst>
-                <a:rect l="l" t="t" r="r" b="b"/>
-                <a:pathLst>
-                  <a:path w="1950" h="150">
-                    <a:moveTo>
-                      <a:pt x="157" y="0"/>
-                    </a:moveTo>
-                    <a:lnTo>
-                      <a:pt x="1793" y="0"/>
-                    </a:lnTo>
-                    <a:lnTo>
-                      <a:pt x="1950" y="150"/>
-                    </a:lnTo>
-                    <a:lnTo>
-                      <a:pt x="0" y="150"/>
-                    </a:lnTo>
-                    <a:lnTo>
-                      <a:pt x="157" y="0"/>
-                    </a:lnTo>
-                    <a:close/>
-                  </a:path>
-                </a:pathLst>
-              </a:custGeom>
-              <a:grpFill/>
-              <a:ln>
-                <a:noFill/>
-              </a:ln>
-            </p:spPr>
-            <p:style>
-              <a:lnRef idx="2">
-                <a:schemeClr val="accent1">
-                  <a:shade val="50000"/>
-                </a:schemeClr>
-              </a:lnRef>
-              <a:fillRef idx="1">
-                <a:schemeClr val="accent1"/>
-              </a:fillRef>
-              <a:effectRef idx="0">
-                <a:schemeClr val="accent1"/>
-              </a:effectRef>
-              <a:fontRef idx="minor">
-                <a:schemeClr val="lt1"/>
-              </a:fontRef>
-            </p:style>
-            <p:txBody>
-              <a:bodyPr wrap="square" rtlCol="0" anchor="ctr">
-                <a:noAutofit/>
-              </a:bodyPr>
-              <a:lstStyle/>
-              <a:p>
-                <a:pPr algn="ctr"/>
-                <a:endParaRPr lang="zh-CN" altLang="en-US"/>
-              </a:p>
-            </p:txBody>
-          </p:sp>
-          <p:sp>
-            <p:nvSpPr>
-              <p:cNvPr id="17" name="任意多边形 16"/>
-              <p:cNvSpPr/>
-              <p:nvPr>
-                <p:custDataLst>
-                  <p:tags r:id="rId2"/>
-                </p:custDataLst>
-              </p:nvPr>
-            </p:nvSpPr>
-            <p:spPr>
-              <a:xfrm rot="5400000">
-                <a:off x="6739" y="236"/>
-                <a:ext cx="5731" cy="9112"/>
-              </a:xfrm>
-              <a:custGeom>
-                <a:avLst/>
-                <a:gdLst>
-                  <a:gd name="adj" fmla="val 104500"/>
-                  <a:gd name="maxAdj" fmla="*/ 50000 w ss"/>
-                  <a:gd name="a" fmla="pin 0 adj maxAdj"/>
-                  <a:gd name="x1" fmla="*/ ss a 200000"/>
-                  <a:gd name="x2" fmla="*/ ss a 100000"/>
-                  <a:gd name="x3" fmla="+- r 0 x2"/>
-                  <a:gd name="x4" fmla="+- r 0 x1"/>
-                  <a:gd name="il" fmla="*/ wd3 a maxAdj"/>
-                  <a:gd name="it" fmla="*/ hd3 a maxAdj"/>
-                  <a:gd name="ir" fmla="+- r 0 il"/>
-                </a:gdLst>
-                <a:ahLst/>
-                <a:cxnLst>
-                  <a:cxn ang="3">
-                    <a:pos x="hc" y="t"/>
-                  </a:cxn>
-                  <a:cxn ang="cd2">
-                    <a:pos x="x1" y="vc"/>
-                  </a:cxn>
-                  <a:cxn ang="cd4">
-                    <a:pos x="hc" y="b"/>
-                  </a:cxn>
-                  <a:cxn ang="0">
-                    <a:pos x="x4" y="vc"/>
-                  </a:cxn>
-                </a:cxnLst>
-                <a:rect l="l" t="t" r="r" b="b"/>
-                <a:pathLst>
-                  <a:path w="4540" h="9270">
-                    <a:moveTo>
-                      <a:pt x="392" y="125"/>
-                    </a:moveTo>
-                    <a:lnTo>
-                      <a:pt x="400" y="7061"/>
-                    </a:lnTo>
-                    <a:lnTo>
-                      <a:pt x="152" y="7361"/>
-                    </a:lnTo>
-                    <a:lnTo>
-                      <a:pt x="164" y="9131"/>
-                    </a:lnTo>
-                    <a:lnTo>
-                      <a:pt x="4383" y="9145"/>
-                    </a:lnTo>
-                    <a:lnTo>
-                      <a:pt x="4383" y="125"/>
-                    </a:lnTo>
-                    <a:lnTo>
-                      <a:pt x="392" y="125"/>
-                    </a:lnTo>
-                    <a:close/>
-                    <a:moveTo>
-                      <a:pt x="252" y="0"/>
-                    </a:moveTo>
-                    <a:lnTo>
-                      <a:pt x="4540" y="0"/>
-                    </a:lnTo>
-                    <a:lnTo>
-                      <a:pt x="4540" y="830"/>
-                    </a:lnTo>
-                    <a:lnTo>
-                      <a:pt x="4390" y="987"/>
-                    </a:lnTo>
-                    <a:lnTo>
-                      <a:pt x="4390" y="2623"/>
-                    </a:lnTo>
-                    <a:lnTo>
-                      <a:pt x="4540" y="2780"/>
-                    </a:lnTo>
-                    <a:lnTo>
-                      <a:pt x="4540" y="9270"/>
-                    </a:lnTo>
-                    <a:lnTo>
-                      <a:pt x="4342" y="9269"/>
-                    </a:lnTo>
-                    <a:lnTo>
-                      <a:pt x="4238" y="9170"/>
-                    </a:lnTo>
-                    <a:lnTo>
-                      <a:pt x="3418" y="9170"/>
-                    </a:lnTo>
-                    <a:lnTo>
-                      <a:pt x="3317" y="9266"/>
-                    </a:lnTo>
-                    <a:lnTo>
-                      <a:pt x="8" y="9256"/>
-                    </a:lnTo>
-                    <a:lnTo>
-                      <a:pt x="0" y="7269"/>
-                    </a:lnTo>
-                    <a:lnTo>
-                      <a:pt x="254" y="7041"/>
-                    </a:lnTo>
-                    <a:lnTo>
-                      <a:pt x="252" y="0"/>
-                    </a:lnTo>
-                    <a:close/>
-                  </a:path>
-                </a:pathLst>
-              </a:custGeom>
-              <a:grpFill/>
-              <a:ln>
-                <a:noFill/>
-              </a:ln>
-            </p:spPr>
-            <p:style>
-              <a:lnRef idx="2">
-                <a:schemeClr val="accent1">
-                  <a:shade val="50000"/>
-                </a:schemeClr>
-              </a:lnRef>
-              <a:fillRef idx="1">
-                <a:schemeClr val="accent1"/>
-              </a:fillRef>
-              <a:effectRef idx="0">
-                <a:schemeClr val="accent1"/>
-              </a:effectRef>
-              <a:fontRef idx="minor">
-                <a:schemeClr val="lt1"/>
-              </a:fontRef>
-            </p:style>
-            <p:txBody>
-              <a:bodyPr wrap="square" rtlCol="0" anchor="ctr">
-                <a:noAutofit/>
-              </a:bodyPr>
-              <a:lstStyle>
-                <a:defPPr>
-                  <a:defRPr lang="zh-CN">
-                    <a:solidFill>
-                      <a:schemeClr val="lt1"/>
-                    </a:solidFill>
-                  </a:defRPr>
-                </a:defPPr>
-                <a:lvl1pPr marL="0" algn="l" defTabSz="914400" rtl="0" eaLnBrk="1" latinLnBrk="0" hangingPunct="1">
-                  <a:defRPr sz="1800" kern="1200">
-                    <a:solidFill>
-                      <a:schemeClr val="lt1"/>
-                    </a:solidFill>
-                    <a:latin typeface="+mn-lt"/>
-                    <a:ea typeface="+mn-ea"/>
-                    <a:cs typeface="+mn-cs"/>
-                  </a:defRPr>
-                </a:lvl1pPr>
-                <a:lvl2pPr marL="457200" algn="l" defTabSz="914400" rtl="0" eaLnBrk="1" latinLnBrk="0" hangingPunct="1">
-                  <a:defRPr sz="1800" kern="1200">
-                    <a:solidFill>
-                      <a:schemeClr val="lt1"/>
-                    </a:solidFill>
-                    <a:latin typeface="+mn-lt"/>
-                    <a:ea typeface="+mn-ea"/>
-                    <a:cs typeface="+mn-cs"/>
-                  </a:defRPr>
-                </a:lvl2pPr>
-                <a:lvl3pPr marL="914400" algn="l" defTabSz="914400" rtl="0" eaLnBrk="1" latinLnBrk="0" hangingPunct="1">
-                  <a:defRPr sz="1800" kern="1200">
-                    <a:solidFill>
-                      <a:schemeClr val="lt1"/>
-                    </a:solidFill>
-                    <a:latin typeface="+mn-lt"/>
-                    <a:ea typeface="+mn-ea"/>
-                    <a:cs typeface="+mn-cs"/>
-                  </a:defRPr>
-                </a:lvl3pPr>
-                <a:lvl4pPr marL="1371600" algn="l" defTabSz="914400" rtl="0" eaLnBrk="1" latinLnBrk="0" hangingPunct="1">
-                  <a:defRPr sz="1800" kern="1200">
-                    <a:solidFill>
-                      <a:schemeClr val="lt1"/>
-                    </a:solidFill>
-                    <a:latin typeface="+mn-lt"/>
-                    <a:ea typeface="+mn-ea"/>
-                    <a:cs typeface="+mn-cs"/>
-                  </a:defRPr>
-                </a:lvl4pPr>
-                <a:lvl5pPr marL="1828800" algn="l" defTabSz="914400" rtl="0" eaLnBrk="1" latinLnBrk="0" hangingPunct="1">
-                  <a:defRPr sz="1800" kern="1200">
-                    <a:solidFill>
-                      <a:schemeClr val="lt1"/>
-                    </a:solidFill>
-                    <a:latin typeface="+mn-lt"/>
-                    <a:ea typeface="+mn-ea"/>
-                    <a:cs typeface="+mn-cs"/>
-                  </a:defRPr>
-                </a:lvl5pPr>
-                <a:lvl6pPr marL="2286000" algn="l" defTabSz="914400" rtl="0" eaLnBrk="1" latinLnBrk="0" hangingPunct="1">
-                  <a:defRPr sz="1800" kern="1200">
-                    <a:solidFill>
-                      <a:schemeClr val="lt1"/>
-                    </a:solidFill>
-                    <a:latin typeface="+mn-lt"/>
-                    <a:ea typeface="+mn-ea"/>
-                    <a:cs typeface="+mn-cs"/>
-                  </a:defRPr>
-                </a:lvl6pPr>
-                <a:lvl7pPr marL="2743200" algn="l" defTabSz="914400" rtl="0" eaLnBrk="1" latinLnBrk="0" hangingPunct="1">
-                  <a:defRPr sz="1800" kern="1200">
-                    <a:solidFill>
-                      <a:schemeClr val="lt1"/>
-                    </a:solidFill>
-                    <a:latin typeface="+mn-lt"/>
-                    <a:ea typeface="+mn-ea"/>
-                    <a:cs typeface="+mn-cs"/>
-                  </a:defRPr>
-                </a:lvl7pPr>
-                <a:lvl8pPr marL="3200400" algn="l" defTabSz="914400" rtl="0" eaLnBrk="1" latinLnBrk="0" hangingPunct="1">
-                  <a:defRPr sz="1800" kern="1200">
-                    <a:solidFill>
-                      <a:schemeClr val="lt1"/>
-                    </a:solidFill>
-                    <a:latin typeface="+mn-lt"/>
-                    <a:ea typeface="+mn-ea"/>
-                    <a:cs typeface="+mn-cs"/>
-                  </a:defRPr>
-                </a:lvl8pPr>
-                <a:lvl9pPr marL="3657600" algn="l" defTabSz="914400" rtl="0" eaLnBrk="1" latinLnBrk="0" hangingPunct="1">
-                  <a:defRPr sz="1800" kern="1200">
-                    <a:solidFill>
-                      <a:schemeClr val="lt1"/>
-                    </a:solidFill>
-                    <a:latin typeface="+mn-lt"/>
-                    <a:ea typeface="+mn-ea"/>
-                    <a:cs typeface="+mn-cs"/>
-                  </a:defRPr>
-                </a:lvl9pPr>
-              </a:lstStyle>
-              <a:p>
-                <a:pPr algn="ctr"/>
-                <a:endParaRPr lang="zh-CN" altLang="en-US"/>
-              </a:p>
-            </p:txBody>
-          </p:sp>
-          <p:sp>
-            <p:nvSpPr>
-              <p:cNvPr id="18" name="梯形 17"/>
-              <p:cNvSpPr/>
-              <p:nvPr>
-                <p:custDataLst>
-                  <p:tags r:id="rId3"/>
-                </p:custDataLst>
-              </p:nvPr>
-            </p:nvSpPr>
-            <p:spPr>
-              <a:xfrm rot="5400000">
-                <a:off x="13749" y="4156"/>
-                <a:ext cx="964" cy="170"/>
-              </a:xfrm>
-              <a:prstGeom prst="trapezoid">
-                <a:avLst>
-                  <a:gd name="adj" fmla="val 104500"/>
-                </a:avLst>
-              </a:prstGeom>
-              <a:grpFill/>
-              <a:ln>
-                <a:noFill/>
-              </a:ln>
-            </p:spPr>
-            <p:style>
-              <a:lnRef idx="2">
-                <a:schemeClr val="accent1">
-                  <a:shade val="50000"/>
-                </a:schemeClr>
-              </a:lnRef>
-              <a:fillRef idx="1">
-                <a:schemeClr val="accent1"/>
-              </a:fillRef>
-              <a:effectRef idx="0">
-                <a:schemeClr val="accent1"/>
-              </a:effectRef>
-              <a:fontRef idx="minor">
-                <a:schemeClr val="lt1"/>
-              </a:fontRef>
-            </p:style>
-            <p:txBody>
-              <a:bodyPr rtlCol="0" anchor="ctr"/>
-              <a:lstStyle/>
-              <a:p>
-                <a:pPr algn="ctr"/>
-                <a:endParaRPr lang="zh-CN" altLang="en-US"/>
-              </a:p>
-            </p:txBody>
-          </p:sp>
-          <p:sp>
-            <p:nvSpPr>
-              <p:cNvPr id="19" name="梯形 18"/>
-              <p:cNvSpPr/>
-              <p:nvPr>
-                <p:custDataLst>
-                  <p:tags r:id="rId4"/>
-                </p:custDataLst>
-              </p:nvPr>
-            </p:nvSpPr>
-            <p:spPr>
-              <a:xfrm>
-                <a:off x="6194" y="7431"/>
-                <a:ext cx="964" cy="170"/>
-              </a:xfrm>
-              <a:prstGeom prst="trapezoid">
-                <a:avLst>
-                  <a:gd name="adj" fmla="val 104500"/>
-                </a:avLst>
-              </a:prstGeom>
-              <a:grpFill/>
-              <a:ln>
-                <a:noFill/>
-              </a:ln>
-            </p:spPr>
-            <p:style>
-              <a:lnRef idx="2">
-                <a:schemeClr val="accent1">
-                  <a:shade val="50000"/>
-                </a:schemeClr>
-              </a:lnRef>
-              <a:fillRef idx="1">
-                <a:schemeClr val="accent1"/>
-              </a:fillRef>
-              <a:effectRef idx="0">
-                <a:schemeClr val="accent1"/>
-              </a:effectRef>
-              <a:fontRef idx="minor">
-                <a:schemeClr val="lt1"/>
-              </a:fontRef>
-            </p:style>
-            <p:txBody>
-              <a:bodyPr rtlCol="0" anchor="ctr"/>
-              <a:lstStyle/>
-              <a:p>
-                <a:pPr algn="ctr"/>
-                <a:endParaRPr lang="zh-CN" altLang="en-US"/>
-              </a:p>
-            </p:txBody>
-          </p:sp>
-        </p:grpSp>
-        <p:sp>
-          <p:nvSpPr>
-            <p:cNvPr id="14" name="文本框 13"/>
-            <p:cNvSpPr txBox="1"/>
-            <p:nvPr>
-              <p:custDataLst>
-                <p:tags r:id="rId5"/>
-              </p:custDataLst>
-            </p:nvPr>
-          </p:nvSpPr>
-          <p:spPr>
-            <a:xfrm>
-              <a:off x="5327" y="2459"/>
-              <a:ext cx="8796" cy="4985"/>
-            </a:xfrm>
-            <a:prstGeom prst="rect">
-              <a:avLst/>
-            </a:prstGeom>
-            <a:noFill/>
-          </p:spPr>
-          <p:txBody>
-            <a:bodyPr wrap="square" rtlCol="0" anchor="ctr" anchorCtr="0">
-              <a:noAutofit/>
-            </a:bodyPr>
-            <a:lstStyle/>
-            <a:p>
-              <a:pPr indent="457200" fontAlgn="auto">
-                <a:lnSpc>
-                  <a:spcPct val="150000"/>
-                </a:lnSpc>
-              </a:pPr>
-              <a:r>
-                <a:rPr lang="en-US" dirty="0">
-                  <a:latin typeface="微软雅黑" panose="020B0503020204020204" pitchFamily="34" charset="-122"/>
-                  <a:ea typeface="微软雅黑" panose="020B0503020204020204" pitchFamily="34" charset="-122"/>
-                  <a:cs typeface="微软雅黑" panose="020B0503020204020204" pitchFamily="34" charset="-122"/>
-                </a:rPr>
-                <a:t>{{text:</a:t>
-              </a:r>
-              <a:r>
-                <a:rPr lang="en-US" altLang="zh-CN" dirty="0">
-                  <a:latin typeface="微软雅黑" panose="020B0503020204020204" pitchFamily="34" charset="-122"/>
-                  <a:ea typeface="微软雅黑" panose="020B0503020204020204" pitchFamily="34" charset="-122"/>
-                  <a:cs typeface="微软雅黑" panose="020B0503020204020204" pitchFamily="34" charset="-122"/>
-                </a:rPr>
-                <a:t>content</a:t>
-              </a:r>
-              <a:r>
-                <a:rPr lang="en-US" dirty="0">
-                  <a:latin typeface="微软雅黑" panose="020B0503020204020204" pitchFamily="34" charset="-122"/>
-                  <a:ea typeface="微软雅黑" panose="020B0503020204020204" pitchFamily="34" charset="-122"/>
-                  <a:cs typeface="微软雅黑" panose="020B0503020204020204" pitchFamily="34" charset="-122"/>
-                </a:rPr>
-                <a:t>}}</a:t>
-              </a:r>
-              <a:endParaRPr lang="en-US" dirty="0">
-                <a:latin typeface="微软雅黑" panose="020B0503020204020204" pitchFamily="34" charset="-122"/>
-                <a:ea typeface="微软雅黑" panose="020B0503020204020204" pitchFamily="34" charset="-122"/>
-                <a:cs typeface="微软雅黑" panose="020B0503020204020204" pitchFamily="34" charset="-122"/>
-              </a:endParaRPr>
-            </a:p>
-          </p:txBody>
-        </p:sp>
-      </p:grpSp>
-      <p:sp>
-        <p:nvSpPr>
-          <p:cNvPr id="21" name="矩形 20"/>
-          <p:cNvSpPr/>
-          <p:nvPr/>
-        </p:nvSpPr>
-        <p:spPr>
-          <a:xfrm>
-            <a:off x="8275521" y="1842581"/>
-            <a:ext cx="3494356" cy="4658995"/>
-          </a:xfrm>
-          <a:prstGeom prst="rect">
-            <a:avLst/>
-          </a:prstGeom>
-          <a:noFill/>
-        </p:spPr>
-        <p:style>
-          <a:lnRef idx="2">
-            <a:schemeClr val="accent1">
-              <a:shade val="50000"/>
-            </a:schemeClr>
-          </a:lnRef>
-          <a:fillRef idx="1">
-            <a:schemeClr val="accent1"/>
-          </a:fillRef>
-          <a:effectRef idx="0">
-            <a:schemeClr val="accent1"/>
-          </a:effectRef>
-          <a:fontRef idx="minor">
-            <a:schemeClr val="lt1"/>
-          </a:fontRef>
-        </p:style>
-        <p:txBody>
-          <a:bodyPr rtlCol="0" anchor="ctr"/>
-          <a:lstStyle/>
-          <a:p>
-            <a:pPr algn="ctr"/>
-            <a:r>
-              <a:rPr lang="zh-CN" altLang="en-US" dirty="0" smtClean="0">
-                <a:solidFill>
-                  <a:schemeClr val="tx1"/>
-                </a:solidFill>
-              </a:rPr>
-              <a:t>教材对应知识的图片</a:t>
-            </a:r>
-            <a:endParaRPr lang="zh-CN" altLang="en-US" dirty="0">
-              <a:solidFill>
-                <a:schemeClr val="tx1"/>
-              </a:solidFill>
-            </a:endParaRPr>
-          </a:p>
-        </p:txBody>
-      </p:sp>
-      <p:sp>
-        <p:nvSpPr>
-          <p:cNvPr id="2" name="文本框 1"/>
-          <p:cNvSpPr txBox="1"/>
-          <p:nvPr/>
-        </p:nvSpPr>
-        <p:spPr>
-          <a:xfrm>
-            <a:off x="0" y="793750"/>
-            <a:ext cx="1351262" cy="583565"/>
-          </a:xfrm>
-          <a:prstGeom prst="rect">
-            <a:avLst/>
-          </a:prstGeom>
-          <a:noFill/>
-        </p:spPr>
-        <p:txBody>
-          <a:bodyPr wrap="square" rtlCol="0">
-            <a:spAutoFit/>
-            <a:scene3d>
-              <a:camera prst="orthographicFront"/>
-              <a:lightRig rig="threePt" dir="t"/>
-            </a:scene3d>
-            <a:sp3d contourW="12700"/>
-          </a:bodyPr>
-          <a:lstStyle/>
-          <a:p>
-            <a:pPr algn="ctr"/>
-            <a:r>
-              <a:rPr lang="en-US" sz="3200" dirty="0" smtClean="0">
-                <a:solidFill>
-                  <a:srgbClr val="3F396C"/>
-                </a:solidFill>
-                <a:latin typeface="思源宋体" panose="02020700000000000000" charset="-122"/>
-                <a:ea typeface="思源宋体" panose="02020700000000000000" charset="-122"/>
-              </a:rPr>
-              <a:t>03</a:t>
-            </a:r>
-            <a:endParaRPr lang="en-US" sz="3200" dirty="0" smtClean="0">
-              <a:solidFill>
-                <a:srgbClr val="3F396C"/>
-              </a:solidFill>
-              <a:latin typeface="思源宋体" panose="02020700000000000000" charset="-122"/>
-              <a:ea typeface="思源宋体" panose="02020700000000000000" charset="-122"/>
-            </a:endParaRPr>
-          </a:p>
-        </p:txBody>
-      </p:sp>
-      <p:sp>
-        <p:nvSpPr>
-          <p:cNvPr id="3" name="文本框 2"/>
-          <p:cNvSpPr txBox="1"/>
-          <p:nvPr/>
-        </p:nvSpPr>
-        <p:spPr>
-          <a:xfrm>
-            <a:off x="1278000" y="792000"/>
-            <a:ext cx="3932555" cy="583565"/>
-          </a:xfrm>
-          <a:prstGeom prst="rect">
-            <a:avLst/>
-          </a:prstGeom>
-          <a:noFill/>
-        </p:spPr>
-        <p:txBody>
-          <a:bodyPr wrap="square" rtlCol="0">
-            <a:spAutoFit/>
-            <a:scene3d>
-              <a:camera prst="orthographicFront"/>
-              <a:lightRig rig="threePt" dir="t"/>
-            </a:scene3d>
-            <a:sp3d contourW="12700"/>
-          </a:bodyPr>
-          <a:lstStyle>
-            <a:defPPr>
-              <a:defRPr lang="en-US"/>
-            </a:defPPr>
-            <a:lvl1pPr algn="ctr">
-              <a:defRPr sz="3200">
-                <a:gradFill>
-                  <a:gsLst>
-                    <a:gs pos="0">
-                      <a:schemeClr val="tx1">
-                        <a:lumMod val="50000"/>
-                        <a:lumOff val="50000"/>
-                      </a:schemeClr>
-                    </a:gs>
-                    <a:gs pos="100000">
-                      <a:schemeClr val="tx1">
-                        <a:lumMod val="85000"/>
-                        <a:lumOff val="15000"/>
-                      </a:schemeClr>
-                    </a:gs>
-                  </a:gsLst>
-                  <a:lin ang="5400000" scaled="1"/>
-                </a:gradFill>
-              </a:defRPr>
-            </a:lvl1pPr>
-          </a:lstStyle>
-          <a:p>
-            <a:pPr marL="0" marR="0" lvl="0" indent="0" algn="l" defTabSz="914400" rtl="0" eaLnBrk="1" fontAlgn="auto" latinLnBrk="0" hangingPunct="1">
-              <a:lnSpc>
-                <a:spcPct val="100000"/>
-              </a:lnSpc>
-              <a:spcBef>
-                <a:spcPts val="0"/>
-              </a:spcBef>
-              <a:spcAft>
-                <a:spcPts val="0"/>
-              </a:spcAft>
-              <a:buClrTx/>
-              <a:buSzTx/>
-              <a:buFontTx/>
-              <a:buNone/>
-              <a:defRPr/>
-            </a:pPr>
-            <a:r>
-              <a:rPr lang="en-US" altLang="zh-CN" b="1" dirty="0">
-                <a:solidFill>
-                  <a:schemeClr val="accent1">
-                    <a:lumMod val="75000"/>
-                  </a:schemeClr>
-                </a:solidFill>
-                <a:latin typeface="微软雅黑" panose="020B0503020204020204" pitchFamily="34" charset="-122"/>
-                <a:ea typeface="微软雅黑" panose="020B0503020204020204" pitchFamily="34" charset="-122"/>
-                <a:cs typeface="微软雅黑" panose="020B0503020204020204" pitchFamily="34" charset="-122"/>
-                <a:sym typeface="+mn-lt"/>
-              </a:rPr>
-              <a:t>{{text</a:t>
-            </a:r>
-            <a:r>
-              <a:rPr lang="zh-CN" altLang="en-US" b="1" dirty="0">
-                <a:solidFill>
-                  <a:schemeClr val="accent1">
-                    <a:lumMod val="75000"/>
-                  </a:schemeClr>
-                </a:solidFill>
-                <a:latin typeface="微软雅黑" panose="020B0503020204020204" pitchFamily="34" charset="-122"/>
-                <a:ea typeface="微软雅黑" panose="020B0503020204020204" pitchFamily="34" charset="-122"/>
-                <a:cs typeface="微软雅黑" panose="020B0503020204020204" pitchFamily="34" charset="-122"/>
-                <a:sym typeface="+mn-lt"/>
-              </a:rPr>
-              <a:t>：</a:t>
-            </a:r>
-            <a:r>
-              <a:rPr lang="en-US" altLang="zh-CN" b="1" dirty="0">
-                <a:solidFill>
-                  <a:schemeClr val="accent1">
-                    <a:lumMod val="75000"/>
-                  </a:schemeClr>
-                </a:solidFill>
-                <a:latin typeface="微软雅黑" panose="020B0503020204020204" pitchFamily="34" charset="-122"/>
-                <a:ea typeface="微软雅黑" panose="020B0503020204020204" pitchFamily="34" charset="-122"/>
-                <a:cs typeface="微软雅黑" panose="020B0503020204020204" pitchFamily="34" charset="-122"/>
-                <a:sym typeface="+mn-lt"/>
-              </a:rPr>
-              <a:t>replace}}</a:t>
-            </a:r>
-            <a:endParaRPr lang="en-US" altLang="zh-CN" b="1" dirty="0">
-              <a:solidFill>
-                <a:schemeClr val="accent1">
-                  <a:lumMod val="75000"/>
-                </a:schemeClr>
-              </a:solidFill>
-              <a:latin typeface="微软雅黑" panose="020B0503020204020204" pitchFamily="34" charset="-122"/>
-              <a:ea typeface="微软雅黑" panose="020B0503020204020204" pitchFamily="34" charset="-122"/>
-              <a:cs typeface="微软雅黑" panose="020B0503020204020204" pitchFamily="34" charset="-122"/>
-              <a:sym typeface="+mn-lt"/>
-            </a:endParaRPr>
-          </a:p>
-        </p:txBody>
-      </p:sp>
-    </p:spTree>
-  </p:cSld>
-  <p:clrMapOvr>
-    <a:masterClrMapping/>
-  </p:clrMapOvr>
-</p:sld>
-</file>
-
-<file path=ppt/slides/slide2.xml><?xml version="1.0" encoding="utf-8"?>
-<p:sld xmlns:a="http://schemas.openxmlformats.org/drawingml/2006/main" xmlns:r="http://schemas.openxmlformats.org/officeDocument/2006/relationships" xmlns:p="http://schemas.openxmlformats.org/presentationml/2006/main">
-  <p:cSld>
-    <p:spTree>
-      <p:nvGrpSpPr>
-        <p:cNvPr id="1" name=""/>
-        <p:cNvGrpSpPr/>
-        <p:nvPr/>
-      </p:nvGrpSpPr>
-      <p:grpSpPr>
-        <a:xfrm>
-          <a:off x="0" y="0"/>
-          <a:ext cx="0" cy="0"/>
-          <a:chOff x="0" y="0"/>
-          <a:chExt cx="0" cy="0"/>
-        </a:xfrm>
-      </p:grpSpPr>
-      <p:sp>
-        <p:nvSpPr>
-          <p:cNvPr id="23" name="圆角矩形 22"/>
-          <p:cNvSpPr/>
-          <p:nvPr/>
-        </p:nvSpPr>
-        <p:spPr>
-          <a:xfrm>
-            <a:off x="546265" y="1728470"/>
-            <a:ext cx="7468870" cy="4835525"/>
-          </a:xfrm>
-          <a:prstGeom prst="roundRect">
-            <a:avLst/>
-          </a:prstGeom>
-          <a:solidFill>
-            <a:schemeClr val="bg1"/>
-          </a:solidFill>
-        </p:spPr>
-        <p:style>
-          <a:lnRef idx="2">
-            <a:schemeClr val="accent1">
-              <a:shade val="50000"/>
-            </a:schemeClr>
-          </a:lnRef>
-          <a:fillRef idx="1">
-            <a:schemeClr val="accent1"/>
-          </a:fillRef>
-          <a:effectRef idx="0">
-            <a:schemeClr val="accent1"/>
-          </a:effectRef>
-          <a:fontRef idx="minor">
-            <a:schemeClr val="lt1"/>
-          </a:fontRef>
-        </p:style>
-        <p:txBody>
-          <a:bodyPr rtlCol="0" anchor="ctr"/>
-          <a:lstStyle/>
-          <a:p>
-            <a:pPr algn="ctr"/>
-            <a:endParaRPr lang="zh-CN" altLang="en-US"/>
-          </a:p>
-        </p:txBody>
-      </p:sp>
       <p:sp>
         <p:nvSpPr>
           <p:cNvPr id="24" name="文本框 23"/>
@@ -9370,8 +8415,8 @@
         </p:nvSpPr>
         <p:spPr>
           <a:xfrm>
-            <a:off x="922171" y="1860550"/>
-            <a:ext cx="6771164" cy="4554000"/>
+            <a:off x="4370070" y="2366010"/>
+            <a:ext cx="7292975" cy="3677920"/>
           </a:xfrm>
           <a:prstGeom prst="rect">
             <a:avLst/>
@@ -9424,16 +8469,505 @@
           </a:p>
         </p:txBody>
       </p:sp>
-      <p:sp>
-        <p:nvSpPr>
-          <p:cNvPr id="25" name="矩形 24"/>
+    </p:spTree>
+  </p:cSld>
+  <p:clrMapOvr>
+    <a:masterClrMapping/>
+  </p:clrMapOvr>
+</p:sld>
+</file>
+
+<file path=ppt/slides/slide10.xml><?xml version="1.0" encoding="utf-8"?>
+<p:sld xmlns:a="http://schemas.openxmlformats.org/drawingml/2006/main" xmlns:r="http://schemas.openxmlformats.org/officeDocument/2006/relationships" xmlns:p="http://schemas.openxmlformats.org/presentationml/2006/main">
+  <p:cSld>
+    <p:spTree>
+      <p:nvGrpSpPr>
+        <p:cNvPr id="1" name=""/>
+        <p:cNvGrpSpPr/>
+        <p:nvPr/>
+      </p:nvGrpSpPr>
+      <p:grpSpPr>
+        <a:xfrm>
+          <a:off x="0" y="0"/>
+          <a:ext cx="0" cy="0"/>
+          <a:chOff x="0" y="0"/>
+          <a:chExt cx="0" cy="0"/>
+        </a:xfrm>
+      </p:grpSpPr>
+      <p:grpSp>
+        <p:nvGrpSpPr>
+          <p:cNvPr id="10" name="组合 9"/>
+          <p:cNvGrpSpPr/>
+          <p:nvPr/>
+        </p:nvGrpSpPr>
+        <p:grpSpPr>
+          <a:xfrm rot="0">
+            <a:off x="385445" y="1786255"/>
+            <a:ext cx="7734935" cy="4715510"/>
+            <a:chOff x="5049" y="1927"/>
+            <a:chExt cx="9267" cy="5731"/>
+          </a:xfrm>
+          <a:solidFill>
+            <a:srgbClr val="1E8CE5"/>
+          </a:solidFill>
+        </p:grpSpPr>
+        <p:sp>
+          <p:nvSpPr>
+            <p:cNvPr id="16" name="任意多边形 15"/>
+            <p:cNvSpPr/>
+            <p:nvPr>
+              <p:custDataLst>
+                <p:tags r:id="rId1"/>
+              </p:custDataLst>
+            </p:nvPr>
+          </p:nvSpPr>
+          <p:spPr>
+            <a:xfrm rot="10800000">
+              <a:off x="11403" y="7498"/>
+              <a:ext cx="1928" cy="150"/>
+            </a:xfrm>
+            <a:custGeom>
+              <a:avLst/>
+              <a:gdLst>
+                <a:gd name="adj" fmla="val 104500"/>
+                <a:gd name="maxAdj" fmla="*/ 50000 w ss"/>
+                <a:gd name="a" fmla="pin 0 adj maxAdj"/>
+                <a:gd name="x1" fmla="*/ ss a 200000"/>
+                <a:gd name="x2" fmla="*/ ss a 100000"/>
+                <a:gd name="x3" fmla="+- r 0 x2"/>
+                <a:gd name="x4" fmla="+- r 0 x1"/>
+                <a:gd name="il" fmla="*/ wd3 a maxAdj"/>
+                <a:gd name="it" fmla="*/ hd3 a maxAdj"/>
+                <a:gd name="ir" fmla="+- r 0 il"/>
+              </a:gdLst>
+              <a:ahLst/>
+              <a:cxnLst>
+                <a:cxn ang="3">
+                  <a:pos x="hc" y="t"/>
+                </a:cxn>
+                <a:cxn ang="cd2">
+                  <a:pos x="x1" y="vc"/>
+                </a:cxn>
+                <a:cxn ang="cd4">
+                  <a:pos x="hc" y="b"/>
+                </a:cxn>
+                <a:cxn ang="0">
+                  <a:pos x="x4" y="vc"/>
+                </a:cxn>
+              </a:cxnLst>
+              <a:rect l="l" t="t" r="r" b="b"/>
+              <a:pathLst>
+                <a:path w="1950" h="150">
+                  <a:moveTo>
+                    <a:pt x="157" y="0"/>
+                  </a:moveTo>
+                  <a:lnTo>
+                    <a:pt x="1793" y="0"/>
+                  </a:lnTo>
+                  <a:lnTo>
+                    <a:pt x="1950" y="150"/>
+                  </a:lnTo>
+                  <a:lnTo>
+                    <a:pt x="0" y="150"/>
+                  </a:lnTo>
+                  <a:lnTo>
+                    <a:pt x="157" y="0"/>
+                  </a:lnTo>
+                  <a:close/>
+                </a:path>
+              </a:pathLst>
+            </a:custGeom>
+            <a:grpFill/>
+            <a:ln>
+              <a:noFill/>
+            </a:ln>
+          </p:spPr>
+          <p:style>
+            <a:lnRef idx="2">
+              <a:schemeClr val="accent1">
+                <a:shade val="50000"/>
+              </a:schemeClr>
+            </a:lnRef>
+            <a:fillRef idx="1">
+              <a:schemeClr val="accent1"/>
+            </a:fillRef>
+            <a:effectRef idx="0">
+              <a:schemeClr val="accent1"/>
+            </a:effectRef>
+            <a:fontRef idx="minor">
+              <a:schemeClr val="lt1"/>
+            </a:fontRef>
+          </p:style>
+          <p:txBody>
+            <a:bodyPr wrap="square" rtlCol="0" anchor="ctr">
+              <a:noAutofit/>
+            </a:bodyPr>
+            <a:lstStyle/>
+            <a:p>
+              <a:pPr algn="ctr"/>
+              <a:endParaRPr lang="zh-CN" altLang="en-US"/>
+            </a:p>
+          </p:txBody>
+        </p:sp>
+        <p:sp>
+          <p:nvSpPr>
+            <p:cNvPr id="17" name="任意多边形 16"/>
+            <p:cNvSpPr/>
+            <p:nvPr>
+              <p:custDataLst>
+                <p:tags r:id="rId2"/>
+              </p:custDataLst>
+            </p:nvPr>
+          </p:nvSpPr>
+          <p:spPr>
+            <a:xfrm rot="5400000">
+              <a:off x="6739" y="236"/>
+              <a:ext cx="5731" cy="9112"/>
+            </a:xfrm>
+            <a:custGeom>
+              <a:avLst/>
+              <a:gdLst>
+                <a:gd name="adj" fmla="val 104500"/>
+                <a:gd name="maxAdj" fmla="*/ 50000 w ss"/>
+                <a:gd name="a" fmla="pin 0 adj maxAdj"/>
+                <a:gd name="x1" fmla="*/ ss a 200000"/>
+                <a:gd name="x2" fmla="*/ ss a 100000"/>
+                <a:gd name="x3" fmla="+- r 0 x2"/>
+                <a:gd name="x4" fmla="+- r 0 x1"/>
+                <a:gd name="il" fmla="*/ wd3 a maxAdj"/>
+                <a:gd name="it" fmla="*/ hd3 a maxAdj"/>
+                <a:gd name="ir" fmla="+- r 0 il"/>
+              </a:gdLst>
+              <a:ahLst/>
+              <a:cxnLst>
+                <a:cxn ang="3">
+                  <a:pos x="hc" y="t"/>
+                </a:cxn>
+                <a:cxn ang="cd2">
+                  <a:pos x="x1" y="vc"/>
+                </a:cxn>
+                <a:cxn ang="cd4">
+                  <a:pos x="hc" y="b"/>
+                </a:cxn>
+                <a:cxn ang="0">
+                  <a:pos x="x4" y="vc"/>
+                </a:cxn>
+              </a:cxnLst>
+              <a:rect l="l" t="t" r="r" b="b"/>
+              <a:pathLst>
+                <a:path w="4540" h="9270">
+                  <a:moveTo>
+                    <a:pt x="392" y="125"/>
+                  </a:moveTo>
+                  <a:lnTo>
+                    <a:pt x="400" y="7061"/>
+                  </a:lnTo>
+                  <a:lnTo>
+                    <a:pt x="152" y="7361"/>
+                  </a:lnTo>
+                  <a:lnTo>
+                    <a:pt x="164" y="9131"/>
+                  </a:lnTo>
+                  <a:lnTo>
+                    <a:pt x="4383" y="9145"/>
+                  </a:lnTo>
+                  <a:lnTo>
+                    <a:pt x="4383" y="125"/>
+                  </a:lnTo>
+                  <a:lnTo>
+                    <a:pt x="392" y="125"/>
+                  </a:lnTo>
+                  <a:close/>
+                  <a:moveTo>
+                    <a:pt x="252" y="0"/>
+                  </a:moveTo>
+                  <a:lnTo>
+                    <a:pt x="4540" y="0"/>
+                  </a:lnTo>
+                  <a:lnTo>
+                    <a:pt x="4540" y="830"/>
+                  </a:lnTo>
+                  <a:lnTo>
+                    <a:pt x="4390" y="987"/>
+                  </a:lnTo>
+                  <a:lnTo>
+                    <a:pt x="4390" y="2623"/>
+                  </a:lnTo>
+                  <a:lnTo>
+                    <a:pt x="4540" y="2780"/>
+                  </a:lnTo>
+                  <a:lnTo>
+                    <a:pt x="4540" y="9270"/>
+                  </a:lnTo>
+                  <a:lnTo>
+                    <a:pt x="4342" y="9269"/>
+                  </a:lnTo>
+                  <a:lnTo>
+                    <a:pt x="4238" y="9170"/>
+                  </a:lnTo>
+                  <a:lnTo>
+                    <a:pt x="3418" y="9170"/>
+                  </a:lnTo>
+                  <a:lnTo>
+                    <a:pt x="3317" y="9266"/>
+                  </a:lnTo>
+                  <a:lnTo>
+                    <a:pt x="8" y="9256"/>
+                  </a:lnTo>
+                  <a:lnTo>
+                    <a:pt x="0" y="7269"/>
+                  </a:lnTo>
+                  <a:lnTo>
+                    <a:pt x="254" y="7041"/>
+                  </a:lnTo>
+                  <a:lnTo>
+                    <a:pt x="252" y="0"/>
+                  </a:lnTo>
+                  <a:close/>
+                </a:path>
+              </a:pathLst>
+            </a:custGeom>
+            <a:grpFill/>
+            <a:ln>
+              <a:noFill/>
+            </a:ln>
+          </p:spPr>
+          <p:style>
+            <a:lnRef idx="2">
+              <a:schemeClr val="accent1">
+                <a:shade val="50000"/>
+              </a:schemeClr>
+            </a:lnRef>
+            <a:fillRef idx="1">
+              <a:schemeClr val="accent1"/>
+            </a:fillRef>
+            <a:effectRef idx="0">
+              <a:schemeClr val="accent1"/>
+            </a:effectRef>
+            <a:fontRef idx="minor">
+              <a:schemeClr val="lt1"/>
+            </a:fontRef>
+          </p:style>
+          <p:txBody>
+            <a:bodyPr wrap="square" rtlCol="0" anchor="ctr">
+              <a:noAutofit/>
+            </a:bodyPr>
+            <a:lstStyle>
+              <a:defPPr>
+                <a:defRPr lang="zh-CN">
+                  <a:solidFill>
+                    <a:schemeClr val="lt1"/>
+                  </a:solidFill>
+                </a:defRPr>
+              </a:defPPr>
+              <a:lvl1pPr marL="0" algn="l" defTabSz="914400" rtl="0" eaLnBrk="1" latinLnBrk="0" hangingPunct="1">
+                <a:defRPr sz="1800" kern="1200">
+                  <a:solidFill>
+                    <a:schemeClr val="lt1"/>
+                  </a:solidFill>
+                  <a:latin typeface="+mn-lt"/>
+                  <a:ea typeface="+mn-ea"/>
+                  <a:cs typeface="+mn-cs"/>
+                </a:defRPr>
+              </a:lvl1pPr>
+              <a:lvl2pPr marL="457200" algn="l" defTabSz="914400" rtl="0" eaLnBrk="1" latinLnBrk="0" hangingPunct="1">
+                <a:defRPr sz="1800" kern="1200">
+                  <a:solidFill>
+                    <a:schemeClr val="lt1"/>
+                  </a:solidFill>
+                  <a:latin typeface="+mn-lt"/>
+                  <a:ea typeface="+mn-ea"/>
+                  <a:cs typeface="+mn-cs"/>
+                </a:defRPr>
+              </a:lvl2pPr>
+              <a:lvl3pPr marL="914400" algn="l" defTabSz="914400" rtl="0" eaLnBrk="1" latinLnBrk="0" hangingPunct="1">
+                <a:defRPr sz="1800" kern="1200">
+                  <a:solidFill>
+                    <a:schemeClr val="lt1"/>
+                  </a:solidFill>
+                  <a:latin typeface="+mn-lt"/>
+                  <a:ea typeface="+mn-ea"/>
+                  <a:cs typeface="+mn-cs"/>
+                </a:defRPr>
+              </a:lvl3pPr>
+              <a:lvl4pPr marL="1371600" algn="l" defTabSz="914400" rtl="0" eaLnBrk="1" latinLnBrk="0" hangingPunct="1">
+                <a:defRPr sz="1800" kern="1200">
+                  <a:solidFill>
+                    <a:schemeClr val="lt1"/>
+                  </a:solidFill>
+                  <a:latin typeface="+mn-lt"/>
+                  <a:ea typeface="+mn-ea"/>
+                  <a:cs typeface="+mn-cs"/>
+                </a:defRPr>
+              </a:lvl4pPr>
+              <a:lvl5pPr marL="1828800" algn="l" defTabSz="914400" rtl="0" eaLnBrk="1" latinLnBrk="0" hangingPunct="1">
+                <a:defRPr sz="1800" kern="1200">
+                  <a:solidFill>
+                    <a:schemeClr val="lt1"/>
+                  </a:solidFill>
+                  <a:latin typeface="+mn-lt"/>
+                  <a:ea typeface="+mn-ea"/>
+                  <a:cs typeface="+mn-cs"/>
+                </a:defRPr>
+              </a:lvl5pPr>
+              <a:lvl6pPr marL="2286000" algn="l" defTabSz="914400" rtl="0" eaLnBrk="1" latinLnBrk="0" hangingPunct="1">
+                <a:defRPr sz="1800" kern="1200">
+                  <a:solidFill>
+                    <a:schemeClr val="lt1"/>
+                  </a:solidFill>
+                  <a:latin typeface="+mn-lt"/>
+                  <a:ea typeface="+mn-ea"/>
+                  <a:cs typeface="+mn-cs"/>
+                </a:defRPr>
+              </a:lvl6pPr>
+              <a:lvl7pPr marL="2743200" algn="l" defTabSz="914400" rtl="0" eaLnBrk="1" latinLnBrk="0" hangingPunct="1">
+                <a:defRPr sz="1800" kern="1200">
+                  <a:solidFill>
+                    <a:schemeClr val="lt1"/>
+                  </a:solidFill>
+                  <a:latin typeface="+mn-lt"/>
+                  <a:ea typeface="+mn-ea"/>
+                  <a:cs typeface="+mn-cs"/>
+                </a:defRPr>
+              </a:lvl7pPr>
+              <a:lvl8pPr marL="3200400" algn="l" defTabSz="914400" rtl="0" eaLnBrk="1" latinLnBrk="0" hangingPunct="1">
+                <a:defRPr sz="1800" kern="1200">
+                  <a:solidFill>
+                    <a:schemeClr val="lt1"/>
+                  </a:solidFill>
+                  <a:latin typeface="+mn-lt"/>
+                  <a:ea typeface="+mn-ea"/>
+                  <a:cs typeface="+mn-cs"/>
+                </a:defRPr>
+              </a:lvl8pPr>
+              <a:lvl9pPr marL="3657600" algn="l" defTabSz="914400" rtl="0" eaLnBrk="1" latinLnBrk="0" hangingPunct="1">
+                <a:defRPr sz="1800" kern="1200">
+                  <a:solidFill>
+                    <a:schemeClr val="lt1"/>
+                  </a:solidFill>
+                  <a:latin typeface="+mn-lt"/>
+                  <a:ea typeface="+mn-ea"/>
+                  <a:cs typeface="+mn-cs"/>
+                </a:defRPr>
+              </a:lvl9pPr>
+            </a:lstStyle>
+            <a:p>
+              <a:pPr algn="ctr"/>
+              <a:endParaRPr lang="zh-CN" altLang="en-US"/>
+            </a:p>
+          </p:txBody>
+        </p:sp>
+        <p:sp>
+          <p:nvSpPr>
+            <p:cNvPr id="18" name="梯形 17"/>
+            <p:cNvSpPr/>
+            <p:nvPr>
+              <p:custDataLst>
+                <p:tags r:id="rId3"/>
+              </p:custDataLst>
+            </p:nvPr>
+          </p:nvSpPr>
+          <p:spPr>
+            <a:xfrm rot="5400000">
+              <a:off x="13749" y="4156"/>
+              <a:ext cx="964" cy="170"/>
+            </a:xfrm>
+            <a:prstGeom prst="trapezoid">
+              <a:avLst>
+                <a:gd name="adj" fmla="val 104500"/>
+              </a:avLst>
+            </a:prstGeom>
+            <a:grpFill/>
+            <a:ln>
+              <a:noFill/>
+            </a:ln>
+          </p:spPr>
+          <p:style>
+            <a:lnRef idx="2">
+              <a:schemeClr val="accent1">
+                <a:shade val="50000"/>
+              </a:schemeClr>
+            </a:lnRef>
+            <a:fillRef idx="1">
+              <a:schemeClr val="accent1"/>
+            </a:fillRef>
+            <a:effectRef idx="0">
+              <a:schemeClr val="accent1"/>
+            </a:effectRef>
+            <a:fontRef idx="minor">
+              <a:schemeClr val="lt1"/>
+            </a:fontRef>
+          </p:style>
+          <p:txBody>
+            <a:bodyPr rtlCol="0" anchor="ctr"/>
+            <a:lstStyle/>
+            <a:p>
+              <a:pPr algn="ctr"/>
+              <a:endParaRPr lang="zh-CN" altLang="en-US"/>
+            </a:p>
+          </p:txBody>
+        </p:sp>
+        <p:sp>
+          <p:nvSpPr>
+            <p:cNvPr id="19" name="梯形 18"/>
+            <p:cNvSpPr/>
+            <p:nvPr>
+              <p:custDataLst>
+                <p:tags r:id="rId4"/>
+              </p:custDataLst>
+            </p:nvPr>
+          </p:nvSpPr>
+          <p:spPr>
+            <a:xfrm>
+              <a:off x="6194" y="7431"/>
+              <a:ext cx="964" cy="170"/>
+            </a:xfrm>
+            <a:prstGeom prst="trapezoid">
+              <a:avLst>
+                <a:gd name="adj" fmla="val 104500"/>
+              </a:avLst>
+            </a:prstGeom>
+            <a:grpFill/>
+            <a:ln>
+              <a:noFill/>
+            </a:ln>
+          </p:spPr>
+          <p:style>
+            <a:lnRef idx="2">
+              <a:schemeClr val="accent1">
+                <a:shade val="50000"/>
+              </a:schemeClr>
+            </a:lnRef>
+            <a:fillRef idx="1">
+              <a:schemeClr val="accent1"/>
+            </a:fillRef>
+            <a:effectRef idx="0">
+              <a:schemeClr val="accent1"/>
+            </a:effectRef>
+            <a:fontRef idx="minor">
+              <a:schemeClr val="lt1"/>
+            </a:fontRef>
+          </p:style>
+          <p:txBody>
+            <a:bodyPr rtlCol="0" anchor="ctr"/>
+            <a:lstStyle/>
+            <a:p>
+              <a:pPr algn="ctr"/>
+              <a:endParaRPr lang="zh-CN" altLang="en-US"/>
+            </a:p>
+          </p:txBody>
+        </p:sp>
+      </p:grpSp>
+      <p:sp>
+        <p:nvSpPr>
+          <p:cNvPr id="21" name="矩形 20"/>
           <p:cNvSpPr/>
           <p:nvPr/>
         </p:nvSpPr>
         <p:spPr>
           <a:xfrm>
-            <a:off x="8336934" y="1792605"/>
-            <a:ext cx="3494356" cy="4771390"/>
+            <a:off x="8275521" y="1842581"/>
+            <a:ext cx="3494356" cy="4658995"/>
           </a:xfrm>
           <a:prstGeom prst="rect">
             <a:avLst/>
@@ -9527,7 +9061,7 @@
       </p:sp>
       <p:sp>
         <p:nvSpPr>
-          <p:cNvPr id="17" name="文本框 16"/>
+          <p:cNvPr id="3" name="文本框 2"/>
           <p:cNvSpPr txBox="1"/>
           <p:nvPr/>
         </p:nvSpPr>
@@ -9594,7 +9128,7 @@
               <a:defRPr/>
             </a:pPr>
             <a:r>
-              <a:rPr lang="en-US" altLang="zh-CN" b="1" dirty="0">
+              <a:rPr lang="zh-CN" altLang="en-US" b="1" dirty="0">
                 <a:solidFill>
                   <a:schemeClr val="accent1">
                     <a:lumMod val="75000"/>
@@ -9605,8 +9139,383 @@
                 <a:cs typeface="微软雅黑" panose="020B0503020204020204" pitchFamily="34" charset="-122"/>
                 <a:sym typeface="+mn-lt"/>
               </a:rPr>
-              <a:t>{{text</a:t>
+              <a:t>知识储备</a:t>
             </a:r>
+            <a:endParaRPr lang="en-US" altLang="zh-CN" b="1" dirty="0">
+              <a:solidFill>
+                <a:schemeClr val="accent1">
+                  <a:lumMod val="75000"/>
+                </a:schemeClr>
+              </a:solidFill>
+              <a:latin typeface="微软雅黑" panose="020B0503020204020204" pitchFamily="34" charset="-122"/>
+              <a:ea typeface="微软雅黑" panose="020B0503020204020204" pitchFamily="34" charset="-122"/>
+              <a:cs typeface="微软雅黑" panose="020B0503020204020204" pitchFamily="34" charset="-122"/>
+              <a:sym typeface="+mn-lt"/>
+            </a:endParaRPr>
+          </a:p>
+        </p:txBody>
+      </p:sp>
+      <p:sp>
+        <p:nvSpPr>
+          <p:cNvPr id="24" name="文本框 23"/>
+          <p:cNvSpPr txBox="1"/>
+          <p:nvPr/>
+        </p:nvSpPr>
+        <p:spPr>
+          <a:xfrm>
+            <a:off x="527050" y="2218055"/>
+            <a:ext cx="7366000" cy="4097020"/>
+          </a:xfrm>
+          <a:prstGeom prst="rect">
+            <a:avLst/>
+          </a:prstGeom>
+          <a:noFill/>
+        </p:spPr>
+        <p:txBody>
+          <a:bodyPr wrap="square" rtlCol="0">
+            <a:noAutofit/>
+          </a:bodyPr>
+          <a:lstStyle/>
+          <a:p>
+            <a:pPr indent="457200" fontAlgn="auto">
+              <a:lnSpc>
+                <a:spcPct val="150000"/>
+              </a:lnSpc>
+            </a:pPr>
+            <a:r>
+              <a:rPr lang="en-US" dirty="0">
+                <a:latin typeface="微软雅黑" panose="020B0503020204020204" pitchFamily="34" charset="-122"/>
+                <a:ea typeface="微软雅黑" panose="020B0503020204020204" pitchFamily="34" charset="-122"/>
+                <a:cs typeface="微软雅黑" panose="020B0503020204020204" pitchFamily="34" charset="-122"/>
+                <a:sym typeface="+mn-ea"/>
+              </a:rPr>
+              <a:t>{{text:</a:t>
+            </a:r>
+            <a:r>
+              <a:rPr lang="en-US" altLang="zh-CN" dirty="0">
+                <a:latin typeface="微软雅黑" panose="020B0503020204020204" pitchFamily="34" charset="-122"/>
+                <a:ea typeface="微软雅黑" panose="020B0503020204020204" pitchFamily="34" charset="-122"/>
+                <a:cs typeface="微软雅黑" panose="020B0503020204020204" pitchFamily="34" charset="-122"/>
+                <a:sym typeface="+mn-ea"/>
+              </a:rPr>
+              <a:t>content</a:t>
+            </a:r>
+            <a:r>
+              <a:rPr lang="en-US" dirty="0">
+                <a:latin typeface="微软雅黑" panose="020B0503020204020204" pitchFamily="34" charset="-122"/>
+                <a:ea typeface="微软雅黑" panose="020B0503020204020204" pitchFamily="34" charset="-122"/>
+                <a:cs typeface="微软雅黑" panose="020B0503020204020204" pitchFamily="34" charset="-122"/>
+                <a:sym typeface="+mn-ea"/>
+              </a:rPr>
+              <a:t>}}</a:t>
+            </a:r>
+            <a:endParaRPr lang="en-US" dirty="0">
+              <a:latin typeface="微软雅黑" panose="020B0503020204020204" pitchFamily="34" charset="-122"/>
+              <a:ea typeface="微软雅黑" panose="020B0503020204020204" pitchFamily="34" charset="-122"/>
+              <a:cs typeface="微软雅黑" panose="020B0503020204020204" pitchFamily="34" charset="-122"/>
+            </a:endParaRPr>
+          </a:p>
+        </p:txBody>
+      </p:sp>
+    </p:spTree>
+  </p:cSld>
+  <p:clrMapOvr>
+    <a:masterClrMapping/>
+  </p:clrMapOvr>
+</p:sld>
+</file>
+
+<file path=ppt/slides/slide2.xml><?xml version="1.0" encoding="utf-8"?>
+<p:sld xmlns:a="http://schemas.openxmlformats.org/drawingml/2006/main" xmlns:r="http://schemas.openxmlformats.org/officeDocument/2006/relationships" xmlns:p="http://schemas.openxmlformats.org/presentationml/2006/main">
+  <p:cSld>
+    <p:spTree>
+      <p:nvGrpSpPr>
+        <p:cNvPr id="1" name=""/>
+        <p:cNvGrpSpPr/>
+        <p:nvPr/>
+      </p:nvGrpSpPr>
+      <p:grpSpPr>
+        <a:xfrm>
+          <a:off x="0" y="0"/>
+          <a:ext cx="0" cy="0"/>
+          <a:chOff x="0" y="0"/>
+          <a:chExt cx="0" cy="0"/>
+        </a:xfrm>
+      </p:grpSpPr>
+      <p:sp>
+        <p:nvSpPr>
+          <p:cNvPr id="23" name="圆角矩形 22"/>
+          <p:cNvSpPr/>
+          <p:nvPr/>
+        </p:nvSpPr>
+        <p:spPr>
+          <a:xfrm>
+            <a:off x="546265" y="1728470"/>
+            <a:ext cx="7468870" cy="4835525"/>
+          </a:xfrm>
+          <a:prstGeom prst="roundRect">
+            <a:avLst/>
+          </a:prstGeom>
+          <a:solidFill>
+            <a:schemeClr val="bg1"/>
+          </a:solidFill>
+        </p:spPr>
+        <p:style>
+          <a:lnRef idx="2">
+            <a:schemeClr val="accent1">
+              <a:shade val="50000"/>
+            </a:schemeClr>
+          </a:lnRef>
+          <a:fillRef idx="1">
+            <a:schemeClr val="accent1"/>
+          </a:fillRef>
+          <a:effectRef idx="0">
+            <a:schemeClr val="accent1"/>
+          </a:effectRef>
+          <a:fontRef idx="minor">
+            <a:schemeClr val="lt1"/>
+          </a:fontRef>
+        </p:style>
+        <p:txBody>
+          <a:bodyPr rtlCol="0" anchor="ctr"/>
+          <a:lstStyle/>
+          <a:p>
+            <a:pPr algn="ctr"/>
+            <a:endParaRPr lang="zh-CN" altLang="en-US"/>
+          </a:p>
+        </p:txBody>
+      </p:sp>
+      <p:sp>
+        <p:nvSpPr>
+          <p:cNvPr id="24" name="文本框 23"/>
+          <p:cNvSpPr txBox="1"/>
+          <p:nvPr/>
+        </p:nvSpPr>
+        <p:spPr>
+          <a:xfrm>
+            <a:off x="922171" y="1860550"/>
+            <a:ext cx="6771164" cy="4554000"/>
+          </a:xfrm>
+          <a:prstGeom prst="rect">
+            <a:avLst/>
+          </a:prstGeom>
+          <a:noFill/>
+        </p:spPr>
+        <p:txBody>
+          <a:bodyPr wrap="square" rtlCol="0">
+            <a:noAutofit/>
+          </a:bodyPr>
+          <a:lstStyle/>
+          <a:p>
+            <a:pPr indent="457200" fontAlgn="auto">
+              <a:lnSpc>
+                <a:spcPct val="150000"/>
+              </a:lnSpc>
+            </a:pPr>
+            <a:r>
+              <a:rPr lang="en-US" dirty="0">
+                <a:latin typeface="微软雅黑" panose="020B0503020204020204" pitchFamily="34" charset="-122"/>
+                <a:ea typeface="微软雅黑" panose="020B0503020204020204" pitchFamily="34" charset="-122"/>
+                <a:cs typeface="微软雅黑" panose="020B0503020204020204" pitchFamily="34" charset="-122"/>
+                <a:sym typeface="+mn-ea"/>
+              </a:rPr>
+              <a:t>{{text:</a:t>
+            </a:r>
+            <a:r>
+              <a:rPr lang="en-US" altLang="zh-CN" dirty="0">
+                <a:latin typeface="微软雅黑" panose="020B0503020204020204" pitchFamily="34" charset="-122"/>
+                <a:ea typeface="微软雅黑" panose="020B0503020204020204" pitchFamily="34" charset="-122"/>
+                <a:cs typeface="微软雅黑" panose="020B0503020204020204" pitchFamily="34" charset="-122"/>
+                <a:sym typeface="+mn-ea"/>
+              </a:rPr>
+              <a:t>content</a:t>
+            </a:r>
+            <a:r>
+              <a:rPr lang="en-US" dirty="0">
+                <a:latin typeface="微软雅黑" panose="020B0503020204020204" pitchFamily="34" charset="-122"/>
+                <a:ea typeface="微软雅黑" panose="020B0503020204020204" pitchFamily="34" charset="-122"/>
+                <a:cs typeface="微软雅黑" panose="020B0503020204020204" pitchFamily="34" charset="-122"/>
+                <a:sym typeface="+mn-ea"/>
+              </a:rPr>
+              <a:t>}}</a:t>
+            </a:r>
+            <a:endParaRPr lang="en-US" dirty="0">
+              <a:latin typeface="微软雅黑" panose="020B0503020204020204" pitchFamily="34" charset="-122"/>
+              <a:ea typeface="微软雅黑" panose="020B0503020204020204" pitchFamily="34" charset="-122"/>
+              <a:cs typeface="微软雅黑" panose="020B0503020204020204" pitchFamily="34" charset="-122"/>
+            </a:endParaRPr>
+          </a:p>
+        </p:txBody>
+      </p:sp>
+      <p:sp>
+        <p:nvSpPr>
+          <p:cNvPr id="25" name="矩形 24"/>
+          <p:cNvSpPr/>
+          <p:nvPr/>
+        </p:nvSpPr>
+        <p:spPr>
+          <a:xfrm>
+            <a:off x="8336934" y="1792605"/>
+            <a:ext cx="3494356" cy="4771390"/>
+          </a:xfrm>
+          <a:prstGeom prst="rect">
+            <a:avLst/>
+          </a:prstGeom>
+          <a:noFill/>
+        </p:spPr>
+        <p:style>
+          <a:lnRef idx="2">
+            <a:schemeClr val="accent1">
+              <a:shade val="50000"/>
+            </a:schemeClr>
+          </a:lnRef>
+          <a:fillRef idx="1">
+            <a:schemeClr val="accent1"/>
+          </a:fillRef>
+          <a:effectRef idx="0">
+            <a:schemeClr val="accent1"/>
+          </a:effectRef>
+          <a:fontRef idx="minor">
+            <a:schemeClr val="lt1"/>
+          </a:fontRef>
+        </p:style>
+        <p:txBody>
+          <a:bodyPr rtlCol="0" anchor="ctr"/>
+          <a:lstStyle/>
+          <a:p>
+            <a:pPr algn="ctr"/>
+            <a:r>
+              <a:rPr lang="zh-CN" altLang="en-US" dirty="0" smtClean="0">
+                <a:solidFill>
+                  <a:schemeClr val="tx1"/>
+                </a:solidFill>
+              </a:rPr>
+              <a:t>教材对应知识的图片</a:t>
+            </a:r>
+            <a:endParaRPr lang="zh-CN" altLang="en-US" dirty="0">
+              <a:solidFill>
+                <a:schemeClr val="tx1"/>
+              </a:solidFill>
+            </a:endParaRPr>
+          </a:p>
+        </p:txBody>
+      </p:sp>
+      <p:sp>
+        <p:nvSpPr>
+          <p:cNvPr id="2" name="文本框 1"/>
+          <p:cNvSpPr txBox="1"/>
+          <p:nvPr/>
+        </p:nvSpPr>
+        <p:spPr>
+          <a:xfrm>
+            <a:off x="0" y="793750"/>
+            <a:ext cx="1351262" cy="583565"/>
+          </a:xfrm>
+          <a:prstGeom prst="rect">
+            <a:avLst/>
+          </a:prstGeom>
+          <a:noFill/>
+        </p:spPr>
+        <p:txBody>
+          <a:bodyPr wrap="square" rtlCol="0">
+            <a:spAutoFit/>
+            <a:scene3d>
+              <a:camera prst="orthographicFront"/>
+              <a:lightRig rig="threePt" dir="t"/>
+            </a:scene3d>
+            <a:sp3d contourW="12700"/>
+          </a:bodyPr>
+          <a:lstStyle/>
+          <a:p>
+            <a:pPr algn="ctr"/>
+            <a:r>
+              <a:rPr lang="en-US" sz="3200" dirty="0" smtClean="0">
+                <a:solidFill>
+                  <a:srgbClr val="3F396C"/>
+                </a:solidFill>
+                <a:latin typeface="思源宋体" panose="02020700000000000000" charset="-122"/>
+                <a:ea typeface="思源宋体" panose="02020700000000000000" charset="-122"/>
+              </a:rPr>
+              <a:t>03</a:t>
+            </a:r>
+            <a:endParaRPr lang="en-US" sz="3200" dirty="0" smtClean="0">
+              <a:solidFill>
+                <a:srgbClr val="3F396C"/>
+              </a:solidFill>
+              <a:latin typeface="思源宋体" panose="02020700000000000000" charset="-122"/>
+              <a:ea typeface="思源宋体" panose="02020700000000000000" charset="-122"/>
+            </a:endParaRPr>
+          </a:p>
+        </p:txBody>
+      </p:sp>
+      <p:sp>
+        <p:nvSpPr>
+          <p:cNvPr id="17" name="文本框 16"/>
+          <p:cNvSpPr txBox="1"/>
+          <p:nvPr/>
+        </p:nvSpPr>
+        <p:spPr>
+          <a:xfrm>
+            <a:off x="1278000" y="792000"/>
+            <a:ext cx="3932555" cy="583565"/>
+          </a:xfrm>
+          <a:prstGeom prst="rect">
+            <a:avLst/>
+          </a:prstGeom>
+          <a:noFill/>
+        </p:spPr>
+        <p:txBody>
+          <a:bodyPr wrap="square" rtlCol="0">
+            <a:spAutoFit/>
+            <a:scene3d>
+              <a:camera prst="orthographicFront"/>
+              <a:lightRig rig="threePt" dir="t"/>
+            </a:scene3d>
+            <a:sp3d contourW="12700"/>
+          </a:bodyPr>
+          <a:lstStyle>
+            <a:defPPr>
+              <a:defRPr lang="en-US"/>
+            </a:defPPr>
+            <a:lvl1pPr algn="ctr">
+              <a:defRPr sz="3200">
+                <a:gradFill>
+                  <a:gsLst>
+                    <a:gs pos="0">
+                      <a:schemeClr val="tx1">
+                        <a:lumMod val="50000"/>
+                        <a:lumOff val="50000"/>
+                      </a:schemeClr>
+                    </a:gs>
+                    <a:gs pos="100000">
+                      <a:schemeClr val="tx1">
+                        <a:lumMod val="85000"/>
+                        <a:lumOff val="15000"/>
+                      </a:schemeClr>
+                    </a:gs>
+                  </a:gsLst>
+                  <a:lin ang="5400000" scaled="1"/>
+                </a:gradFill>
+              </a:defRPr>
+            </a:lvl1pPr>
+          </a:lstStyle>
+          <a:p>
+            <a:pPr marL="0" marR="0" lvl="0" indent="0" algn="l" defTabSz="914400" rtl="0" eaLnBrk="1" fontAlgn="auto" latinLnBrk="0" hangingPunct="1">
+              <a:lnSpc>
+                <a:spcPct val="100000"/>
+              </a:lnSpc>
+              <a:spcBef>
+                <a:spcPts val="0"/>
+              </a:spcBef>
+              <a:spcAft>
+                <a:spcPts val="0"/>
+              </a:spcAft>
+              <a:buClrTx/>
+              <a:buSzTx/>
+              <a:buFontTx/>
+              <a:buNone/>
+              <a:defRPr/>
+            </a:pPr>
             <a:r>
               <a:rPr lang="zh-CN" altLang="en-US" b="1" dirty="0">
                 <a:solidFill>
@@ -9619,21 +9528,7 @@
                 <a:cs typeface="微软雅黑" panose="020B0503020204020204" pitchFamily="34" charset="-122"/>
                 <a:sym typeface="+mn-lt"/>
               </a:rPr>
-              <a:t>：</a:t>
-            </a:r>
-            <a:r>
-              <a:rPr lang="en-US" altLang="zh-CN" b="1" dirty="0">
-                <a:solidFill>
-                  <a:schemeClr val="accent1">
-                    <a:lumMod val="75000"/>
-                  </a:schemeClr>
-                </a:solidFill>
-                <a:latin typeface="微软雅黑" panose="020B0503020204020204" pitchFamily="34" charset="-122"/>
-                <a:ea typeface="微软雅黑" panose="020B0503020204020204" pitchFamily="34" charset="-122"/>
-                <a:cs typeface="微软雅黑" panose="020B0503020204020204" pitchFamily="34" charset="-122"/>
-                <a:sym typeface="+mn-lt"/>
-              </a:rPr>
-              <a:t>replace}}</a:t>
+              <a:t>知识储备</a:t>
             </a:r>
             <a:endParaRPr lang="en-US" altLang="zh-CN" b="1" dirty="0">
               <a:solidFill>
@@ -10050,20 +9945,6 @@
               <a:defRPr/>
             </a:pPr>
             <a:r>
-              <a:rPr lang="en-US" altLang="zh-CN" b="1" dirty="0">
-                <a:solidFill>
-                  <a:schemeClr val="accent1">
-                    <a:lumMod val="75000"/>
-                  </a:schemeClr>
-                </a:solidFill>
-                <a:latin typeface="微软雅黑" panose="020B0503020204020204" pitchFamily="34" charset="-122"/>
-                <a:ea typeface="微软雅黑" panose="020B0503020204020204" pitchFamily="34" charset="-122"/>
-                <a:cs typeface="微软雅黑" panose="020B0503020204020204" pitchFamily="34" charset="-122"/>
-                <a:sym typeface="+mn-lt"/>
-              </a:rPr>
-              <a:t>{{text</a:t>
-            </a:r>
-            <a:r>
               <a:rPr lang="zh-CN" altLang="en-US" b="1" dirty="0">
                 <a:solidFill>
                   <a:schemeClr val="accent1">
@@ -10075,21 +9956,7 @@
                 <a:cs typeface="微软雅黑" panose="020B0503020204020204" pitchFamily="34" charset="-122"/>
                 <a:sym typeface="+mn-lt"/>
               </a:rPr>
-              <a:t>：</a:t>
-            </a:r>
-            <a:r>
-              <a:rPr lang="en-US" altLang="zh-CN" b="1" dirty="0">
-                <a:solidFill>
-                  <a:schemeClr val="accent1">
-                    <a:lumMod val="75000"/>
-                  </a:schemeClr>
-                </a:solidFill>
-                <a:latin typeface="微软雅黑" panose="020B0503020204020204" pitchFamily="34" charset="-122"/>
-                <a:ea typeface="微软雅黑" panose="020B0503020204020204" pitchFamily="34" charset="-122"/>
-                <a:cs typeface="微软雅黑" panose="020B0503020204020204" pitchFamily="34" charset="-122"/>
-                <a:sym typeface="+mn-lt"/>
-              </a:rPr>
-              <a:t>replace}}</a:t>
+              <a:t>知识储备</a:t>
             </a:r>
             <a:endParaRPr lang="en-US" altLang="zh-CN" b="1" dirty="0">
               <a:solidFill>
@@ -10165,7 +10032,6 @@
                 <a:latin typeface="微软雅黑" panose="020B0503020204020204" pitchFamily="34" charset="-122"/>
                 <a:ea typeface="微软雅黑" panose="020B0503020204020204" pitchFamily="34" charset="-122"/>
                 <a:cs typeface="微软雅黑" panose="020B0503020204020204" pitchFamily="34" charset="-122"/>
-                <a:sym typeface="+mn-ea"/>
               </a:rPr>
               <a:t>{{text:</a:t>
             </a:r>
@@ -10174,25 +10040,14 @@
                 <a:latin typeface="微软雅黑" panose="020B0503020204020204" pitchFamily="34" charset="-122"/>
                 <a:ea typeface="微软雅黑" panose="020B0503020204020204" pitchFamily="34" charset="-122"/>
                 <a:cs typeface="微软雅黑" panose="020B0503020204020204" pitchFamily="34" charset="-122"/>
-                <a:sym typeface="+mn-ea"/>
               </a:rPr>
-              <a:t>conte</a:t>
-            </a:r>
-            <a:r>
-              <a:rPr lang="en-US" altLang="zh-CN" dirty="0">
-                <a:latin typeface="微软雅黑" panose="020B0503020204020204" pitchFamily="34" charset="-122"/>
-                <a:ea typeface="微软雅黑" panose="020B0503020204020204" pitchFamily="34" charset="-122"/>
-                <a:cs typeface="微软雅黑" panose="020B0503020204020204" pitchFamily="34" charset="-122"/>
-                <a:sym typeface="+mn-ea"/>
-              </a:rPr>
-              <a:t>nt</a:t>
+              <a:t>content</a:t>
             </a:r>
             <a:r>
               <a:rPr lang="en-US" dirty="0">
                 <a:latin typeface="微软雅黑" panose="020B0503020204020204" pitchFamily="34" charset="-122"/>
                 <a:ea typeface="微软雅黑" panose="020B0503020204020204" pitchFamily="34" charset="-122"/>
                 <a:cs typeface="微软雅黑" panose="020B0503020204020204" pitchFamily="34" charset="-122"/>
-                <a:sym typeface="+mn-ea"/>
               </a:rPr>
               <a:t>}}</a:t>
             </a:r>
@@ -10466,20 +10321,6 @@
               <a:defRPr/>
             </a:pPr>
             <a:r>
-              <a:rPr lang="en-US" altLang="zh-CN" b="1" dirty="0">
-                <a:solidFill>
-                  <a:schemeClr val="accent1">
-                    <a:lumMod val="75000"/>
-                  </a:schemeClr>
-                </a:solidFill>
-                <a:latin typeface="微软雅黑" panose="020B0503020204020204" pitchFamily="34" charset="-122"/>
-                <a:ea typeface="微软雅黑" panose="020B0503020204020204" pitchFamily="34" charset="-122"/>
-                <a:cs typeface="微软雅黑" panose="020B0503020204020204" pitchFamily="34" charset="-122"/>
-                <a:sym typeface="+mn-lt"/>
-              </a:rPr>
-              <a:t>{{text</a:t>
-            </a:r>
-            <a:r>
               <a:rPr lang="zh-CN" altLang="en-US" b="1" dirty="0">
                 <a:solidFill>
                   <a:schemeClr val="accent1">
@@ -10491,21 +10332,7 @@
                 <a:cs typeface="微软雅黑" panose="020B0503020204020204" pitchFamily="34" charset="-122"/>
                 <a:sym typeface="+mn-lt"/>
               </a:rPr>
-              <a:t>：</a:t>
-            </a:r>
-            <a:r>
-              <a:rPr lang="en-US" altLang="zh-CN" b="1" dirty="0">
-                <a:solidFill>
-                  <a:schemeClr val="accent1">
-                    <a:lumMod val="75000"/>
-                  </a:schemeClr>
-                </a:solidFill>
-                <a:latin typeface="微软雅黑" panose="020B0503020204020204" pitchFamily="34" charset="-122"/>
-                <a:ea typeface="微软雅黑" panose="020B0503020204020204" pitchFamily="34" charset="-122"/>
-                <a:cs typeface="微软雅黑" panose="020B0503020204020204" pitchFamily="34" charset="-122"/>
-                <a:sym typeface="+mn-lt"/>
-              </a:rPr>
-              <a:t>replace}}</a:t>
+              <a:t>知识储备</a:t>
             </a:r>
             <a:endParaRPr lang="en-US" altLang="zh-CN" b="1" dirty="0">
               <a:solidFill>
@@ -10548,542 +10375,464 @@
       </p:grpSpPr>
       <p:grpSp>
         <p:nvGrpSpPr>
-          <p:cNvPr id="9" name="组合 8" descr="7b0a202020202274657874626f78223a20227b5c2263617465676f72795f69645c223a31303738302c5c2269645c223a32303334343733387d220a7d0a"/>
+          <p:cNvPr id="10" name="组合 9"/>
           <p:cNvGrpSpPr/>
           <p:nvPr/>
         </p:nvGrpSpPr>
         <p:grpSpPr>
-          <a:xfrm>
-            <a:off x="4170045" y="1786478"/>
+          <a:xfrm rot="0">
+            <a:off x="4170045" y="1786255"/>
             <a:ext cx="7734935" cy="4715510"/>
-            <a:chOff x="5151" y="1940"/>
+            <a:chOff x="5049" y="1927"/>
             <a:chExt cx="9267" cy="5731"/>
           </a:xfrm>
+          <a:solidFill>
+            <a:srgbClr val="1E8CE5"/>
+          </a:solidFill>
         </p:grpSpPr>
-        <p:grpSp>
-          <p:nvGrpSpPr>
-            <p:cNvPr id="10" name="组合 9"/>
-            <p:cNvGrpSpPr/>
-            <p:nvPr/>
-          </p:nvGrpSpPr>
-          <p:grpSpPr>
-            <a:xfrm>
-              <a:off x="5151" y="1940"/>
-              <a:ext cx="9267" cy="5731"/>
-              <a:chOff x="5049" y="1927"/>
-              <a:chExt cx="9267" cy="5731"/>
-            </a:xfrm>
-            <a:solidFill>
-              <a:srgbClr val="1E8CE5"/>
-            </a:solidFill>
-          </p:grpSpPr>
-          <p:sp>
-            <p:nvSpPr>
-              <p:cNvPr id="16" name="任意多边形 15"/>
-              <p:cNvSpPr/>
-              <p:nvPr>
-                <p:custDataLst>
-                  <p:tags r:id="rId1"/>
-                </p:custDataLst>
-              </p:nvPr>
-            </p:nvSpPr>
-            <p:spPr>
-              <a:xfrm rot="10800000">
-                <a:off x="11403" y="7498"/>
-                <a:ext cx="1928" cy="150"/>
-              </a:xfrm>
-              <a:custGeom>
-                <a:avLst/>
-                <a:gdLst>
-                  <a:gd name="adj" fmla="val 104500"/>
-                  <a:gd name="maxAdj" fmla="*/ 50000 w ss"/>
-                  <a:gd name="a" fmla="pin 0 adj maxAdj"/>
-                  <a:gd name="x1" fmla="*/ ss a 200000"/>
-                  <a:gd name="x2" fmla="*/ ss a 100000"/>
-                  <a:gd name="x3" fmla="+- r 0 x2"/>
-                  <a:gd name="x4" fmla="+- r 0 x1"/>
-                  <a:gd name="il" fmla="*/ wd3 a maxAdj"/>
-                  <a:gd name="it" fmla="*/ hd3 a maxAdj"/>
-                  <a:gd name="ir" fmla="+- r 0 il"/>
-                </a:gdLst>
-                <a:ahLst/>
-                <a:cxnLst>
-                  <a:cxn ang="3">
-                    <a:pos x="hc" y="t"/>
-                  </a:cxn>
-                  <a:cxn ang="cd2">
-                    <a:pos x="x1" y="vc"/>
-                  </a:cxn>
-                  <a:cxn ang="cd4">
-                    <a:pos x="hc" y="b"/>
-                  </a:cxn>
-                  <a:cxn ang="0">
-                    <a:pos x="x4" y="vc"/>
-                  </a:cxn>
-                </a:cxnLst>
-                <a:rect l="l" t="t" r="r" b="b"/>
-                <a:pathLst>
-                  <a:path w="1950" h="150">
-                    <a:moveTo>
-                      <a:pt x="157" y="0"/>
-                    </a:moveTo>
-                    <a:lnTo>
-                      <a:pt x="1793" y="0"/>
-                    </a:lnTo>
-                    <a:lnTo>
-                      <a:pt x="1950" y="150"/>
-                    </a:lnTo>
-                    <a:lnTo>
-                      <a:pt x="0" y="150"/>
-                    </a:lnTo>
-                    <a:lnTo>
-                      <a:pt x="157" y="0"/>
-                    </a:lnTo>
-                    <a:close/>
-                  </a:path>
-                </a:pathLst>
-              </a:custGeom>
-              <a:grpFill/>
-              <a:ln>
-                <a:noFill/>
-              </a:ln>
-            </p:spPr>
-            <p:style>
-              <a:lnRef idx="2">
-                <a:schemeClr val="accent1">
-                  <a:shade val="50000"/>
-                </a:schemeClr>
-              </a:lnRef>
-              <a:fillRef idx="1">
-                <a:schemeClr val="accent1"/>
-              </a:fillRef>
-              <a:effectRef idx="0">
-                <a:schemeClr val="accent1"/>
-              </a:effectRef>
-              <a:fontRef idx="minor">
-                <a:schemeClr val="lt1"/>
-              </a:fontRef>
-            </p:style>
-            <p:txBody>
-              <a:bodyPr wrap="square" rtlCol="0" anchor="ctr">
-                <a:noAutofit/>
-              </a:bodyPr>
-              <a:lstStyle/>
-              <a:p>
-                <a:pPr algn="ctr"/>
-                <a:endParaRPr lang="zh-CN" altLang="en-US"/>
-              </a:p>
-            </p:txBody>
-          </p:sp>
-          <p:sp>
-            <p:nvSpPr>
-              <p:cNvPr id="17" name="任意多边形 16"/>
-              <p:cNvSpPr/>
-              <p:nvPr>
-                <p:custDataLst>
-                  <p:tags r:id="rId2"/>
-                </p:custDataLst>
-              </p:nvPr>
-            </p:nvSpPr>
-            <p:spPr>
-              <a:xfrm rot="5400000">
-                <a:off x="6739" y="236"/>
-                <a:ext cx="5731" cy="9112"/>
-              </a:xfrm>
-              <a:custGeom>
-                <a:avLst/>
-                <a:gdLst>
-                  <a:gd name="adj" fmla="val 104500"/>
-                  <a:gd name="maxAdj" fmla="*/ 50000 w ss"/>
-                  <a:gd name="a" fmla="pin 0 adj maxAdj"/>
-                  <a:gd name="x1" fmla="*/ ss a 200000"/>
-                  <a:gd name="x2" fmla="*/ ss a 100000"/>
-                  <a:gd name="x3" fmla="+- r 0 x2"/>
-                  <a:gd name="x4" fmla="+- r 0 x1"/>
-                  <a:gd name="il" fmla="*/ wd3 a maxAdj"/>
-                  <a:gd name="it" fmla="*/ hd3 a maxAdj"/>
-                  <a:gd name="ir" fmla="+- r 0 il"/>
-                </a:gdLst>
-                <a:ahLst/>
-                <a:cxnLst>
-                  <a:cxn ang="3">
-                    <a:pos x="hc" y="t"/>
-                  </a:cxn>
-                  <a:cxn ang="cd2">
-                    <a:pos x="x1" y="vc"/>
-                  </a:cxn>
-                  <a:cxn ang="cd4">
-                    <a:pos x="hc" y="b"/>
-                  </a:cxn>
-                  <a:cxn ang="0">
-                    <a:pos x="x4" y="vc"/>
-                  </a:cxn>
-                </a:cxnLst>
-                <a:rect l="l" t="t" r="r" b="b"/>
-                <a:pathLst>
-                  <a:path w="4540" h="9270">
-                    <a:moveTo>
-                      <a:pt x="392" y="125"/>
-                    </a:moveTo>
-                    <a:lnTo>
-                      <a:pt x="400" y="7061"/>
-                    </a:lnTo>
-                    <a:lnTo>
-                      <a:pt x="152" y="7361"/>
-                    </a:lnTo>
-                    <a:lnTo>
-                      <a:pt x="164" y="9131"/>
-                    </a:lnTo>
-                    <a:lnTo>
-                      <a:pt x="4383" y="9145"/>
-                    </a:lnTo>
-                    <a:lnTo>
-                      <a:pt x="4383" y="125"/>
-                    </a:lnTo>
-                    <a:lnTo>
-                      <a:pt x="392" y="125"/>
-                    </a:lnTo>
-                    <a:close/>
-                    <a:moveTo>
-                      <a:pt x="252" y="0"/>
-                    </a:moveTo>
-                    <a:lnTo>
-                      <a:pt x="4540" y="0"/>
-                    </a:lnTo>
-                    <a:lnTo>
-                      <a:pt x="4540" y="830"/>
-                    </a:lnTo>
-                    <a:lnTo>
-                      <a:pt x="4390" y="987"/>
-                    </a:lnTo>
-                    <a:lnTo>
-                      <a:pt x="4390" y="2623"/>
-                    </a:lnTo>
-                    <a:lnTo>
-                      <a:pt x="4540" y="2780"/>
-                    </a:lnTo>
-                    <a:lnTo>
-                      <a:pt x="4540" y="9270"/>
-                    </a:lnTo>
-                    <a:lnTo>
-                      <a:pt x="4342" y="9269"/>
-                    </a:lnTo>
-                    <a:lnTo>
-                      <a:pt x="4238" y="9170"/>
-                    </a:lnTo>
-                    <a:lnTo>
-                      <a:pt x="3418" y="9170"/>
-                    </a:lnTo>
-                    <a:lnTo>
-                      <a:pt x="3317" y="9266"/>
-                    </a:lnTo>
-                    <a:lnTo>
-                      <a:pt x="8" y="9256"/>
-                    </a:lnTo>
-                    <a:lnTo>
-                      <a:pt x="0" y="7269"/>
-                    </a:lnTo>
-                    <a:lnTo>
-                      <a:pt x="254" y="7041"/>
-                    </a:lnTo>
-                    <a:lnTo>
-                      <a:pt x="252" y="0"/>
-                    </a:lnTo>
-                    <a:close/>
-                  </a:path>
-                </a:pathLst>
-              </a:custGeom>
-              <a:grpFill/>
-              <a:ln>
-                <a:noFill/>
-              </a:ln>
-            </p:spPr>
-            <p:style>
-              <a:lnRef idx="2">
-                <a:schemeClr val="accent1">
-                  <a:shade val="50000"/>
-                </a:schemeClr>
-              </a:lnRef>
-              <a:fillRef idx="1">
-                <a:schemeClr val="accent1"/>
-              </a:fillRef>
-              <a:effectRef idx="0">
-                <a:schemeClr val="accent1"/>
-              </a:effectRef>
-              <a:fontRef idx="minor">
-                <a:schemeClr val="lt1"/>
-              </a:fontRef>
-            </p:style>
-            <p:txBody>
-              <a:bodyPr wrap="square" rtlCol="0" anchor="ctr">
-                <a:noAutofit/>
-              </a:bodyPr>
-              <a:lstStyle>
-                <a:defPPr>
-                  <a:defRPr lang="zh-CN">
-                    <a:solidFill>
-                      <a:schemeClr val="lt1"/>
-                    </a:solidFill>
-                  </a:defRPr>
-                </a:defPPr>
-                <a:lvl1pPr marL="0" algn="l" defTabSz="914400" rtl="0" eaLnBrk="1" latinLnBrk="0" hangingPunct="1">
-                  <a:defRPr sz="1800" kern="1200">
-                    <a:solidFill>
-                      <a:schemeClr val="lt1"/>
-                    </a:solidFill>
-                    <a:latin typeface="+mn-lt"/>
-                    <a:ea typeface="+mn-ea"/>
-                    <a:cs typeface="+mn-cs"/>
-                  </a:defRPr>
-                </a:lvl1pPr>
-                <a:lvl2pPr marL="457200" algn="l" defTabSz="914400" rtl="0" eaLnBrk="1" latinLnBrk="0" hangingPunct="1">
-                  <a:defRPr sz="1800" kern="1200">
-                    <a:solidFill>
-                      <a:schemeClr val="lt1"/>
-                    </a:solidFill>
-                    <a:latin typeface="+mn-lt"/>
-                    <a:ea typeface="+mn-ea"/>
-                    <a:cs typeface="+mn-cs"/>
-                  </a:defRPr>
-                </a:lvl2pPr>
-                <a:lvl3pPr marL="914400" algn="l" defTabSz="914400" rtl="0" eaLnBrk="1" latinLnBrk="0" hangingPunct="1">
-                  <a:defRPr sz="1800" kern="1200">
-                    <a:solidFill>
-                      <a:schemeClr val="lt1"/>
-                    </a:solidFill>
-                    <a:latin typeface="+mn-lt"/>
-                    <a:ea typeface="+mn-ea"/>
-                    <a:cs typeface="+mn-cs"/>
-                  </a:defRPr>
-                </a:lvl3pPr>
-                <a:lvl4pPr marL="1371600" algn="l" defTabSz="914400" rtl="0" eaLnBrk="1" latinLnBrk="0" hangingPunct="1">
-                  <a:defRPr sz="1800" kern="1200">
-                    <a:solidFill>
-                      <a:schemeClr val="lt1"/>
-                    </a:solidFill>
-                    <a:latin typeface="+mn-lt"/>
-                    <a:ea typeface="+mn-ea"/>
-                    <a:cs typeface="+mn-cs"/>
-                  </a:defRPr>
-                </a:lvl4pPr>
-                <a:lvl5pPr marL="1828800" algn="l" defTabSz="914400" rtl="0" eaLnBrk="1" latinLnBrk="0" hangingPunct="1">
-                  <a:defRPr sz="1800" kern="1200">
-                    <a:solidFill>
-                      <a:schemeClr val="lt1"/>
-                    </a:solidFill>
-                    <a:latin typeface="+mn-lt"/>
-                    <a:ea typeface="+mn-ea"/>
-                    <a:cs typeface="+mn-cs"/>
-                  </a:defRPr>
-                </a:lvl5pPr>
-                <a:lvl6pPr marL="2286000" algn="l" defTabSz="914400" rtl="0" eaLnBrk="1" latinLnBrk="0" hangingPunct="1">
-                  <a:defRPr sz="1800" kern="1200">
-                    <a:solidFill>
-                      <a:schemeClr val="lt1"/>
-                    </a:solidFill>
-                    <a:latin typeface="+mn-lt"/>
-                    <a:ea typeface="+mn-ea"/>
-                    <a:cs typeface="+mn-cs"/>
-                  </a:defRPr>
-                </a:lvl6pPr>
-                <a:lvl7pPr marL="2743200" algn="l" defTabSz="914400" rtl="0" eaLnBrk="1" latinLnBrk="0" hangingPunct="1">
-                  <a:defRPr sz="1800" kern="1200">
-                    <a:solidFill>
-                      <a:schemeClr val="lt1"/>
-                    </a:solidFill>
-                    <a:latin typeface="+mn-lt"/>
-                    <a:ea typeface="+mn-ea"/>
-                    <a:cs typeface="+mn-cs"/>
-                  </a:defRPr>
-                </a:lvl7pPr>
-                <a:lvl8pPr marL="3200400" algn="l" defTabSz="914400" rtl="0" eaLnBrk="1" latinLnBrk="0" hangingPunct="1">
-                  <a:defRPr sz="1800" kern="1200">
-                    <a:solidFill>
-                      <a:schemeClr val="lt1"/>
-                    </a:solidFill>
-                    <a:latin typeface="+mn-lt"/>
-                    <a:ea typeface="+mn-ea"/>
-                    <a:cs typeface="+mn-cs"/>
-                  </a:defRPr>
-                </a:lvl8pPr>
-                <a:lvl9pPr marL="3657600" algn="l" defTabSz="914400" rtl="0" eaLnBrk="1" latinLnBrk="0" hangingPunct="1">
-                  <a:defRPr sz="1800" kern="1200">
-                    <a:solidFill>
-                      <a:schemeClr val="lt1"/>
-                    </a:solidFill>
-                    <a:latin typeface="+mn-lt"/>
-                    <a:ea typeface="+mn-ea"/>
-                    <a:cs typeface="+mn-cs"/>
-                  </a:defRPr>
-                </a:lvl9pPr>
-              </a:lstStyle>
-              <a:p>
-                <a:pPr algn="ctr"/>
-                <a:endParaRPr lang="zh-CN" altLang="en-US"/>
-              </a:p>
-            </p:txBody>
-          </p:sp>
-          <p:sp>
-            <p:nvSpPr>
-              <p:cNvPr id="18" name="梯形 17"/>
-              <p:cNvSpPr/>
-              <p:nvPr>
-                <p:custDataLst>
-                  <p:tags r:id="rId3"/>
-                </p:custDataLst>
-              </p:nvPr>
-            </p:nvSpPr>
-            <p:spPr>
-              <a:xfrm rot="5400000">
-                <a:off x="13749" y="4156"/>
-                <a:ext cx="964" cy="170"/>
-              </a:xfrm>
-              <a:prstGeom prst="trapezoid">
-                <a:avLst>
-                  <a:gd name="adj" fmla="val 104500"/>
-                </a:avLst>
-              </a:prstGeom>
-              <a:grpFill/>
-              <a:ln>
-                <a:noFill/>
-              </a:ln>
-            </p:spPr>
-            <p:style>
-              <a:lnRef idx="2">
-                <a:schemeClr val="accent1">
-                  <a:shade val="50000"/>
-                </a:schemeClr>
-              </a:lnRef>
-              <a:fillRef idx="1">
-                <a:schemeClr val="accent1"/>
-              </a:fillRef>
-              <a:effectRef idx="0">
-                <a:schemeClr val="accent1"/>
-              </a:effectRef>
-              <a:fontRef idx="minor">
-                <a:schemeClr val="lt1"/>
-              </a:fontRef>
-            </p:style>
-            <p:txBody>
-              <a:bodyPr rtlCol="0" anchor="ctr"/>
-              <a:lstStyle/>
-              <a:p>
-                <a:pPr algn="ctr"/>
-                <a:endParaRPr lang="zh-CN" altLang="en-US"/>
-              </a:p>
-            </p:txBody>
-          </p:sp>
-          <p:sp>
-            <p:nvSpPr>
-              <p:cNvPr id="19" name="梯形 18"/>
-              <p:cNvSpPr/>
-              <p:nvPr>
-                <p:custDataLst>
-                  <p:tags r:id="rId4"/>
-                </p:custDataLst>
-              </p:nvPr>
-            </p:nvSpPr>
-            <p:spPr>
-              <a:xfrm>
-                <a:off x="6194" y="7431"/>
-                <a:ext cx="964" cy="170"/>
-              </a:xfrm>
-              <a:prstGeom prst="trapezoid">
-                <a:avLst>
-                  <a:gd name="adj" fmla="val 104500"/>
-                </a:avLst>
-              </a:prstGeom>
-              <a:grpFill/>
-              <a:ln>
-                <a:noFill/>
-              </a:ln>
-            </p:spPr>
-            <p:style>
-              <a:lnRef idx="2">
-                <a:schemeClr val="accent1">
-                  <a:shade val="50000"/>
-                </a:schemeClr>
-              </a:lnRef>
-              <a:fillRef idx="1">
-                <a:schemeClr val="accent1"/>
-              </a:fillRef>
-              <a:effectRef idx="0">
-                <a:schemeClr val="accent1"/>
-              </a:effectRef>
-              <a:fontRef idx="minor">
-                <a:schemeClr val="lt1"/>
-              </a:fontRef>
-            </p:style>
-            <p:txBody>
-              <a:bodyPr rtlCol="0" anchor="ctr"/>
-              <a:lstStyle/>
-              <a:p>
-                <a:pPr algn="ctr"/>
-                <a:endParaRPr lang="zh-CN" altLang="en-US"/>
-              </a:p>
-            </p:txBody>
-          </p:sp>
-        </p:grpSp>
         <p:sp>
           <p:nvSpPr>
-            <p:cNvPr id="14" name="文本框 13"/>
-            <p:cNvSpPr txBox="1"/>
+            <p:cNvPr id="16" name="任意多边形 15"/>
+            <p:cNvSpPr/>
             <p:nvPr>
               <p:custDataLst>
-                <p:tags r:id="rId5"/>
+                <p:tags r:id="rId1"/>
+              </p:custDataLst>
+            </p:nvPr>
+          </p:nvSpPr>
+          <p:spPr>
+            <a:xfrm rot="10800000">
+              <a:off x="11403" y="7498"/>
+              <a:ext cx="1928" cy="150"/>
+            </a:xfrm>
+            <a:custGeom>
+              <a:avLst/>
+              <a:gdLst>
+                <a:gd name="adj" fmla="val 104500"/>
+                <a:gd name="maxAdj" fmla="*/ 50000 w ss"/>
+                <a:gd name="a" fmla="pin 0 adj maxAdj"/>
+                <a:gd name="x1" fmla="*/ ss a 200000"/>
+                <a:gd name="x2" fmla="*/ ss a 100000"/>
+                <a:gd name="x3" fmla="+- r 0 x2"/>
+                <a:gd name="x4" fmla="+- r 0 x1"/>
+                <a:gd name="il" fmla="*/ wd3 a maxAdj"/>
+                <a:gd name="it" fmla="*/ hd3 a maxAdj"/>
+                <a:gd name="ir" fmla="+- r 0 il"/>
+              </a:gdLst>
+              <a:ahLst/>
+              <a:cxnLst>
+                <a:cxn ang="3">
+                  <a:pos x="hc" y="t"/>
+                </a:cxn>
+                <a:cxn ang="cd2">
+                  <a:pos x="x1" y="vc"/>
+                </a:cxn>
+                <a:cxn ang="cd4">
+                  <a:pos x="hc" y="b"/>
+                </a:cxn>
+                <a:cxn ang="0">
+                  <a:pos x="x4" y="vc"/>
+                </a:cxn>
+              </a:cxnLst>
+              <a:rect l="l" t="t" r="r" b="b"/>
+              <a:pathLst>
+                <a:path w="1950" h="150">
+                  <a:moveTo>
+                    <a:pt x="157" y="0"/>
+                  </a:moveTo>
+                  <a:lnTo>
+                    <a:pt x="1793" y="0"/>
+                  </a:lnTo>
+                  <a:lnTo>
+                    <a:pt x="1950" y="150"/>
+                  </a:lnTo>
+                  <a:lnTo>
+                    <a:pt x="0" y="150"/>
+                  </a:lnTo>
+                  <a:lnTo>
+                    <a:pt x="157" y="0"/>
+                  </a:lnTo>
+                  <a:close/>
+                </a:path>
+              </a:pathLst>
+            </a:custGeom>
+            <a:grpFill/>
+            <a:ln>
+              <a:noFill/>
+            </a:ln>
+          </p:spPr>
+          <p:style>
+            <a:lnRef idx="2">
+              <a:schemeClr val="accent1">
+                <a:shade val="50000"/>
+              </a:schemeClr>
+            </a:lnRef>
+            <a:fillRef idx="1">
+              <a:schemeClr val="accent1"/>
+            </a:fillRef>
+            <a:effectRef idx="0">
+              <a:schemeClr val="accent1"/>
+            </a:effectRef>
+            <a:fontRef idx="minor">
+              <a:schemeClr val="lt1"/>
+            </a:fontRef>
+          </p:style>
+          <p:txBody>
+            <a:bodyPr wrap="square" rtlCol="0" anchor="ctr">
+              <a:noAutofit/>
+            </a:bodyPr>
+            <a:lstStyle/>
+            <a:p>
+              <a:pPr algn="ctr"/>
+              <a:endParaRPr lang="zh-CN" altLang="en-US"/>
+            </a:p>
+          </p:txBody>
+        </p:sp>
+        <p:sp>
+          <p:nvSpPr>
+            <p:cNvPr id="17" name="任意多边形 16"/>
+            <p:cNvSpPr/>
+            <p:nvPr>
+              <p:custDataLst>
+                <p:tags r:id="rId2"/>
+              </p:custDataLst>
+            </p:nvPr>
+          </p:nvSpPr>
+          <p:spPr>
+            <a:xfrm rot="5400000">
+              <a:off x="6739" y="236"/>
+              <a:ext cx="5731" cy="9112"/>
+            </a:xfrm>
+            <a:custGeom>
+              <a:avLst/>
+              <a:gdLst>
+                <a:gd name="adj" fmla="val 104500"/>
+                <a:gd name="maxAdj" fmla="*/ 50000 w ss"/>
+                <a:gd name="a" fmla="pin 0 adj maxAdj"/>
+                <a:gd name="x1" fmla="*/ ss a 200000"/>
+                <a:gd name="x2" fmla="*/ ss a 100000"/>
+                <a:gd name="x3" fmla="+- r 0 x2"/>
+                <a:gd name="x4" fmla="+- r 0 x1"/>
+                <a:gd name="il" fmla="*/ wd3 a maxAdj"/>
+                <a:gd name="it" fmla="*/ hd3 a maxAdj"/>
+                <a:gd name="ir" fmla="+- r 0 il"/>
+              </a:gdLst>
+              <a:ahLst/>
+              <a:cxnLst>
+                <a:cxn ang="3">
+                  <a:pos x="hc" y="t"/>
+                </a:cxn>
+                <a:cxn ang="cd2">
+                  <a:pos x="x1" y="vc"/>
+                </a:cxn>
+                <a:cxn ang="cd4">
+                  <a:pos x="hc" y="b"/>
+                </a:cxn>
+                <a:cxn ang="0">
+                  <a:pos x="x4" y="vc"/>
+                </a:cxn>
+              </a:cxnLst>
+              <a:rect l="l" t="t" r="r" b="b"/>
+              <a:pathLst>
+                <a:path w="4540" h="9270">
+                  <a:moveTo>
+                    <a:pt x="392" y="125"/>
+                  </a:moveTo>
+                  <a:lnTo>
+                    <a:pt x="400" y="7061"/>
+                  </a:lnTo>
+                  <a:lnTo>
+                    <a:pt x="152" y="7361"/>
+                  </a:lnTo>
+                  <a:lnTo>
+                    <a:pt x="164" y="9131"/>
+                  </a:lnTo>
+                  <a:lnTo>
+                    <a:pt x="4383" y="9145"/>
+                  </a:lnTo>
+                  <a:lnTo>
+                    <a:pt x="4383" y="125"/>
+                  </a:lnTo>
+                  <a:lnTo>
+                    <a:pt x="392" y="125"/>
+                  </a:lnTo>
+                  <a:close/>
+                  <a:moveTo>
+                    <a:pt x="252" y="0"/>
+                  </a:moveTo>
+                  <a:lnTo>
+                    <a:pt x="4540" y="0"/>
+                  </a:lnTo>
+                  <a:lnTo>
+                    <a:pt x="4540" y="830"/>
+                  </a:lnTo>
+                  <a:lnTo>
+                    <a:pt x="4390" y="987"/>
+                  </a:lnTo>
+                  <a:lnTo>
+                    <a:pt x="4390" y="2623"/>
+                  </a:lnTo>
+                  <a:lnTo>
+                    <a:pt x="4540" y="2780"/>
+                  </a:lnTo>
+                  <a:lnTo>
+                    <a:pt x="4540" y="9270"/>
+                  </a:lnTo>
+                  <a:lnTo>
+                    <a:pt x="4342" y="9269"/>
+                  </a:lnTo>
+                  <a:lnTo>
+                    <a:pt x="4238" y="9170"/>
+                  </a:lnTo>
+                  <a:lnTo>
+                    <a:pt x="3418" y="9170"/>
+                  </a:lnTo>
+                  <a:lnTo>
+                    <a:pt x="3317" y="9266"/>
+                  </a:lnTo>
+                  <a:lnTo>
+                    <a:pt x="8" y="9256"/>
+                  </a:lnTo>
+                  <a:lnTo>
+                    <a:pt x="0" y="7269"/>
+                  </a:lnTo>
+                  <a:lnTo>
+                    <a:pt x="254" y="7041"/>
+                  </a:lnTo>
+                  <a:lnTo>
+                    <a:pt x="252" y="0"/>
+                  </a:lnTo>
+                  <a:close/>
+                </a:path>
+              </a:pathLst>
+            </a:custGeom>
+            <a:grpFill/>
+            <a:ln>
+              <a:noFill/>
+            </a:ln>
+          </p:spPr>
+          <p:style>
+            <a:lnRef idx="2">
+              <a:schemeClr val="accent1">
+                <a:shade val="50000"/>
+              </a:schemeClr>
+            </a:lnRef>
+            <a:fillRef idx="1">
+              <a:schemeClr val="accent1"/>
+            </a:fillRef>
+            <a:effectRef idx="0">
+              <a:schemeClr val="accent1"/>
+            </a:effectRef>
+            <a:fontRef idx="minor">
+              <a:schemeClr val="lt1"/>
+            </a:fontRef>
+          </p:style>
+          <p:txBody>
+            <a:bodyPr wrap="square" rtlCol="0" anchor="ctr">
+              <a:noAutofit/>
+            </a:bodyPr>
+            <a:lstStyle>
+              <a:defPPr>
+                <a:defRPr lang="zh-CN">
+                  <a:solidFill>
+                    <a:schemeClr val="lt1"/>
+                  </a:solidFill>
+                </a:defRPr>
+              </a:defPPr>
+              <a:lvl1pPr marL="0" algn="l" defTabSz="914400" rtl="0" eaLnBrk="1" latinLnBrk="0" hangingPunct="1">
+                <a:defRPr sz="1800" kern="1200">
+                  <a:solidFill>
+                    <a:schemeClr val="lt1"/>
+                  </a:solidFill>
+                  <a:latin typeface="+mn-lt"/>
+                  <a:ea typeface="+mn-ea"/>
+                  <a:cs typeface="+mn-cs"/>
+                </a:defRPr>
+              </a:lvl1pPr>
+              <a:lvl2pPr marL="457200" algn="l" defTabSz="914400" rtl="0" eaLnBrk="1" latinLnBrk="0" hangingPunct="1">
+                <a:defRPr sz="1800" kern="1200">
+                  <a:solidFill>
+                    <a:schemeClr val="lt1"/>
+                  </a:solidFill>
+                  <a:latin typeface="+mn-lt"/>
+                  <a:ea typeface="+mn-ea"/>
+                  <a:cs typeface="+mn-cs"/>
+                </a:defRPr>
+              </a:lvl2pPr>
+              <a:lvl3pPr marL="914400" algn="l" defTabSz="914400" rtl="0" eaLnBrk="1" latinLnBrk="0" hangingPunct="1">
+                <a:defRPr sz="1800" kern="1200">
+                  <a:solidFill>
+                    <a:schemeClr val="lt1"/>
+                  </a:solidFill>
+                  <a:latin typeface="+mn-lt"/>
+                  <a:ea typeface="+mn-ea"/>
+                  <a:cs typeface="+mn-cs"/>
+                </a:defRPr>
+              </a:lvl3pPr>
+              <a:lvl4pPr marL="1371600" algn="l" defTabSz="914400" rtl="0" eaLnBrk="1" latinLnBrk="0" hangingPunct="1">
+                <a:defRPr sz="1800" kern="1200">
+                  <a:solidFill>
+                    <a:schemeClr val="lt1"/>
+                  </a:solidFill>
+                  <a:latin typeface="+mn-lt"/>
+                  <a:ea typeface="+mn-ea"/>
+                  <a:cs typeface="+mn-cs"/>
+                </a:defRPr>
+              </a:lvl4pPr>
+              <a:lvl5pPr marL="1828800" algn="l" defTabSz="914400" rtl="0" eaLnBrk="1" latinLnBrk="0" hangingPunct="1">
+                <a:defRPr sz="1800" kern="1200">
+                  <a:solidFill>
+                    <a:schemeClr val="lt1"/>
+                  </a:solidFill>
+                  <a:latin typeface="+mn-lt"/>
+                  <a:ea typeface="+mn-ea"/>
+                  <a:cs typeface="+mn-cs"/>
+                </a:defRPr>
+              </a:lvl5pPr>
+              <a:lvl6pPr marL="2286000" algn="l" defTabSz="914400" rtl="0" eaLnBrk="1" latinLnBrk="0" hangingPunct="1">
+                <a:defRPr sz="1800" kern="1200">
+                  <a:solidFill>
+                    <a:schemeClr val="lt1"/>
+                  </a:solidFill>
+                  <a:latin typeface="+mn-lt"/>
+                  <a:ea typeface="+mn-ea"/>
+                  <a:cs typeface="+mn-cs"/>
+                </a:defRPr>
+              </a:lvl6pPr>
+              <a:lvl7pPr marL="2743200" algn="l" defTabSz="914400" rtl="0" eaLnBrk="1" latinLnBrk="0" hangingPunct="1">
+                <a:defRPr sz="1800" kern="1200">
+                  <a:solidFill>
+                    <a:schemeClr val="lt1"/>
+                  </a:solidFill>
+                  <a:latin typeface="+mn-lt"/>
+                  <a:ea typeface="+mn-ea"/>
+                  <a:cs typeface="+mn-cs"/>
+                </a:defRPr>
+              </a:lvl7pPr>
+              <a:lvl8pPr marL="3200400" algn="l" defTabSz="914400" rtl="0" eaLnBrk="1" latinLnBrk="0" hangingPunct="1">
+                <a:defRPr sz="1800" kern="1200">
+                  <a:solidFill>
+                    <a:schemeClr val="lt1"/>
+                  </a:solidFill>
+                  <a:latin typeface="+mn-lt"/>
+                  <a:ea typeface="+mn-ea"/>
+                  <a:cs typeface="+mn-cs"/>
+                </a:defRPr>
+              </a:lvl8pPr>
+              <a:lvl9pPr marL="3657600" algn="l" defTabSz="914400" rtl="0" eaLnBrk="1" latinLnBrk="0" hangingPunct="1">
+                <a:defRPr sz="1800" kern="1200">
+                  <a:solidFill>
+                    <a:schemeClr val="lt1"/>
+                  </a:solidFill>
+                  <a:latin typeface="+mn-lt"/>
+                  <a:ea typeface="+mn-ea"/>
+                  <a:cs typeface="+mn-cs"/>
+                </a:defRPr>
+              </a:lvl9pPr>
+            </a:lstStyle>
+            <a:p>
+              <a:pPr algn="ctr"/>
+              <a:endParaRPr lang="zh-CN" altLang="en-US"/>
+            </a:p>
+          </p:txBody>
+        </p:sp>
+        <p:sp>
+          <p:nvSpPr>
+            <p:cNvPr id="18" name="梯形 17"/>
+            <p:cNvSpPr/>
+            <p:nvPr>
+              <p:custDataLst>
+                <p:tags r:id="rId3"/>
+              </p:custDataLst>
+            </p:nvPr>
+          </p:nvSpPr>
+          <p:spPr>
+            <a:xfrm rot="5400000">
+              <a:off x="13749" y="4156"/>
+              <a:ext cx="964" cy="170"/>
+            </a:xfrm>
+            <a:prstGeom prst="trapezoid">
+              <a:avLst>
+                <a:gd name="adj" fmla="val 104500"/>
+              </a:avLst>
+            </a:prstGeom>
+            <a:grpFill/>
+            <a:ln>
+              <a:noFill/>
+            </a:ln>
+          </p:spPr>
+          <p:style>
+            <a:lnRef idx="2">
+              <a:schemeClr val="accent1">
+                <a:shade val="50000"/>
+              </a:schemeClr>
+            </a:lnRef>
+            <a:fillRef idx="1">
+              <a:schemeClr val="accent1"/>
+            </a:fillRef>
+            <a:effectRef idx="0">
+              <a:schemeClr val="accent1"/>
+            </a:effectRef>
+            <a:fontRef idx="minor">
+              <a:schemeClr val="lt1"/>
+            </a:fontRef>
+          </p:style>
+          <p:txBody>
+            <a:bodyPr rtlCol="0" anchor="ctr"/>
+            <a:lstStyle/>
+            <a:p>
+              <a:pPr algn="ctr"/>
+              <a:endParaRPr lang="zh-CN" altLang="en-US"/>
+            </a:p>
+          </p:txBody>
+        </p:sp>
+        <p:sp>
+          <p:nvSpPr>
+            <p:cNvPr id="19" name="梯形 18"/>
+            <p:cNvSpPr/>
+            <p:nvPr>
+              <p:custDataLst>
+                <p:tags r:id="rId4"/>
               </p:custDataLst>
             </p:nvPr>
           </p:nvSpPr>
           <p:spPr>
             <a:xfrm>
-              <a:off x="5292" y="2483"/>
-              <a:ext cx="8832" cy="4961"/>
+              <a:off x="6194" y="7431"/>
+              <a:ext cx="964" cy="170"/>
             </a:xfrm>
-            <a:prstGeom prst="rect">
-              <a:avLst/>
+            <a:prstGeom prst="trapezoid">
+              <a:avLst>
+                <a:gd name="adj" fmla="val 104500"/>
+              </a:avLst>
             </a:prstGeom>
-            <a:noFill/>
+            <a:grpFill/>
+            <a:ln>
+              <a:noFill/>
+            </a:ln>
           </p:spPr>
+          <p:style>
+            <a:lnRef idx="2">
+              <a:schemeClr val="accent1">
+                <a:shade val="50000"/>
+              </a:schemeClr>
+            </a:lnRef>
+            <a:fillRef idx="1">
+              <a:schemeClr val="accent1"/>
+            </a:fillRef>
+            <a:effectRef idx="0">
+              <a:schemeClr val="accent1"/>
+            </a:effectRef>
+            <a:fontRef idx="minor">
+              <a:schemeClr val="lt1"/>
+            </a:fontRef>
+          </p:style>
           <p:txBody>
-            <a:bodyPr wrap="square" rtlCol="0" anchor="ctr" anchorCtr="0">
-              <a:noAutofit/>
-            </a:bodyPr>
+            <a:bodyPr rtlCol="0" anchor="ctr"/>
             <a:lstStyle/>
             <a:p>
-              <a:pPr indent="457200" fontAlgn="auto">
-                <a:lnSpc>
-                  <a:spcPct val="100000"/>
-                </a:lnSpc>
-              </a:pPr>
-              <a:r>
-                <a:rPr lang="en-US" dirty="0">
-                  <a:latin typeface="微软雅黑" panose="020B0503020204020204" pitchFamily="34" charset="-122"/>
-                  <a:ea typeface="微软雅黑" panose="020B0503020204020204" pitchFamily="34" charset="-122"/>
-                  <a:cs typeface="微软雅黑" panose="020B0503020204020204" pitchFamily="34" charset="-122"/>
-                </a:rPr>
-                <a:t>{{text:</a:t>
-              </a:r>
-              <a:r>
-                <a:rPr lang="en-US" altLang="zh-CN" dirty="0">
-                  <a:latin typeface="微软雅黑" panose="020B0503020204020204" pitchFamily="34" charset="-122"/>
-                  <a:ea typeface="微软雅黑" panose="020B0503020204020204" pitchFamily="34" charset="-122"/>
-                  <a:cs typeface="微软雅黑" panose="020B0503020204020204" pitchFamily="34" charset="-122"/>
-                </a:rPr>
-                <a:t>content</a:t>
-              </a:r>
-              <a:r>
-                <a:rPr lang="en-US" dirty="0">
-                  <a:latin typeface="微软雅黑" panose="020B0503020204020204" pitchFamily="34" charset="-122"/>
-                  <a:ea typeface="微软雅黑" panose="020B0503020204020204" pitchFamily="34" charset="-122"/>
-                  <a:cs typeface="微软雅黑" panose="020B0503020204020204" pitchFamily="34" charset="-122"/>
-                </a:rPr>
-                <a:t>}}</a:t>
-              </a:r>
-              <a:endParaRPr lang="en-US" dirty="0">
-                <a:latin typeface="微软雅黑" panose="020B0503020204020204" pitchFamily="34" charset="-122"/>
-                <a:ea typeface="微软雅黑" panose="020B0503020204020204" pitchFamily="34" charset="-122"/>
-                <a:cs typeface="微软雅黑" panose="020B0503020204020204" pitchFamily="34" charset="-122"/>
-              </a:endParaRPr>
+              <a:pPr algn="ctr"/>
+              <a:endParaRPr lang="zh-CN" altLang="en-US"/>
             </a:p>
           </p:txBody>
         </p:sp>
@@ -11258,7 +11007,7 @@
               <a:defRPr/>
             </a:pPr>
             <a:r>
-              <a:rPr lang="en-US" altLang="zh-CN" b="1" dirty="0">
+              <a:rPr lang="zh-CN" altLang="en-US" b="1" dirty="0">
                 <a:solidFill>
                   <a:schemeClr val="accent1">
                     <a:lumMod val="75000"/>
@@ -11269,7 +11018,7 @@
                 <a:cs typeface="微软雅黑" panose="020B0503020204020204" pitchFamily="34" charset="-122"/>
                 <a:sym typeface="+mn-lt"/>
               </a:rPr>
-              <a:t>{{text</a:t>
+              <a:t>知识</a:t>
             </a:r>
             <a:r>
               <a:rPr lang="zh-CN" altLang="en-US" b="1" dirty="0">
@@ -11283,23 +11032,9 @@
                 <a:cs typeface="微软雅黑" panose="020B0503020204020204" pitchFamily="34" charset="-122"/>
                 <a:sym typeface="+mn-lt"/>
               </a:rPr>
-              <a:t>：</a:t>
+              <a:t>储备</a:t>
             </a:r>
-            <a:r>
-              <a:rPr lang="en-US" altLang="zh-CN" b="1" dirty="0">
-                <a:solidFill>
-                  <a:schemeClr val="accent1">
-                    <a:lumMod val="75000"/>
-                  </a:schemeClr>
-                </a:solidFill>
-                <a:latin typeface="微软雅黑" panose="020B0503020204020204" pitchFamily="34" charset="-122"/>
-                <a:ea typeface="微软雅黑" panose="020B0503020204020204" pitchFamily="34" charset="-122"/>
-                <a:cs typeface="微软雅黑" panose="020B0503020204020204" pitchFamily="34" charset="-122"/>
-                <a:sym typeface="+mn-lt"/>
-              </a:rPr>
-              <a:t>replace}}</a:t>
-            </a:r>
-            <a:endParaRPr lang="en-US" altLang="zh-CN" b="1" dirty="0">
+            <a:endParaRPr lang="zh-CN" altLang="en-US" b="1" dirty="0">
               <a:solidFill>
                 <a:schemeClr val="accent1">
                   <a:lumMod val="75000"/>
@@ -11309,6 +11044,68 @@
               <a:ea typeface="微软雅黑" panose="020B0503020204020204" pitchFamily="34" charset="-122"/>
               <a:cs typeface="微软雅黑" panose="020B0503020204020204" pitchFamily="34" charset="-122"/>
               <a:sym typeface="+mn-lt"/>
+            </a:endParaRPr>
+          </a:p>
+        </p:txBody>
+      </p:sp>
+      <p:sp>
+        <p:nvSpPr>
+          <p:cNvPr id="24" name="文本框 23"/>
+          <p:cNvSpPr txBox="1"/>
+          <p:nvPr/>
+        </p:nvSpPr>
+        <p:spPr>
+          <a:xfrm>
+            <a:off x="4311650" y="2206625"/>
+            <a:ext cx="7312025" cy="4109085"/>
+          </a:xfrm>
+          <a:prstGeom prst="rect">
+            <a:avLst/>
+          </a:prstGeom>
+          <a:noFill/>
+        </p:spPr>
+        <p:txBody>
+          <a:bodyPr wrap="square" rtlCol="0">
+            <a:noAutofit/>
+          </a:bodyPr>
+          <a:lstStyle/>
+          <a:p>
+            <a:pPr indent="457200" fontAlgn="auto">
+              <a:lnSpc>
+                <a:spcPct val="150000"/>
+              </a:lnSpc>
+            </a:pPr>
+            <a:r>
+              <a:rPr lang="en-US" dirty="0">
+                <a:latin typeface="微软雅黑" panose="020B0503020204020204" pitchFamily="34" charset="-122"/>
+                <a:ea typeface="微软雅黑" panose="020B0503020204020204" pitchFamily="34" charset="-122"/>
+                <a:cs typeface="微软雅黑" panose="020B0503020204020204" pitchFamily="34" charset="-122"/>
+                <a:sym typeface="+mn-ea"/>
+              </a:rPr>
+              <a:t>{{text:</a:t>
+            </a:r>
+            <a:r>
+              <a:rPr lang="en-US" altLang="zh-CN" dirty="0">
+                <a:latin typeface="微软雅黑" panose="020B0503020204020204" pitchFamily="34" charset="-122"/>
+                <a:ea typeface="微软雅黑" panose="020B0503020204020204" pitchFamily="34" charset="-122"/>
+                <a:cs typeface="微软雅黑" panose="020B0503020204020204" pitchFamily="34" charset="-122"/>
+                <a:sym typeface="+mn-ea"/>
+              </a:rPr>
+              <a:t>content</a:t>
+            </a:r>
+            <a:r>
+              <a:rPr lang="en-US" dirty="0">
+                <a:latin typeface="微软雅黑" panose="020B0503020204020204" pitchFamily="34" charset="-122"/>
+                <a:ea typeface="微软雅黑" panose="020B0503020204020204" pitchFamily="34" charset="-122"/>
+                <a:cs typeface="微软雅黑" panose="020B0503020204020204" pitchFamily="34" charset="-122"/>
+                <a:sym typeface="+mn-ea"/>
+              </a:rPr>
+              <a:t>}}</a:t>
+            </a:r>
+            <a:endParaRPr lang="en-US" dirty="0">
+              <a:latin typeface="微软雅黑" panose="020B0503020204020204" pitchFamily="34" charset="-122"/>
+              <a:ea typeface="微软雅黑" panose="020B0503020204020204" pitchFamily="34" charset="-122"/>
+              <a:cs typeface="微软雅黑" panose="020B0503020204020204" pitchFamily="34" charset="-122"/>
             </a:endParaRPr>
           </a:p>
         </p:txBody>
@@ -11340,842 +11137,761 @@
       </p:grpSpPr>
       <p:grpSp>
         <p:nvGrpSpPr>
-          <p:cNvPr id="10" name="组合 9" descr="7b0a202020202274657874626f78223a20227b5c2263617465676f72795f69645c223a31303732362c5c2269645c223a32303334323632387d220a7d0a"/>
+          <p:cNvPr id="11" name="组合 10"/>
           <p:cNvGrpSpPr/>
           <p:nvPr/>
         </p:nvGrpSpPr>
         <p:grpSpPr>
-          <a:xfrm>
-            <a:off x="326635" y="1431180"/>
+          <a:xfrm rot="0">
+            <a:off x="326390" y="1431290"/>
             <a:ext cx="7423785" cy="4859020"/>
-            <a:chOff x="6045" y="3315"/>
-            <a:chExt cx="6859" cy="3966"/>
+            <a:chOff x="3838575" y="2105025"/>
+            <a:chExt cx="4355782" cy="2518409"/>
           </a:xfrm>
         </p:grpSpPr>
-        <p:grpSp>
-          <p:nvGrpSpPr>
-            <p:cNvPr id="11" name="组合 10"/>
-            <p:cNvGrpSpPr/>
-            <p:nvPr/>
-          </p:nvGrpSpPr>
-          <p:grpSpPr>
-            <a:xfrm>
-              <a:off x="6045" y="3315"/>
-              <a:ext cx="6859" cy="3966"/>
-              <a:chOff x="3838575" y="2105025"/>
-              <a:chExt cx="4355782" cy="2518409"/>
-            </a:xfrm>
-          </p:grpSpPr>
-          <p:sp>
-            <p:nvSpPr>
-              <p:cNvPr id="13" name="图形 5"/>
-              <p:cNvSpPr/>
-              <p:nvPr>
-                <p:custDataLst>
-                  <p:tags r:id="rId1"/>
-                </p:custDataLst>
-              </p:nvPr>
-            </p:nvSpPr>
-            <p:spPr>
-              <a:xfrm>
-                <a:off x="3838575" y="2439352"/>
-                <a:ext cx="4278630" cy="2184082"/>
-              </a:xfrm>
-              <a:custGeom>
-                <a:avLst/>
-                <a:gdLst>
-                  <a:gd name="connsiteX0" fmla="*/ 0 w 4278630"/>
-                  <a:gd name="connsiteY0" fmla="*/ 0 h 2184082"/>
-                  <a:gd name="connsiteX1" fmla="*/ 4278630 w 4278630"/>
-                  <a:gd name="connsiteY1" fmla="*/ 0 h 2184082"/>
-                  <a:gd name="connsiteX2" fmla="*/ 4278630 w 4278630"/>
-                  <a:gd name="connsiteY2" fmla="*/ 2184083 h 2184082"/>
-                  <a:gd name="connsiteX3" fmla="*/ 0 w 4278630"/>
-                  <a:gd name="connsiteY3" fmla="*/ 2184083 h 2184082"/>
-                </a:gdLst>
-                <a:ahLst/>
-                <a:cxnLst>
-                  <a:cxn ang="0">
-                    <a:pos x="connsiteX0" y="connsiteY0"/>
-                  </a:cxn>
-                  <a:cxn ang="0">
-                    <a:pos x="connsiteX1" y="connsiteY1"/>
-                  </a:cxn>
-                  <a:cxn ang="0">
-                    <a:pos x="connsiteX2" y="connsiteY2"/>
-                  </a:cxn>
-                  <a:cxn ang="0">
-                    <a:pos x="connsiteX3" y="connsiteY3"/>
-                  </a:cxn>
-                </a:cxnLst>
-                <a:rect l="l" t="t" r="r" b="b"/>
-                <a:pathLst>
-                  <a:path w="4278630" h="2184082">
-                    <a:moveTo>
-                      <a:pt x="0" y="0"/>
-                    </a:moveTo>
-                    <a:lnTo>
-                      <a:pt x="4278630" y="0"/>
-                    </a:lnTo>
-                    <a:lnTo>
-                      <a:pt x="4278630" y="2184083"/>
-                    </a:lnTo>
-                    <a:lnTo>
-                      <a:pt x="0" y="2184083"/>
-                    </a:lnTo>
-                    <a:close/>
-                  </a:path>
-                </a:pathLst>
-              </a:custGeom>
-              <a:solidFill>
-                <a:srgbClr val="E8E8E8"/>
-              </a:solidFill>
-              <a:ln w="9525" cap="flat">
-                <a:noFill/>
-                <a:prstDash val="solid"/>
-                <a:miter/>
-              </a:ln>
-            </p:spPr>
-            <p:txBody>
-              <a:bodyPr rtlCol="0" anchor="ctr"/>
-              <a:lstStyle/>
-              <a:p>
-                <a:endParaRPr lang="zh-CN" altLang="en-US"/>
-              </a:p>
-            </p:txBody>
-          </p:sp>
-          <p:sp>
-            <p:nvSpPr>
-              <p:cNvPr id="14" name="图形 5"/>
-              <p:cNvSpPr/>
-              <p:nvPr>
-                <p:custDataLst>
-                  <p:tags r:id="rId2"/>
-                </p:custDataLst>
-              </p:nvPr>
-            </p:nvSpPr>
-            <p:spPr>
-              <a:xfrm>
-                <a:off x="7632382" y="2110740"/>
-                <a:ext cx="218122" cy="501967"/>
-              </a:xfrm>
-              <a:custGeom>
-                <a:avLst/>
-                <a:gdLst>
-                  <a:gd name="connsiteX0" fmla="*/ 184785 w 218122"/>
-                  <a:gd name="connsiteY0" fmla="*/ 501968 h 501967"/>
-                  <a:gd name="connsiteX1" fmla="*/ 0 w 218122"/>
-                  <a:gd name="connsiteY1" fmla="*/ 482918 h 501967"/>
-                  <a:gd name="connsiteX2" fmla="*/ 33338 w 218122"/>
-                  <a:gd name="connsiteY2" fmla="*/ 0 h 501967"/>
-                  <a:gd name="connsiteX3" fmla="*/ 218123 w 218122"/>
-                  <a:gd name="connsiteY3" fmla="*/ 18098 h 501967"/>
-                </a:gdLst>
-                <a:ahLst/>
-                <a:cxnLst>
-                  <a:cxn ang="0">
-                    <a:pos x="connsiteX0" y="connsiteY0"/>
-                  </a:cxn>
-                  <a:cxn ang="0">
-                    <a:pos x="connsiteX1" y="connsiteY1"/>
-                  </a:cxn>
-                  <a:cxn ang="0">
-                    <a:pos x="connsiteX2" y="connsiteY2"/>
-                  </a:cxn>
-                  <a:cxn ang="0">
-                    <a:pos x="connsiteX3" y="connsiteY3"/>
-                  </a:cxn>
-                </a:cxnLst>
-                <a:rect l="l" t="t" r="r" b="b"/>
-                <a:pathLst>
-                  <a:path w="218122" h="501967">
-                    <a:moveTo>
-                      <a:pt x="184785" y="501968"/>
-                    </a:moveTo>
-                    <a:lnTo>
-                      <a:pt x="0" y="482918"/>
-                    </a:lnTo>
-                    <a:lnTo>
-                      <a:pt x="33338" y="0"/>
-                    </a:lnTo>
-                    <a:lnTo>
-                      <a:pt x="218123" y="18098"/>
-                    </a:lnTo>
-                    <a:close/>
-                  </a:path>
-                </a:pathLst>
-              </a:custGeom>
-              <a:solidFill>
-                <a:srgbClr val="DEBF90"/>
-              </a:solidFill>
-              <a:ln w="9525" cap="flat">
-                <a:noFill/>
-                <a:prstDash val="solid"/>
-                <a:miter/>
-              </a:ln>
-            </p:spPr>
-            <p:txBody>
-              <a:bodyPr rtlCol="0" anchor="ctr"/>
-              <a:lstStyle/>
-              <a:p>
-                <a:endParaRPr lang="zh-CN" altLang="en-US"/>
-              </a:p>
-            </p:txBody>
-          </p:sp>
-          <p:sp>
-            <p:nvSpPr>
-              <p:cNvPr id="15" name="图形 5"/>
-              <p:cNvSpPr/>
-              <p:nvPr>
-                <p:custDataLst>
-                  <p:tags r:id="rId3"/>
-                </p:custDataLst>
-              </p:nvPr>
-            </p:nvSpPr>
-            <p:spPr>
-              <a:xfrm>
-                <a:off x="4259580" y="2110740"/>
-                <a:ext cx="217169" cy="501967"/>
-              </a:xfrm>
-              <a:custGeom>
-                <a:avLst/>
-                <a:gdLst>
-                  <a:gd name="connsiteX0" fmla="*/ 32385 w 217169"/>
-                  <a:gd name="connsiteY0" fmla="*/ 501968 h 501967"/>
-                  <a:gd name="connsiteX1" fmla="*/ 217170 w 217169"/>
-                  <a:gd name="connsiteY1" fmla="*/ 482918 h 501967"/>
-                  <a:gd name="connsiteX2" fmla="*/ 183833 w 217169"/>
-                  <a:gd name="connsiteY2" fmla="*/ 0 h 501967"/>
-                  <a:gd name="connsiteX3" fmla="*/ 0 w 217169"/>
-                  <a:gd name="connsiteY3" fmla="*/ 18098 h 501967"/>
-                </a:gdLst>
-                <a:ahLst/>
-                <a:cxnLst>
-                  <a:cxn ang="0">
-                    <a:pos x="connsiteX0" y="connsiteY0"/>
-                  </a:cxn>
-                  <a:cxn ang="0">
-                    <a:pos x="connsiteX1" y="connsiteY1"/>
-                  </a:cxn>
-                  <a:cxn ang="0">
-                    <a:pos x="connsiteX2" y="connsiteY2"/>
-                  </a:cxn>
-                  <a:cxn ang="0">
-                    <a:pos x="connsiteX3" y="connsiteY3"/>
-                  </a:cxn>
-                </a:cxnLst>
-                <a:rect l="l" t="t" r="r" b="b"/>
-                <a:pathLst>
-                  <a:path w="217169" h="501967">
-                    <a:moveTo>
-                      <a:pt x="32385" y="501968"/>
-                    </a:moveTo>
-                    <a:lnTo>
-                      <a:pt x="217170" y="482918"/>
-                    </a:lnTo>
-                    <a:lnTo>
-                      <a:pt x="183833" y="0"/>
-                    </a:lnTo>
-                    <a:lnTo>
-                      <a:pt x="0" y="18098"/>
-                    </a:lnTo>
-                    <a:close/>
-                  </a:path>
-                </a:pathLst>
-              </a:custGeom>
-              <a:solidFill>
-                <a:srgbClr val="DEBF90"/>
-              </a:solidFill>
-              <a:ln w="9525" cap="flat">
-                <a:noFill/>
-                <a:prstDash val="solid"/>
-                <a:miter/>
-              </a:ln>
-            </p:spPr>
-            <p:txBody>
-              <a:bodyPr rtlCol="0" anchor="ctr"/>
-              <a:lstStyle/>
-              <a:p>
-                <a:endParaRPr lang="zh-CN" altLang="en-US"/>
-              </a:p>
-            </p:txBody>
-          </p:sp>
-          <p:sp>
-            <p:nvSpPr>
-              <p:cNvPr id="16" name="图形 5"/>
-              <p:cNvSpPr/>
-              <p:nvPr>
-                <p:custDataLst>
-                  <p:tags r:id="rId4"/>
-                </p:custDataLst>
-              </p:nvPr>
-            </p:nvSpPr>
-            <p:spPr>
-              <a:xfrm>
-                <a:off x="3915727" y="2349817"/>
-                <a:ext cx="4278630" cy="2184082"/>
-              </a:xfrm>
-              <a:custGeom>
-                <a:avLst/>
-                <a:gdLst>
-                  <a:gd name="connsiteX0" fmla="*/ 0 w 4278630"/>
-                  <a:gd name="connsiteY0" fmla="*/ 0 h 2184082"/>
-                  <a:gd name="connsiteX1" fmla="*/ 4278630 w 4278630"/>
-                  <a:gd name="connsiteY1" fmla="*/ 0 h 2184082"/>
-                  <a:gd name="connsiteX2" fmla="*/ 4278630 w 4278630"/>
-                  <a:gd name="connsiteY2" fmla="*/ 2184083 h 2184082"/>
-                  <a:gd name="connsiteX3" fmla="*/ 0 w 4278630"/>
-                  <a:gd name="connsiteY3" fmla="*/ 2184083 h 2184082"/>
-                </a:gdLst>
-                <a:ahLst/>
-                <a:cxnLst>
-                  <a:cxn ang="0">
-                    <a:pos x="connsiteX0" y="connsiteY0"/>
-                  </a:cxn>
-                  <a:cxn ang="0">
-                    <a:pos x="connsiteX1" y="connsiteY1"/>
-                  </a:cxn>
-                  <a:cxn ang="0">
-                    <a:pos x="connsiteX2" y="connsiteY2"/>
-                  </a:cxn>
-                  <a:cxn ang="0">
-                    <a:pos x="connsiteX3" y="connsiteY3"/>
-                  </a:cxn>
-                </a:cxnLst>
-                <a:rect l="l" t="t" r="r" b="b"/>
-                <a:pathLst>
-                  <a:path w="4278630" h="2184082">
-                    <a:moveTo>
-                      <a:pt x="0" y="0"/>
-                    </a:moveTo>
-                    <a:lnTo>
-                      <a:pt x="4278630" y="0"/>
-                    </a:lnTo>
-                    <a:lnTo>
-                      <a:pt x="4278630" y="2184083"/>
-                    </a:lnTo>
-                    <a:lnTo>
-                      <a:pt x="0" y="2184083"/>
-                    </a:lnTo>
-                    <a:close/>
-                  </a:path>
-                </a:pathLst>
-              </a:custGeom>
-              <a:solidFill>
-                <a:srgbClr val="FFFFFF"/>
-              </a:solidFill>
-              <a:ln w="9525" cap="flat">
-                <a:solidFill>
-                  <a:srgbClr val="231815"/>
-                </a:solidFill>
-                <a:prstDash val="solid"/>
-                <a:miter/>
-              </a:ln>
-            </p:spPr>
-            <p:txBody>
-              <a:bodyPr rtlCol="0" anchor="ctr"/>
-              <a:lstStyle/>
-              <a:p>
-                <a:endParaRPr lang="zh-CN" altLang="en-US"/>
-              </a:p>
-            </p:txBody>
-          </p:sp>
-          <p:sp>
-            <p:nvSpPr>
-              <p:cNvPr id="17" name="图形 5"/>
-              <p:cNvSpPr/>
-              <p:nvPr>
-                <p:custDataLst>
-                  <p:tags r:id="rId5"/>
-                </p:custDataLst>
-              </p:nvPr>
-            </p:nvSpPr>
-            <p:spPr>
-              <a:xfrm>
-                <a:off x="7632382" y="2105025"/>
-                <a:ext cx="244792" cy="507682"/>
-              </a:xfrm>
-              <a:custGeom>
-                <a:avLst/>
-                <a:gdLst>
-                  <a:gd name="connsiteX0" fmla="*/ 184785 w 244792"/>
-                  <a:gd name="connsiteY0" fmla="*/ 507683 h 507682"/>
-                  <a:gd name="connsiteX1" fmla="*/ 0 w 244792"/>
-                  <a:gd name="connsiteY1" fmla="*/ 488633 h 507682"/>
-                  <a:gd name="connsiteX2" fmla="*/ 60960 w 244792"/>
-                  <a:gd name="connsiteY2" fmla="*/ 0 h 507682"/>
-                  <a:gd name="connsiteX3" fmla="*/ 244793 w 244792"/>
-                  <a:gd name="connsiteY3" fmla="*/ 19050 h 507682"/>
-                </a:gdLst>
-                <a:ahLst/>
-                <a:cxnLst>
-                  <a:cxn ang="0">
-                    <a:pos x="connsiteX0" y="connsiteY0"/>
-                  </a:cxn>
-                  <a:cxn ang="0">
-                    <a:pos x="connsiteX1" y="connsiteY1"/>
-                  </a:cxn>
-                  <a:cxn ang="0">
-                    <a:pos x="connsiteX2" y="connsiteY2"/>
-                  </a:cxn>
-                  <a:cxn ang="0">
-                    <a:pos x="connsiteX3" y="connsiteY3"/>
-                  </a:cxn>
-                </a:cxnLst>
-                <a:rect l="l" t="t" r="r" b="b"/>
-                <a:pathLst>
-                  <a:path w="244792" h="507682">
-                    <a:moveTo>
-                      <a:pt x="184785" y="507683"/>
-                    </a:moveTo>
-                    <a:lnTo>
-                      <a:pt x="0" y="488633"/>
-                    </a:lnTo>
-                    <a:lnTo>
-                      <a:pt x="60960" y="0"/>
-                    </a:lnTo>
-                    <a:lnTo>
-                      <a:pt x="244793" y="19050"/>
-                    </a:lnTo>
-                    <a:close/>
-                  </a:path>
-                </a:pathLst>
-              </a:custGeom>
-              <a:solidFill>
-                <a:srgbClr val="FFDBA6"/>
-              </a:solidFill>
-              <a:ln w="9525" cap="flat">
-                <a:noFill/>
-                <a:prstDash val="solid"/>
-                <a:miter/>
-              </a:ln>
-            </p:spPr>
-            <p:txBody>
-              <a:bodyPr rtlCol="0" anchor="ctr"/>
-              <a:lstStyle/>
-              <a:p>
-                <a:endParaRPr lang="zh-CN" altLang="en-US"/>
-              </a:p>
-            </p:txBody>
-          </p:sp>
-          <p:sp>
-            <p:nvSpPr>
-              <p:cNvPr id="18" name="图形 5"/>
-              <p:cNvSpPr/>
-              <p:nvPr>
-                <p:custDataLst>
-                  <p:tags r:id="rId6"/>
-                </p:custDataLst>
-              </p:nvPr>
-            </p:nvSpPr>
-            <p:spPr>
-              <a:xfrm>
-                <a:off x="7632382" y="2105025"/>
-                <a:ext cx="65722" cy="489585"/>
-              </a:xfrm>
-              <a:custGeom>
-                <a:avLst/>
-                <a:gdLst>
-                  <a:gd name="connsiteX0" fmla="*/ 60960 w 65722"/>
-                  <a:gd name="connsiteY0" fmla="*/ 0 h 489585"/>
-                  <a:gd name="connsiteX1" fmla="*/ 0 w 65722"/>
-                  <a:gd name="connsiteY1" fmla="*/ 488633 h 489585"/>
-                  <a:gd name="connsiteX2" fmla="*/ 5715 w 65722"/>
-                  <a:gd name="connsiteY2" fmla="*/ 489585 h 489585"/>
-                  <a:gd name="connsiteX3" fmla="*/ 65723 w 65722"/>
-                  <a:gd name="connsiteY3" fmla="*/ 953 h 489585"/>
-                </a:gdLst>
-                <a:ahLst/>
-                <a:cxnLst>
-                  <a:cxn ang="0">
-                    <a:pos x="connsiteX0" y="connsiteY0"/>
-                  </a:cxn>
-                  <a:cxn ang="0">
-                    <a:pos x="connsiteX1" y="connsiteY1"/>
-                  </a:cxn>
-                  <a:cxn ang="0">
-                    <a:pos x="connsiteX2" y="connsiteY2"/>
-                  </a:cxn>
-                  <a:cxn ang="0">
-                    <a:pos x="connsiteX3" y="connsiteY3"/>
-                  </a:cxn>
-                </a:cxnLst>
-                <a:rect l="l" t="t" r="r" b="b"/>
-                <a:pathLst>
-                  <a:path w="65722" h="489585">
-                    <a:moveTo>
-                      <a:pt x="60960" y="0"/>
-                    </a:moveTo>
-                    <a:lnTo>
-                      <a:pt x="0" y="488633"/>
-                    </a:lnTo>
-                    <a:lnTo>
-                      <a:pt x="5715" y="489585"/>
-                    </a:lnTo>
-                    <a:lnTo>
-                      <a:pt x="65723" y="953"/>
-                    </a:lnTo>
-                    <a:close/>
-                  </a:path>
-                </a:pathLst>
-              </a:custGeom>
-              <a:solidFill>
-                <a:srgbClr val="EBCA98"/>
-              </a:solidFill>
-              <a:ln w="9525" cap="flat">
-                <a:noFill/>
-                <a:prstDash val="solid"/>
-                <a:miter/>
-              </a:ln>
-            </p:spPr>
-            <p:txBody>
-              <a:bodyPr rtlCol="0" anchor="ctr"/>
-              <a:lstStyle/>
-              <a:p>
-                <a:endParaRPr lang="zh-CN" altLang="en-US"/>
-              </a:p>
-            </p:txBody>
-          </p:sp>
-          <p:sp>
-            <p:nvSpPr>
-              <p:cNvPr id="19" name="图形 5"/>
-              <p:cNvSpPr/>
-              <p:nvPr>
-                <p:custDataLst>
-                  <p:tags r:id="rId7"/>
-                </p:custDataLst>
-              </p:nvPr>
-            </p:nvSpPr>
-            <p:spPr>
-              <a:xfrm>
-                <a:off x="4231957" y="2105025"/>
-                <a:ext cx="244792" cy="507682"/>
-              </a:xfrm>
-              <a:custGeom>
-                <a:avLst/>
-                <a:gdLst>
-                  <a:gd name="connsiteX0" fmla="*/ 60007 w 244792"/>
-                  <a:gd name="connsiteY0" fmla="*/ 507683 h 507682"/>
-                  <a:gd name="connsiteX1" fmla="*/ 244793 w 244792"/>
-                  <a:gd name="connsiteY1" fmla="*/ 488633 h 507682"/>
-                  <a:gd name="connsiteX2" fmla="*/ 184785 w 244792"/>
-                  <a:gd name="connsiteY2" fmla="*/ 0 h 507682"/>
-                  <a:gd name="connsiteX3" fmla="*/ 0 w 244792"/>
-                  <a:gd name="connsiteY3" fmla="*/ 19050 h 507682"/>
-                </a:gdLst>
-                <a:ahLst/>
-                <a:cxnLst>
-                  <a:cxn ang="0">
-                    <a:pos x="connsiteX0" y="connsiteY0"/>
-                  </a:cxn>
-                  <a:cxn ang="0">
-                    <a:pos x="connsiteX1" y="connsiteY1"/>
-                  </a:cxn>
-                  <a:cxn ang="0">
-                    <a:pos x="connsiteX2" y="connsiteY2"/>
-                  </a:cxn>
-                  <a:cxn ang="0">
-                    <a:pos x="connsiteX3" y="connsiteY3"/>
-                  </a:cxn>
-                </a:cxnLst>
-                <a:rect l="l" t="t" r="r" b="b"/>
-                <a:pathLst>
-                  <a:path w="244792" h="507682">
-                    <a:moveTo>
-                      <a:pt x="60007" y="507683"/>
-                    </a:moveTo>
-                    <a:lnTo>
-                      <a:pt x="244793" y="488633"/>
-                    </a:lnTo>
-                    <a:lnTo>
-                      <a:pt x="184785" y="0"/>
-                    </a:lnTo>
-                    <a:lnTo>
-                      <a:pt x="0" y="19050"/>
-                    </a:lnTo>
-                    <a:close/>
-                  </a:path>
-                </a:pathLst>
-              </a:custGeom>
-              <a:solidFill>
-                <a:srgbClr val="FFDBA6"/>
-              </a:solidFill>
-              <a:ln w="9525" cap="flat">
-                <a:noFill/>
-                <a:prstDash val="solid"/>
-                <a:miter/>
-              </a:ln>
-            </p:spPr>
-            <p:txBody>
-              <a:bodyPr rtlCol="0" anchor="ctr"/>
-              <a:lstStyle/>
-              <a:p>
-                <a:endParaRPr lang="zh-CN" altLang="en-US"/>
-              </a:p>
-            </p:txBody>
-          </p:sp>
-          <p:sp>
-            <p:nvSpPr>
-              <p:cNvPr id="20" name="图形 5"/>
-              <p:cNvSpPr/>
-              <p:nvPr>
-                <p:custDataLst>
-                  <p:tags r:id="rId8"/>
-                </p:custDataLst>
-              </p:nvPr>
-            </p:nvSpPr>
-            <p:spPr>
-              <a:xfrm>
-                <a:off x="4411980" y="2105025"/>
-                <a:ext cx="64769" cy="489585"/>
-              </a:xfrm>
-              <a:custGeom>
-                <a:avLst/>
-                <a:gdLst>
-                  <a:gd name="connsiteX0" fmla="*/ 4763 w 64769"/>
-                  <a:gd name="connsiteY0" fmla="*/ 0 h 489585"/>
-                  <a:gd name="connsiteX1" fmla="*/ 64770 w 64769"/>
-                  <a:gd name="connsiteY1" fmla="*/ 488633 h 489585"/>
-                  <a:gd name="connsiteX2" fmla="*/ 60007 w 64769"/>
-                  <a:gd name="connsiteY2" fmla="*/ 489585 h 489585"/>
-                  <a:gd name="connsiteX3" fmla="*/ 0 w 64769"/>
-                  <a:gd name="connsiteY3" fmla="*/ 953 h 489585"/>
-                </a:gdLst>
-                <a:ahLst/>
-                <a:cxnLst>
-                  <a:cxn ang="0">
-                    <a:pos x="connsiteX0" y="connsiteY0"/>
-                  </a:cxn>
-                  <a:cxn ang="0">
-                    <a:pos x="connsiteX1" y="connsiteY1"/>
-                  </a:cxn>
-                  <a:cxn ang="0">
-                    <a:pos x="connsiteX2" y="connsiteY2"/>
-                  </a:cxn>
-                  <a:cxn ang="0">
-                    <a:pos x="connsiteX3" y="connsiteY3"/>
-                  </a:cxn>
-                </a:cxnLst>
-                <a:rect l="l" t="t" r="r" b="b"/>
-                <a:pathLst>
-                  <a:path w="64769" h="489585">
-                    <a:moveTo>
-                      <a:pt x="4763" y="0"/>
-                    </a:moveTo>
-                    <a:lnTo>
-                      <a:pt x="64770" y="488633"/>
-                    </a:lnTo>
-                    <a:lnTo>
-                      <a:pt x="60007" y="489585"/>
-                    </a:lnTo>
-                    <a:lnTo>
-                      <a:pt x="0" y="953"/>
-                    </a:lnTo>
-                    <a:close/>
-                  </a:path>
-                </a:pathLst>
-              </a:custGeom>
-              <a:solidFill>
-                <a:srgbClr val="EBCA98"/>
-              </a:solidFill>
-              <a:ln w="9525" cap="flat">
-                <a:noFill/>
-                <a:prstDash val="solid"/>
-                <a:miter/>
-              </a:ln>
-            </p:spPr>
-            <p:txBody>
-              <a:bodyPr rtlCol="0" anchor="ctr"/>
-              <a:lstStyle/>
-              <a:p>
-                <a:endParaRPr lang="zh-CN" altLang="en-US"/>
-              </a:p>
-            </p:txBody>
-          </p:sp>
-          <p:sp>
-            <p:nvSpPr>
-              <p:cNvPr id="21" name="图形 5"/>
-              <p:cNvSpPr/>
-              <p:nvPr>
-                <p:custDataLst>
-                  <p:tags r:id="rId9"/>
-                </p:custDataLst>
-              </p:nvPr>
-            </p:nvSpPr>
-            <p:spPr>
-              <a:xfrm>
-                <a:off x="4259580" y="2331720"/>
-                <a:ext cx="180022" cy="18097"/>
-              </a:xfrm>
-              <a:custGeom>
-                <a:avLst/>
-                <a:gdLst>
-                  <a:gd name="connsiteX0" fmla="*/ 0 w 180022"/>
-                  <a:gd name="connsiteY0" fmla="*/ 18098 h 18097"/>
-                  <a:gd name="connsiteX1" fmla="*/ 180022 w 180022"/>
-                  <a:gd name="connsiteY1" fmla="*/ 0 h 18097"/>
-                </a:gdLst>
-                <a:ahLst/>
-                <a:cxnLst>
-                  <a:cxn ang="0">
-                    <a:pos x="connsiteX0" y="connsiteY0"/>
-                  </a:cxn>
-                  <a:cxn ang="0">
-                    <a:pos x="connsiteX1" y="connsiteY1"/>
-                  </a:cxn>
-                </a:cxnLst>
-                <a:rect l="l" t="t" r="r" b="b"/>
-                <a:pathLst>
-                  <a:path w="180022" h="18097">
-                    <a:moveTo>
-                      <a:pt x="0" y="18098"/>
-                    </a:moveTo>
-                    <a:lnTo>
-                      <a:pt x="180022" y="0"/>
-                    </a:lnTo>
-                  </a:path>
-                </a:pathLst>
-              </a:custGeom>
-              <a:ln w="9525" cap="flat">
-                <a:solidFill>
-                  <a:srgbClr val="EBC999"/>
-                </a:solidFill>
-                <a:prstDash val="solid"/>
-                <a:miter/>
-              </a:ln>
-            </p:spPr>
-            <p:txBody>
-              <a:bodyPr rtlCol="0" anchor="ctr"/>
-              <a:lstStyle/>
-              <a:p>
-                <a:endParaRPr lang="zh-CN" altLang="en-US"/>
-              </a:p>
-            </p:txBody>
-          </p:sp>
-          <p:sp>
-            <p:nvSpPr>
-              <p:cNvPr id="22" name="图形 5"/>
-              <p:cNvSpPr/>
-              <p:nvPr>
-                <p:custDataLst>
-                  <p:tags r:id="rId10"/>
-                </p:custDataLst>
-              </p:nvPr>
-            </p:nvSpPr>
-            <p:spPr>
-              <a:xfrm>
-                <a:off x="7669530" y="2331720"/>
-                <a:ext cx="180022" cy="18097"/>
-              </a:xfrm>
-              <a:custGeom>
-                <a:avLst/>
-                <a:gdLst>
-                  <a:gd name="connsiteX0" fmla="*/ 180023 w 180022"/>
-                  <a:gd name="connsiteY0" fmla="*/ 18098 h 18097"/>
-                  <a:gd name="connsiteX1" fmla="*/ 0 w 180022"/>
-                  <a:gd name="connsiteY1" fmla="*/ 0 h 18097"/>
-                </a:gdLst>
-                <a:ahLst/>
-                <a:cxnLst>
-                  <a:cxn ang="0">
-                    <a:pos x="connsiteX0" y="connsiteY0"/>
-                  </a:cxn>
-                  <a:cxn ang="0">
-                    <a:pos x="connsiteX1" y="connsiteY1"/>
-                  </a:cxn>
-                </a:cxnLst>
-                <a:rect l="l" t="t" r="r" b="b"/>
-                <a:pathLst>
-                  <a:path w="180022" h="18097">
-                    <a:moveTo>
-                      <a:pt x="180023" y="18098"/>
-                    </a:moveTo>
-                    <a:lnTo>
-                      <a:pt x="0" y="0"/>
-                    </a:lnTo>
-                  </a:path>
-                </a:pathLst>
-              </a:custGeom>
-              <a:ln w="9525" cap="flat">
-                <a:solidFill>
-                  <a:srgbClr val="EBC999"/>
-                </a:solidFill>
-                <a:prstDash val="solid"/>
-                <a:miter/>
-              </a:ln>
-            </p:spPr>
-            <p:txBody>
-              <a:bodyPr rtlCol="0" anchor="ctr"/>
-              <a:lstStyle/>
-              <a:p>
-                <a:endParaRPr lang="zh-CN" altLang="en-US"/>
-              </a:p>
-            </p:txBody>
-          </p:sp>
-        </p:grpSp>
         <p:sp>
           <p:nvSpPr>
-            <p:cNvPr id="12" name="文本框 11"/>
-            <p:cNvSpPr txBox="1"/>
+            <p:cNvPr id="13" name="图形 5"/>
+            <p:cNvSpPr/>
             <p:nvPr>
               <p:custDataLst>
-                <p:tags r:id="rId11"/>
+                <p:tags r:id="rId1"/>
               </p:custDataLst>
             </p:nvPr>
           </p:nvSpPr>
           <p:spPr>
             <a:xfrm>
-              <a:off x="6230" y="4132"/>
-              <a:ext cx="6604" cy="2955"/>
+              <a:off x="3838575" y="2439352"/>
+              <a:ext cx="4278630" cy="2184082"/>
             </a:xfrm>
-            <a:prstGeom prst="rect">
+            <a:custGeom>
               <a:avLst/>
-            </a:prstGeom>
-            <a:noFill/>
+              <a:gdLst>
+                <a:gd name="connsiteX0" fmla="*/ 0 w 4278630"/>
+                <a:gd name="connsiteY0" fmla="*/ 0 h 2184082"/>
+                <a:gd name="connsiteX1" fmla="*/ 4278630 w 4278630"/>
+                <a:gd name="connsiteY1" fmla="*/ 0 h 2184082"/>
+                <a:gd name="connsiteX2" fmla="*/ 4278630 w 4278630"/>
+                <a:gd name="connsiteY2" fmla="*/ 2184083 h 2184082"/>
+                <a:gd name="connsiteX3" fmla="*/ 0 w 4278630"/>
+                <a:gd name="connsiteY3" fmla="*/ 2184083 h 2184082"/>
+              </a:gdLst>
+              <a:ahLst/>
+              <a:cxnLst>
+                <a:cxn ang="0">
+                  <a:pos x="connsiteX0" y="connsiteY0"/>
+                </a:cxn>
+                <a:cxn ang="0">
+                  <a:pos x="connsiteX1" y="connsiteY1"/>
+                </a:cxn>
+                <a:cxn ang="0">
+                  <a:pos x="connsiteX2" y="connsiteY2"/>
+                </a:cxn>
+                <a:cxn ang="0">
+                  <a:pos x="connsiteX3" y="connsiteY3"/>
+                </a:cxn>
+              </a:cxnLst>
+              <a:rect l="l" t="t" r="r" b="b"/>
+              <a:pathLst>
+                <a:path w="4278630" h="2184082">
+                  <a:moveTo>
+                    <a:pt x="0" y="0"/>
+                  </a:moveTo>
+                  <a:lnTo>
+                    <a:pt x="4278630" y="0"/>
+                  </a:lnTo>
+                  <a:lnTo>
+                    <a:pt x="4278630" y="2184083"/>
+                  </a:lnTo>
+                  <a:lnTo>
+                    <a:pt x="0" y="2184083"/>
+                  </a:lnTo>
+                  <a:close/>
+                </a:path>
+              </a:pathLst>
+            </a:custGeom>
+            <a:solidFill>
+              <a:srgbClr val="E8E8E8"/>
+            </a:solidFill>
+            <a:ln w="9525" cap="flat">
+              <a:noFill/>
+              <a:prstDash val="solid"/>
+              <a:miter/>
+            </a:ln>
           </p:spPr>
           <p:txBody>
-            <a:bodyPr wrap="square" rtlCol="0" anchor="t">
-              <a:noAutofit/>
-            </a:bodyPr>
+            <a:bodyPr rtlCol="0" anchor="ctr"/>
             <a:lstStyle/>
             <a:p>
-              <a:pPr indent="457200" fontAlgn="auto">
-                <a:lnSpc>
-                  <a:spcPct val="150000"/>
-                </a:lnSpc>
-              </a:pPr>
-              <a:r>
-                <a:rPr lang="en-US" dirty="0" smtClean="0">
-                  <a:latin typeface="微软雅黑" panose="020B0503020204020204" pitchFamily="34" charset="-122"/>
-                  <a:ea typeface="微软雅黑" panose="020B0503020204020204" pitchFamily="34" charset="-122"/>
-                  <a:cs typeface="微软雅黑" panose="020B0503020204020204" pitchFamily="34" charset="-122"/>
-                  <a:sym typeface="+mn-ea"/>
-                </a:rPr>
-                <a:t>{{text:</a:t>
-              </a:r>
-              <a:r>
-                <a:rPr lang="en-US" altLang="zh-CN" dirty="0" smtClean="0">
-                  <a:latin typeface="微软雅黑" panose="020B0503020204020204" pitchFamily="34" charset="-122"/>
-                  <a:ea typeface="微软雅黑" panose="020B0503020204020204" pitchFamily="34" charset="-122"/>
-                  <a:cs typeface="微软雅黑" panose="020B0503020204020204" pitchFamily="34" charset="-122"/>
-                  <a:sym typeface="+mn-ea"/>
-                </a:rPr>
-                <a:t>content</a:t>
-              </a:r>
-              <a:r>
-                <a:rPr lang="en-US" dirty="0" smtClean="0">
-                  <a:latin typeface="微软雅黑" panose="020B0503020204020204" pitchFamily="34" charset="-122"/>
-                  <a:ea typeface="微软雅黑" panose="020B0503020204020204" pitchFamily="34" charset="-122"/>
-                  <a:cs typeface="微软雅黑" panose="020B0503020204020204" pitchFamily="34" charset="-122"/>
-                  <a:sym typeface="+mn-ea"/>
-                </a:rPr>
-                <a:t>}}</a:t>
-              </a:r>
-              <a:endParaRPr lang="en-US" sz="2000" dirty="0">
-                <a:latin typeface="微软雅黑" panose="020B0503020204020204" pitchFamily="34" charset="-122"/>
-                <a:ea typeface="微软雅黑" panose="020B0503020204020204" pitchFamily="34" charset="-122"/>
-                <a:cs typeface="微软雅黑" panose="020B0503020204020204" pitchFamily="34" charset="-122"/>
-              </a:endParaRPr>
+              <a:endParaRPr lang="zh-CN" altLang="en-US"/>
+            </a:p>
+          </p:txBody>
+        </p:sp>
+        <p:sp>
+          <p:nvSpPr>
+            <p:cNvPr id="14" name="图形 5"/>
+            <p:cNvSpPr/>
+            <p:nvPr>
+              <p:custDataLst>
+                <p:tags r:id="rId2"/>
+              </p:custDataLst>
+            </p:nvPr>
+          </p:nvSpPr>
+          <p:spPr>
+            <a:xfrm>
+              <a:off x="7632382" y="2110740"/>
+              <a:ext cx="218122" cy="501967"/>
+            </a:xfrm>
+            <a:custGeom>
+              <a:avLst/>
+              <a:gdLst>
+                <a:gd name="connsiteX0" fmla="*/ 184785 w 218122"/>
+                <a:gd name="connsiteY0" fmla="*/ 501968 h 501967"/>
+                <a:gd name="connsiteX1" fmla="*/ 0 w 218122"/>
+                <a:gd name="connsiteY1" fmla="*/ 482918 h 501967"/>
+                <a:gd name="connsiteX2" fmla="*/ 33338 w 218122"/>
+                <a:gd name="connsiteY2" fmla="*/ 0 h 501967"/>
+                <a:gd name="connsiteX3" fmla="*/ 218123 w 218122"/>
+                <a:gd name="connsiteY3" fmla="*/ 18098 h 501967"/>
+              </a:gdLst>
+              <a:ahLst/>
+              <a:cxnLst>
+                <a:cxn ang="0">
+                  <a:pos x="connsiteX0" y="connsiteY0"/>
+                </a:cxn>
+                <a:cxn ang="0">
+                  <a:pos x="connsiteX1" y="connsiteY1"/>
+                </a:cxn>
+                <a:cxn ang="0">
+                  <a:pos x="connsiteX2" y="connsiteY2"/>
+                </a:cxn>
+                <a:cxn ang="0">
+                  <a:pos x="connsiteX3" y="connsiteY3"/>
+                </a:cxn>
+              </a:cxnLst>
+              <a:rect l="l" t="t" r="r" b="b"/>
+              <a:pathLst>
+                <a:path w="218122" h="501967">
+                  <a:moveTo>
+                    <a:pt x="184785" y="501968"/>
+                  </a:moveTo>
+                  <a:lnTo>
+                    <a:pt x="0" y="482918"/>
+                  </a:lnTo>
+                  <a:lnTo>
+                    <a:pt x="33338" y="0"/>
+                  </a:lnTo>
+                  <a:lnTo>
+                    <a:pt x="218123" y="18098"/>
+                  </a:lnTo>
+                  <a:close/>
+                </a:path>
+              </a:pathLst>
+            </a:custGeom>
+            <a:solidFill>
+              <a:srgbClr val="DEBF90"/>
+            </a:solidFill>
+            <a:ln w="9525" cap="flat">
+              <a:noFill/>
+              <a:prstDash val="solid"/>
+              <a:miter/>
+            </a:ln>
+          </p:spPr>
+          <p:txBody>
+            <a:bodyPr rtlCol="0" anchor="ctr"/>
+            <a:lstStyle/>
+            <a:p>
+              <a:endParaRPr lang="zh-CN" altLang="en-US"/>
+            </a:p>
+          </p:txBody>
+        </p:sp>
+        <p:sp>
+          <p:nvSpPr>
+            <p:cNvPr id="15" name="图形 5"/>
+            <p:cNvSpPr/>
+            <p:nvPr>
+              <p:custDataLst>
+                <p:tags r:id="rId3"/>
+              </p:custDataLst>
+            </p:nvPr>
+          </p:nvSpPr>
+          <p:spPr>
+            <a:xfrm>
+              <a:off x="4259580" y="2110740"/>
+              <a:ext cx="217169" cy="501967"/>
+            </a:xfrm>
+            <a:custGeom>
+              <a:avLst/>
+              <a:gdLst>
+                <a:gd name="connsiteX0" fmla="*/ 32385 w 217169"/>
+                <a:gd name="connsiteY0" fmla="*/ 501968 h 501967"/>
+                <a:gd name="connsiteX1" fmla="*/ 217170 w 217169"/>
+                <a:gd name="connsiteY1" fmla="*/ 482918 h 501967"/>
+                <a:gd name="connsiteX2" fmla="*/ 183833 w 217169"/>
+                <a:gd name="connsiteY2" fmla="*/ 0 h 501967"/>
+                <a:gd name="connsiteX3" fmla="*/ 0 w 217169"/>
+                <a:gd name="connsiteY3" fmla="*/ 18098 h 501967"/>
+              </a:gdLst>
+              <a:ahLst/>
+              <a:cxnLst>
+                <a:cxn ang="0">
+                  <a:pos x="connsiteX0" y="connsiteY0"/>
+                </a:cxn>
+                <a:cxn ang="0">
+                  <a:pos x="connsiteX1" y="connsiteY1"/>
+                </a:cxn>
+                <a:cxn ang="0">
+                  <a:pos x="connsiteX2" y="connsiteY2"/>
+                </a:cxn>
+                <a:cxn ang="0">
+                  <a:pos x="connsiteX3" y="connsiteY3"/>
+                </a:cxn>
+              </a:cxnLst>
+              <a:rect l="l" t="t" r="r" b="b"/>
+              <a:pathLst>
+                <a:path w="217169" h="501967">
+                  <a:moveTo>
+                    <a:pt x="32385" y="501968"/>
+                  </a:moveTo>
+                  <a:lnTo>
+                    <a:pt x="217170" y="482918"/>
+                  </a:lnTo>
+                  <a:lnTo>
+                    <a:pt x="183833" y="0"/>
+                  </a:lnTo>
+                  <a:lnTo>
+                    <a:pt x="0" y="18098"/>
+                  </a:lnTo>
+                  <a:close/>
+                </a:path>
+              </a:pathLst>
+            </a:custGeom>
+            <a:solidFill>
+              <a:srgbClr val="DEBF90"/>
+            </a:solidFill>
+            <a:ln w="9525" cap="flat">
+              <a:noFill/>
+              <a:prstDash val="solid"/>
+              <a:miter/>
+            </a:ln>
+          </p:spPr>
+          <p:txBody>
+            <a:bodyPr rtlCol="0" anchor="ctr"/>
+            <a:lstStyle/>
+            <a:p>
+              <a:endParaRPr lang="zh-CN" altLang="en-US"/>
+            </a:p>
+          </p:txBody>
+        </p:sp>
+        <p:sp>
+          <p:nvSpPr>
+            <p:cNvPr id="16" name="图形 5"/>
+            <p:cNvSpPr/>
+            <p:nvPr>
+              <p:custDataLst>
+                <p:tags r:id="rId4"/>
+              </p:custDataLst>
+            </p:nvPr>
+          </p:nvSpPr>
+          <p:spPr>
+            <a:xfrm>
+              <a:off x="3915727" y="2349817"/>
+              <a:ext cx="4278630" cy="2184082"/>
+            </a:xfrm>
+            <a:custGeom>
+              <a:avLst/>
+              <a:gdLst>
+                <a:gd name="connsiteX0" fmla="*/ 0 w 4278630"/>
+                <a:gd name="connsiteY0" fmla="*/ 0 h 2184082"/>
+                <a:gd name="connsiteX1" fmla="*/ 4278630 w 4278630"/>
+                <a:gd name="connsiteY1" fmla="*/ 0 h 2184082"/>
+                <a:gd name="connsiteX2" fmla="*/ 4278630 w 4278630"/>
+                <a:gd name="connsiteY2" fmla="*/ 2184083 h 2184082"/>
+                <a:gd name="connsiteX3" fmla="*/ 0 w 4278630"/>
+                <a:gd name="connsiteY3" fmla="*/ 2184083 h 2184082"/>
+              </a:gdLst>
+              <a:ahLst/>
+              <a:cxnLst>
+                <a:cxn ang="0">
+                  <a:pos x="connsiteX0" y="connsiteY0"/>
+                </a:cxn>
+                <a:cxn ang="0">
+                  <a:pos x="connsiteX1" y="connsiteY1"/>
+                </a:cxn>
+                <a:cxn ang="0">
+                  <a:pos x="connsiteX2" y="connsiteY2"/>
+                </a:cxn>
+                <a:cxn ang="0">
+                  <a:pos x="connsiteX3" y="connsiteY3"/>
+                </a:cxn>
+              </a:cxnLst>
+              <a:rect l="l" t="t" r="r" b="b"/>
+              <a:pathLst>
+                <a:path w="4278630" h="2184082">
+                  <a:moveTo>
+                    <a:pt x="0" y="0"/>
+                  </a:moveTo>
+                  <a:lnTo>
+                    <a:pt x="4278630" y="0"/>
+                  </a:lnTo>
+                  <a:lnTo>
+                    <a:pt x="4278630" y="2184083"/>
+                  </a:lnTo>
+                  <a:lnTo>
+                    <a:pt x="0" y="2184083"/>
+                  </a:lnTo>
+                  <a:close/>
+                </a:path>
+              </a:pathLst>
+            </a:custGeom>
+            <a:solidFill>
+              <a:srgbClr val="FFFFFF"/>
+            </a:solidFill>
+            <a:ln w="9525" cap="flat">
+              <a:solidFill>
+                <a:srgbClr val="231815"/>
+              </a:solidFill>
+              <a:prstDash val="solid"/>
+              <a:miter/>
+            </a:ln>
+          </p:spPr>
+          <p:txBody>
+            <a:bodyPr rtlCol="0" anchor="ctr"/>
+            <a:lstStyle/>
+            <a:p>
+              <a:endParaRPr lang="zh-CN" altLang="en-US"/>
+            </a:p>
+          </p:txBody>
+        </p:sp>
+        <p:sp>
+          <p:nvSpPr>
+            <p:cNvPr id="17" name="图形 5"/>
+            <p:cNvSpPr/>
+            <p:nvPr>
+              <p:custDataLst>
+                <p:tags r:id="rId5"/>
+              </p:custDataLst>
+            </p:nvPr>
+          </p:nvSpPr>
+          <p:spPr>
+            <a:xfrm>
+              <a:off x="7632382" y="2105025"/>
+              <a:ext cx="244792" cy="507682"/>
+            </a:xfrm>
+            <a:custGeom>
+              <a:avLst/>
+              <a:gdLst>
+                <a:gd name="connsiteX0" fmla="*/ 184785 w 244792"/>
+                <a:gd name="connsiteY0" fmla="*/ 507683 h 507682"/>
+                <a:gd name="connsiteX1" fmla="*/ 0 w 244792"/>
+                <a:gd name="connsiteY1" fmla="*/ 488633 h 507682"/>
+                <a:gd name="connsiteX2" fmla="*/ 60960 w 244792"/>
+                <a:gd name="connsiteY2" fmla="*/ 0 h 507682"/>
+                <a:gd name="connsiteX3" fmla="*/ 244793 w 244792"/>
+                <a:gd name="connsiteY3" fmla="*/ 19050 h 507682"/>
+              </a:gdLst>
+              <a:ahLst/>
+              <a:cxnLst>
+                <a:cxn ang="0">
+                  <a:pos x="connsiteX0" y="connsiteY0"/>
+                </a:cxn>
+                <a:cxn ang="0">
+                  <a:pos x="connsiteX1" y="connsiteY1"/>
+                </a:cxn>
+                <a:cxn ang="0">
+                  <a:pos x="connsiteX2" y="connsiteY2"/>
+                </a:cxn>
+                <a:cxn ang="0">
+                  <a:pos x="connsiteX3" y="connsiteY3"/>
+                </a:cxn>
+              </a:cxnLst>
+              <a:rect l="l" t="t" r="r" b="b"/>
+              <a:pathLst>
+                <a:path w="244792" h="507682">
+                  <a:moveTo>
+                    <a:pt x="184785" y="507683"/>
+                  </a:moveTo>
+                  <a:lnTo>
+                    <a:pt x="0" y="488633"/>
+                  </a:lnTo>
+                  <a:lnTo>
+                    <a:pt x="60960" y="0"/>
+                  </a:lnTo>
+                  <a:lnTo>
+                    <a:pt x="244793" y="19050"/>
+                  </a:lnTo>
+                  <a:close/>
+                </a:path>
+              </a:pathLst>
+            </a:custGeom>
+            <a:solidFill>
+              <a:srgbClr val="FFDBA6"/>
+            </a:solidFill>
+            <a:ln w="9525" cap="flat">
+              <a:noFill/>
+              <a:prstDash val="solid"/>
+              <a:miter/>
+            </a:ln>
+          </p:spPr>
+          <p:txBody>
+            <a:bodyPr rtlCol="0" anchor="ctr"/>
+            <a:lstStyle/>
+            <a:p>
+              <a:endParaRPr lang="zh-CN" altLang="en-US"/>
+            </a:p>
+          </p:txBody>
+        </p:sp>
+        <p:sp>
+          <p:nvSpPr>
+            <p:cNvPr id="18" name="图形 5"/>
+            <p:cNvSpPr/>
+            <p:nvPr>
+              <p:custDataLst>
+                <p:tags r:id="rId6"/>
+              </p:custDataLst>
+            </p:nvPr>
+          </p:nvSpPr>
+          <p:spPr>
+            <a:xfrm>
+              <a:off x="7632382" y="2105025"/>
+              <a:ext cx="65722" cy="489585"/>
+            </a:xfrm>
+            <a:custGeom>
+              <a:avLst/>
+              <a:gdLst>
+                <a:gd name="connsiteX0" fmla="*/ 60960 w 65722"/>
+                <a:gd name="connsiteY0" fmla="*/ 0 h 489585"/>
+                <a:gd name="connsiteX1" fmla="*/ 0 w 65722"/>
+                <a:gd name="connsiteY1" fmla="*/ 488633 h 489585"/>
+                <a:gd name="connsiteX2" fmla="*/ 5715 w 65722"/>
+                <a:gd name="connsiteY2" fmla="*/ 489585 h 489585"/>
+                <a:gd name="connsiteX3" fmla="*/ 65723 w 65722"/>
+                <a:gd name="connsiteY3" fmla="*/ 953 h 489585"/>
+              </a:gdLst>
+              <a:ahLst/>
+              <a:cxnLst>
+                <a:cxn ang="0">
+                  <a:pos x="connsiteX0" y="connsiteY0"/>
+                </a:cxn>
+                <a:cxn ang="0">
+                  <a:pos x="connsiteX1" y="connsiteY1"/>
+                </a:cxn>
+                <a:cxn ang="0">
+                  <a:pos x="connsiteX2" y="connsiteY2"/>
+                </a:cxn>
+                <a:cxn ang="0">
+                  <a:pos x="connsiteX3" y="connsiteY3"/>
+                </a:cxn>
+              </a:cxnLst>
+              <a:rect l="l" t="t" r="r" b="b"/>
+              <a:pathLst>
+                <a:path w="65722" h="489585">
+                  <a:moveTo>
+                    <a:pt x="60960" y="0"/>
+                  </a:moveTo>
+                  <a:lnTo>
+                    <a:pt x="0" y="488633"/>
+                  </a:lnTo>
+                  <a:lnTo>
+                    <a:pt x="5715" y="489585"/>
+                  </a:lnTo>
+                  <a:lnTo>
+                    <a:pt x="65723" y="953"/>
+                  </a:lnTo>
+                  <a:close/>
+                </a:path>
+              </a:pathLst>
+            </a:custGeom>
+            <a:solidFill>
+              <a:srgbClr val="EBCA98"/>
+            </a:solidFill>
+            <a:ln w="9525" cap="flat">
+              <a:noFill/>
+              <a:prstDash val="solid"/>
+              <a:miter/>
+            </a:ln>
+          </p:spPr>
+          <p:txBody>
+            <a:bodyPr rtlCol="0" anchor="ctr"/>
+            <a:lstStyle/>
+            <a:p>
+              <a:endParaRPr lang="zh-CN" altLang="en-US"/>
+            </a:p>
+          </p:txBody>
+        </p:sp>
+        <p:sp>
+          <p:nvSpPr>
+            <p:cNvPr id="19" name="图形 5"/>
+            <p:cNvSpPr/>
+            <p:nvPr>
+              <p:custDataLst>
+                <p:tags r:id="rId7"/>
+              </p:custDataLst>
+            </p:nvPr>
+          </p:nvSpPr>
+          <p:spPr>
+            <a:xfrm>
+              <a:off x="4231957" y="2105025"/>
+              <a:ext cx="244792" cy="507682"/>
+            </a:xfrm>
+            <a:custGeom>
+              <a:avLst/>
+              <a:gdLst>
+                <a:gd name="connsiteX0" fmla="*/ 60007 w 244792"/>
+                <a:gd name="connsiteY0" fmla="*/ 507683 h 507682"/>
+                <a:gd name="connsiteX1" fmla="*/ 244793 w 244792"/>
+                <a:gd name="connsiteY1" fmla="*/ 488633 h 507682"/>
+                <a:gd name="connsiteX2" fmla="*/ 184785 w 244792"/>
+                <a:gd name="connsiteY2" fmla="*/ 0 h 507682"/>
+                <a:gd name="connsiteX3" fmla="*/ 0 w 244792"/>
+                <a:gd name="connsiteY3" fmla="*/ 19050 h 507682"/>
+              </a:gdLst>
+              <a:ahLst/>
+              <a:cxnLst>
+                <a:cxn ang="0">
+                  <a:pos x="connsiteX0" y="connsiteY0"/>
+                </a:cxn>
+                <a:cxn ang="0">
+                  <a:pos x="connsiteX1" y="connsiteY1"/>
+                </a:cxn>
+                <a:cxn ang="0">
+                  <a:pos x="connsiteX2" y="connsiteY2"/>
+                </a:cxn>
+                <a:cxn ang="0">
+                  <a:pos x="connsiteX3" y="connsiteY3"/>
+                </a:cxn>
+              </a:cxnLst>
+              <a:rect l="l" t="t" r="r" b="b"/>
+              <a:pathLst>
+                <a:path w="244792" h="507682">
+                  <a:moveTo>
+                    <a:pt x="60007" y="507683"/>
+                  </a:moveTo>
+                  <a:lnTo>
+                    <a:pt x="244793" y="488633"/>
+                  </a:lnTo>
+                  <a:lnTo>
+                    <a:pt x="184785" y="0"/>
+                  </a:lnTo>
+                  <a:lnTo>
+                    <a:pt x="0" y="19050"/>
+                  </a:lnTo>
+                  <a:close/>
+                </a:path>
+              </a:pathLst>
+            </a:custGeom>
+            <a:solidFill>
+              <a:srgbClr val="FFDBA6"/>
+            </a:solidFill>
+            <a:ln w="9525" cap="flat">
+              <a:noFill/>
+              <a:prstDash val="solid"/>
+              <a:miter/>
+            </a:ln>
+          </p:spPr>
+          <p:txBody>
+            <a:bodyPr rtlCol="0" anchor="ctr"/>
+            <a:lstStyle/>
+            <a:p>
+              <a:endParaRPr lang="zh-CN" altLang="en-US"/>
+            </a:p>
+          </p:txBody>
+        </p:sp>
+        <p:sp>
+          <p:nvSpPr>
+            <p:cNvPr id="20" name="图形 5"/>
+            <p:cNvSpPr/>
+            <p:nvPr>
+              <p:custDataLst>
+                <p:tags r:id="rId8"/>
+              </p:custDataLst>
+            </p:nvPr>
+          </p:nvSpPr>
+          <p:spPr>
+            <a:xfrm>
+              <a:off x="4411980" y="2105025"/>
+              <a:ext cx="64769" cy="489585"/>
+            </a:xfrm>
+            <a:custGeom>
+              <a:avLst/>
+              <a:gdLst>
+                <a:gd name="connsiteX0" fmla="*/ 4763 w 64769"/>
+                <a:gd name="connsiteY0" fmla="*/ 0 h 489585"/>
+                <a:gd name="connsiteX1" fmla="*/ 64770 w 64769"/>
+                <a:gd name="connsiteY1" fmla="*/ 488633 h 489585"/>
+                <a:gd name="connsiteX2" fmla="*/ 60007 w 64769"/>
+                <a:gd name="connsiteY2" fmla="*/ 489585 h 489585"/>
+                <a:gd name="connsiteX3" fmla="*/ 0 w 64769"/>
+                <a:gd name="connsiteY3" fmla="*/ 953 h 489585"/>
+              </a:gdLst>
+              <a:ahLst/>
+              <a:cxnLst>
+                <a:cxn ang="0">
+                  <a:pos x="connsiteX0" y="connsiteY0"/>
+                </a:cxn>
+                <a:cxn ang="0">
+                  <a:pos x="connsiteX1" y="connsiteY1"/>
+                </a:cxn>
+                <a:cxn ang="0">
+                  <a:pos x="connsiteX2" y="connsiteY2"/>
+                </a:cxn>
+                <a:cxn ang="0">
+                  <a:pos x="connsiteX3" y="connsiteY3"/>
+                </a:cxn>
+              </a:cxnLst>
+              <a:rect l="l" t="t" r="r" b="b"/>
+              <a:pathLst>
+                <a:path w="64769" h="489585">
+                  <a:moveTo>
+                    <a:pt x="4763" y="0"/>
+                  </a:moveTo>
+                  <a:lnTo>
+                    <a:pt x="64770" y="488633"/>
+                  </a:lnTo>
+                  <a:lnTo>
+                    <a:pt x="60007" y="489585"/>
+                  </a:lnTo>
+                  <a:lnTo>
+                    <a:pt x="0" y="953"/>
+                  </a:lnTo>
+                  <a:close/>
+                </a:path>
+              </a:pathLst>
+            </a:custGeom>
+            <a:solidFill>
+              <a:srgbClr val="EBCA98"/>
+            </a:solidFill>
+            <a:ln w="9525" cap="flat">
+              <a:noFill/>
+              <a:prstDash val="solid"/>
+              <a:miter/>
+            </a:ln>
+          </p:spPr>
+          <p:txBody>
+            <a:bodyPr rtlCol="0" anchor="ctr"/>
+            <a:lstStyle/>
+            <a:p>
+              <a:endParaRPr lang="zh-CN" altLang="en-US"/>
+            </a:p>
+          </p:txBody>
+        </p:sp>
+        <p:sp>
+          <p:nvSpPr>
+            <p:cNvPr id="21" name="图形 5"/>
+            <p:cNvSpPr/>
+            <p:nvPr>
+              <p:custDataLst>
+                <p:tags r:id="rId9"/>
+              </p:custDataLst>
+            </p:nvPr>
+          </p:nvSpPr>
+          <p:spPr>
+            <a:xfrm>
+              <a:off x="4259580" y="2331720"/>
+              <a:ext cx="180022" cy="18097"/>
+            </a:xfrm>
+            <a:custGeom>
+              <a:avLst/>
+              <a:gdLst>
+                <a:gd name="connsiteX0" fmla="*/ 0 w 180022"/>
+                <a:gd name="connsiteY0" fmla="*/ 18098 h 18097"/>
+                <a:gd name="connsiteX1" fmla="*/ 180022 w 180022"/>
+                <a:gd name="connsiteY1" fmla="*/ 0 h 18097"/>
+              </a:gdLst>
+              <a:ahLst/>
+              <a:cxnLst>
+                <a:cxn ang="0">
+                  <a:pos x="connsiteX0" y="connsiteY0"/>
+                </a:cxn>
+                <a:cxn ang="0">
+                  <a:pos x="connsiteX1" y="connsiteY1"/>
+                </a:cxn>
+              </a:cxnLst>
+              <a:rect l="l" t="t" r="r" b="b"/>
+              <a:pathLst>
+                <a:path w="180022" h="18097">
+                  <a:moveTo>
+                    <a:pt x="0" y="18098"/>
+                  </a:moveTo>
+                  <a:lnTo>
+                    <a:pt x="180022" y="0"/>
+                  </a:lnTo>
+                </a:path>
+              </a:pathLst>
+            </a:custGeom>
+            <a:ln w="9525" cap="flat">
+              <a:solidFill>
+                <a:srgbClr val="EBC999"/>
+              </a:solidFill>
+              <a:prstDash val="solid"/>
+              <a:miter/>
+            </a:ln>
+          </p:spPr>
+          <p:txBody>
+            <a:bodyPr rtlCol="0" anchor="ctr"/>
+            <a:lstStyle/>
+            <a:p>
+              <a:endParaRPr lang="zh-CN" altLang="en-US"/>
+            </a:p>
+          </p:txBody>
+        </p:sp>
+        <p:sp>
+          <p:nvSpPr>
+            <p:cNvPr id="22" name="图形 5"/>
+            <p:cNvSpPr/>
+            <p:nvPr>
+              <p:custDataLst>
+                <p:tags r:id="rId10"/>
+              </p:custDataLst>
+            </p:nvPr>
+          </p:nvSpPr>
+          <p:spPr>
+            <a:xfrm>
+              <a:off x="7669530" y="2331720"/>
+              <a:ext cx="180022" cy="18097"/>
+            </a:xfrm>
+            <a:custGeom>
+              <a:avLst/>
+              <a:gdLst>
+                <a:gd name="connsiteX0" fmla="*/ 180023 w 180022"/>
+                <a:gd name="connsiteY0" fmla="*/ 18098 h 18097"/>
+                <a:gd name="connsiteX1" fmla="*/ 0 w 180022"/>
+                <a:gd name="connsiteY1" fmla="*/ 0 h 18097"/>
+              </a:gdLst>
+              <a:ahLst/>
+              <a:cxnLst>
+                <a:cxn ang="0">
+                  <a:pos x="connsiteX0" y="connsiteY0"/>
+                </a:cxn>
+                <a:cxn ang="0">
+                  <a:pos x="connsiteX1" y="connsiteY1"/>
+                </a:cxn>
+              </a:cxnLst>
+              <a:rect l="l" t="t" r="r" b="b"/>
+              <a:pathLst>
+                <a:path w="180022" h="18097">
+                  <a:moveTo>
+                    <a:pt x="180023" y="18098"/>
+                  </a:moveTo>
+                  <a:lnTo>
+                    <a:pt x="0" y="0"/>
+                  </a:lnTo>
+                </a:path>
+              </a:pathLst>
+            </a:custGeom>
+            <a:ln w="9525" cap="flat">
+              <a:solidFill>
+                <a:srgbClr val="EBC999"/>
+              </a:solidFill>
+              <a:prstDash val="solid"/>
+              <a:miter/>
+            </a:ln>
+          </p:spPr>
+          <p:txBody>
+            <a:bodyPr rtlCol="0" anchor="ctr"/>
+            <a:lstStyle/>
+            <a:p>
+              <a:endParaRPr lang="zh-CN" altLang="en-US"/>
             </a:p>
           </p:txBody>
         </p:sp>
@@ -12350,20 +12066,6 @@
               <a:defRPr/>
             </a:pPr>
             <a:r>
-              <a:rPr lang="en-US" altLang="zh-CN" b="1" dirty="0">
-                <a:solidFill>
-                  <a:schemeClr val="accent1">
-                    <a:lumMod val="75000"/>
-                  </a:schemeClr>
-                </a:solidFill>
-                <a:latin typeface="微软雅黑" panose="020B0503020204020204" pitchFamily="34" charset="-122"/>
-                <a:ea typeface="微软雅黑" panose="020B0503020204020204" pitchFamily="34" charset="-122"/>
-                <a:cs typeface="微软雅黑" panose="020B0503020204020204" pitchFamily="34" charset="-122"/>
-                <a:sym typeface="+mn-lt"/>
-              </a:rPr>
-              <a:t>{{text</a:t>
-            </a:r>
-            <a:r>
               <a:rPr lang="zh-CN" altLang="en-US" b="1" dirty="0">
                 <a:solidFill>
                   <a:schemeClr val="accent1">
@@ -12375,21 +12077,7 @@
                 <a:cs typeface="微软雅黑" panose="020B0503020204020204" pitchFamily="34" charset="-122"/>
                 <a:sym typeface="+mn-lt"/>
               </a:rPr>
-              <a:t>：</a:t>
-            </a:r>
-            <a:r>
-              <a:rPr lang="en-US" altLang="zh-CN" b="1" dirty="0">
-                <a:solidFill>
-                  <a:schemeClr val="accent1">
-                    <a:lumMod val="75000"/>
-                  </a:schemeClr>
-                </a:solidFill>
-                <a:latin typeface="微软雅黑" panose="020B0503020204020204" pitchFamily="34" charset="-122"/>
-                <a:ea typeface="微软雅黑" panose="020B0503020204020204" pitchFamily="34" charset="-122"/>
-                <a:cs typeface="微软雅黑" panose="020B0503020204020204" pitchFamily="34" charset="-122"/>
-                <a:sym typeface="+mn-lt"/>
-              </a:rPr>
-              <a:t>replace}}</a:t>
+              <a:t>知识储备</a:t>
             </a:r>
             <a:endParaRPr lang="en-US" altLang="zh-CN" b="1" dirty="0">
               <a:solidFill>
@@ -12401,6 +12089,68 @@
               <a:ea typeface="微软雅黑" panose="020B0503020204020204" pitchFamily="34" charset="-122"/>
               <a:cs typeface="微软雅黑" panose="020B0503020204020204" pitchFamily="34" charset="-122"/>
               <a:sym typeface="+mn-lt"/>
+            </a:endParaRPr>
+          </a:p>
+        </p:txBody>
+      </p:sp>
+      <p:sp>
+        <p:nvSpPr>
+          <p:cNvPr id="24" name="文本框 23"/>
+          <p:cNvSpPr txBox="1"/>
+          <p:nvPr/>
+        </p:nvSpPr>
+        <p:spPr>
+          <a:xfrm>
+            <a:off x="458470" y="2379980"/>
+            <a:ext cx="7291705" cy="3641090"/>
+          </a:xfrm>
+          <a:prstGeom prst="rect">
+            <a:avLst/>
+          </a:prstGeom>
+          <a:noFill/>
+        </p:spPr>
+        <p:txBody>
+          <a:bodyPr wrap="square" rtlCol="0">
+            <a:noAutofit/>
+          </a:bodyPr>
+          <a:lstStyle/>
+          <a:p>
+            <a:pPr indent="457200" fontAlgn="auto">
+              <a:lnSpc>
+                <a:spcPct val="150000"/>
+              </a:lnSpc>
+            </a:pPr>
+            <a:r>
+              <a:rPr lang="en-US" dirty="0">
+                <a:latin typeface="微软雅黑" panose="020B0503020204020204" pitchFamily="34" charset="-122"/>
+                <a:ea typeface="微软雅黑" panose="020B0503020204020204" pitchFamily="34" charset="-122"/>
+                <a:cs typeface="微软雅黑" panose="020B0503020204020204" pitchFamily="34" charset="-122"/>
+                <a:sym typeface="+mn-ea"/>
+              </a:rPr>
+              <a:t>{{text:</a:t>
+            </a:r>
+            <a:r>
+              <a:rPr lang="en-US" altLang="zh-CN" dirty="0">
+                <a:latin typeface="微软雅黑" panose="020B0503020204020204" pitchFamily="34" charset="-122"/>
+                <a:ea typeface="微软雅黑" panose="020B0503020204020204" pitchFamily="34" charset="-122"/>
+                <a:cs typeface="微软雅黑" panose="020B0503020204020204" pitchFamily="34" charset="-122"/>
+                <a:sym typeface="+mn-ea"/>
+              </a:rPr>
+              <a:t>content</a:t>
+            </a:r>
+            <a:r>
+              <a:rPr lang="en-US" dirty="0">
+                <a:latin typeface="微软雅黑" panose="020B0503020204020204" pitchFamily="34" charset="-122"/>
+                <a:ea typeface="微软雅黑" panose="020B0503020204020204" pitchFamily="34" charset="-122"/>
+                <a:cs typeface="微软雅黑" panose="020B0503020204020204" pitchFamily="34" charset="-122"/>
+                <a:sym typeface="+mn-ea"/>
+              </a:rPr>
+              <a:t>}}</a:t>
+            </a:r>
+            <a:endParaRPr lang="en-US" dirty="0">
+              <a:latin typeface="微软雅黑" panose="020B0503020204020204" pitchFamily="34" charset="-122"/>
+              <a:ea typeface="微软雅黑" panose="020B0503020204020204" pitchFamily="34" charset="-122"/>
+              <a:cs typeface="微软雅黑" panose="020B0503020204020204" pitchFamily="34" charset="-122"/>
             </a:endParaRPr>
           </a:p>
         </p:txBody>
@@ -12430,126 +12180,49 @@
           <a:chExt cx="0" cy="0"/>
         </a:xfrm>
       </p:grpSpPr>
-      <p:grpSp>
-        <p:nvGrpSpPr>
-          <p:cNvPr id="2" name="组合 1"/>
-          <p:cNvGrpSpPr/>
+      <p:sp>
+        <p:nvSpPr>
+          <p:cNvPr id="23" name="圆角矩形 22"/>
+          <p:cNvSpPr/>
           <p:nvPr/>
-        </p:nvGrpSpPr>
-        <p:grpSpPr>
+        </p:nvSpPr>
+        <p:spPr>
           <a:xfrm>
-            <a:off x="4241965" y="1728470"/>
+            <a:off x="4241800" y="1728470"/>
             <a:ext cx="7468870" cy="4835525"/>
-            <a:chOff x="546265" y="1728470"/>
-            <a:chExt cx="7468870" cy="4835525"/>
-          </a:xfrm>
-        </p:grpSpPr>
-        <p:sp>
-          <p:nvSpPr>
-            <p:cNvPr id="23" name="圆角矩形 22"/>
-            <p:cNvSpPr/>
-            <p:nvPr/>
-          </p:nvSpPr>
-          <p:spPr>
-            <a:xfrm>
-              <a:off x="546265" y="1728470"/>
-              <a:ext cx="7468870" cy="4835525"/>
-            </a:xfrm>
-            <a:prstGeom prst="roundRect">
-              <a:avLst/>
-            </a:prstGeom>
-            <a:solidFill>
-              <a:schemeClr val="bg1"/>
-            </a:solidFill>
-          </p:spPr>
-          <p:style>
-            <a:lnRef idx="2">
-              <a:schemeClr val="accent1">
-                <a:shade val="50000"/>
-              </a:schemeClr>
-            </a:lnRef>
-            <a:fillRef idx="1">
-              <a:schemeClr val="accent1"/>
-            </a:fillRef>
-            <a:effectRef idx="0">
-              <a:schemeClr val="accent1"/>
-            </a:effectRef>
-            <a:fontRef idx="minor">
-              <a:schemeClr val="lt1"/>
-            </a:fontRef>
-          </p:style>
-          <p:txBody>
-            <a:bodyPr rtlCol="0" anchor="ctr"/>
-            <a:lstStyle/>
-            <a:p>
-              <a:pPr algn="ctr"/>
-              <a:endParaRPr lang="zh-CN" altLang="en-US"/>
-            </a:p>
-          </p:txBody>
-        </p:sp>
-        <p:sp>
-          <p:nvSpPr>
-            <p:cNvPr id="24" name="文本框 23"/>
-            <p:cNvSpPr txBox="1"/>
-            <p:nvPr/>
-          </p:nvSpPr>
-          <p:spPr>
-            <a:xfrm>
-              <a:off x="922171" y="1860550"/>
-              <a:ext cx="6771164" cy="4554000"/>
-            </a:xfrm>
-            <a:prstGeom prst="rect">
-              <a:avLst/>
-            </a:prstGeom>
-            <a:noFill/>
-          </p:spPr>
-          <p:txBody>
-            <a:bodyPr wrap="square" rtlCol="0">
-              <a:noAutofit/>
-            </a:bodyPr>
-            <a:lstStyle/>
-            <a:p>
-              <a:pPr indent="457200" fontAlgn="auto">
-                <a:lnSpc>
-                  <a:spcPct val="150000"/>
-                </a:lnSpc>
-              </a:pPr>
-              <a:r>
-                <a:rPr lang="en-US" dirty="0">
-                  <a:latin typeface="微软雅黑" panose="020B0503020204020204" pitchFamily="34" charset="-122"/>
-                  <a:ea typeface="微软雅黑" panose="020B0503020204020204" pitchFamily="34" charset="-122"/>
-                  <a:cs typeface="微软雅黑" panose="020B0503020204020204" pitchFamily="34" charset="-122"/>
-                  <a:sym typeface="+mn-ea"/>
-                </a:rPr>
-                <a:t>{{text:</a:t>
-              </a:r>
-              <a:r>
-                <a:rPr lang="en-US" altLang="zh-CN" dirty="0">
-                  <a:latin typeface="微软雅黑" panose="020B0503020204020204" pitchFamily="34" charset="-122"/>
-                  <a:ea typeface="微软雅黑" panose="020B0503020204020204" pitchFamily="34" charset="-122"/>
-                  <a:cs typeface="微软雅黑" panose="020B0503020204020204" pitchFamily="34" charset="-122"/>
-                  <a:sym typeface="+mn-ea"/>
-                </a:rPr>
-                <a:t>content</a:t>
-              </a:r>
-              <a:r>
-                <a:rPr lang="en-US" dirty="0">
-                  <a:latin typeface="微软雅黑" panose="020B0503020204020204" pitchFamily="34" charset="-122"/>
-                  <a:ea typeface="微软雅黑" panose="020B0503020204020204" pitchFamily="34" charset="-122"/>
-                  <a:cs typeface="微软雅黑" panose="020B0503020204020204" pitchFamily="34" charset="-122"/>
-                  <a:sym typeface="+mn-ea"/>
-                </a:rPr>
-                <a:t>}}</a:t>
-              </a:r>
-              <a:endParaRPr lang="en-US" dirty="0">
-                <a:latin typeface="微软雅黑" panose="020B0503020204020204" pitchFamily="34" charset="-122"/>
-                <a:ea typeface="微软雅黑" panose="020B0503020204020204" pitchFamily="34" charset="-122"/>
-                <a:cs typeface="微软雅黑" panose="020B0503020204020204" pitchFamily="34" charset="-122"/>
-              </a:endParaRPr>
-            </a:p>
-          </p:txBody>
-        </p:sp>
-      </p:grpSp>
+          </a:xfrm>
+          <a:prstGeom prst="roundRect">
+            <a:avLst/>
+          </a:prstGeom>
+          <a:solidFill>
+            <a:schemeClr val="bg1"/>
+          </a:solidFill>
+        </p:spPr>
+        <p:style>
+          <a:lnRef idx="2">
+            <a:schemeClr val="accent1">
+              <a:shade val="50000"/>
+            </a:schemeClr>
+          </a:lnRef>
+          <a:fillRef idx="1">
+            <a:schemeClr val="accent1"/>
+          </a:fillRef>
+          <a:effectRef idx="0">
+            <a:schemeClr val="accent1"/>
+          </a:effectRef>
+          <a:fontRef idx="minor">
+            <a:schemeClr val="lt1"/>
+          </a:fontRef>
+        </p:style>
+        <p:txBody>
+          <a:bodyPr rtlCol="0" anchor="ctr"/>
+          <a:lstStyle/>
+          <a:p>
+            <a:pPr algn="ctr"/>
+            <a:endParaRPr lang="zh-CN" altLang="en-US"/>
+          </a:p>
+        </p:txBody>
+      </p:sp>
       <p:sp>
         <p:nvSpPr>
           <p:cNvPr id="25" name="矩形 24"/>
@@ -12720,20 +12393,6 @@
               <a:defRPr/>
             </a:pPr>
             <a:r>
-              <a:rPr lang="en-US" altLang="zh-CN" b="1" dirty="0">
-                <a:solidFill>
-                  <a:schemeClr val="accent1">
-                    <a:lumMod val="75000"/>
-                  </a:schemeClr>
-                </a:solidFill>
-                <a:latin typeface="微软雅黑" panose="020B0503020204020204" pitchFamily="34" charset="-122"/>
-                <a:ea typeface="微软雅黑" panose="020B0503020204020204" pitchFamily="34" charset="-122"/>
-                <a:cs typeface="微软雅黑" panose="020B0503020204020204" pitchFamily="34" charset="-122"/>
-                <a:sym typeface="+mn-lt"/>
-              </a:rPr>
-              <a:t>{{text</a:t>
-            </a:r>
-            <a:r>
               <a:rPr lang="zh-CN" altLang="en-US" b="1" dirty="0">
                 <a:solidFill>
                   <a:schemeClr val="accent1">
@@ -12745,21 +12404,7 @@
                 <a:cs typeface="微软雅黑" panose="020B0503020204020204" pitchFamily="34" charset="-122"/>
                 <a:sym typeface="+mn-lt"/>
               </a:rPr>
-              <a:t>：</a:t>
-            </a:r>
-            <a:r>
-              <a:rPr lang="en-US" altLang="zh-CN" b="1" dirty="0">
-                <a:solidFill>
-                  <a:schemeClr val="accent1">
-                    <a:lumMod val="75000"/>
-                  </a:schemeClr>
-                </a:solidFill>
-                <a:latin typeface="微软雅黑" panose="020B0503020204020204" pitchFamily="34" charset="-122"/>
-                <a:ea typeface="微软雅黑" panose="020B0503020204020204" pitchFamily="34" charset="-122"/>
-                <a:cs typeface="微软雅黑" panose="020B0503020204020204" pitchFamily="34" charset="-122"/>
-                <a:sym typeface="+mn-lt"/>
-              </a:rPr>
-              <a:t>replace}}</a:t>
+              <a:t>知识储备</a:t>
             </a:r>
             <a:endParaRPr lang="en-US" altLang="zh-CN" b="1" dirty="0">
               <a:solidFill>
@@ -12771,6 +12416,68 @@
               <a:ea typeface="微软雅黑" panose="020B0503020204020204" pitchFamily="34" charset="-122"/>
               <a:cs typeface="微软雅黑" panose="020B0503020204020204" pitchFamily="34" charset="-122"/>
               <a:sym typeface="+mn-lt"/>
+            </a:endParaRPr>
+          </a:p>
+        </p:txBody>
+      </p:sp>
+      <p:sp>
+        <p:nvSpPr>
+          <p:cNvPr id="4" name="文本框 3"/>
+          <p:cNvSpPr txBox="1"/>
+          <p:nvPr/>
+        </p:nvSpPr>
+        <p:spPr>
+          <a:xfrm>
+            <a:off x="4668671" y="1860550"/>
+            <a:ext cx="6771164" cy="4554000"/>
+          </a:xfrm>
+          <a:prstGeom prst="rect">
+            <a:avLst/>
+          </a:prstGeom>
+          <a:noFill/>
+        </p:spPr>
+        <p:txBody>
+          <a:bodyPr wrap="square" rtlCol="0">
+            <a:noAutofit/>
+          </a:bodyPr>
+          <a:lstStyle/>
+          <a:p>
+            <a:pPr indent="457200" fontAlgn="auto">
+              <a:lnSpc>
+                <a:spcPct val="150000"/>
+              </a:lnSpc>
+            </a:pPr>
+            <a:r>
+              <a:rPr lang="en-US" dirty="0">
+                <a:latin typeface="微软雅黑" panose="020B0503020204020204" pitchFamily="34" charset="-122"/>
+                <a:ea typeface="微软雅黑" panose="020B0503020204020204" pitchFamily="34" charset="-122"/>
+                <a:cs typeface="微软雅黑" panose="020B0503020204020204" pitchFamily="34" charset="-122"/>
+                <a:sym typeface="+mn-ea"/>
+              </a:rPr>
+              <a:t>{{text:</a:t>
+            </a:r>
+            <a:r>
+              <a:rPr lang="en-US" altLang="zh-CN" dirty="0">
+                <a:latin typeface="微软雅黑" panose="020B0503020204020204" pitchFamily="34" charset="-122"/>
+                <a:ea typeface="微软雅黑" panose="020B0503020204020204" pitchFamily="34" charset="-122"/>
+                <a:cs typeface="微软雅黑" panose="020B0503020204020204" pitchFamily="34" charset="-122"/>
+                <a:sym typeface="+mn-ea"/>
+              </a:rPr>
+              <a:t>content</a:t>
+            </a:r>
+            <a:r>
+              <a:rPr lang="en-US" dirty="0">
+                <a:latin typeface="微软雅黑" panose="020B0503020204020204" pitchFamily="34" charset="-122"/>
+                <a:ea typeface="微软雅黑" panose="020B0503020204020204" pitchFamily="34" charset="-122"/>
+                <a:cs typeface="微软雅黑" panose="020B0503020204020204" pitchFamily="34" charset="-122"/>
+                <a:sym typeface="+mn-ea"/>
+              </a:rPr>
+              <a:t>}}</a:t>
+            </a:r>
+            <a:endParaRPr lang="en-US" dirty="0">
+              <a:latin typeface="微软雅黑" panose="020B0503020204020204" pitchFamily="34" charset="-122"/>
+              <a:ea typeface="微软雅黑" panose="020B0503020204020204" pitchFamily="34" charset="-122"/>
+              <a:cs typeface="微软雅黑" panose="020B0503020204020204" pitchFamily="34" charset="-122"/>
             </a:endParaRPr>
           </a:p>
         </p:txBody>
@@ -13176,20 +12883,6 @@
               <a:defRPr/>
             </a:pPr>
             <a:r>
-              <a:rPr lang="en-US" altLang="zh-CN" b="1" dirty="0">
-                <a:solidFill>
-                  <a:schemeClr val="accent1">
-                    <a:lumMod val="75000"/>
-                  </a:schemeClr>
-                </a:solidFill>
-                <a:latin typeface="微软雅黑" panose="020B0503020204020204" pitchFamily="34" charset="-122"/>
-                <a:ea typeface="微软雅黑" panose="020B0503020204020204" pitchFamily="34" charset="-122"/>
-                <a:cs typeface="微软雅黑" panose="020B0503020204020204" pitchFamily="34" charset="-122"/>
-                <a:sym typeface="+mn-lt"/>
-              </a:rPr>
-              <a:t>{{text</a:t>
-            </a:r>
-            <a:r>
               <a:rPr lang="zh-CN" altLang="en-US" b="1" dirty="0">
                 <a:solidFill>
                   <a:schemeClr val="accent1">
@@ -13201,21 +12894,7 @@
                 <a:cs typeface="微软雅黑" panose="020B0503020204020204" pitchFamily="34" charset="-122"/>
                 <a:sym typeface="+mn-lt"/>
               </a:rPr>
-              <a:t>：</a:t>
-            </a:r>
-            <a:r>
-              <a:rPr lang="en-US" altLang="zh-CN" b="1" dirty="0">
-                <a:solidFill>
-                  <a:schemeClr val="accent1">
-                    <a:lumMod val="75000"/>
-                  </a:schemeClr>
-                </a:solidFill>
-                <a:latin typeface="微软雅黑" panose="020B0503020204020204" pitchFamily="34" charset="-122"/>
-                <a:ea typeface="微软雅黑" panose="020B0503020204020204" pitchFamily="34" charset="-122"/>
-                <a:cs typeface="微软雅黑" panose="020B0503020204020204" pitchFamily="34" charset="-122"/>
-                <a:sym typeface="+mn-lt"/>
-              </a:rPr>
-              <a:t>replace}}</a:t>
+              <a:t>知识储备</a:t>
             </a:r>
             <a:endParaRPr lang="en-US" altLang="zh-CN" b="1" dirty="0">
               <a:solidFill>
@@ -13256,178 +12935,98 @@
           <a:chExt cx="0" cy="0"/>
         </a:xfrm>
       </p:grpSpPr>
-      <p:grpSp>
-        <p:nvGrpSpPr>
-          <p:cNvPr id="3" name="组合 2"/>
-          <p:cNvGrpSpPr/>
+      <p:sp>
+        <p:nvSpPr>
+          <p:cNvPr id="2" name="矩形 10"/>
+          <p:cNvSpPr/>
           <p:nvPr/>
-        </p:nvGrpSpPr>
-        <p:grpSpPr>
+        </p:nvSpPr>
+        <p:spPr>
           <a:xfrm>
             <a:off x="4782820" y="1619885"/>
             <a:ext cx="7019290" cy="4445635"/>
-            <a:chOff x="674370" y="1619885"/>
-            <a:chExt cx="7019290" cy="4445635"/>
-          </a:xfrm>
-        </p:grpSpPr>
-        <p:sp>
-          <p:nvSpPr>
-            <p:cNvPr id="4" name="文本框 3"/>
-            <p:cNvSpPr txBox="1"/>
-            <p:nvPr/>
-          </p:nvSpPr>
-          <p:spPr>
-            <a:xfrm>
-              <a:off x="982345" y="1891030"/>
-              <a:ext cx="6480175" cy="3920490"/>
-            </a:xfrm>
-            <a:prstGeom prst="rect">
-              <a:avLst/>
-            </a:prstGeom>
+          </a:xfrm>
+          <a:custGeom>
+            <a:avLst/>
+            <a:gdLst/>
+            <a:ahLst/>
+            <a:cxnLst/>
+            <a:rect l="l" t="t" r="r" b="b"/>
+            <a:pathLst>
+              <a:path w="1759038" h="1334706">
+                <a:moveTo>
+                  <a:pt x="65637" y="63758"/>
+                </a:moveTo>
+                <a:lnTo>
+                  <a:pt x="65637" y="1271391"/>
+                </a:lnTo>
+                <a:lnTo>
+                  <a:pt x="1711798" y="1271391"/>
+                </a:lnTo>
+                <a:lnTo>
+                  <a:pt x="1711798" y="63758"/>
+                </a:lnTo>
+                <a:close/>
+                <a:moveTo>
+                  <a:pt x="0" y="0"/>
+                </a:moveTo>
+                <a:lnTo>
+                  <a:pt x="1759038" y="0"/>
+                </a:lnTo>
+                <a:lnTo>
+                  <a:pt x="1759038" y="1334706"/>
+                </a:lnTo>
+                <a:lnTo>
+                  <a:pt x="0" y="1334706"/>
+                </a:lnTo>
+                <a:close/>
+              </a:path>
+            </a:pathLst>
+          </a:custGeom>
+          <a:solidFill>
+            <a:schemeClr val="accent2">
+              <a:lumMod val="75000"/>
+            </a:schemeClr>
+          </a:solidFill>
+          <a:ln>
             <a:noFill/>
-            <a:ln w="9525">
-              <a:noFill/>
-            </a:ln>
-          </p:spPr>
-          <p:txBody>
-            <a:bodyPr wrap="square">
-              <a:noAutofit/>
-            </a:bodyPr>
-            <a:lstStyle/>
-            <a:p>
-              <a:pPr indent="457200" fontAlgn="auto">
-                <a:lnSpc>
-                  <a:spcPct val="150000"/>
-                </a:lnSpc>
-              </a:pPr>
-              <a:r>
-                <a:rPr lang="en-US" dirty="0">
-                  <a:latin typeface="微软雅黑" panose="020B0503020204020204" pitchFamily="34" charset="-122"/>
-                  <a:ea typeface="微软雅黑" panose="020B0503020204020204" pitchFamily="34" charset="-122"/>
-                  <a:cs typeface="微软雅黑" panose="020B0503020204020204" pitchFamily="34" charset="-122"/>
-                  <a:sym typeface="+mn-ea"/>
-                </a:rPr>
-                <a:t>{{text:</a:t>
-              </a:r>
-              <a:r>
-                <a:rPr lang="en-US" altLang="zh-CN" dirty="0">
-                  <a:latin typeface="微软雅黑" panose="020B0503020204020204" pitchFamily="34" charset="-122"/>
-                  <a:ea typeface="微软雅黑" panose="020B0503020204020204" pitchFamily="34" charset="-122"/>
-                  <a:cs typeface="微软雅黑" panose="020B0503020204020204" pitchFamily="34" charset="-122"/>
-                  <a:sym typeface="+mn-ea"/>
-                </a:rPr>
-                <a:t>content</a:t>
-              </a:r>
-              <a:r>
-                <a:rPr lang="en-US" dirty="0">
-                  <a:latin typeface="微软雅黑" panose="020B0503020204020204" pitchFamily="34" charset="-122"/>
-                  <a:ea typeface="微软雅黑" panose="020B0503020204020204" pitchFamily="34" charset="-122"/>
-                  <a:cs typeface="微软雅黑" panose="020B0503020204020204" pitchFamily="34" charset="-122"/>
-                  <a:sym typeface="+mn-ea"/>
-                </a:rPr>
-                <a:t>}}</a:t>
-              </a:r>
-              <a:endParaRPr lang="en-US" dirty="0">
-                <a:latin typeface="微软雅黑" panose="020B0503020204020204" pitchFamily="34" charset="-122"/>
-                <a:ea typeface="微软雅黑" panose="020B0503020204020204" pitchFamily="34" charset="-122"/>
-                <a:cs typeface="微软雅黑" panose="020B0503020204020204" pitchFamily="34" charset="-122"/>
-              </a:endParaRPr>
-            </a:p>
-          </p:txBody>
-        </p:sp>
-        <p:sp>
-          <p:nvSpPr>
-            <p:cNvPr id="2" name="矩形 10"/>
-            <p:cNvSpPr/>
-            <p:nvPr/>
-          </p:nvSpPr>
-          <p:spPr>
-            <a:xfrm>
-              <a:off x="674370" y="1619885"/>
-              <a:ext cx="7019290" cy="4445635"/>
-            </a:xfrm>
-            <a:custGeom>
-              <a:avLst/>
-              <a:gdLst/>
-              <a:ahLst/>
-              <a:cxnLst/>
-              <a:rect l="l" t="t" r="r" b="b"/>
-              <a:pathLst>
-                <a:path w="1759038" h="1334706">
-                  <a:moveTo>
-                    <a:pt x="65637" y="63758"/>
-                  </a:moveTo>
-                  <a:lnTo>
-                    <a:pt x="65637" y="1271391"/>
-                  </a:lnTo>
-                  <a:lnTo>
-                    <a:pt x="1711798" y="1271391"/>
-                  </a:lnTo>
-                  <a:lnTo>
-                    <a:pt x="1711798" y="63758"/>
-                  </a:lnTo>
-                  <a:close/>
-                  <a:moveTo>
-                    <a:pt x="0" y="0"/>
-                  </a:moveTo>
-                  <a:lnTo>
-                    <a:pt x="1759038" y="0"/>
-                  </a:lnTo>
-                  <a:lnTo>
-                    <a:pt x="1759038" y="1334706"/>
-                  </a:lnTo>
-                  <a:lnTo>
-                    <a:pt x="0" y="1334706"/>
-                  </a:lnTo>
-                  <a:close/>
-                </a:path>
-              </a:pathLst>
-            </a:custGeom>
-            <a:solidFill>
-              <a:schemeClr val="accent2">
-                <a:lumMod val="75000"/>
-              </a:schemeClr>
-            </a:solidFill>
-            <a:ln>
-              <a:noFill/>
-            </a:ln>
-          </p:spPr>
-          <p:style>
-            <a:lnRef idx="2">
-              <a:schemeClr val="accent1">
-                <a:shade val="50000"/>
-              </a:schemeClr>
-            </a:lnRef>
-            <a:fillRef idx="1">
-              <a:schemeClr val="accent1"/>
-            </a:fillRef>
-            <a:effectRef idx="0">
-              <a:schemeClr val="accent1"/>
-            </a:effectRef>
-            <a:fontRef idx="minor">
-              <a:schemeClr val="lt1"/>
-            </a:fontRef>
-          </p:style>
-          <p:txBody>
-            <a:bodyPr rtlCol="0" anchor="t"/>
-            <a:lstStyle/>
-            <a:p>
-              <a:pPr>
-                <a:lnSpc>
-                  <a:spcPct val="120000"/>
-                </a:lnSpc>
-              </a:pPr>
-              <a:endParaRPr lang="zh-CN" altLang="en-US">
-                <a:solidFill>
-                  <a:srgbClr val="000000"/>
-                </a:solidFill>
-                <a:cs typeface="+mn-ea"/>
-                <a:sym typeface="+mn-lt"/>
-              </a:endParaRPr>
-            </a:p>
-          </p:txBody>
-        </p:sp>
-      </p:grpSp>
+          </a:ln>
+        </p:spPr>
+        <p:style>
+          <a:lnRef idx="2">
+            <a:schemeClr val="accent1">
+              <a:shade val="50000"/>
+            </a:schemeClr>
+          </a:lnRef>
+          <a:fillRef idx="1">
+            <a:schemeClr val="accent1"/>
+          </a:fillRef>
+          <a:effectRef idx="0">
+            <a:schemeClr val="accent1"/>
+          </a:effectRef>
+          <a:fontRef idx="minor">
+            <a:schemeClr val="lt1"/>
+          </a:fontRef>
+        </p:style>
+        <p:txBody>
+          <a:bodyPr rtlCol="0" anchor="t"/>
+          <a:lstStyle/>
+          <a:p>
+            <a:pPr>
+              <a:lnSpc>
+                <a:spcPct val="120000"/>
+              </a:lnSpc>
+            </a:pPr>
+            <a:endParaRPr lang="zh-CN" altLang="en-US">
+              <a:solidFill>
+                <a:srgbClr val="000000"/>
+              </a:solidFill>
+              <a:cs typeface="+mn-ea"/>
+              <a:sym typeface="+mn-lt"/>
+            </a:endParaRPr>
+          </a:p>
+        </p:txBody>
+      </p:sp>
       <p:sp>
         <p:nvSpPr>
           <p:cNvPr id="9" name="矩形 8"/>
@@ -13598,20 +13197,6 @@
               <a:defRPr/>
             </a:pPr>
             <a:r>
-              <a:rPr lang="en-US" altLang="zh-CN" b="1" dirty="0">
-                <a:solidFill>
-                  <a:schemeClr val="accent1">
-                    <a:lumMod val="75000"/>
-                  </a:schemeClr>
-                </a:solidFill>
-                <a:latin typeface="微软雅黑" panose="020B0503020204020204" pitchFamily="34" charset="-122"/>
-                <a:ea typeface="微软雅黑" panose="020B0503020204020204" pitchFamily="34" charset="-122"/>
-                <a:cs typeface="微软雅黑" panose="020B0503020204020204" pitchFamily="34" charset="-122"/>
-                <a:sym typeface="+mn-lt"/>
-              </a:rPr>
-              <a:t>{{text</a:t>
-            </a:r>
-            <a:r>
               <a:rPr lang="zh-CN" altLang="en-US" b="1" dirty="0">
                 <a:solidFill>
                   <a:schemeClr val="accent1">
@@ -13623,21 +13208,7 @@
                 <a:cs typeface="微软雅黑" panose="020B0503020204020204" pitchFamily="34" charset="-122"/>
                 <a:sym typeface="+mn-lt"/>
               </a:rPr>
-              <a:t>：</a:t>
-            </a:r>
-            <a:r>
-              <a:rPr lang="en-US" altLang="zh-CN" b="1" dirty="0">
-                <a:solidFill>
-                  <a:schemeClr val="accent1">
-                    <a:lumMod val="75000"/>
-                  </a:schemeClr>
-                </a:solidFill>
-                <a:latin typeface="微软雅黑" panose="020B0503020204020204" pitchFamily="34" charset="-122"/>
-                <a:ea typeface="微软雅黑" panose="020B0503020204020204" pitchFamily="34" charset="-122"/>
-                <a:cs typeface="微软雅黑" panose="020B0503020204020204" pitchFamily="34" charset="-122"/>
-                <a:sym typeface="+mn-lt"/>
-              </a:rPr>
-              <a:t>replace}}</a:t>
+              <a:t>知识储备</a:t>
             </a:r>
             <a:endParaRPr lang="en-US" altLang="zh-CN" b="1" dirty="0">
               <a:solidFill>
@@ -13653,6 +13224,68 @@
           </a:p>
         </p:txBody>
       </p:sp>
+      <p:sp>
+        <p:nvSpPr>
+          <p:cNvPr id="24" name="文本框 23"/>
+          <p:cNvSpPr txBox="1"/>
+          <p:nvPr/>
+        </p:nvSpPr>
+        <p:spPr>
+          <a:xfrm>
+            <a:off x="5031105" y="1828165"/>
+            <a:ext cx="6608445" cy="4003040"/>
+          </a:xfrm>
+          <a:prstGeom prst="rect">
+            <a:avLst/>
+          </a:prstGeom>
+          <a:noFill/>
+        </p:spPr>
+        <p:txBody>
+          <a:bodyPr wrap="square" rtlCol="0">
+            <a:noAutofit/>
+          </a:bodyPr>
+          <a:lstStyle/>
+          <a:p>
+            <a:pPr indent="457200" fontAlgn="auto">
+              <a:lnSpc>
+                <a:spcPct val="150000"/>
+              </a:lnSpc>
+            </a:pPr>
+            <a:r>
+              <a:rPr lang="en-US" dirty="0">
+                <a:latin typeface="微软雅黑" panose="020B0503020204020204" pitchFamily="34" charset="-122"/>
+                <a:ea typeface="微软雅黑" panose="020B0503020204020204" pitchFamily="34" charset="-122"/>
+                <a:cs typeface="微软雅黑" panose="020B0503020204020204" pitchFamily="34" charset="-122"/>
+                <a:sym typeface="+mn-ea"/>
+              </a:rPr>
+              <a:t>{{text:</a:t>
+            </a:r>
+            <a:r>
+              <a:rPr lang="en-US" altLang="zh-CN" dirty="0">
+                <a:latin typeface="微软雅黑" panose="020B0503020204020204" pitchFamily="34" charset="-122"/>
+                <a:ea typeface="微软雅黑" panose="020B0503020204020204" pitchFamily="34" charset="-122"/>
+                <a:cs typeface="微软雅黑" panose="020B0503020204020204" pitchFamily="34" charset="-122"/>
+                <a:sym typeface="+mn-ea"/>
+              </a:rPr>
+              <a:t>content</a:t>
+            </a:r>
+            <a:r>
+              <a:rPr lang="en-US" dirty="0">
+                <a:latin typeface="微软雅黑" panose="020B0503020204020204" pitchFamily="34" charset="-122"/>
+                <a:ea typeface="微软雅黑" panose="020B0503020204020204" pitchFamily="34" charset="-122"/>
+                <a:cs typeface="微软雅黑" panose="020B0503020204020204" pitchFamily="34" charset="-122"/>
+                <a:sym typeface="+mn-ea"/>
+              </a:rPr>
+              <a:t>}}</a:t>
+            </a:r>
+            <a:endParaRPr lang="en-US" dirty="0">
+              <a:latin typeface="微软雅黑" panose="020B0503020204020204" pitchFamily="34" charset="-122"/>
+              <a:ea typeface="微软雅黑" panose="020B0503020204020204" pitchFamily="34" charset="-122"/>
+              <a:cs typeface="微软雅黑" panose="020B0503020204020204" pitchFamily="34" charset="-122"/>
+            </a:endParaRPr>
+          </a:p>
+        </p:txBody>
+      </p:sp>
     </p:spTree>
   </p:cSld>
   <p:clrMapOvr>
@@ -13688,6 +13321,955 @@
 </file>
 
 <file path=ppt/tags/tag100.xml><?xml version="1.0" encoding="utf-8"?>
+<p:tagLst xmlns:p="http://schemas.openxmlformats.org/presentationml/2006/main">
+  <p:tag name="KSO_WM_BEAUTIFY_FLAG" val=""/>
+</p:tagLst>
+</file>
+
+<file path=ppt/tags/tag101.xml><?xml version="1.0" encoding="utf-8"?>
+<p:tagLst xmlns:p="http://schemas.openxmlformats.org/presentationml/2006/main">
+  <p:tag name="KSO_WM_BEAUTIFY_FLAG" val=""/>
+</p:tagLst>
+</file>
+
+<file path=ppt/tags/tag102.xml><?xml version="1.0" encoding="utf-8"?>
+<p:tagLst xmlns:p="http://schemas.openxmlformats.org/presentationml/2006/main">
+  <p:tag name="KSO_WM_BEAUTIFY_FLAG" val=""/>
+</p:tagLst>
+</file>
+
+<file path=ppt/tags/tag103.xml><?xml version="1.0" encoding="utf-8"?>
+<p:tagLst xmlns:p="http://schemas.openxmlformats.org/presentationml/2006/main">
+  <p:tag name="KSO_WM_BEAUTIFY_FLAG" val=""/>
+</p:tagLst>
+</file>
+
+<file path=ppt/tags/tag104.xml><?xml version="1.0" encoding="utf-8"?>
+<p:tagLst xmlns:p="http://schemas.openxmlformats.org/presentationml/2006/main">
+  <p:tag name="COMMONDATA" val="eyJoZGlkIjoiYzZkNzQ4ZWFiZmQ4NTRhOWRkZTk3YTMwMjlmMmZhYmUifQ=="/>
+  <p:tag name="KSO_WPP_MARK_KEY" val="3c15e236-6e17-4788-8b7a-5fd2c15b6c5c"/>
+</p:tagLst>
+</file>
+
+<file path=ppt/tags/tag11.xml><?xml version="1.0" encoding="utf-8"?>
+<p:tagLst xmlns:p="http://schemas.openxmlformats.org/presentationml/2006/main">
+  <p:tag name="KSO_WM_UNIT_HIGHLIGHT" val="0"/>
+  <p:tag name="KSO_WM_UNIT_COMPATIBLE" val="0"/>
+  <p:tag name="KSO_WM_UNIT_DIAGRAM_ISNUMVISUAL" val="0"/>
+  <p:tag name="KSO_WM_UNIT_DIAGRAM_ISREFERUNIT" val="0"/>
+  <p:tag name="KSO_WM_UNIT_ID" val="_7**"/>
+  <p:tag name="KSO_WM_UNIT_LAYERLEVEL" val="1"/>
+  <p:tag name="KSO_WM_TAG_VERSION" val="1.0"/>
+  <p:tag name="KSO_WM_BEAUTIFY_FLAG" val="#wm#"/>
+</p:tagLst>
+</file>
+
+<file path=ppt/tags/tag12.xml><?xml version="1.0" encoding="utf-8"?>
+<p:tagLst xmlns:p="http://schemas.openxmlformats.org/presentationml/2006/main">
+  <p:tag name="KSO_WM_UNIT_HIGHLIGHT" val="0"/>
+  <p:tag name="KSO_WM_UNIT_COMPATIBLE" val="0"/>
+  <p:tag name="KSO_WM_UNIT_DIAGRAM_ISNUMVISUAL" val="0"/>
+  <p:tag name="KSO_WM_UNIT_DIAGRAM_ISREFERUNIT" val="0"/>
+  <p:tag name="KSO_WM_UNIT_ID" val="_7**"/>
+  <p:tag name="KSO_WM_UNIT_LAYERLEVEL" val="1"/>
+  <p:tag name="KSO_WM_TAG_VERSION" val="1.0"/>
+  <p:tag name="KSO_WM_BEAUTIFY_FLAG" val="#wm#"/>
+</p:tagLst>
+</file>
+
+<file path=ppt/tags/tag13.xml><?xml version="1.0" encoding="utf-8"?>
+<p:tagLst xmlns:p="http://schemas.openxmlformats.org/presentationml/2006/main">
+  <p:tag name="KSO_WM_UNIT_HIGHLIGHT" val="0"/>
+  <p:tag name="KSO_WM_UNIT_COMPATIBLE" val="0"/>
+  <p:tag name="KSO_WM_UNIT_DIAGRAM_ISNUMVISUAL" val="0"/>
+  <p:tag name="KSO_WM_UNIT_DIAGRAM_ISREFERUNIT" val="0"/>
+  <p:tag name="KSO_WM_UNIT_ID" val="_7**"/>
+  <p:tag name="KSO_WM_UNIT_LAYERLEVEL" val="1"/>
+  <p:tag name="KSO_WM_TAG_VERSION" val="1.0"/>
+  <p:tag name="KSO_WM_BEAUTIFY_FLAG" val="#wm#"/>
+</p:tagLst>
+</file>
+
+<file path=ppt/tags/tag14.xml><?xml version="1.0" encoding="utf-8"?>
+<p:tagLst xmlns:p="http://schemas.openxmlformats.org/presentationml/2006/main">
+  <p:tag name="KSO_WM_UNIT_HIGHLIGHT" val="0"/>
+  <p:tag name="KSO_WM_UNIT_COMPATIBLE" val="0"/>
+  <p:tag name="KSO_WM_UNIT_DIAGRAM_ISNUMVISUAL" val="0"/>
+  <p:tag name="KSO_WM_UNIT_DIAGRAM_ISREFERUNIT" val="0"/>
+  <p:tag name="KSO_WM_UNIT_ID" val="_1**"/>
+  <p:tag name="KSO_WM_UNIT_LAYERLEVEL" val="1"/>
+  <p:tag name="KSO_WM_TAG_VERSION" val="1.0"/>
+  <p:tag name="KSO_WM_BEAUTIFY_FLAG" val="#wm#"/>
+</p:tagLst>
+</file>
+
+<file path=ppt/tags/tag15.xml><?xml version="1.0" encoding="utf-8"?>
+<p:tagLst xmlns:p="http://schemas.openxmlformats.org/presentationml/2006/main">
+  <p:tag name="KSO_WM_UNIT_HIGHLIGHT" val="0"/>
+  <p:tag name="KSO_WM_UNIT_COMPATIBLE" val="0"/>
+  <p:tag name="KSO_WM_UNIT_DIAGRAM_ISNUMVISUAL" val="0"/>
+  <p:tag name="KSO_WM_UNIT_DIAGRAM_ISREFERUNIT" val="0"/>
+  <p:tag name="KSO_WM_UNIT_ID" val="_1**"/>
+  <p:tag name="KSO_WM_UNIT_LAYERLEVEL" val="1"/>
+  <p:tag name="KSO_WM_TAG_VERSION" val="1.0"/>
+  <p:tag name="KSO_WM_BEAUTIFY_FLAG" val="#wm#"/>
+</p:tagLst>
+</file>
+
+<file path=ppt/tags/tag16.xml><?xml version="1.0" encoding="utf-8"?>
+<p:tagLst xmlns:p="http://schemas.openxmlformats.org/presentationml/2006/main">
+  <p:tag name="KSO_WM_UNIT_HIGHLIGHT" val="0"/>
+  <p:tag name="KSO_WM_UNIT_COMPATIBLE" val="0"/>
+  <p:tag name="KSO_WM_UNIT_DIAGRAM_ISNUMVISUAL" val="0"/>
+  <p:tag name="KSO_WM_UNIT_DIAGRAM_ISREFERUNIT" val="0"/>
+  <p:tag name="KSO_WM_UNIT_ID" val="_1**"/>
+  <p:tag name="KSO_WM_UNIT_LAYERLEVEL" val="1"/>
+  <p:tag name="KSO_WM_TAG_VERSION" val="1.0"/>
+  <p:tag name="KSO_WM_BEAUTIFY_FLAG" val="#wm#"/>
+</p:tagLst>
+</file>
+
+<file path=ppt/tags/tag17.xml><?xml version="1.0" encoding="utf-8"?>
+<p:tagLst xmlns:p="http://schemas.openxmlformats.org/presentationml/2006/main">
+  <p:tag name="KSO_WM_UNIT_HIGHLIGHT" val="0"/>
+  <p:tag name="KSO_WM_UNIT_COMPATIBLE" val="0"/>
+  <p:tag name="KSO_WM_UNIT_DIAGRAM_ISNUMVISUAL" val="0"/>
+  <p:tag name="KSO_WM_UNIT_DIAGRAM_ISREFERUNIT" val="0"/>
+  <p:tag name="KSO_WM_UNIT_ID" val="_1**"/>
+  <p:tag name="KSO_WM_UNIT_LAYERLEVEL" val="1"/>
+  <p:tag name="KSO_WM_TAG_VERSION" val="1.0"/>
+  <p:tag name="KSO_WM_BEAUTIFY_FLAG" val="#wm#"/>
+</p:tagLst>
+</file>
+
+<file path=ppt/tags/tag18.xml><?xml version="1.0" encoding="utf-8"?>
+<p:tagLst xmlns:p="http://schemas.openxmlformats.org/presentationml/2006/main">
+  <p:tag name="KSO_WM_UNIT_HIGHLIGHT" val="0"/>
+  <p:tag name="KSO_WM_UNIT_COMPATIBLE" val="0"/>
+  <p:tag name="KSO_WM_UNIT_DIAGRAM_ISNUMVISUAL" val="0"/>
+  <p:tag name="KSO_WM_UNIT_DIAGRAM_ISREFERUNIT" val="0"/>
+  <p:tag name="KSO_WM_UNIT_ID" val="_1**"/>
+  <p:tag name="KSO_WM_UNIT_LAYERLEVEL" val="1"/>
+  <p:tag name="KSO_WM_TAG_VERSION" val="1.0"/>
+  <p:tag name="KSO_WM_BEAUTIFY_FLAG" val="#wm#"/>
+</p:tagLst>
+</file>
+
+<file path=ppt/tags/tag19.xml><?xml version="1.0" encoding="utf-8"?>
+<p:tagLst xmlns:p="http://schemas.openxmlformats.org/presentationml/2006/main">
+  <p:tag name="KSO_WM_UNIT_HIGHLIGHT" val="0"/>
+  <p:tag name="KSO_WM_UNIT_COMPATIBLE" val="0"/>
+  <p:tag name="KSO_WM_UNIT_DIAGRAM_ISNUMVISUAL" val="0"/>
+  <p:tag name="KSO_WM_UNIT_DIAGRAM_ISREFERUNIT" val="0"/>
+  <p:tag name="KSO_WM_UNIT_ID" val="_2**"/>
+  <p:tag name="KSO_WM_UNIT_LAYERLEVEL" val="1"/>
+  <p:tag name="KSO_WM_TAG_VERSION" val="1.0"/>
+  <p:tag name="KSO_WM_BEAUTIFY_FLAG" val="#wm#"/>
+</p:tagLst>
+</file>
+
+<file path=ppt/tags/tag2.xml><?xml version="1.0" encoding="utf-8"?>
+<p:tagLst xmlns:p="http://schemas.openxmlformats.org/presentationml/2006/main">
+  <p:tag name="KSO_WM_UNIT_HIGHLIGHT" val="0"/>
+  <p:tag name="KSO_WM_UNIT_COMPATIBLE" val="0"/>
+  <p:tag name="KSO_WM_UNIT_DIAGRAM_ISNUMVISUAL" val="0"/>
+  <p:tag name="KSO_WM_UNIT_DIAGRAM_ISREFERUNIT" val="0"/>
+  <p:tag name="KSO_WM_UNIT_ID" val="_11**"/>
+  <p:tag name="KSO_WM_UNIT_LAYERLEVEL" val="1"/>
+  <p:tag name="KSO_WM_TAG_VERSION" val="1.0"/>
+  <p:tag name="KSO_WM_BEAUTIFY_FLAG" val="#wm#"/>
+</p:tagLst>
+</file>
+
+<file path=ppt/tags/tag20.xml><?xml version="1.0" encoding="utf-8"?>
+<p:tagLst xmlns:p="http://schemas.openxmlformats.org/presentationml/2006/main">
+  <p:tag name="KSO_WM_UNIT_HIGHLIGHT" val="0"/>
+  <p:tag name="KSO_WM_UNIT_COMPATIBLE" val="0"/>
+  <p:tag name="KSO_WM_UNIT_DIAGRAM_ISNUMVISUAL" val="0"/>
+  <p:tag name="KSO_WM_UNIT_DIAGRAM_ISREFERUNIT" val="0"/>
+  <p:tag name="KSO_WM_UNIT_ID" val="_2**"/>
+  <p:tag name="KSO_WM_UNIT_LAYERLEVEL" val="1"/>
+  <p:tag name="KSO_WM_TAG_VERSION" val="1.0"/>
+  <p:tag name="KSO_WM_BEAUTIFY_FLAG" val="#wm#"/>
+</p:tagLst>
+</file>
+
+<file path=ppt/tags/tag21.xml><?xml version="1.0" encoding="utf-8"?>
+<p:tagLst xmlns:p="http://schemas.openxmlformats.org/presentationml/2006/main">
+  <p:tag name="KSO_WM_UNIT_HIGHLIGHT" val="0"/>
+  <p:tag name="KSO_WM_UNIT_COMPATIBLE" val="0"/>
+  <p:tag name="KSO_WM_UNIT_DIAGRAM_ISNUMVISUAL" val="0"/>
+  <p:tag name="KSO_WM_UNIT_DIAGRAM_ISREFERUNIT" val="0"/>
+  <p:tag name="KSO_WM_UNIT_ID" val="_2**"/>
+  <p:tag name="KSO_WM_UNIT_LAYERLEVEL" val="1"/>
+  <p:tag name="KSO_WM_TAG_VERSION" val="1.0"/>
+  <p:tag name="KSO_WM_BEAUTIFY_FLAG" val="#wm#"/>
+</p:tagLst>
+</file>
+
+<file path=ppt/tags/tag22.xml><?xml version="1.0" encoding="utf-8"?>
+<p:tagLst xmlns:p="http://schemas.openxmlformats.org/presentationml/2006/main">
+  <p:tag name="KSO_WM_UNIT_HIGHLIGHT" val="0"/>
+  <p:tag name="KSO_WM_UNIT_COMPATIBLE" val="0"/>
+  <p:tag name="KSO_WM_UNIT_DIAGRAM_ISNUMVISUAL" val="0"/>
+  <p:tag name="KSO_WM_UNIT_DIAGRAM_ISREFERUNIT" val="0"/>
+  <p:tag name="KSO_WM_UNIT_ID" val="_2**"/>
+  <p:tag name="KSO_WM_UNIT_LAYERLEVEL" val="1"/>
+  <p:tag name="KSO_WM_TAG_VERSION" val="1.0"/>
+  <p:tag name="KSO_WM_BEAUTIFY_FLAG" val="#wm#"/>
+</p:tagLst>
+</file>
+
+<file path=ppt/tags/tag23.xml><?xml version="1.0" encoding="utf-8"?>
+<p:tagLst xmlns:p="http://schemas.openxmlformats.org/presentationml/2006/main">
+  <p:tag name="KSO_WM_UNIT_HIGHLIGHT" val="0"/>
+  <p:tag name="KSO_WM_UNIT_COMPATIBLE" val="0"/>
+  <p:tag name="KSO_WM_UNIT_DIAGRAM_ISNUMVISUAL" val="0"/>
+  <p:tag name="KSO_WM_UNIT_DIAGRAM_ISREFERUNIT" val="0"/>
+  <p:tag name="KSO_WM_UNIT_ID" val="_2**"/>
+  <p:tag name="KSO_WM_UNIT_LAYERLEVEL" val="1"/>
+  <p:tag name="KSO_WM_TAG_VERSION" val="1.0"/>
+  <p:tag name="KSO_WM_BEAUTIFY_FLAG" val="#wm#"/>
+</p:tagLst>
+</file>
+
+<file path=ppt/tags/tag24.xml><?xml version="1.0" encoding="utf-8"?>
+<p:tagLst xmlns:p="http://schemas.openxmlformats.org/presentationml/2006/main">
+  <p:tag name="KSO_WM_UNIT_HIGHLIGHT" val="0"/>
+  <p:tag name="KSO_WM_UNIT_COMPATIBLE" val="0"/>
+  <p:tag name="KSO_WM_UNIT_DIAGRAM_ISNUMVISUAL" val="0"/>
+  <p:tag name="KSO_WM_UNIT_DIAGRAM_ISREFERUNIT" val="0"/>
+  <p:tag name="KSO_WM_UNIT_ID" val="_3**"/>
+  <p:tag name="KSO_WM_UNIT_LAYERLEVEL" val="1"/>
+  <p:tag name="KSO_WM_TAG_VERSION" val="1.0"/>
+  <p:tag name="KSO_WM_BEAUTIFY_FLAG" val="#wm#"/>
+</p:tagLst>
+</file>
+
+<file path=ppt/tags/tag25.xml><?xml version="1.0" encoding="utf-8"?>
+<p:tagLst xmlns:p="http://schemas.openxmlformats.org/presentationml/2006/main">
+  <p:tag name="KSO_WM_UNIT_HIGHLIGHT" val="0"/>
+  <p:tag name="KSO_WM_UNIT_COMPATIBLE" val="0"/>
+  <p:tag name="KSO_WM_UNIT_DIAGRAM_ISNUMVISUAL" val="0"/>
+  <p:tag name="KSO_WM_UNIT_DIAGRAM_ISREFERUNIT" val="0"/>
+  <p:tag name="KSO_WM_UNIT_ID" val="_3**"/>
+  <p:tag name="KSO_WM_UNIT_LAYERLEVEL" val="1"/>
+  <p:tag name="KSO_WM_TAG_VERSION" val="1.0"/>
+  <p:tag name="KSO_WM_BEAUTIFY_FLAG" val="#wm#"/>
+</p:tagLst>
+</file>
+
+<file path=ppt/tags/tag26.xml><?xml version="1.0" encoding="utf-8"?>
+<p:tagLst xmlns:p="http://schemas.openxmlformats.org/presentationml/2006/main">
+  <p:tag name="KSO_WM_UNIT_HIGHLIGHT" val="0"/>
+  <p:tag name="KSO_WM_UNIT_COMPATIBLE" val="0"/>
+  <p:tag name="KSO_WM_UNIT_DIAGRAM_ISNUMVISUAL" val="0"/>
+  <p:tag name="KSO_WM_UNIT_DIAGRAM_ISREFERUNIT" val="0"/>
+  <p:tag name="KSO_WM_UNIT_ID" val="_3**"/>
+  <p:tag name="KSO_WM_UNIT_LAYERLEVEL" val="1"/>
+  <p:tag name="KSO_WM_TAG_VERSION" val="1.0"/>
+  <p:tag name="KSO_WM_BEAUTIFY_FLAG" val="#wm#"/>
+</p:tagLst>
+</file>
+
+<file path=ppt/tags/tag27.xml><?xml version="1.0" encoding="utf-8"?>
+<p:tagLst xmlns:p="http://schemas.openxmlformats.org/presentationml/2006/main">
+  <p:tag name="KSO_WM_UNIT_HIGHLIGHT" val="0"/>
+  <p:tag name="KSO_WM_UNIT_COMPATIBLE" val="0"/>
+  <p:tag name="KSO_WM_UNIT_DIAGRAM_ISNUMVISUAL" val="0"/>
+  <p:tag name="KSO_WM_UNIT_DIAGRAM_ISREFERUNIT" val="0"/>
+  <p:tag name="KSO_WM_UNIT_ID" val="_3**"/>
+  <p:tag name="KSO_WM_UNIT_LAYERLEVEL" val="1"/>
+  <p:tag name="KSO_WM_TAG_VERSION" val="1.0"/>
+  <p:tag name="KSO_WM_BEAUTIFY_FLAG" val="#wm#"/>
+</p:tagLst>
+</file>
+
+<file path=ppt/tags/tag28.xml><?xml version="1.0" encoding="utf-8"?>
+<p:tagLst xmlns:p="http://schemas.openxmlformats.org/presentationml/2006/main">
+  <p:tag name="KSO_WM_UNIT_HIGHLIGHT" val="0"/>
+  <p:tag name="KSO_WM_UNIT_COMPATIBLE" val="0"/>
+  <p:tag name="KSO_WM_UNIT_DIAGRAM_ISNUMVISUAL" val="0"/>
+  <p:tag name="KSO_WM_UNIT_DIAGRAM_ISREFERUNIT" val="0"/>
+  <p:tag name="KSO_WM_UNIT_ID" val="_3**"/>
+  <p:tag name="KSO_WM_UNIT_LAYERLEVEL" val="1"/>
+  <p:tag name="KSO_WM_TAG_VERSION" val="1.0"/>
+  <p:tag name="KSO_WM_BEAUTIFY_FLAG" val="#wm#"/>
+</p:tagLst>
+</file>
+
+<file path=ppt/tags/tag29.xml><?xml version="1.0" encoding="utf-8"?>
+<p:tagLst xmlns:p="http://schemas.openxmlformats.org/presentationml/2006/main">
+  <p:tag name="KSO_WM_UNIT_HIGHLIGHT" val="0"/>
+  <p:tag name="KSO_WM_UNIT_COMPATIBLE" val="0"/>
+  <p:tag name="KSO_WM_UNIT_DIAGRAM_ISNUMVISUAL" val="0"/>
+  <p:tag name="KSO_WM_UNIT_DIAGRAM_ISREFERUNIT" val="0"/>
+  <p:tag name="KSO_WM_UNIT_ID" val="_4**"/>
+  <p:tag name="KSO_WM_UNIT_LAYERLEVEL" val="1"/>
+  <p:tag name="KSO_WM_TAG_VERSION" val="1.0"/>
+  <p:tag name="KSO_WM_BEAUTIFY_FLAG" val="#wm#"/>
+</p:tagLst>
+</file>
+
+<file path=ppt/tags/tag3.xml><?xml version="1.0" encoding="utf-8"?>
+<p:tagLst xmlns:p="http://schemas.openxmlformats.org/presentationml/2006/main">
+  <p:tag name="KSO_WM_UNIT_HIGHLIGHT" val="0"/>
+  <p:tag name="KSO_WM_UNIT_COMPATIBLE" val="0"/>
+  <p:tag name="KSO_WM_UNIT_DIAGRAM_ISNUMVISUAL" val="0"/>
+  <p:tag name="KSO_WM_UNIT_DIAGRAM_ISREFERUNIT" val="0"/>
+  <p:tag name="KSO_WM_UNIT_ID" val="_11**"/>
+  <p:tag name="KSO_WM_UNIT_LAYERLEVEL" val="1"/>
+  <p:tag name="KSO_WM_TAG_VERSION" val="1.0"/>
+  <p:tag name="KSO_WM_BEAUTIFY_FLAG" val="#wm#"/>
+</p:tagLst>
+</file>
+
+<file path=ppt/tags/tag30.xml><?xml version="1.0" encoding="utf-8"?>
+<p:tagLst xmlns:p="http://schemas.openxmlformats.org/presentationml/2006/main">
+  <p:tag name="KSO_WM_UNIT_HIGHLIGHT" val="0"/>
+  <p:tag name="KSO_WM_UNIT_COMPATIBLE" val="0"/>
+  <p:tag name="KSO_WM_UNIT_DIAGRAM_ISNUMVISUAL" val="0"/>
+  <p:tag name="KSO_WM_UNIT_DIAGRAM_ISREFERUNIT" val="0"/>
+  <p:tag name="KSO_WM_UNIT_ID" val="_4**"/>
+  <p:tag name="KSO_WM_UNIT_LAYERLEVEL" val="1"/>
+  <p:tag name="KSO_WM_TAG_VERSION" val="1.0"/>
+  <p:tag name="KSO_WM_BEAUTIFY_FLAG" val="#wm#"/>
+</p:tagLst>
+</file>
+
+<file path=ppt/tags/tag31.xml><?xml version="1.0" encoding="utf-8"?>
+<p:tagLst xmlns:p="http://schemas.openxmlformats.org/presentationml/2006/main">
+  <p:tag name="KSO_WM_UNIT_HIGHLIGHT" val="0"/>
+  <p:tag name="KSO_WM_UNIT_COMPATIBLE" val="0"/>
+  <p:tag name="KSO_WM_UNIT_DIAGRAM_ISNUMVISUAL" val="0"/>
+  <p:tag name="KSO_WM_UNIT_DIAGRAM_ISREFERUNIT" val="0"/>
+  <p:tag name="KSO_WM_UNIT_ID" val="_4**"/>
+  <p:tag name="KSO_WM_UNIT_LAYERLEVEL" val="1"/>
+  <p:tag name="KSO_WM_TAG_VERSION" val="1.0"/>
+  <p:tag name="KSO_WM_BEAUTIFY_FLAG" val="#wm#"/>
+</p:tagLst>
+</file>
+
+<file path=ppt/tags/tag32.xml><?xml version="1.0" encoding="utf-8"?>
+<p:tagLst xmlns:p="http://schemas.openxmlformats.org/presentationml/2006/main">
+  <p:tag name="KSO_WM_UNIT_HIGHLIGHT" val="0"/>
+  <p:tag name="KSO_WM_UNIT_COMPATIBLE" val="0"/>
+  <p:tag name="KSO_WM_UNIT_DIAGRAM_ISNUMVISUAL" val="0"/>
+  <p:tag name="KSO_WM_UNIT_DIAGRAM_ISREFERUNIT" val="0"/>
+  <p:tag name="KSO_WM_UNIT_ID" val="_4**"/>
+  <p:tag name="KSO_WM_UNIT_LAYERLEVEL" val="1"/>
+  <p:tag name="KSO_WM_TAG_VERSION" val="1.0"/>
+  <p:tag name="KSO_WM_BEAUTIFY_FLAG" val="#wm#"/>
+</p:tagLst>
+</file>
+
+<file path=ppt/tags/tag33.xml><?xml version="1.0" encoding="utf-8"?>
+<p:tagLst xmlns:p="http://schemas.openxmlformats.org/presentationml/2006/main">
+  <p:tag name="KSO_WM_UNIT_HIGHLIGHT" val="0"/>
+  <p:tag name="KSO_WM_UNIT_COMPATIBLE" val="0"/>
+  <p:tag name="KSO_WM_UNIT_DIAGRAM_ISNUMVISUAL" val="0"/>
+  <p:tag name="KSO_WM_UNIT_DIAGRAM_ISREFERUNIT" val="0"/>
+  <p:tag name="KSO_WM_UNIT_ID" val="_4**"/>
+  <p:tag name="KSO_WM_UNIT_LAYERLEVEL" val="1"/>
+  <p:tag name="KSO_WM_TAG_VERSION" val="1.0"/>
+  <p:tag name="KSO_WM_BEAUTIFY_FLAG" val="#wm#"/>
+</p:tagLst>
+</file>
+
+<file path=ppt/tags/tag34.xml><?xml version="1.0" encoding="utf-8"?>
+<p:tagLst xmlns:p="http://schemas.openxmlformats.org/presentationml/2006/main">
+  <p:tag name="KSO_WM_UNIT_HIGHLIGHT" val="0"/>
+  <p:tag name="KSO_WM_UNIT_COMPATIBLE" val="0"/>
+  <p:tag name="KSO_WM_UNIT_DIAGRAM_ISNUMVISUAL" val="0"/>
+  <p:tag name="KSO_WM_UNIT_DIAGRAM_ISREFERUNIT" val="0"/>
+  <p:tag name="KSO_WM_UNIT_ID" val="_4**"/>
+  <p:tag name="KSO_WM_UNIT_LAYERLEVEL" val="1"/>
+  <p:tag name="KSO_WM_TAG_VERSION" val="1.0"/>
+  <p:tag name="KSO_WM_BEAUTIFY_FLAG" val="#wm#"/>
+</p:tagLst>
+</file>
+
+<file path=ppt/tags/tag35.xml><?xml version="1.0" encoding="utf-8"?>
+<p:tagLst xmlns:p="http://schemas.openxmlformats.org/presentationml/2006/main">
+  <p:tag name="KSO_WM_UNIT_HIGHLIGHT" val="0"/>
+  <p:tag name="KSO_WM_UNIT_COMPATIBLE" val="0"/>
+  <p:tag name="KSO_WM_UNIT_DIAGRAM_ISNUMVISUAL" val="0"/>
+  <p:tag name="KSO_WM_UNIT_DIAGRAM_ISREFERUNIT" val="0"/>
+  <p:tag name="KSO_WM_UNIT_ID" val="_5**"/>
+  <p:tag name="KSO_WM_UNIT_LAYERLEVEL" val="1"/>
+  <p:tag name="KSO_WM_TAG_VERSION" val="1.0"/>
+  <p:tag name="KSO_WM_BEAUTIFY_FLAG" val="#wm#"/>
+</p:tagLst>
+</file>
+
+<file path=ppt/tags/tag36.xml><?xml version="1.0" encoding="utf-8"?>
+<p:tagLst xmlns:p="http://schemas.openxmlformats.org/presentationml/2006/main">
+  <p:tag name="KSO_WM_UNIT_HIGHLIGHT" val="0"/>
+  <p:tag name="KSO_WM_UNIT_COMPATIBLE" val="0"/>
+  <p:tag name="KSO_WM_UNIT_DIAGRAM_ISNUMVISUAL" val="0"/>
+  <p:tag name="KSO_WM_UNIT_DIAGRAM_ISREFERUNIT" val="0"/>
+  <p:tag name="KSO_WM_UNIT_ID" val="_5**"/>
+  <p:tag name="KSO_WM_UNIT_LAYERLEVEL" val="1"/>
+  <p:tag name="KSO_WM_TAG_VERSION" val="1.0"/>
+  <p:tag name="KSO_WM_BEAUTIFY_FLAG" val="#wm#"/>
+</p:tagLst>
+</file>
+
+<file path=ppt/tags/tag37.xml><?xml version="1.0" encoding="utf-8"?>
+<p:tagLst xmlns:p="http://schemas.openxmlformats.org/presentationml/2006/main">
+  <p:tag name="KSO_WM_UNIT_HIGHLIGHT" val="0"/>
+  <p:tag name="KSO_WM_UNIT_COMPATIBLE" val="0"/>
+  <p:tag name="KSO_WM_UNIT_DIAGRAM_ISNUMVISUAL" val="0"/>
+  <p:tag name="KSO_WM_UNIT_DIAGRAM_ISREFERUNIT" val="0"/>
+  <p:tag name="KSO_WM_UNIT_ID" val="_5**"/>
+  <p:tag name="KSO_WM_UNIT_LAYERLEVEL" val="1"/>
+  <p:tag name="KSO_WM_TAG_VERSION" val="1.0"/>
+  <p:tag name="KSO_WM_BEAUTIFY_FLAG" val="#wm#"/>
+</p:tagLst>
+</file>
+
+<file path=ppt/tags/tag38.xml><?xml version="1.0" encoding="utf-8"?>
+<p:tagLst xmlns:p="http://schemas.openxmlformats.org/presentationml/2006/main">
+  <p:tag name="KSO_WM_UNIT_HIGHLIGHT" val="0"/>
+  <p:tag name="KSO_WM_UNIT_COMPATIBLE" val="0"/>
+  <p:tag name="KSO_WM_UNIT_DIAGRAM_ISNUMVISUAL" val="0"/>
+  <p:tag name="KSO_WM_UNIT_DIAGRAM_ISREFERUNIT" val="0"/>
+  <p:tag name="KSO_WM_UNIT_ID" val="_5**"/>
+  <p:tag name="KSO_WM_UNIT_LAYERLEVEL" val="1"/>
+  <p:tag name="KSO_WM_TAG_VERSION" val="1.0"/>
+  <p:tag name="KSO_WM_BEAUTIFY_FLAG" val="#wm#"/>
+</p:tagLst>
+</file>
+
+<file path=ppt/tags/tag39.xml><?xml version="1.0" encoding="utf-8"?>
+<p:tagLst xmlns:p="http://schemas.openxmlformats.org/presentationml/2006/main">
+  <p:tag name="KSO_WM_UNIT_HIGHLIGHT" val="0"/>
+  <p:tag name="KSO_WM_UNIT_COMPATIBLE" val="0"/>
+  <p:tag name="KSO_WM_UNIT_DIAGRAM_ISNUMVISUAL" val="0"/>
+  <p:tag name="KSO_WM_UNIT_DIAGRAM_ISREFERUNIT" val="0"/>
+  <p:tag name="KSO_WM_UNIT_ID" val="_5**"/>
+  <p:tag name="KSO_WM_UNIT_LAYERLEVEL" val="1"/>
+  <p:tag name="KSO_WM_TAG_VERSION" val="1.0"/>
+  <p:tag name="KSO_WM_BEAUTIFY_FLAG" val="#wm#"/>
+</p:tagLst>
+</file>
+
+<file path=ppt/tags/tag4.xml><?xml version="1.0" encoding="utf-8"?>
+<p:tagLst xmlns:p="http://schemas.openxmlformats.org/presentationml/2006/main">
+  <p:tag name="KSO_WM_UNIT_HIGHLIGHT" val="0"/>
+  <p:tag name="KSO_WM_UNIT_COMPATIBLE" val="0"/>
+  <p:tag name="KSO_WM_UNIT_DIAGRAM_ISNUMVISUAL" val="0"/>
+  <p:tag name="KSO_WM_UNIT_DIAGRAM_ISREFERUNIT" val="0"/>
+  <p:tag name="KSO_WM_UNIT_ID" val="_11**"/>
+  <p:tag name="KSO_WM_UNIT_LAYERLEVEL" val="1"/>
+  <p:tag name="KSO_WM_TAG_VERSION" val="1.0"/>
+  <p:tag name="KSO_WM_BEAUTIFY_FLAG" val="#wm#"/>
+</p:tagLst>
+</file>
+
+<file path=ppt/tags/tag40.xml><?xml version="1.0" encoding="utf-8"?>
+<p:tagLst xmlns:p="http://schemas.openxmlformats.org/presentationml/2006/main">
+  <p:tag name="KSO_WM_UNIT_HIGHLIGHT" val="0"/>
+  <p:tag name="KSO_WM_UNIT_COMPATIBLE" val="0"/>
+  <p:tag name="KSO_WM_UNIT_DIAGRAM_ISNUMVISUAL" val="0"/>
+  <p:tag name="KSO_WM_UNIT_DIAGRAM_ISREFERUNIT" val="0"/>
+  <p:tag name="KSO_WM_UNIT_ID" val="_5**"/>
+  <p:tag name="KSO_WM_UNIT_LAYERLEVEL" val="1"/>
+  <p:tag name="KSO_WM_TAG_VERSION" val="1.0"/>
+  <p:tag name="KSO_WM_BEAUTIFY_FLAG" val="#wm#"/>
+</p:tagLst>
+</file>
+
+<file path=ppt/tags/tag41.xml><?xml version="1.0" encoding="utf-8"?>
+<p:tagLst xmlns:p="http://schemas.openxmlformats.org/presentationml/2006/main">
+  <p:tag name="KSO_WM_UNIT_HIGHLIGHT" val="0"/>
+  <p:tag name="KSO_WM_UNIT_COMPATIBLE" val="0"/>
+  <p:tag name="KSO_WM_UNIT_DIAGRAM_ISNUMVISUAL" val="0"/>
+  <p:tag name="KSO_WM_UNIT_DIAGRAM_ISREFERUNIT" val="0"/>
+  <p:tag name="KSO_WM_UNIT_ID" val="_5**"/>
+  <p:tag name="KSO_WM_UNIT_LAYERLEVEL" val="1"/>
+  <p:tag name="KSO_WM_TAG_VERSION" val="1.0"/>
+  <p:tag name="KSO_WM_BEAUTIFY_FLAG" val="#wm#"/>
+</p:tagLst>
+</file>
+
+<file path=ppt/tags/tag42.xml><?xml version="1.0" encoding="utf-8"?>
+<p:tagLst xmlns:p="http://schemas.openxmlformats.org/presentationml/2006/main">
+  <p:tag name="KSO_WM_UNIT_HIGHLIGHT" val="0"/>
+  <p:tag name="KSO_WM_UNIT_COMPATIBLE" val="0"/>
+  <p:tag name="KSO_WM_UNIT_DIAGRAM_ISNUMVISUAL" val="0"/>
+  <p:tag name="KSO_WM_UNIT_DIAGRAM_ISREFERUNIT" val="0"/>
+  <p:tag name="KSO_WM_UNIT_ID" val="_5**"/>
+  <p:tag name="KSO_WM_UNIT_LAYERLEVEL" val="1"/>
+  <p:tag name="KSO_WM_TAG_VERSION" val="1.0"/>
+  <p:tag name="KSO_WM_BEAUTIFY_FLAG" val="#wm#"/>
+</p:tagLst>
+</file>
+
+<file path=ppt/tags/tag43.xml><?xml version="1.0" encoding="utf-8"?>
+<p:tagLst xmlns:p="http://schemas.openxmlformats.org/presentationml/2006/main">
+  <p:tag name="KSO_WM_UNIT_HIGHLIGHT" val="0"/>
+  <p:tag name="KSO_WM_UNIT_COMPATIBLE" val="0"/>
+  <p:tag name="KSO_WM_UNIT_DIAGRAM_ISNUMVISUAL" val="0"/>
+  <p:tag name="KSO_WM_UNIT_DIAGRAM_ISREFERUNIT" val="0"/>
+  <p:tag name="KSO_WM_UNIT_ID" val="_6**"/>
+  <p:tag name="KSO_WM_UNIT_LAYERLEVEL" val="1"/>
+  <p:tag name="KSO_WM_TAG_VERSION" val="1.0"/>
+  <p:tag name="KSO_WM_BEAUTIFY_FLAG" val="#wm#"/>
+</p:tagLst>
+</file>
+
+<file path=ppt/tags/tag44.xml><?xml version="1.0" encoding="utf-8"?>
+<p:tagLst xmlns:p="http://schemas.openxmlformats.org/presentationml/2006/main">
+  <p:tag name="KSO_WM_UNIT_HIGHLIGHT" val="0"/>
+  <p:tag name="KSO_WM_UNIT_COMPATIBLE" val="0"/>
+  <p:tag name="KSO_WM_UNIT_DIAGRAM_ISNUMVISUAL" val="0"/>
+  <p:tag name="KSO_WM_UNIT_DIAGRAM_ISREFERUNIT" val="0"/>
+  <p:tag name="KSO_WM_UNIT_ID" val="_6**"/>
+  <p:tag name="KSO_WM_UNIT_LAYERLEVEL" val="1"/>
+  <p:tag name="KSO_WM_TAG_VERSION" val="1.0"/>
+  <p:tag name="KSO_WM_BEAUTIFY_FLAG" val="#wm#"/>
+</p:tagLst>
+</file>
+
+<file path=ppt/tags/tag45.xml><?xml version="1.0" encoding="utf-8"?>
+<p:tagLst xmlns:p="http://schemas.openxmlformats.org/presentationml/2006/main">
+  <p:tag name="KSO_WM_UNIT_HIGHLIGHT" val="0"/>
+  <p:tag name="KSO_WM_UNIT_COMPATIBLE" val="0"/>
+  <p:tag name="KSO_WM_UNIT_DIAGRAM_ISNUMVISUAL" val="0"/>
+  <p:tag name="KSO_WM_UNIT_DIAGRAM_ISREFERUNIT" val="0"/>
+  <p:tag name="KSO_WM_UNIT_ID" val="_6**"/>
+  <p:tag name="KSO_WM_UNIT_LAYERLEVEL" val="1"/>
+  <p:tag name="KSO_WM_TAG_VERSION" val="1.0"/>
+  <p:tag name="KSO_WM_BEAUTIFY_FLAG" val="#wm#"/>
+</p:tagLst>
+</file>
+
+<file path=ppt/tags/tag46.xml><?xml version="1.0" encoding="utf-8"?>
+<p:tagLst xmlns:p="http://schemas.openxmlformats.org/presentationml/2006/main">
+  <p:tag name="KSO_WM_UNIT_HIGHLIGHT" val="0"/>
+  <p:tag name="KSO_WM_UNIT_COMPATIBLE" val="0"/>
+  <p:tag name="KSO_WM_UNIT_DIAGRAM_ISNUMVISUAL" val="0"/>
+  <p:tag name="KSO_WM_UNIT_DIAGRAM_ISREFERUNIT" val="0"/>
+  <p:tag name="KSO_WM_UNIT_ID" val="_6**"/>
+  <p:tag name="KSO_WM_UNIT_LAYERLEVEL" val="1"/>
+  <p:tag name="KSO_WM_TAG_VERSION" val="1.0"/>
+  <p:tag name="KSO_WM_BEAUTIFY_FLAG" val="#wm#"/>
+</p:tagLst>
+</file>
+
+<file path=ppt/tags/tag47.xml><?xml version="1.0" encoding="utf-8"?>
+<p:tagLst xmlns:p="http://schemas.openxmlformats.org/presentationml/2006/main">
+  <p:tag name="KSO_WM_UNIT_HIGHLIGHT" val="0"/>
+  <p:tag name="KSO_WM_UNIT_COMPATIBLE" val="0"/>
+  <p:tag name="KSO_WM_UNIT_DIAGRAM_ISNUMVISUAL" val="0"/>
+  <p:tag name="KSO_WM_UNIT_DIAGRAM_ISREFERUNIT" val="0"/>
+  <p:tag name="KSO_WM_UNIT_ID" val="_7**"/>
+  <p:tag name="KSO_WM_UNIT_LAYERLEVEL" val="1"/>
+  <p:tag name="KSO_WM_TAG_VERSION" val="1.0"/>
+  <p:tag name="KSO_WM_BEAUTIFY_FLAG" val="#wm#"/>
+</p:tagLst>
+</file>
+
+<file path=ppt/tags/tag48.xml><?xml version="1.0" encoding="utf-8"?>
+<p:tagLst xmlns:p="http://schemas.openxmlformats.org/presentationml/2006/main">
+  <p:tag name="KSO_WM_UNIT_HIGHLIGHT" val="0"/>
+  <p:tag name="KSO_WM_UNIT_COMPATIBLE" val="0"/>
+  <p:tag name="KSO_WM_UNIT_DIAGRAM_ISNUMVISUAL" val="0"/>
+  <p:tag name="KSO_WM_UNIT_DIAGRAM_ISREFERUNIT" val="0"/>
+  <p:tag name="KSO_WM_UNIT_ID" val="_7**"/>
+  <p:tag name="KSO_WM_UNIT_LAYERLEVEL" val="1"/>
+  <p:tag name="KSO_WM_TAG_VERSION" val="1.0"/>
+  <p:tag name="KSO_WM_BEAUTIFY_FLAG" val="#wm#"/>
+</p:tagLst>
+</file>
+
+<file path=ppt/tags/tag49.xml><?xml version="1.0" encoding="utf-8"?>
+<p:tagLst xmlns:p="http://schemas.openxmlformats.org/presentationml/2006/main">
+  <p:tag name="KSO_WM_UNIT_HIGHLIGHT" val="0"/>
+  <p:tag name="KSO_WM_UNIT_COMPATIBLE" val="0"/>
+  <p:tag name="KSO_WM_UNIT_DIAGRAM_ISNUMVISUAL" val="0"/>
+  <p:tag name="KSO_WM_UNIT_DIAGRAM_ISREFERUNIT" val="0"/>
+  <p:tag name="KSO_WM_UNIT_ID" val="_7**"/>
+  <p:tag name="KSO_WM_UNIT_LAYERLEVEL" val="1"/>
+  <p:tag name="KSO_WM_TAG_VERSION" val="1.0"/>
+  <p:tag name="KSO_WM_BEAUTIFY_FLAG" val="#wm#"/>
+</p:tagLst>
+</file>
+
+<file path=ppt/tags/tag5.xml><?xml version="1.0" encoding="utf-8"?>
+<p:tagLst xmlns:p="http://schemas.openxmlformats.org/presentationml/2006/main">
+  <p:tag name="KSO_WM_UNIT_HIGHLIGHT" val="0"/>
+  <p:tag name="KSO_WM_UNIT_COMPATIBLE" val="0"/>
+  <p:tag name="KSO_WM_UNIT_DIAGRAM_ISNUMVISUAL" val="0"/>
+  <p:tag name="KSO_WM_UNIT_DIAGRAM_ISREFERUNIT" val="0"/>
+  <p:tag name="KSO_WM_UNIT_ID" val="_11**"/>
+  <p:tag name="KSO_WM_UNIT_LAYERLEVEL" val="1"/>
+  <p:tag name="KSO_WM_TAG_VERSION" val="1.0"/>
+  <p:tag name="KSO_WM_BEAUTIFY_FLAG" val="#wm#"/>
+</p:tagLst>
+</file>
+
+<file path=ppt/tags/tag50.xml><?xml version="1.0" encoding="utf-8"?>
+<p:tagLst xmlns:p="http://schemas.openxmlformats.org/presentationml/2006/main">
+  <p:tag name="KSO_WM_UNIT_HIGHLIGHT" val="0"/>
+  <p:tag name="KSO_WM_UNIT_COMPATIBLE" val="0"/>
+  <p:tag name="KSO_WM_UNIT_DIAGRAM_ISNUMVISUAL" val="0"/>
+  <p:tag name="KSO_WM_UNIT_DIAGRAM_ISREFERUNIT" val="0"/>
+  <p:tag name="KSO_WM_UNIT_ID" val="_8**"/>
+  <p:tag name="KSO_WM_UNIT_LAYERLEVEL" val="1"/>
+  <p:tag name="KSO_WM_TAG_VERSION" val="1.0"/>
+  <p:tag name="KSO_WM_BEAUTIFY_FLAG" val="#wm#"/>
+</p:tagLst>
+</file>
+
+<file path=ppt/tags/tag51.xml><?xml version="1.0" encoding="utf-8"?>
+<p:tagLst xmlns:p="http://schemas.openxmlformats.org/presentationml/2006/main">
+  <p:tag name="KSO_WM_UNIT_HIGHLIGHT" val="0"/>
+  <p:tag name="KSO_WM_UNIT_COMPATIBLE" val="0"/>
+  <p:tag name="KSO_WM_UNIT_DIAGRAM_ISNUMVISUAL" val="0"/>
+  <p:tag name="KSO_WM_UNIT_DIAGRAM_ISREFERUNIT" val="0"/>
+  <p:tag name="KSO_WM_UNIT_ID" val="_8**"/>
+  <p:tag name="KSO_WM_UNIT_LAYERLEVEL" val="1"/>
+  <p:tag name="KSO_WM_TAG_VERSION" val="1.0"/>
+  <p:tag name="KSO_WM_BEAUTIFY_FLAG" val="#wm#"/>
+</p:tagLst>
+</file>
+
+<file path=ppt/tags/tag52.xml><?xml version="1.0" encoding="utf-8"?>
+<p:tagLst xmlns:p="http://schemas.openxmlformats.org/presentationml/2006/main">
+  <p:tag name="KSO_WM_UNIT_HIGHLIGHT" val="0"/>
+  <p:tag name="KSO_WM_UNIT_COMPATIBLE" val="0"/>
+  <p:tag name="KSO_WM_UNIT_DIAGRAM_ISNUMVISUAL" val="0"/>
+  <p:tag name="KSO_WM_UNIT_DIAGRAM_ISREFERUNIT" val="0"/>
+  <p:tag name="KSO_WM_UNIT_ID" val="_8**"/>
+  <p:tag name="KSO_WM_UNIT_LAYERLEVEL" val="1"/>
+  <p:tag name="KSO_WM_TAG_VERSION" val="1.0"/>
+  <p:tag name="KSO_WM_BEAUTIFY_FLAG" val="#wm#"/>
+</p:tagLst>
+</file>
+
+<file path=ppt/tags/tag53.xml><?xml version="1.0" encoding="utf-8"?>
+<p:tagLst xmlns:p="http://schemas.openxmlformats.org/presentationml/2006/main">
+  <p:tag name="KSO_WM_UNIT_HIGHLIGHT" val="0"/>
+  <p:tag name="KSO_WM_UNIT_COMPATIBLE" val="0"/>
+  <p:tag name="KSO_WM_UNIT_DIAGRAM_ISNUMVISUAL" val="0"/>
+  <p:tag name="KSO_WM_UNIT_DIAGRAM_ISREFERUNIT" val="0"/>
+  <p:tag name="KSO_WM_UNIT_ID" val="_8**"/>
+  <p:tag name="KSO_WM_UNIT_LAYERLEVEL" val="1"/>
+  <p:tag name="KSO_WM_TAG_VERSION" val="1.0"/>
+  <p:tag name="KSO_WM_BEAUTIFY_FLAG" val="#wm#"/>
+</p:tagLst>
+</file>
+
+<file path=ppt/tags/tag54.xml><?xml version="1.0" encoding="utf-8"?>
+<p:tagLst xmlns:p="http://schemas.openxmlformats.org/presentationml/2006/main">
+  <p:tag name="KSO_WM_UNIT_HIGHLIGHT" val="0"/>
+  <p:tag name="KSO_WM_UNIT_COMPATIBLE" val="0"/>
+  <p:tag name="KSO_WM_UNIT_DIAGRAM_ISNUMVISUAL" val="0"/>
+  <p:tag name="KSO_WM_UNIT_DIAGRAM_ISREFERUNIT" val="0"/>
+  <p:tag name="KSO_WM_UNIT_ID" val="_8**"/>
+  <p:tag name="KSO_WM_UNIT_LAYERLEVEL" val="1"/>
+  <p:tag name="KSO_WM_TAG_VERSION" val="1.0"/>
+  <p:tag name="KSO_WM_BEAUTIFY_FLAG" val="#wm#"/>
+</p:tagLst>
+</file>
+
+<file path=ppt/tags/tag55.xml><?xml version="1.0" encoding="utf-8"?>
+<p:tagLst xmlns:p="http://schemas.openxmlformats.org/presentationml/2006/main">
+  <p:tag name="KSO_WM_UNIT_HIGHLIGHT" val="0"/>
+  <p:tag name="KSO_WM_UNIT_COMPATIBLE" val="0"/>
+  <p:tag name="KSO_WM_UNIT_DIAGRAM_ISNUMVISUAL" val="0"/>
+  <p:tag name="KSO_WM_UNIT_DIAGRAM_ISREFERUNIT" val="0"/>
+  <p:tag name="KSO_WM_UNIT_ID" val="_8**"/>
+  <p:tag name="KSO_WM_UNIT_LAYERLEVEL" val="1"/>
+  <p:tag name="KSO_WM_TAG_VERSION" val="1.0"/>
+  <p:tag name="KSO_WM_BEAUTIFY_FLAG" val="#wm#"/>
+</p:tagLst>
+</file>
+
+<file path=ppt/tags/tag56.xml><?xml version="1.0" encoding="utf-8"?>
+<p:tagLst xmlns:p="http://schemas.openxmlformats.org/presentationml/2006/main">
+  <p:tag name="KSO_WM_UNIT_HIGHLIGHT" val="0"/>
+  <p:tag name="KSO_WM_UNIT_COMPATIBLE" val="0"/>
+  <p:tag name="KSO_WM_UNIT_DIAGRAM_ISNUMVISUAL" val="0"/>
+  <p:tag name="KSO_WM_UNIT_DIAGRAM_ISREFERUNIT" val="0"/>
+  <p:tag name="KSO_WM_UNIT_ID" val="_9**"/>
+  <p:tag name="KSO_WM_UNIT_LAYERLEVEL" val="1"/>
+  <p:tag name="KSO_WM_TAG_VERSION" val="1.0"/>
+  <p:tag name="KSO_WM_BEAUTIFY_FLAG" val="#wm#"/>
+</p:tagLst>
+</file>
+
+<file path=ppt/tags/tag57.xml><?xml version="1.0" encoding="utf-8"?>
+<p:tagLst xmlns:p="http://schemas.openxmlformats.org/presentationml/2006/main">
+  <p:tag name="KSO_WM_UNIT_HIGHLIGHT" val="0"/>
+  <p:tag name="KSO_WM_UNIT_COMPATIBLE" val="0"/>
+  <p:tag name="KSO_WM_UNIT_DIAGRAM_ISNUMVISUAL" val="0"/>
+  <p:tag name="KSO_WM_UNIT_DIAGRAM_ISREFERUNIT" val="0"/>
+  <p:tag name="KSO_WM_UNIT_ID" val="_9**"/>
+  <p:tag name="KSO_WM_UNIT_LAYERLEVEL" val="1"/>
+  <p:tag name="KSO_WM_TAG_VERSION" val="1.0"/>
+  <p:tag name="KSO_WM_BEAUTIFY_FLAG" val="#wm#"/>
+</p:tagLst>
+</file>
+
+<file path=ppt/tags/tag58.xml><?xml version="1.0" encoding="utf-8"?>
+<p:tagLst xmlns:p="http://schemas.openxmlformats.org/presentationml/2006/main">
+  <p:tag name="KSO_WM_UNIT_HIGHLIGHT" val="0"/>
+  <p:tag name="KSO_WM_UNIT_COMPATIBLE" val="0"/>
+  <p:tag name="KSO_WM_UNIT_DIAGRAM_ISNUMVISUAL" val="0"/>
+  <p:tag name="KSO_WM_UNIT_DIAGRAM_ISREFERUNIT" val="0"/>
+  <p:tag name="KSO_WM_UNIT_ID" val="_9**"/>
+  <p:tag name="KSO_WM_UNIT_LAYERLEVEL" val="1"/>
+  <p:tag name="KSO_WM_TAG_VERSION" val="1.0"/>
+  <p:tag name="KSO_WM_BEAUTIFY_FLAG" val="#wm#"/>
+</p:tagLst>
+</file>
+
+<file path=ppt/tags/tag59.xml><?xml version="1.0" encoding="utf-8"?>
+<p:tagLst xmlns:p="http://schemas.openxmlformats.org/presentationml/2006/main">
+  <p:tag name="KSO_WM_UNIT_HIGHLIGHT" val="0"/>
+  <p:tag name="KSO_WM_UNIT_COMPATIBLE" val="0"/>
+  <p:tag name="KSO_WM_UNIT_DIAGRAM_ISNUMVISUAL" val="0"/>
+  <p:tag name="KSO_WM_UNIT_DIAGRAM_ISREFERUNIT" val="0"/>
+  <p:tag name="KSO_WM_UNIT_ID" val="_9**"/>
+  <p:tag name="KSO_WM_UNIT_LAYERLEVEL" val="1"/>
+  <p:tag name="KSO_WM_TAG_VERSION" val="1.0"/>
+  <p:tag name="KSO_WM_BEAUTIFY_FLAG" val="#wm#"/>
+</p:tagLst>
+</file>
+
+<file path=ppt/tags/tag6.xml><?xml version="1.0" encoding="utf-8"?>
+<p:tagLst xmlns:p="http://schemas.openxmlformats.org/presentationml/2006/main">
+  <p:tag name="KSO_WM_UNIT_HIGHLIGHT" val="0"/>
+  <p:tag name="KSO_WM_UNIT_COMPATIBLE" val="0"/>
+  <p:tag name="KSO_WM_UNIT_DIAGRAM_ISNUMVISUAL" val="0"/>
+  <p:tag name="KSO_WM_UNIT_DIAGRAM_ISREFERUNIT" val="0"/>
+  <p:tag name="KSO_WM_UNIT_ID" val="_1**"/>
+  <p:tag name="KSO_WM_UNIT_LAYERLEVEL" val="1"/>
+  <p:tag name="KSO_WM_TAG_VERSION" val="1.0"/>
+  <p:tag name="KSO_WM_BEAUTIFY_FLAG" val="#wm#"/>
+</p:tagLst>
+</file>
+
+<file path=ppt/tags/tag60.xml><?xml version="1.0" encoding="utf-8"?>
+<p:tagLst xmlns:p="http://schemas.openxmlformats.org/presentationml/2006/main">
+  <p:tag name="KSO_WM_UNIT_HIGHLIGHT" val="0"/>
+  <p:tag name="KSO_WM_UNIT_COMPATIBLE" val="0"/>
+  <p:tag name="KSO_WM_UNIT_DIAGRAM_ISNUMVISUAL" val="0"/>
+  <p:tag name="KSO_WM_UNIT_DIAGRAM_ISREFERUNIT" val="0"/>
+  <p:tag name="KSO_WM_UNIT_ID" val="_9**"/>
+  <p:tag name="KSO_WM_UNIT_LAYERLEVEL" val="1"/>
+  <p:tag name="KSO_WM_TAG_VERSION" val="1.0"/>
+  <p:tag name="KSO_WM_BEAUTIFY_FLAG" val="#wm#"/>
+</p:tagLst>
+</file>
+
+<file path=ppt/tags/tag61.xml><?xml version="1.0" encoding="utf-8"?>
+<p:tagLst xmlns:p="http://schemas.openxmlformats.org/presentationml/2006/main">
+  <p:tag name="KSO_WM_UNIT_HIGHLIGHT" val="0"/>
+  <p:tag name="KSO_WM_UNIT_COMPATIBLE" val="0"/>
+  <p:tag name="KSO_WM_UNIT_DIAGRAM_ISNUMVISUAL" val="0"/>
+  <p:tag name="KSO_WM_UNIT_DIAGRAM_ISREFERUNIT" val="0"/>
+  <p:tag name="KSO_WM_UNIT_ID" val="_10**"/>
+  <p:tag name="KSO_WM_UNIT_LAYERLEVEL" val="1"/>
+  <p:tag name="KSO_WM_TAG_VERSION" val="1.0"/>
+  <p:tag name="KSO_WM_BEAUTIFY_FLAG" val="#wm#"/>
+</p:tagLst>
+</file>
+
+<file path=ppt/tags/tag62.xml><?xml version="1.0" encoding="utf-8"?>
+<p:tagLst xmlns:p="http://schemas.openxmlformats.org/presentationml/2006/main">
+  <p:tag name="KSO_WM_UNIT_HIGHLIGHT" val="0"/>
+  <p:tag name="KSO_WM_UNIT_COMPATIBLE" val="0"/>
+  <p:tag name="KSO_WM_UNIT_DIAGRAM_ISNUMVISUAL" val="0"/>
+  <p:tag name="KSO_WM_UNIT_DIAGRAM_ISREFERUNIT" val="0"/>
+  <p:tag name="KSO_WM_UNIT_ID" val="_10**"/>
+  <p:tag name="KSO_WM_UNIT_LAYERLEVEL" val="1"/>
+  <p:tag name="KSO_WM_TAG_VERSION" val="1.0"/>
+  <p:tag name="KSO_WM_BEAUTIFY_FLAG" val="#wm#"/>
+</p:tagLst>
+</file>
+
+<file path=ppt/tags/tag63.xml><?xml version="1.0" encoding="utf-8"?>
+<p:tagLst xmlns:p="http://schemas.openxmlformats.org/presentationml/2006/main">
+  <p:tag name="KSO_WM_UNIT_HIGHLIGHT" val="0"/>
+  <p:tag name="KSO_WM_UNIT_COMPATIBLE" val="0"/>
+  <p:tag name="KSO_WM_UNIT_DIAGRAM_ISNUMVISUAL" val="0"/>
+  <p:tag name="KSO_WM_UNIT_DIAGRAM_ISREFERUNIT" val="0"/>
+  <p:tag name="KSO_WM_UNIT_ID" val="_10**"/>
+  <p:tag name="KSO_WM_UNIT_LAYERLEVEL" val="1"/>
+  <p:tag name="KSO_WM_TAG_VERSION" val="1.0"/>
+  <p:tag name="KSO_WM_BEAUTIFY_FLAG" val="#wm#"/>
+</p:tagLst>
+</file>
+
+<file path=ppt/tags/tag64.xml><?xml version="1.0" encoding="utf-8"?>
+<p:tagLst xmlns:p="http://schemas.openxmlformats.org/presentationml/2006/main">
+  <p:tag name="KSO_WM_UNIT_HIGHLIGHT" val="0"/>
+  <p:tag name="KSO_WM_UNIT_COMPATIBLE" val="0"/>
+  <p:tag name="KSO_WM_UNIT_DIAGRAM_ISNUMVISUAL" val="0"/>
+  <p:tag name="KSO_WM_UNIT_DIAGRAM_ISREFERUNIT" val="0"/>
+  <p:tag name="KSO_WM_UNIT_ID" val="_10**"/>
+  <p:tag name="KSO_WM_UNIT_LAYERLEVEL" val="1"/>
+  <p:tag name="KSO_WM_TAG_VERSION" val="1.0"/>
+  <p:tag name="KSO_WM_BEAUTIFY_FLAG" val="#wm#"/>
+</p:tagLst>
+</file>
+
+<file path=ppt/tags/tag65.xml><?xml version="1.0" encoding="utf-8"?>
+<p:tagLst xmlns:p="http://schemas.openxmlformats.org/presentationml/2006/main">
+  <p:tag name="KSO_WM_UNIT_HIGHLIGHT" val="0"/>
+  <p:tag name="KSO_WM_UNIT_COMPATIBLE" val="0"/>
+  <p:tag name="KSO_WM_UNIT_DIAGRAM_ISNUMVISUAL" val="0"/>
+  <p:tag name="KSO_WM_UNIT_DIAGRAM_ISREFERUNIT" val="0"/>
+  <p:tag name="KSO_WM_UNIT_ID" val="_11**"/>
+  <p:tag name="KSO_WM_UNIT_LAYERLEVEL" val="1"/>
+  <p:tag name="KSO_WM_TAG_VERSION" val="1.0"/>
+  <p:tag name="KSO_WM_BEAUTIFY_FLAG" val="#wm#"/>
+</p:tagLst>
+</file>
+
+<file path=ppt/tags/tag66.xml><?xml version="1.0" encoding="utf-8"?>
+<p:tagLst xmlns:p="http://schemas.openxmlformats.org/presentationml/2006/main">
+  <p:tag name="KSO_WM_UNIT_HIGHLIGHT" val="0"/>
+  <p:tag name="KSO_WM_UNIT_COMPATIBLE" val="0"/>
+  <p:tag name="KSO_WM_UNIT_DIAGRAM_ISNUMVISUAL" val="0"/>
+  <p:tag name="KSO_WM_UNIT_DIAGRAM_ISREFERUNIT" val="0"/>
+  <p:tag name="KSO_WM_UNIT_ID" val="_11**"/>
+  <p:tag name="KSO_WM_UNIT_LAYERLEVEL" val="1"/>
+  <p:tag name="KSO_WM_TAG_VERSION" val="1.0"/>
+  <p:tag name="KSO_WM_BEAUTIFY_FLAG" val="#wm#"/>
+</p:tagLst>
+</file>
+
+<file path=ppt/tags/tag67.xml><?xml version="1.0" encoding="utf-8"?>
+<p:tagLst xmlns:p="http://schemas.openxmlformats.org/presentationml/2006/main">
+  <p:tag name="KSO_WM_UNIT_HIGHLIGHT" val="0"/>
+  <p:tag name="KSO_WM_UNIT_COMPATIBLE" val="0"/>
+  <p:tag name="KSO_WM_UNIT_DIAGRAM_ISNUMVISUAL" val="0"/>
+  <p:tag name="KSO_WM_UNIT_DIAGRAM_ISREFERUNIT" val="0"/>
+  <p:tag name="KSO_WM_UNIT_ID" val="_11**"/>
+  <p:tag name="KSO_WM_UNIT_LAYERLEVEL" val="1"/>
+  <p:tag name="KSO_WM_TAG_VERSION" val="1.0"/>
+  <p:tag name="KSO_WM_BEAUTIFY_FLAG" val="#wm#"/>
+</p:tagLst>
+</file>
+
+<file path=ppt/tags/tag68.xml><?xml version="1.0" encoding="utf-8"?>
+<p:tagLst xmlns:p="http://schemas.openxmlformats.org/presentationml/2006/main">
+  <p:tag name="KSO_WM_UNIT_HIGHLIGHT" val="0"/>
+  <p:tag name="KSO_WM_UNIT_COMPATIBLE" val="0"/>
+  <p:tag name="KSO_WM_UNIT_DIAGRAM_ISNUMVISUAL" val="0"/>
+  <p:tag name="KSO_WM_UNIT_DIAGRAM_ISREFERUNIT" val="0"/>
+  <p:tag name="KSO_WM_UNIT_ID" val="_11**"/>
+  <p:tag name="KSO_WM_UNIT_LAYERLEVEL" val="1"/>
+  <p:tag name="KSO_WM_TAG_VERSION" val="1.0"/>
+  <p:tag name="KSO_WM_BEAUTIFY_FLAG" val="#wm#"/>
+</p:tagLst>
+</file>
+
+<file path=ppt/tags/tag69.xml><?xml version="1.0" encoding="utf-8"?>
+<p:tagLst xmlns:p="http://schemas.openxmlformats.org/presentationml/2006/main">
+  <p:tag name="KSO_WM_UNIT_HIGHLIGHT" val="0"/>
+  <p:tag name="KSO_WM_UNIT_COMPATIBLE" val="0"/>
+  <p:tag name="KSO_WM_UNIT_DIAGRAM_ISNUMVISUAL" val="0"/>
+  <p:tag name="KSO_WM_UNIT_DIAGRAM_ISREFERUNIT" val="0"/>
+  <p:tag name="KSO_WM_UNIT_ID" val="_11**"/>
+  <p:tag name="KSO_WM_UNIT_LAYERLEVEL" val="1"/>
+  <p:tag name="KSO_WM_TAG_VERSION" val="1.0"/>
+  <p:tag name="KSO_WM_BEAUTIFY_FLAG" val="#wm#"/>
+</p:tagLst>
+</file>
+
+<file path=ppt/tags/tag7.xml><?xml version="1.0" encoding="utf-8"?>
+<p:tagLst xmlns:p="http://schemas.openxmlformats.org/presentationml/2006/main">
+  <p:tag name="KSO_WM_UNIT_HIGHLIGHT" val="0"/>
+  <p:tag name="KSO_WM_UNIT_COMPATIBLE" val="0"/>
+  <p:tag name="KSO_WM_UNIT_DIAGRAM_ISNUMVISUAL" val="0"/>
+  <p:tag name="KSO_WM_UNIT_DIAGRAM_ISREFERUNIT" val="0"/>
+  <p:tag name="KSO_WM_UNIT_ID" val="_1**"/>
+  <p:tag name="KSO_WM_UNIT_LAYERLEVEL" val="1"/>
+  <p:tag name="KSO_WM_TAG_VERSION" val="1.0"/>
+  <p:tag name="KSO_WM_BEAUTIFY_FLAG" val="#wm#"/>
+</p:tagLst>
+</file>
+
+<file path=ppt/tags/tag70.xml><?xml version="1.0" encoding="utf-8"?>
+<p:tagLst xmlns:p="http://schemas.openxmlformats.org/presentationml/2006/main">
+  <p:tag name="KSO_WM_BEAUTIFY_FLAG" val=""/>
+</p:tagLst>
+</file>
+
+<file path=ppt/tags/tag71.xml><?xml version="1.0" encoding="utf-8"?>
+<p:tagLst xmlns:p="http://schemas.openxmlformats.org/presentationml/2006/main">
+  <p:tag name="KSO_WM_BEAUTIFY_FLAG" val=""/>
+</p:tagLst>
+</file>
+
+<file path=ppt/tags/tag72.xml><?xml version="1.0" encoding="utf-8"?>
+<p:tagLst xmlns:p="http://schemas.openxmlformats.org/presentationml/2006/main">
+  <p:tag name="KSO_WM_BEAUTIFY_FLAG" val=""/>
+</p:tagLst>
+</file>
+
+<file path=ppt/tags/tag73.xml><?xml version="1.0" encoding="utf-8"?>
+<p:tagLst xmlns:p="http://schemas.openxmlformats.org/presentationml/2006/main">
+  <p:tag name="KSO_WM_BEAUTIFY_FLAG" val=""/>
+</p:tagLst>
+</file>
+
+<file path=ppt/tags/tag74.xml><?xml version="1.0" encoding="utf-8"?>
+<p:tagLst xmlns:p="http://schemas.openxmlformats.org/presentationml/2006/main">
+  <p:tag name="KSO_WM_BEAUTIFY_FLAG" val=""/>
+</p:tagLst>
+</file>
+
+<file path=ppt/tags/tag75.xml><?xml version="1.0" encoding="utf-8"?>
+<p:tagLst xmlns:p="http://schemas.openxmlformats.org/presentationml/2006/main">
+  <p:tag name="KSO_WM_BEAUTIFY_FLAG" val=""/>
+</p:tagLst>
+</file>
+
+<file path=ppt/tags/tag76.xml><?xml version="1.0" encoding="utf-8"?>
+<p:tagLst xmlns:p="http://schemas.openxmlformats.org/presentationml/2006/main">
+  <p:tag name="KSO_WM_BEAUTIFY_FLAG" val=""/>
+</p:tagLst>
+</file>
+
+<file path=ppt/tags/tag77.xml><?xml version="1.0" encoding="utf-8"?>
+<p:tagLst xmlns:p="http://schemas.openxmlformats.org/presentationml/2006/main">
+  <p:tag name="KSO_WM_BEAUTIFY_FLAG" val=""/>
+</p:tagLst>
+</file>
+
+<file path=ppt/tags/tag78.xml><?xml version="1.0" encoding="utf-8"?>
+<p:tagLst xmlns:p="http://schemas.openxmlformats.org/presentationml/2006/main">
+  <p:tag name="KSO_WM_BEAUTIFY_FLAG" val=""/>
+</p:tagLst>
+</file>
+
+<file path=ppt/tags/tag79.xml><?xml version="1.0" encoding="utf-8"?>
+<p:tagLst xmlns:p="http://schemas.openxmlformats.org/presentationml/2006/main">
+  <p:tag name="KSO_WM_BEAUTIFY_FLAG" val=""/>
+</p:tagLst>
+</file>
+
+<file path=ppt/tags/tag8.xml><?xml version="1.0" encoding="utf-8"?>
+<p:tagLst xmlns:p="http://schemas.openxmlformats.org/presentationml/2006/main">
+  <p:tag name="KSO_WM_UNIT_HIGHLIGHT" val="0"/>
+  <p:tag name="KSO_WM_UNIT_COMPATIBLE" val="0"/>
+  <p:tag name="KSO_WM_UNIT_DIAGRAM_ISNUMVISUAL" val="0"/>
+  <p:tag name="KSO_WM_UNIT_DIAGRAM_ISREFERUNIT" val="0"/>
+  <p:tag name="KSO_WM_UNIT_ID" val="_1**"/>
+  <p:tag name="KSO_WM_UNIT_LAYERLEVEL" val="1"/>
+  <p:tag name="KSO_WM_TAG_VERSION" val="1.0"/>
+  <p:tag name="KSO_WM_BEAUTIFY_FLAG" val="#wm#"/>
+</p:tagLst>
+</file>
+
+<file path=ppt/tags/tag80.xml><?xml version="1.0" encoding="utf-8"?>
 <p:tagLst xmlns:p="http://schemas.openxmlformats.org/presentationml/2006/main">
   <p:tag name="KSO_WM_UNIT_NOCLEAR" val="0"/>
   <p:tag name="KSO_WM_UNIT_HIGHLIGHT" val="0"/>
@@ -13709,998 +14291,6 @@
   <p:tag name="KSO_WM_UNIT_TEXT_FILL_TYPE" val="1"/>
   <p:tag name="KSO_WM_UNIT_DIAGRAM_SCHEMECOLOR_ID" val="1"/>
   <p:tag name="KSO_WM_UNIT_USESOURCEFORMAT_APPLY" val="1"/>
-</p:tagLst>
-</file>
-
-<file path=ppt/tags/tag101.xml><?xml version="1.0" encoding="utf-8"?>
-<p:tagLst xmlns:p="http://schemas.openxmlformats.org/presentationml/2006/main">
-  <p:tag name="KSO_WM_UNIT_NOCLEAR" val="0"/>
-  <p:tag name="KSO_WM_UNIT_HIGHLIGHT" val="0"/>
-  <p:tag name="KSO_WM_UNIT_COMPATIBLE" val="0"/>
-  <p:tag name="KSO_WM_UNIT_DIAGRAM_ISNUMVISUAL" val="0"/>
-  <p:tag name="KSO_WM_UNIT_DIAGRAM_ISREFERUNIT" val="0"/>
-  <p:tag name="KSO_WM_UNIT_TYPE" val="m_h_i"/>
-  <p:tag name="KSO_WM_UNIT_INDEX" val="1_1_1"/>
-  <p:tag name="KSO_WM_UNIT_ID" val="diagram726_1*m_h_i*1_1_1"/>
-  <p:tag name="KSO_WM_TEMPLATE_CATEGORY" val="diagram"/>
-  <p:tag name="KSO_WM_TEMPLATE_INDEX" val="726"/>
-  <p:tag name="KSO_WM_UNIT_LAYERLEVEL" val="1_1_1"/>
-  <p:tag name="KSO_WM_TAG_VERSION" val="1.0"/>
-  <p:tag name="KSO_WM_BEAUTIFY_FLAG" val=""/>
-  <p:tag name="KSO_WM_DIAGRAM_GROUP_CODE" val="m1-1"/>
-  <p:tag name="KSO_WM_UNIT_FILL_FORE_SCHEMECOLOR_INDEX" val="5"/>
-  <p:tag name="KSO_WM_UNIT_FILL_TYPE" val="1"/>
-  <p:tag name="KSO_WM_UNIT_TEXT_FILL_FORE_SCHEMECOLOR_INDEX" val="2"/>
-  <p:tag name="KSO_WM_UNIT_TEXT_FILL_TYPE" val="1"/>
-  <p:tag name="KSO_WM_UNIT_DIAGRAM_SCHEMECOLOR_ID" val="1"/>
-  <p:tag name="KSO_WM_UNIT_USESOURCEFORMAT_APPLY" val="1"/>
-</p:tagLst>
-</file>
-
-<file path=ppt/tags/tag102.xml><?xml version="1.0" encoding="utf-8"?>
-<p:tagLst xmlns:p="http://schemas.openxmlformats.org/presentationml/2006/main">
-  <p:tag name="KSO_WM_BEAUTIFY_FLAG" val=""/>
-</p:tagLst>
-</file>
-
-<file path=ppt/tags/tag103.xml><?xml version="1.0" encoding="utf-8"?>
-<p:tagLst xmlns:p="http://schemas.openxmlformats.org/presentationml/2006/main">
-  <p:tag name="KSO_WM_BEAUTIFY_FLAG" val=""/>
-</p:tagLst>
-</file>
-
-<file path=ppt/tags/tag104.xml><?xml version="1.0" encoding="utf-8"?>
-<p:tagLst xmlns:p="http://schemas.openxmlformats.org/presentationml/2006/main">
-  <p:tag name="KSO_WM_BEAUTIFY_FLAG" val=""/>
-</p:tagLst>
-</file>
-
-<file path=ppt/tags/tag105.xml><?xml version="1.0" encoding="utf-8"?>
-<p:tagLst xmlns:p="http://schemas.openxmlformats.org/presentationml/2006/main">
-  <p:tag name="KSO_WM_BEAUTIFY_FLAG" val=""/>
-</p:tagLst>
-</file>
-
-<file path=ppt/tags/tag106.xml><?xml version="1.0" encoding="utf-8"?>
-<p:tagLst xmlns:p="http://schemas.openxmlformats.org/presentationml/2006/main">
-  <p:tag name="KSO_WM_BEAUTIFY_FLAG" val=""/>
-</p:tagLst>
-</file>
-
-<file path=ppt/tags/tag107.xml><?xml version="1.0" encoding="utf-8"?>
-<p:tagLst xmlns:p="http://schemas.openxmlformats.org/presentationml/2006/main">
-  <p:tag name="KSO_WM_BEAUTIFY_FLAG" val=""/>
-</p:tagLst>
-</file>
-
-<file path=ppt/tags/tag108.xml><?xml version="1.0" encoding="utf-8"?>
-<p:tagLst xmlns:p="http://schemas.openxmlformats.org/presentationml/2006/main">
-  <p:tag name="COMMONDATA" val="eyJoZGlkIjoiYzZkNzQ4ZWFiZmQ4NTRhOWRkZTk3YTMwMjlmMmZhYmUifQ=="/>
-  <p:tag name="KSO_WPP_MARK_KEY" val="3c15e236-6e17-4788-8b7a-5fd2c15b6c5c"/>
-</p:tagLst>
-</file>
-
-<file path=ppt/tags/tag11.xml><?xml version="1.0" encoding="utf-8"?>
-<p:tagLst xmlns:p="http://schemas.openxmlformats.org/presentationml/2006/main">
-  <p:tag name="KSO_WM_UNIT_HIGHLIGHT" val="0"/>
-  <p:tag name="KSO_WM_UNIT_COMPATIBLE" val="0"/>
-  <p:tag name="KSO_WM_UNIT_DIAGRAM_ISNUMVISUAL" val="0"/>
-  <p:tag name="KSO_WM_UNIT_DIAGRAM_ISREFERUNIT" val="0"/>
-  <p:tag name="KSO_WM_UNIT_ID" val="_7**"/>
-  <p:tag name="KSO_WM_UNIT_LAYERLEVEL" val="1"/>
-  <p:tag name="KSO_WM_TAG_VERSION" val="1.0"/>
-  <p:tag name="KSO_WM_BEAUTIFY_FLAG" val="#wm#"/>
-</p:tagLst>
-</file>
-
-<file path=ppt/tags/tag12.xml><?xml version="1.0" encoding="utf-8"?>
-<p:tagLst xmlns:p="http://schemas.openxmlformats.org/presentationml/2006/main">
-  <p:tag name="KSO_WM_UNIT_HIGHLIGHT" val="0"/>
-  <p:tag name="KSO_WM_UNIT_COMPATIBLE" val="0"/>
-  <p:tag name="KSO_WM_UNIT_DIAGRAM_ISNUMVISUAL" val="0"/>
-  <p:tag name="KSO_WM_UNIT_DIAGRAM_ISREFERUNIT" val="0"/>
-  <p:tag name="KSO_WM_UNIT_ID" val="_7**"/>
-  <p:tag name="KSO_WM_UNIT_LAYERLEVEL" val="1"/>
-  <p:tag name="KSO_WM_TAG_VERSION" val="1.0"/>
-  <p:tag name="KSO_WM_BEAUTIFY_FLAG" val="#wm#"/>
-</p:tagLst>
-</file>
-
-<file path=ppt/tags/tag13.xml><?xml version="1.0" encoding="utf-8"?>
-<p:tagLst xmlns:p="http://schemas.openxmlformats.org/presentationml/2006/main">
-  <p:tag name="KSO_WM_UNIT_HIGHLIGHT" val="0"/>
-  <p:tag name="KSO_WM_UNIT_COMPATIBLE" val="0"/>
-  <p:tag name="KSO_WM_UNIT_DIAGRAM_ISNUMVISUAL" val="0"/>
-  <p:tag name="KSO_WM_UNIT_DIAGRAM_ISREFERUNIT" val="0"/>
-  <p:tag name="KSO_WM_UNIT_ID" val="_7**"/>
-  <p:tag name="KSO_WM_UNIT_LAYERLEVEL" val="1"/>
-  <p:tag name="KSO_WM_TAG_VERSION" val="1.0"/>
-  <p:tag name="KSO_WM_BEAUTIFY_FLAG" val="#wm#"/>
-</p:tagLst>
-</file>
-
-<file path=ppt/tags/tag14.xml><?xml version="1.0" encoding="utf-8"?>
-<p:tagLst xmlns:p="http://schemas.openxmlformats.org/presentationml/2006/main">
-  <p:tag name="KSO_WM_UNIT_HIGHLIGHT" val="0"/>
-  <p:tag name="KSO_WM_UNIT_COMPATIBLE" val="0"/>
-  <p:tag name="KSO_WM_UNIT_DIAGRAM_ISNUMVISUAL" val="0"/>
-  <p:tag name="KSO_WM_UNIT_DIAGRAM_ISREFERUNIT" val="0"/>
-  <p:tag name="KSO_WM_UNIT_ID" val="_1**"/>
-  <p:tag name="KSO_WM_UNIT_LAYERLEVEL" val="1"/>
-  <p:tag name="KSO_WM_TAG_VERSION" val="1.0"/>
-  <p:tag name="KSO_WM_BEAUTIFY_FLAG" val="#wm#"/>
-</p:tagLst>
-</file>
-
-<file path=ppt/tags/tag15.xml><?xml version="1.0" encoding="utf-8"?>
-<p:tagLst xmlns:p="http://schemas.openxmlformats.org/presentationml/2006/main">
-  <p:tag name="KSO_WM_UNIT_HIGHLIGHT" val="0"/>
-  <p:tag name="KSO_WM_UNIT_COMPATIBLE" val="0"/>
-  <p:tag name="KSO_WM_UNIT_DIAGRAM_ISNUMVISUAL" val="0"/>
-  <p:tag name="KSO_WM_UNIT_DIAGRAM_ISREFERUNIT" val="0"/>
-  <p:tag name="KSO_WM_UNIT_ID" val="_1**"/>
-  <p:tag name="KSO_WM_UNIT_LAYERLEVEL" val="1"/>
-  <p:tag name="KSO_WM_TAG_VERSION" val="1.0"/>
-  <p:tag name="KSO_WM_BEAUTIFY_FLAG" val="#wm#"/>
-</p:tagLst>
-</file>
-
-<file path=ppt/tags/tag16.xml><?xml version="1.0" encoding="utf-8"?>
-<p:tagLst xmlns:p="http://schemas.openxmlformats.org/presentationml/2006/main">
-  <p:tag name="KSO_WM_UNIT_HIGHLIGHT" val="0"/>
-  <p:tag name="KSO_WM_UNIT_COMPATIBLE" val="0"/>
-  <p:tag name="KSO_WM_UNIT_DIAGRAM_ISNUMVISUAL" val="0"/>
-  <p:tag name="KSO_WM_UNIT_DIAGRAM_ISREFERUNIT" val="0"/>
-  <p:tag name="KSO_WM_UNIT_ID" val="_1**"/>
-  <p:tag name="KSO_WM_UNIT_LAYERLEVEL" val="1"/>
-  <p:tag name="KSO_WM_TAG_VERSION" val="1.0"/>
-  <p:tag name="KSO_WM_BEAUTIFY_FLAG" val="#wm#"/>
-</p:tagLst>
-</file>
-
-<file path=ppt/tags/tag17.xml><?xml version="1.0" encoding="utf-8"?>
-<p:tagLst xmlns:p="http://schemas.openxmlformats.org/presentationml/2006/main">
-  <p:tag name="KSO_WM_UNIT_HIGHLIGHT" val="0"/>
-  <p:tag name="KSO_WM_UNIT_COMPATIBLE" val="0"/>
-  <p:tag name="KSO_WM_UNIT_DIAGRAM_ISNUMVISUAL" val="0"/>
-  <p:tag name="KSO_WM_UNIT_DIAGRAM_ISREFERUNIT" val="0"/>
-  <p:tag name="KSO_WM_UNIT_ID" val="_1**"/>
-  <p:tag name="KSO_WM_UNIT_LAYERLEVEL" val="1"/>
-  <p:tag name="KSO_WM_TAG_VERSION" val="1.0"/>
-  <p:tag name="KSO_WM_BEAUTIFY_FLAG" val="#wm#"/>
-</p:tagLst>
-</file>
-
-<file path=ppt/tags/tag18.xml><?xml version="1.0" encoding="utf-8"?>
-<p:tagLst xmlns:p="http://schemas.openxmlformats.org/presentationml/2006/main">
-  <p:tag name="KSO_WM_UNIT_HIGHLIGHT" val="0"/>
-  <p:tag name="KSO_WM_UNIT_COMPATIBLE" val="0"/>
-  <p:tag name="KSO_WM_UNIT_DIAGRAM_ISNUMVISUAL" val="0"/>
-  <p:tag name="KSO_WM_UNIT_DIAGRAM_ISREFERUNIT" val="0"/>
-  <p:tag name="KSO_WM_UNIT_ID" val="_1**"/>
-  <p:tag name="KSO_WM_UNIT_LAYERLEVEL" val="1"/>
-  <p:tag name="KSO_WM_TAG_VERSION" val="1.0"/>
-  <p:tag name="KSO_WM_BEAUTIFY_FLAG" val="#wm#"/>
-</p:tagLst>
-</file>
-
-<file path=ppt/tags/tag19.xml><?xml version="1.0" encoding="utf-8"?>
-<p:tagLst xmlns:p="http://schemas.openxmlformats.org/presentationml/2006/main">
-  <p:tag name="KSO_WM_UNIT_HIGHLIGHT" val="0"/>
-  <p:tag name="KSO_WM_UNIT_COMPATIBLE" val="0"/>
-  <p:tag name="KSO_WM_UNIT_DIAGRAM_ISNUMVISUAL" val="0"/>
-  <p:tag name="KSO_WM_UNIT_DIAGRAM_ISREFERUNIT" val="0"/>
-  <p:tag name="KSO_WM_UNIT_ID" val="_2**"/>
-  <p:tag name="KSO_WM_UNIT_LAYERLEVEL" val="1"/>
-  <p:tag name="KSO_WM_TAG_VERSION" val="1.0"/>
-  <p:tag name="KSO_WM_BEAUTIFY_FLAG" val="#wm#"/>
-</p:tagLst>
-</file>
-
-<file path=ppt/tags/tag2.xml><?xml version="1.0" encoding="utf-8"?>
-<p:tagLst xmlns:p="http://schemas.openxmlformats.org/presentationml/2006/main">
-  <p:tag name="KSO_WM_UNIT_HIGHLIGHT" val="0"/>
-  <p:tag name="KSO_WM_UNIT_COMPATIBLE" val="0"/>
-  <p:tag name="KSO_WM_UNIT_DIAGRAM_ISNUMVISUAL" val="0"/>
-  <p:tag name="KSO_WM_UNIT_DIAGRAM_ISREFERUNIT" val="0"/>
-  <p:tag name="KSO_WM_UNIT_ID" val="_11**"/>
-  <p:tag name="KSO_WM_UNIT_LAYERLEVEL" val="1"/>
-  <p:tag name="KSO_WM_TAG_VERSION" val="1.0"/>
-  <p:tag name="KSO_WM_BEAUTIFY_FLAG" val="#wm#"/>
-</p:tagLst>
-</file>
-
-<file path=ppt/tags/tag20.xml><?xml version="1.0" encoding="utf-8"?>
-<p:tagLst xmlns:p="http://schemas.openxmlformats.org/presentationml/2006/main">
-  <p:tag name="KSO_WM_UNIT_HIGHLIGHT" val="0"/>
-  <p:tag name="KSO_WM_UNIT_COMPATIBLE" val="0"/>
-  <p:tag name="KSO_WM_UNIT_DIAGRAM_ISNUMVISUAL" val="0"/>
-  <p:tag name="KSO_WM_UNIT_DIAGRAM_ISREFERUNIT" val="0"/>
-  <p:tag name="KSO_WM_UNIT_ID" val="_2**"/>
-  <p:tag name="KSO_WM_UNIT_LAYERLEVEL" val="1"/>
-  <p:tag name="KSO_WM_TAG_VERSION" val="1.0"/>
-  <p:tag name="KSO_WM_BEAUTIFY_FLAG" val="#wm#"/>
-</p:tagLst>
-</file>
-
-<file path=ppt/tags/tag21.xml><?xml version="1.0" encoding="utf-8"?>
-<p:tagLst xmlns:p="http://schemas.openxmlformats.org/presentationml/2006/main">
-  <p:tag name="KSO_WM_UNIT_HIGHLIGHT" val="0"/>
-  <p:tag name="KSO_WM_UNIT_COMPATIBLE" val="0"/>
-  <p:tag name="KSO_WM_UNIT_DIAGRAM_ISNUMVISUAL" val="0"/>
-  <p:tag name="KSO_WM_UNIT_DIAGRAM_ISREFERUNIT" val="0"/>
-  <p:tag name="KSO_WM_UNIT_ID" val="_2**"/>
-  <p:tag name="KSO_WM_UNIT_LAYERLEVEL" val="1"/>
-  <p:tag name="KSO_WM_TAG_VERSION" val="1.0"/>
-  <p:tag name="KSO_WM_BEAUTIFY_FLAG" val="#wm#"/>
-</p:tagLst>
-</file>
-
-<file path=ppt/tags/tag22.xml><?xml version="1.0" encoding="utf-8"?>
-<p:tagLst xmlns:p="http://schemas.openxmlformats.org/presentationml/2006/main">
-  <p:tag name="KSO_WM_UNIT_HIGHLIGHT" val="0"/>
-  <p:tag name="KSO_WM_UNIT_COMPATIBLE" val="0"/>
-  <p:tag name="KSO_WM_UNIT_DIAGRAM_ISNUMVISUAL" val="0"/>
-  <p:tag name="KSO_WM_UNIT_DIAGRAM_ISREFERUNIT" val="0"/>
-  <p:tag name="KSO_WM_UNIT_ID" val="_2**"/>
-  <p:tag name="KSO_WM_UNIT_LAYERLEVEL" val="1"/>
-  <p:tag name="KSO_WM_TAG_VERSION" val="1.0"/>
-  <p:tag name="KSO_WM_BEAUTIFY_FLAG" val="#wm#"/>
-</p:tagLst>
-</file>
-
-<file path=ppt/tags/tag23.xml><?xml version="1.0" encoding="utf-8"?>
-<p:tagLst xmlns:p="http://schemas.openxmlformats.org/presentationml/2006/main">
-  <p:tag name="KSO_WM_UNIT_HIGHLIGHT" val="0"/>
-  <p:tag name="KSO_WM_UNIT_COMPATIBLE" val="0"/>
-  <p:tag name="KSO_WM_UNIT_DIAGRAM_ISNUMVISUAL" val="0"/>
-  <p:tag name="KSO_WM_UNIT_DIAGRAM_ISREFERUNIT" val="0"/>
-  <p:tag name="KSO_WM_UNIT_ID" val="_2**"/>
-  <p:tag name="KSO_WM_UNIT_LAYERLEVEL" val="1"/>
-  <p:tag name="KSO_WM_TAG_VERSION" val="1.0"/>
-  <p:tag name="KSO_WM_BEAUTIFY_FLAG" val="#wm#"/>
-</p:tagLst>
-</file>
-
-<file path=ppt/tags/tag24.xml><?xml version="1.0" encoding="utf-8"?>
-<p:tagLst xmlns:p="http://schemas.openxmlformats.org/presentationml/2006/main">
-  <p:tag name="KSO_WM_UNIT_HIGHLIGHT" val="0"/>
-  <p:tag name="KSO_WM_UNIT_COMPATIBLE" val="0"/>
-  <p:tag name="KSO_WM_UNIT_DIAGRAM_ISNUMVISUAL" val="0"/>
-  <p:tag name="KSO_WM_UNIT_DIAGRAM_ISREFERUNIT" val="0"/>
-  <p:tag name="KSO_WM_UNIT_ID" val="_3**"/>
-  <p:tag name="KSO_WM_UNIT_LAYERLEVEL" val="1"/>
-  <p:tag name="KSO_WM_TAG_VERSION" val="1.0"/>
-  <p:tag name="KSO_WM_BEAUTIFY_FLAG" val="#wm#"/>
-</p:tagLst>
-</file>
-
-<file path=ppt/tags/tag25.xml><?xml version="1.0" encoding="utf-8"?>
-<p:tagLst xmlns:p="http://schemas.openxmlformats.org/presentationml/2006/main">
-  <p:tag name="KSO_WM_UNIT_HIGHLIGHT" val="0"/>
-  <p:tag name="KSO_WM_UNIT_COMPATIBLE" val="0"/>
-  <p:tag name="KSO_WM_UNIT_DIAGRAM_ISNUMVISUAL" val="0"/>
-  <p:tag name="KSO_WM_UNIT_DIAGRAM_ISREFERUNIT" val="0"/>
-  <p:tag name="KSO_WM_UNIT_ID" val="_3**"/>
-  <p:tag name="KSO_WM_UNIT_LAYERLEVEL" val="1"/>
-  <p:tag name="KSO_WM_TAG_VERSION" val="1.0"/>
-  <p:tag name="KSO_WM_BEAUTIFY_FLAG" val="#wm#"/>
-</p:tagLst>
-</file>
-
-<file path=ppt/tags/tag26.xml><?xml version="1.0" encoding="utf-8"?>
-<p:tagLst xmlns:p="http://schemas.openxmlformats.org/presentationml/2006/main">
-  <p:tag name="KSO_WM_UNIT_HIGHLIGHT" val="0"/>
-  <p:tag name="KSO_WM_UNIT_COMPATIBLE" val="0"/>
-  <p:tag name="KSO_WM_UNIT_DIAGRAM_ISNUMVISUAL" val="0"/>
-  <p:tag name="KSO_WM_UNIT_DIAGRAM_ISREFERUNIT" val="0"/>
-  <p:tag name="KSO_WM_UNIT_ID" val="_3**"/>
-  <p:tag name="KSO_WM_UNIT_LAYERLEVEL" val="1"/>
-  <p:tag name="KSO_WM_TAG_VERSION" val="1.0"/>
-  <p:tag name="KSO_WM_BEAUTIFY_FLAG" val="#wm#"/>
-</p:tagLst>
-</file>
-
-<file path=ppt/tags/tag27.xml><?xml version="1.0" encoding="utf-8"?>
-<p:tagLst xmlns:p="http://schemas.openxmlformats.org/presentationml/2006/main">
-  <p:tag name="KSO_WM_UNIT_HIGHLIGHT" val="0"/>
-  <p:tag name="KSO_WM_UNIT_COMPATIBLE" val="0"/>
-  <p:tag name="KSO_WM_UNIT_DIAGRAM_ISNUMVISUAL" val="0"/>
-  <p:tag name="KSO_WM_UNIT_DIAGRAM_ISREFERUNIT" val="0"/>
-  <p:tag name="KSO_WM_UNIT_ID" val="_3**"/>
-  <p:tag name="KSO_WM_UNIT_LAYERLEVEL" val="1"/>
-  <p:tag name="KSO_WM_TAG_VERSION" val="1.0"/>
-  <p:tag name="KSO_WM_BEAUTIFY_FLAG" val="#wm#"/>
-</p:tagLst>
-</file>
-
-<file path=ppt/tags/tag28.xml><?xml version="1.0" encoding="utf-8"?>
-<p:tagLst xmlns:p="http://schemas.openxmlformats.org/presentationml/2006/main">
-  <p:tag name="KSO_WM_UNIT_HIGHLIGHT" val="0"/>
-  <p:tag name="KSO_WM_UNIT_COMPATIBLE" val="0"/>
-  <p:tag name="KSO_WM_UNIT_DIAGRAM_ISNUMVISUAL" val="0"/>
-  <p:tag name="KSO_WM_UNIT_DIAGRAM_ISREFERUNIT" val="0"/>
-  <p:tag name="KSO_WM_UNIT_ID" val="_3**"/>
-  <p:tag name="KSO_WM_UNIT_LAYERLEVEL" val="1"/>
-  <p:tag name="KSO_WM_TAG_VERSION" val="1.0"/>
-  <p:tag name="KSO_WM_BEAUTIFY_FLAG" val="#wm#"/>
-</p:tagLst>
-</file>
-
-<file path=ppt/tags/tag29.xml><?xml version="1.0" encoding="utf-8"?>
-<p:tagLst xmlns:p="http://schemas.openxmlformats.org/presentationml/2006/main">
-  <p:tag name="KSO_WM_UNIT_HIGHLIGHT" val="0"/>
-  <p:tag name="KSO_WM_UNIT_COMPATIBLE" val="0"/>
-  <p:tag name="KSO_WM_UNIT_DIAGRAM_ISNUMVISUAL" val="0"/>
-  <p:tag name="KSO_WM_UNIT_DIAGRAM_ISREFERUNIT" val="0"/>
-  <p:tag name="KSO_WM_UNIT_ID" val="_4**"/>
-  <p:tag name="KSO_WM_UNIT_LAYERLEVEL" val="1"/>
-  <p:tag name="KSO_WM_TAG_VERSION" val="1.0"/>
-  <p:tag name="KSO_WM_BEAUTIFY_FLAG" val="#wm#"/>
-</p:tagLst>
-</file>
-
-<file path=ppt/tags/tag3.xml><?xml version="1.0" encoding="utf-8"?>
-<p:tagLst xmlns:p="http://schemas.openxmlformats.org/presentationml/2006/main">
-  <p:tag name="KSO_WM_UNIT_HIGHLIGHT" val="0"/>
-  <p:tag name="KSO_WM_UNIT_COMPATIBLE" val="0"/>
-  <p:tag name="KSO_WM_UNIT_DIAGRAM_ISNUMVISUAL" val="0"/>
-  <p:tag name="KSO_WM_UNIT_DIAGRAM_ISREFERUNIT" val="0"/>
-  <p:tag name="KSO_WM_UNIT_ID" val="_11**"/>
-  <p:tag name="KSO_WM_UNIT_LAYERLEVEL" val="1"/>
-  <p:tag name="KSO_WM_TAG_VERSION" val="1.0"/>
-  <p:tag name="KSO_WM_BEAUTIFY_FLAG" val="#wm#"/>
-</p:tagLst>
-</file>
-
-<file path=ppt/tags/tag30.xml><?xml version="1.0" encoding="utf-8"?>
-<p:tagLst xmlns:p="http://schemas.openxmlformats.org/presentationml/2006/main">
-  <p:tag name="KSO_WM_UNIT_HIGHLIGHT" val="0"/>
-  <p:tag name="KSO_WM_UNIT_COMPATIBLE" val="0"/>
-  <p:tag name="KSO_WM_UNIT_DIAGRAM_ISNUMVISUAL" val="0"/>
-  <p:tag name="KSO_WM_UNIT_DIAGRAM_ISREFERUNIT" val="0"/>
-  <p:tag name="KSO_WM_UNIT_ID" val="_4**"/>
-  <p:tag name="KSO_WM_UNIT_LAYERLEVEL" val="1"/>
-  <p:tag name="KSO_WM_TAG_VERSION" val="1.0"/>
-  <p:tag name="KSO_WM_BEAUTIFY_FLAG" val="#wm#"/>
-</p:tagLst>
-</file>
-
-<file path=ppt/tags/tag31.xml><?xml version="1.0" encoding="utf-8"?>
-<p:tagLst xmlns:p="http://schemas.openxmlformats.org/presentationml/2006/main">
-  <p:tag name="KSO_WM_UNIT_HIGHLIGHT" val="0"/>
-  <p:tag name="KSO_WM_UNIT_COMPATIBLE" val="0"/>
-  <p:tag name="KSO_WM_UNIT_DIAGRAM_ISNUMVISUAL" val="0"/>
-  <p:tag name="KSO_WM_UNIT_DIAGRAM_ISREFERUNIT" val="0"/>
-  <p:tag name="KSO_WM_UNIT_ID" val="_4**"/>
-  <p:tag name="KSO_WM_UNIT_LAYERLEVEL" val="1"/>
-  <p:tag name="KSO_WM_TAG_VERSION" val="1.0"/>
-  <p:tag name="KSO_WM_BEAUTIFY_FLAG" val="#wm#"/>
-</p:tagLst>
-</file>
-
-<file path=ppt/tags/tag32.xml><?xml version="1.0" encoding="utf-8"?>
-<p:tagLst xmlns:p="http://schemas.openxmlformats.org/presentationml/2006/main">
-  <p:tag name="KSO_WM_UNIT_HIGHLIGHT" val="0"/>
-  <p:tag name="KSO_WM_UNIT_COMPATIBLE" val="0"/>
-  <p:tag name="KSO_WM_UNIT_DIAGRAM_ISNUMVISUAL" val="0"/>
-  <p:tag name="KSO_WM_UNIT_DIAGRAM_ISREFERUNIT" val="0"/>
-  <p:tag name="KSO_WM_UNIT_ID" val="_4**"/>
-  <p:tag name="KSO_WM_UNIT_LAYERLEVEL" val="1"/>
-  <p:tag name="KSO_WM_TAG_VERSION" val="1.0"/>
-  <p:tag name="KSO_WM_BEAUTIFY_FLAG" val="#wm#"/>
-</p:tagLst>
-</file>
-
-<file path=ppt/tags/tag33.xml><?xml version="1.0" encoding="utf-8"?>
-<p:tagLst xmlns:p="http://schemas.openxmlformats.org/presentationml/2006/main">
-  <p:tag name="KSO_WM_UNIT_HIGHLIGHT" val="0"/>
-  <p:tag name="KSO_WM_UNIT_COMPATIBLE" val="0"/>
-  <p:tag name="KSO_WM_UNIT_DIAGRAM_ISNUMVISUAL" val="0"/>
-  <p:tag name="KSO_WM_UNIT_DIAGRAM_ISREFERUNIT" val="0"/>
-  <p:tag name="KSO_WM_UNIT_ID" val="_4**"/>
-  <p:tag name="KSO_WM_UNIT_LAYERLEVEL" val="1"/>
-  <p:tag name="KSO_WM_TAG_VERSION" val="1.0"/>
-  <p:tag name="KSO_WM_BEAUTIFY_FLAG" val="#wm#"/>
-</p:tagLst>
-</file>
-
-<file path=ppt/tags/tag34.xml><?xml version="1.0" encoding="utf-8"?>
-<p:tagLst xmlns:p="http://schemas.openxmlformats.org/presentationml/2006/main">
-  <p:tag name="KSO_WM_UNIT_HIGHLIGHT" val="0"/>
-  <p:tag name="KSO_WM_UNIT_COMPATIBLE" val="0"/>
-  <p:tag name="KSO_WM_UNIT_DIAGRAM_ISNUMVISUAL" val="0"/>
-  <p:tag name="KSO_WM_UNIT_DIAGRAM_ISREFERUNIT" val="0"/>
-  <p:tag name="KSO_WM_UNIT_ID" val="_4**"/>
-  <p:tag name="KSO_WM_UNIT_LAYERLEVEL" val="1"/>
-  <p:tag name="KSO_WM_TAG_VERSION" val="1.0"/>
-  <p:tag name="KSO_WM_BEAUTIFY_FLAG" val="#wm#"/>
-</p:tagLst>
-</file>
-
-<file path=ppt/tags/tag35.xml><?xml version="1.0" encoding="utf-8"?>
-<p:tagLst xmlns:p="http://schemas.openxmlformats.org/presentationml/2006/main">
-  <p:tag name="KSO_WM_UNIT_HIGHLIGHT" val="0"/>
-  <p:tag name="KSO_WM_UNIT_COMPATIBLE" val="0"/>
-  <p:tag name="KSO_WM_UNIT_DIAGRAM_ISNUMVISUAL" val="0"/>
-  <p:tag name="KSO_WM_UNIT_DIAGRAM_ISREFERUNIT" val="0"/>
-  <p:tag name="KSO_WM_UNIT_ID" val="_5**"/>
-  <p:tag name="KSO_WM_UNIT_LAYERLEVEL" val="1"/>
-  <p:tag name="KSO_WM_TAG_VERSION" val="1.0"/>
-  <p:tag name="KSO_WM_BEAUTIFY_FLAG" val="#wm#"/>
-</p:tagLst>
-</file>
-
-<file path=ppt/tags/tag36.xml><?xml version="1.0" encoding="utf-8"?>
-<p:tagLst xmlns:p="http://schemas.openxmlformats.org/presentationml/2006/main">
-  <p:tag name="KSO_WM_UNIT_HIGHLIGHT" val="0"/>
-  <p:tag name="KSO_WM_UNIT_COMPATIBLE" val="0"/>
-  <p:tag name="KSO_WM_UNIT_DIAGRAM_ISNUMVISUAL" val="0"/>
-  <p:tag name="KSO_WM_UNIT_DIAGRAM_ISREFERUNIT" val="0"/>
-  <p:tag name="KSO_WM_UNIT_ID" val="_5**"/>
-  <p:tag name="KSO_WM_UNIT_LAYERLEVEL" val="1"/>
-  <p:tag name="KSO_WM_TAG_VERSION" val="1.0"/>
-  <p:tag name="KSO_WM_BEAUTIFY_FLAG" val="#wm#"/>
-</p:tagLst>
-</file>
-
-<file path=ppt/tags/tag37.xml><?xml version="1.0" encoding="utf-8"?>
-<p:tagLst xmlns:p="http://schemas.openxmlformats.org/presentationml/2006/main">
-  <p:tag name="KSO_WM_UNIT_HIGHLIGHT" val="0"/>
-  <p:tag name="KSO_WM_UNIT_COMPATIBLE" val="0"/>
-  <p:tag name="KSO_WM_UNIT_DIAGRAM_ISNUMVISUAL" val="0"/>
-  <p:tag name="KSO_WM_UNIT_DIAGRAM_ISREFERUNIT" val="0"/>
-  <p:tag name="KSO_WM_UNIT_ID" val="_5**"/>
-  <p:tag name="KSO_WM_UNIT_LAYERLEVEL" val="1"/>
-  <p:tag name="KSO_WM_TAG_VERSION" val="1.0"/>
-  <p:tag name="KSO_WM_BEAUTIFY_FLAG" val="#wm#"/>
-</p:tagLst>
-</file>
-
-<file path=ppt/tags/tag38.xml><?xml version="1.0" encoding="utf-8"?>
-<p:tagLst xmlns:p="http://schemas.openxmlformats.org/presentationml/2006/main">
-  <p:tag name="KSO_WM_UNIT_HIGHLIGHT" val="0"/>
-  <p:tag name="KSO_WM_UNIT_COMPATIBLE" val="0"/>
-  <p:tag name="KSO_WM_UNIT_DIAGRAM_ISNUMVISUAL" val="0"/>
-  <p:tag name="KSO_WM_UNIT_DIAGRAM_ISREFERUNIT" val="0"/>
-  <p:tag name="KSO_WM_UNIT_ID" val="_5**"/>
-  <p:tag name="KSO_WM_UNIT_LAYERLEVEL" val="1"/>
-  <p:tag name="KSO_WM_TAG_VERSION" val="1.0"/>
-  <p:tag name="KSO_WM_BEAUTIFY_FLAG" val="#wm#"/>
-</p:tagLst>
-</file>
-
-<file path=ppt/tags/tag39.xml><?xml version="1.0" encoding="utf-8"?>
-<p:tagLst xmlns:p="http://schemas.openxmlformats.org/presentationml/2006/main">
-  <p:tag name="KSO_WM_UNIT_HIGHLIGHT" val="0"/>
-  <p:tag name="KSO_WM_UNIT_COMPATIBLE" val="0"/>
-  <p:tag name="KSO_WM_UNIT_DIAGRAM_ISNUMVISUAL" val="0"/>
-  <p:tag name="KSO_WM_UNIT_DIAGRAM_ISREFERUNIT" val="0"/>
-  <p:tag name="KSO_WM_UNIT_ID" val="_5**"/>
-  <p:tag name="KSO_WM_UNIT_LAYERLEVEL" val="1"/>
-  <p:tag name="KSO_WM_TAG_VERSION" val="1.0"/>
-  <p:tag name="KSO_WM_BEAUTIFY_FLAG" val="#wm#"/>
-</p:tagLst>
-</file>
-
-<file path=ppt/tags/tag4.xml><?xml version="1.0" encoding="utf-8"?>
-<p:tagLst xmlns:p="http://schemas.openxmlformats.org/presentationml/2006/main">
-  <p:tag name="KSO_WM_UNIT_HIGHLIGHT" val="0"/>
-  <p:tag name="KSO_WM_UNIT_COMPATIBLE" val="0"/>
-  <p:tag name="KSO_WM_UNIT_DIAGRAM_ISNUMVISUAL" val="0"/>
-  <p:tag name="KSO_WM_UNIT_DIAGRAM_ISREFERUNIT" val="0"/>
-  <p:tag name="KSO_WM_UNIT_ID" val="_11**"/>
-  <p:tag name="KSO_WM_UNIT_LAYERLEVEL" val="1"/>
-  <p:tag name="KSO_WM_TAG_VERSION" val="1.0"/>
-  <p:tag name="KSO_WM_BEAUTIFY_FLAG" val="#wm#"/>
-</p:tagLst>
-</file>
-
-<file path=ppt/tags/tag40.xml><?xml version="1.0" encoding="utf-8"?>
-<p:tagLst xmlns:p="http://schemas.openxmlformats.org/presentationml/2006/main">
-  <p:tag name="KSO_WM_UNIT_HIGHLIGHT" val="0"/>
-  <p:tag name="KSO_WM_UNIT_COMPATIBLE" val="0"/>
-  <p:tag name="KSO_WM_UNIT_DIAGRAM_ISNUMVISUAL" val="0"/>
-  <p:tag name="KSO_WM_UNIT_DIAGRAM_ISREFERUNIT" val="0"/>
-  <p:tag name="KSO_WM_UNIT_ID" val="_5**"/>
-  <p:tag name="KSO_WM_UNIT_LAYERLEVEL" val="1"/>
-  <p:tag name="KSO_WM_TAG_VERSION" val="1.0"/>
-  <p:tag name="KSO_WM_BEAUTIFY_FLAG" val="#wm#"/>
-</p:tagLst>
-</file>
-
-<file path=ppt/tags/tag41.xml><?xml version="1.0" encoding="utf-8"?>
-<p:tagLst xmlns:p="http://schemas.openxmlformats.org/presentationml/2006/main">
-  <p:tag name="KSO_WM_UNIT_HIGHLIGHT" val="0"/>
-  <p:tag name="KSO_WM_UNIT_COMPATIBLE" val="0"/>
-  <p:tag name="KSO_WM_UNIT_DIAGRAM_ISNUMVISUAL" val="0"/>
-  <p:tag name="KSO_WM_UNIT_DIAGRAM_ISREFERUNIT" val="0"/>
-  <p:tag name="KSO_WM_UNIT_ID" val="_5**"/>
-  <p:tag name="KSO_WM_UNIT_LAYERLEVEL" val="1"/>
-  <p:tag name="KSO_WM_TAG_VERSION" val="1.0"/>
-  <p:tag name="KSO_WM_BEAUTIFY_FLAG" val="#wm#"/>
-</p:tagLst>
-</file>
-
-<file path=ppt/tags/tag42.xml><?xml version="1.0" encoding="utf-8"?>
-<p:tagLst xmlns:p="http://schemas.openxmlformats.org/presentationml/2006/main">
-  <p:tag name="KSO_WM_UNIT_HIGHLIGHT" val="0"/>
-  <p:tag name="KSO_WM_UNIT_COMPATIBLE" val="0"/>
-  <p:tag name="KSO_WM_UNIT_DIAGRAM_ISNUMVISUAL" val="0"/>
-  <p:tag name="KSO_WM_UNIT_DIAGRAM_ISREFERUNIT" val="0"/>
-  <p:tag name="KSO_WM_UNIT_ID" val="_5**"/>
-  <p:tag name="KSO_WM_UNIT_LAYERLEVEL" val="1"/>
-  <p:tag name="KSO_WM_TAG_VERSION" val="1.0"/>
-  <p:tag name="KSO_WM_BEAUTIFY_FLAG" val="#wm#"/>
-</p:tagLst>
-</file>
-
-<file path=ppt/tags/tag43.xml><?xml version="1.0" encoding="utf-8"?>
-<p:tagLst xmlns:p="http://schemas.openxmlformats.org/presentationml/2006/main">
-  <p:tag name="KSO_WM_UNIT_HIGHLIGHT" val="0"/>
-  <p:tag name="KSO_WM_UNIT_COMPATIBLE" val="0"/>
-  <p:tag name="KSO_WM_UNIT_DIAGRAM_ISNUMVISUAL" val="0"/>
-  <p:tag name="KSO_WM_UNIT_DIAGRAM_ISREFERUNIT" val="0"/>
-  <p:tag name="KSO_WM_UNIT_ID" val="_6**"/>
-  <p:tag name="KSO_WM_UNIT_LAYERLEVEL" val="1"/>
-  <p:tag name="KSO_WM_TAG_VERSION" val="1.0"/>
-  <p:tag name="KSO_WM_BEAUTIFY_FLAG" val="#wm#"/>
-</p:tagLst>
-</file>
-
-<file path=ppt/tags/tag44.xml><?xml version="1.0" encoding="utf-8"?>
-<p:tagLst xmlns:p="http://schemas.openxmlformats.org/presentationml/2006/main">
-  <p:tag name="KSO_WM_UNIT_HIGHLIGHT" val="0"/>
-  <p:tag name="KSO_WM_UNIT_COMPATIBLE" val="0"/>
-  <p:tag name="KSO_WM_UNIT_DIAGRAM_ISNUMVISUAL" val="0"/>
-  <p:tag name="KSO_WM_UNIT_DIAGRAM_ISREFERUNIT" val="0"/>
-  <p:tag name="KSO_WM_UNIT_ID" val="_6**"/>
-  <p:tag name="KSO_WM_UNIT_LAYERLEVEL" val="1"/>
-  <p:tag name="KSO_WM_TAG_VERSION" val="1.0"/>
-  <p:tag name="KSO_WM_BEAUTIFY_FLAG" val="#wm#"/>
-</p:tagLst>
-</file>
-
-<file path=ppt/tags/tag45.xml><?xml version="1.0" encoding="utf-8"?>
-<p:tagLst xmlns:p="http://schemas.openxmlformats.org/presentationml/2006/main">
-  <p:tag name="KSO_WM_UNIT_HIGHLIGHT" val="0"/>
-  <p:tag name="KSO_WM_UNIT_COMPATIBLE" val="0"/>
-  <p:tag name="KSO_WM_UNIT_DIAGRAM_ISNUMVISUAL" val="0"/>
-  <p:tag name="KSO_WM_UNIT_DIAGRAM_ISREFERUNIT" val="0"/>
-  <p:tag name="KSO_WM_UNIT_ID" val="_6**"/>
-  <p:tag name="KSO_WM_UNIT_LAYERLEVEL" val="1"/>
-  <p:tag name="KSO_WM_TAG_VERSION" val="1.0"/>
-  <p:tag name="KSO_WM_BEAUTIFY_FLAG" val="#wm#"/>
-</p:tagLst>
-</file>
-
-<file path=ppt/tags/tag46.xml><?xml version="1.0" encoding="utf-8"?>
-<p:tagLst xmlns:p="http://schemas.openxmlformats.org/presentationml/2006/main">
-  <p:tag name="KSO_WM_UNIT_HIGHLIGHT" val="0"/>
-  <p:tag name="KSO_WM_UNIT_COMPATIBLE" val="0"/>
-  <p:tag name="KSO_WM_UNIT_DIAGRAM_ISNUMVISUAL" val="0"/>
-  <p:tag name="KSO_WM_UNIT_DIAGRAM_ISREFERUNIT" val="0"/>
-  <p:tag name="KSO_WM_UNIT_ID" val="_6**"/>
-  <p:tag name="KSO_WM_UNIT_LAYERLEVEL" val="1"/>
-  <p:tag name="KSO_WM_TAG_VERSION" val="1.0"/>
-  <p:tag name="KSO_WM_BEAUTIFY_FLAG" val="#wm#"/>
-</p:tagLst>
-</file>
-
-<file path=ppt/tags/tag47.xml><?xml version="1.0" encoding="utf-8"?>
-<p:tagLst xmlns:p="http://schemas.openxmlformats.org/presentationml/2006/main">
-  <p:tag name="KSO_WM_UNIT_HIGHLIGHT" val="0"/>
-  <p:tag name="KSO_WM_UNIT_COMPATIBLE" val="0"/>
-  <p:tag name="KSO_WM_UNIT_DIAGRAM_ISNUMVISUAL" val="0"/>
-  <p:tag name="KSO_WM_UNIT_DIAGRAM_ISREFERUNIT" val="0"/>
-  <p:tag name="KSO_WM_UNIT_ID" val="_7**"/>
-  <p:tag name="KSO_WM_UNIT_LAYERLEVEL" val="1"/>
-  <p:tag name="KSO_WM_TAG_VERSION" val="1.0"/>
-  <p:tag name="KSO_WM_BEAUTIFY_FLAG" val="#wm#"/>
-</p:tagLst>
-</file>
-
-<file path=ppt/tags/tag48.xml><?xml version="1.0" encoding="utf-8"?>
-<p:tagLst xmlns:p="http://schemas.openxmlformats.org/presentationml/2006/main">
-  <p:tag name="KSO_WM_UNIT_HIGHLIGHT" val="0"/>
-  <p:tag name="KSO_WM_UNIT_COMPATIBLE" val="0"/>
-  <p:tag name="KSO_WM_UNIT_DIAGRAM_ISNUMVISUAL" val="0"/>
-  <p:tag name="KSO_WM_UNIT_DIAGRAM_ISREFERUNIT" val="0"/>
-  <p:tag name="KSO_WM_UNIT_ID" val="_7**"/>
-  <p:tag name="KSO_WM_UNIT_LAYERLEVEL" val="1"/>
-  <p:tag name="KSO_WM_TAG_VERSION" val="1.0"/>
-  <p:tag name="KSO_WM_BEAUTIFY_FLAG" val="#wm#"/>
-</p:tagLst>
-</file>
-
-<file path=ppt/tags/tag49.xml><?xml version="1.0" encoding="utf-8"?>
-<p:tagLst xmlns:p="http://schemas.openxmlformats.org/presentationml/2006/main">
-  <p:tag name="KSO_WM_UNIT_HIGHLIGHT" val="0"/>
-  <p:tag name="KSO_WM_UNIT_COMPATIBLE" val="0"/>
-  <p:tag name="KSO_WM_UNIT_DIAGRAM_ISNUMVISUAL" val="0"/>
-  <p:tag name="KSO_WM_UNIT_DIAGRAM_ISREFERUNIT" val="0"/>
-  <p:tag name="KSO_WM_UNIT_ID" val="_7**"/>
-  <p:tag name="KSO_WM_UNIT_LAYERLEVEL" val="1"/>
-  <p:tag name="KSO_WM_TAG_VERSION" val="1.0"/>
-  <p:tag name="KSO_WM_BEAUTIFY_FLAG" val="#wm#"/>
-</p:tagLst>
-</file>
-
-<file path=ppt/tags/tag5.xml><?xml version="1.0" encoding="utf-8"?>
-<p:tagLst xmlns:p="http://schemas.openxmlformats.org/presentationml/2006/main">
-  <p:tag name="KSO_WM_UNIT_HIGHLIGHT" val="0"/>
-  <p:tag name="KSO_WM_UNIT_COMPATIBLE" val="0"/>
-  <p:tag name="KSO_WM_UNIT_DIAGRAM_ISNUMVISUAL" val="0"/>
-  <p:tag name="KSO_WM_UNIT_DIAGRAM_ISREFERUNIT" val="0"/>
-  <p:tag name="KSO_WM_UNIT_ID" val="_11**"/>
-  <p:tag name="KSO_WM_UNIT_LAYERLEVEL" val="1"/>
-  <p:tag name="KSO_WM_TAG_VERSION" val="1.0"/>
-  <p:tag name="KSO_WM_BEAUTIFY_FLAG" val="#wm#"/>
-</p:tagLst>
-</file>
-
-<file path=ppt/tags/tag50.xml><?xml version="1.0" encoding="utf-8"?>
-<p:tagLst xmlns:p="http://schemas.openxmlformats.org/presentationml/2006/main">
-  <p:tag name="KSO_WM_UNIT_HIGHLIGHT" val="0"/>
-  <p:tag name="KSO_WM_UNIT_COMPATIBLE" val="0"/>
-  <p:tag name="KSO_WM_UNIT_DIAGRAM_ISNUMVISUAL" val="0"/>
-  <p:tag name="KSO_WM_UNIT_DIAGRAM_ISREFERUNIT" val="0"/>
-  <p:tag name="KSO_WM_UNIT_ID" val="_8**"/>
-  <p:tag name="KSO_WM_UNIT_LAYERLEVEL" val="1"/>
-  <p:tag name="KSO_WM_TAG_VERSION" val="1.0"/>
-  <p:tag name="KSO_WM_BEAUTIFY_FLAG" val="#wm#"/>
-</p:tagLst>
-</file>
-
-<file path=ppt/tags/tag51.xml><?xml version="1.0" encoding="utf-8"?>
-<p:tagLst xmlns:p="http://schemas.openxmlformats.org/presentationml/2006/main">
-  <p:tag name="KSO_WM_UNIT_HIGHLIGHT" val="0"/>
-  <p:tag name="KSO_WM_UNIT_COMPATIBLE" val="0"/>
-  <p:tag name="KSO_WM_UNIT_DIAGRAM_ISNUMVISUAL" val="0"/>
-  <p:tag name="KSO_WM_UNIT_DIAGRAM_ISREFERUNIT" val="0"/>
-  <p:tag name="KSO_WM_UNIT_ID" val="_8**"/>
-  <p:tag name="KSO_WM_UNIT_LAYERLEVEL" val="1"/>
-  <p:tag name="KSO_WM_TAG_VERSION" val="1.0"/>
-  <p:tag name="KSO_WM_BEAUTIFY_FLAG" val="#wm#"/>
-</p:tagLst>
-</file>
-
-<file path=ppt/tags/tag52.xml><?xml version="1.0" encoding="utf-8"?>
-<p:tagLst xmlns:p="http://schemas.openxmlformats.org/presentationml/2006/main">
-  <p:tag name="KSO_WM_UNIT_HIGHLIGHT" val="0"/>
-  <p:tag name="KSO_WM_UNIT_COMPATIBLE" val="0"/>
-  <p:tag name="KSO_WM_UNIT_DIAGRAM_ISNUMVISUAL" val="0"/>
-  <p:tag name="KSO_WM_UNIT_DIAGRAM_ISREFERUNIT" val="0"/>
-  <p:tag name="KSO_WM_UNIT_ID" val="_8**"/>
-  <p:tag name="KSO_WM_UNIT_LAYERLEVEL" val="1"/>
-  <p:tag name="KSO_WM_TAG_VERSION" val="1.0"/>
-  <p:tag name="KSO_WM_BEAUTIFY_FLAG" val="#wm#"/>
-</p:tagLst>
-</file>
-
-<file path=ppt/tags/tag53.xml><?xml version="1.0" encoding="utf-8"?>
-<p:tagLst xmlns:p="http://schemas.openxmlformats.org/presentationml/2006/main">
-  <p:tag name="KSO_WM_UNIT_HIGHLIGHT" val="0"/>
-  <p:tag name="KSO_WM_UNIT_COMPATIBLE" val="0"/>
-  <p:tag name="KSO_WM_UNIT_DIAGRAM_ISNUMVISUAL" val="0"/>
-  <p:tag name="KSO_WM_UNIT_DIAGRAM_ISREFERUNIT" val="0"/>
-  <p:tag name="KSO_WM_UNIT_ID" val="_8**"/>
-  <p:tag name="KSO_WM_UNIT_LAYERLEVEL" val="1"/>
-  <p:tag name="KSO_WM_TAG_VERSION" val="1.0"/>
-  <p:tag name="KSO_WM_BEAUTIFY_FLAG" val="#wm#"/>
-</p:tagLst>
-</file>
-
-<file path=ppt/tags/tag54.xml><?xml version="1.0" encoding="utf-8"?>
-<p:tagLst xmlns:p="http://schemas.openxmlformats.org/presentationml/2006/main">
-  <p:tag name="KSO_WM_UNIT_HIGHLIGHT" val="0"/>
-  <p:tag name="KSO_WM_UNIT_COMPATIBLE" val="0"/>
-  <p:tag name="KSO_WM_UNIT_DIAGRAM_ISNUMVISUAL" val="0"/>
-  <p:tag name="KSO_WM_UNIT_DIAGRAM_ISREFERUNIT" val="0"/>
-  <p:tag name="KSO_WM_UNIT_ID" val="_8**"/>
-  <p:tag name="KSO_WM_UNIT_LAYERLEVEL" val="1"/>
-  <p:tag name="KSO_WM_TAG_VERSION" val="1.0"/>
-  <p:tag name="KSO_WM_BEAUTIFY_FLAG" val="#wm#"/>
-</p:tagLst>
-</file>
-
-<file path=ppt/tags/tag55.xml><?xml version="1.0" encoding="utf-8"?>
-<p:tagLst xmlns:p="http://schemas.openxmlformats.org/presentationml/2006/main">
-  <p:tag name="KSO_WM_UNIT_HIGHLIGHT" val="0"/>
-  <p:tag name="KSO_WM_UNIT_COMPATIBLE" val="0"/>
-  <p:tag name="KSO_WM_UNIT_DIAGRAM_ISNUMVISUAL" val="0"/>
-  <p:tag name="KSO_WM_UNIT_DIAGRAM_ISREFERUNIT" val="0"/>
-  <p:tag name="KSO_WM_UNIT_ID" val="_8**"/>
-  <p:tag name="KSO_WM_UNIT_LAYERLEVEL" val="1"/>
-  <p:tag name="KSO_WM_TAG_VERSION" val="1.0"/>
-  <p:tag name="KSO_WM_BEAUTIFY_FLAG" val="#wm#"/>
-</p:tagLst>
-</file>
-
-<file path=ppt/tags/tag56.xml><?xml version="1.0" encoding="utf-8"?>
-<p:tagLst xmlns:p="http://schemas.openxmlformats.org/presentationml/2006/main">
-  <p:tag name="KSO_WM_UNIT_HIGHLIGHT" val="0"/>
-  <p:tag name="KSO_WM_UNIT_COMPATIBLE" val="0"/>
-  <p:tag name="KSO_WM_UNIT_DIAGRAM_ISNUMVISUAL" val="0"/>
-  <p:tag name="KSO_WM_UNIT_DIAGRAM_ISREFERUNIT" val="0"/>
-  <p:tag name="KSO_WM_UNIT_ID" val="_9**"/>
-  <p:tag name="KSO_WM_UNIT_LAYERLEVEL" val="1"/>
-  <p:tag name="KSO_WM_TAG_VERSION" val="1.0"/>
-  <p:tag name="KSO_WM_BEAUTIFY_FLAG" val="#wm#"/>
-</p:tagLst>
-</file>
-
-<file path=ppt/tags/tag57.xml><?xml version="1.0" encoding="utf-8"?>
-<p:tagLst xmlns:p="http://schemas.openxmlformats.org/presentationml/2006/main">
-  <p:tag name="KSO_WM_UNIT_HIGHLIGHT" val="0"/>
-  <p:tag name="KSO_WM_UNIT_COMPATIBLE" val="0"/>
-  <p:tag name="KSO_WM_UNIT_DIAGRAM_ISNUMVISUAL" val="0"/>
-  <p:tag name="KSO_WM_UNIT_DIAGRAM_ISREFERUNIT" val="0"/>
-  <p:tag name="KSO_WM_UNIT_ID" val="_9**"/>
-  <p:tag name="KSO_WM_UNIT_LAYERLEVEL" val="1"/>
-  <p:tag name="KSO_WM_TAG_VERSION" val="1.0"/>
-  <p:tag name="KSO_WM_BEAUTIFY_FLAG" val="#wm#"/>
-</p:tagLst>
-</file>
-
-<file path=ppt/tags/tag58.xml><?xml version="1.0" encoding="utf-8"?>
-<p:tagLst xmlns:p="http://schemas.openxmlformats.org/presentationml/2006/main">
-  <p:tag name="KSO_WM_UNIT_HIGHLIGHT" val="0"/>
-  <p:tag name="KSO_WM_UNIT_COMPATIBLE" val="0"/>
-  <p:tag name="KSO_WM_UNIT_DIAGRAM_ISNUMVISUAL" val="0"/>
-  <p:tag name="KSO_WM_UNIT_DIAGRAM_ISREFERUNIT" val="0"/>
-  <p:tag name="KSO_WM_UNIT_ID" val="_9**"/>
-  <p:tag name="KSO_WM_UNIT_LAYERLEVEL" val="1"/>
-  <p:tag name="KSO_WM_TAG_VERSION" val="1.0"/>
-  <p:tag name="KSO_WM_BEAUTIFY_FLAG" val="#wm#"/>
-</p:tagLst>
-</file>
-
-<file path=ppt/tags/tag59.xml><?xml version="1.0" encoding="utf-8"?>
-<p:tagLst xmlns:p="http://schemas.openxmlformats.org/presentationml/2006/main">
-  <p:tag name="KSO_WM_UNIT_HIGHLIGHT" val="0"/>
-  <p:tag name="KSO_WM_UNIT_COMPATIBLE" val="0"/>
-  <p:tag name="KSO_WM_UNIT_DIAGRAM_ISNUMVISUAL" val="0"/>
-  <p:tag name="KSO_WM_UNIT_DIAGRAM_ISREFERUNIT" val="0"/>
-  <p:tag name="KSO_WM_UNIT_ID" val="_9**"/>
-  <p:tag name="KSO_WM_UNIT_LAYERLEVEL" val="1"/>
-  <p:tag name="KSO_WM_TAG_VERSION" val="1.0"/>
-  <p:tag name="KSO_WM_BEAUTIFY_FLAG" val="#wm#"/>
-</p:tagLst>
-</file>
-
-<file path=ppt/tags/tag6.xml><?xml version="1.0" encoding="utf-8"?>
-<p:tagLst xmlns:p="http://schemas.openxmlformats.org/presentationml/2006/main">
-  <p:tag name="KSO_WM_UNIT_HIGHLIGHT" val="0"/>
-  <p:tag name="KSO_WM_UNIT_COMPATIBLE" val="0"/>
-  <p:tag name="KSO_WM_UNIT_DIAGRAM_ISNUMVISUAL" val="0"/>
-  <p:tag name="KSO_WM_UNIT_DIAGRAM_ISREFERUNIT" val="0"/>
-  <p:tag name="KSO_WM_UNIT_ID" val="_1**"/>
-  <p:tag name="KSO_WM_UNIT_LAYERLEVEL" val="1"/>
-  <p:tag name="KSO_WM_TAG_VERSION" val="1.0"/>
-  <p:tag name="KSO_WM_BEAUTIFY_FLAG" val="#wm#"/>
-</p:tagLst>
-</file>
-
-<file path=ppt/tags/tag60.xml><?xml version="1.0" encoding="utf-8"?>
-<p:tagLst xmlns:p="http://schemas.openxmlformats.org/presentationml/2006/main">
-  <p:tag name="KSO_WM_UNIT_HIGHLIGHT" val="0"/>
-  <p:tag name="KSO_WM_UNIT_COMPATIBLE" val="0"/>
-  <p:tag name="KSO_WM_UNIT_DIAGRAM_ISNUMVISUAL" val="0"/>
-  <p:tag name="KSO_WM_UNIT_DIAGRAM_ISREFERUNIT" val="0"/>
-  <p:tag name="KSO_WM_UNIT_ID" val="_9**"/>
-  <p:tag name="KSO_WM_UNIT_LAYERLEVEL" val="1"/>
-  <p:tag name="KSO_WM_TAG_VERSION" val="1.0"/>
-  <p:tag name="KSO_WM_BEAUTIFY_FLAG" val="#wm#"/>
-</p:tagLst>
-</file>
-
-<file path=ppt/tags/tag61.xml><?xml version="1.0" encoding="utf-8"?>
-<p:tagLst xmlns:p="http://schemas.openxmlformats.org/presentationml/2006/main">
-  <p:tag name="KSO_WM_UNIT_HIGHLIGHT" val="0"/>
-  <p:tag name="KSO_WM_UNIT_COMPATIBLE" val="0"/>
-  <p:tag name="KSO_WM_UNIT_DIAGRAM_ISNUMVISUAL" val="0"/>
-  <p:tag name="KSO_WM_UNIT_DIAGRAM_ISREFERUNIT" val="0"/>
-  <p:tag name="KSO_WM_UNIT_ID" val="_10**"/>
-  <p:tag name="KSO_WM_UNIT_LAYERLEVEL" val="1"/>
-  <p:tag name="KSO_WM_TAG_VERSION" val="1.0"/>
-  <p:tag name="KSO_WM_BEAUTIFY_FLAG" val="#wm#"/>
-</p:tagLst>
-</file>
-
-<file path=ppt/tags/tag62.xml><?xml version="1.0" encoding="utf-8"?>
-<p:tagLst xmlns:p="http://schemas.openxmlformats.org/presentationml/2006/main">
-  <p:tag name="KSO_WM_UNIT_HIGHLIGHT" val="0"/>
-  <p:tag name="KSO_WM_UNIT_COMPATIBLE" val="0"/>
-  <p:tag name="KSO_WM_UNIT_DIAGRAM_ISNUMVISUAL" val="0"/>
-  <p:tag name="KSO_WM_UNIT_DIAGRAM_ISREFERUNIT" val="0"/>
-  <p:tag name="KSO_WM_UNIT_ID" val="_10**"/>
-  <p:tag name="KSO_WM_UNIT_LAYERLEVEL" val="1"/>
-  <p:tag name="KSO_WM_TAG_VERSION" val="1.0"/>
-  <p:tag name="KSO_WM_BEAUTIFY_FLAG" val="#wm#"/>
-</p:tagLst>
-</file>
-
-<file path=ppt/tags/tag63.xml><?xml version="1.0" encoding="utf-8"?>
-<p:tagLst xmlns:p="http://schemas.openxmlformats.org/presentationml/2006/main">
-  <p:tag name="KSO_WM_UNIT_HIGHLIGHT" val="0"/>
-  <p:tag name="KSO_WM_UNIT_COMPATIBLE" val="0"/>
-  <p:tag name="KSO_WM_UNIT_DIAGRAM_ISNUMVISUAL" val="0"/>
-  <p:tag name="KSO_WM_UNIT_DIAGRAM_ISREFERUNIT" val="0"/>
-  <p:tag name="KSO_WM_UNIT_ID" val="_10**"/>
-  <p:tag name="KSO_WM_UNIT_LAYERLEVEL" val="1"/>
-  <p:tag name="KSO_WM_TAG_VERSION" val="1.0"/>
-  <p:tag name="KSO_WM_BEAUTIFY_FLAG" val="#wm#"/>
-</p:tagLst>
-</file>
-
-<file path=ppt/tags/tag64.xml><?xml version="1.0" encoding="utf-8"?>
-<p:tagLst xmlns:p="http://schemas.openxmlformats.org/presentationml/2006/main">
-  <p:tag name="KSO_WM_UNIT_HIGHLIGHT" val="0"/>
-  <p:tag name="KSO_WM_UNIT_COMPATIBLE" val="0"/>
-  <p:tag name="KSO_WM_UNIT_DIAGRAM_ISNUMVISUAL" val="0"/>
-  <p:tag name="KSO_WM_UNIT_DIAGRAM_ISREFERUNIT" val="0"/>
-  <p:tag name="KSO_WM_UNIT_ID" val="_10**"/>
-  <p:tag name="KSO_WM_UNIT_LAYERLEVEL" val="1"/>
-  <p:tag name="KSO_WM_TAG_VERSION" val="1.0"/>
-  <p:tag name="KSO_WM_BEAUTIFY_FLAG" val="#wm#"/>
-</p:tagLst>
-</file>
-
-<file path=ppt/tags/tag65.xml><?xml version="1.0" encoding="utf-8"?>
-<p:tagLst xmlns:p="http://schemas.openxmlformats.org/presentationml/2006/main">
-  <p:tag name="KSO_WM_UNIT_HIGHLIGHT" val="0"/>
-  <p:tag name="KSO_WM_UNIT_COMPATIBLE" val="0"/>
-  <p:tag name="KSO_WM_UNIT_DIAGRAM_ISNUMVISUAL" val="0"/>
-  <p:tag name="KSO_WM_UNIT_DIAGRAM_ISREFERUNIT" val="0"/>
-  <p:tag name="KSO_WM_UNIT_ID" val="_11**"/>
-  <p:tag name="KSO_WM_UNIT_LAYERLEVEL" val="1"/>
-  <p:tag name="KSO_WM_TAG_VERSION" val="1.0"/>
-  <p:tag name="KSO_WM_BEAUTIFY_FLAG" val="#wm#"/>
-</p:tagLst>
-</file>
-
-<file path=ppt/tags/tag66.xml><?xml version="1.0" encoding="utf-8"?>
-<p:tagLst xmlns:p="http://schemas.openxmlformats.org/presentationml/2006/main">
-  <p:tag name="KSO_WM_UNIT_HIGHLIGHT" val="0"/>
-  <p:tag name="KSO_WM_UNIT_COMPATIBLE" val="0"/>
-  <p:tag name="KSO_WM_UNIT_DIAGRAM_ISNUMVISUAL" val="0"/>
-  <p:tag name="KSO_WM_UNIT_DIAGRAM_ISREFERUNIT" val="0"/>
-  <p:tag name="KSO_WM_UNIT_ID" val="_11**"/>
-  <p:tag name="KSO_WM_UNIT_LAYERLEVEL" val="1"/>
-  <p:tag name="KSO_WM_TAG_VERSION" val="1.0"/>
-  <p:tag name="KSO_WM_BEAUTIFY_FLAG" val="#wm#"/>
-</p:tagLst>
-</file>
-
-<file path=ppt/tags/tag67.xml><?xml version="1.0" encoding="utf-8"?>
-<p:tagLst xmlns:p="http://schemas.openxmlformats.org/presentationml/2006/main">
-  <p:tag name="KSO_WM_UNIT_HIGHLIGHT" val="0"/>
-  <p:tag name="KSO_WM_UNIT_COMPATIBLE" val="0"/>
-  <p:tag name="KSO_WM_UNIT_DIAGRAM_ISNUMVISUAL" val="0"/>
-  <p:tag name="KSO_WM_UNIT_DIAGRAM_ISREFERUNIT" val="0"/>
-  <p:tag name="KSO_WM_UNIT_ID" val="_11**"/>
-  <p:tag name="KSO_WM_UNIT_LAYERLEVEL" val="1"/>
-  <p:tag name="KSO_WM_TAG_VERSION" val="1.0"/>
-  <p:tag name="KSO_WM_BEAUTIFY_FLAG" val="#wm#"/>
-</p:tagLst>
-</file>
-
-<file path=ppt/tags/tag68.xml><?xml version="1.0" encoding="utf-8"?>
-<p:tagLst xmlns:p="http://schemas.openxmlformats.org/presentationml/2006/main">
-  <p:tag name="KSO_WM_UNIT_HIGHLIGHT" val="0"/>
-  <p:tag name="KSO_WM_UNIT_COMPATIBLE" val="0"/>
-  <p:tag name="KSO_WM_UNIT_DIAGRAM_ISNUMVISUAL" val="0"/>
-  <p:tag name="KSO_WM_UNIT_DIAGRAM_ISREFERUNIT" val="0"/>
-  <p:tag name="KSO_WM_UNIT_ID" val="_11**"/>
-  <p:tag name="KSO_WM_UNIT_LAYERLEVEL" val="1"/>
-  <p:tag name="KSO_WM_TAG_VERSION" val="1.0"/>
-  <p:tag name="KSO_WM_BEAUTIFY_FLAG" val="#wm#"/>
-</p:tagLst>
-</file>
-
-<file path=ppt/tags/tag69.xml><?xml version="1.0" encoding="utf-8"?>
-<p:tagLst xmlns:p="http://schemas.openxmlformats.org/presentationml/2006/main">
-  <p:tag name="KSO_WM_UNIT_HIGHLIGHT" val="0"/>
-  <p:tag name="KSO_WM_UNIT_COMPATIBLE" val="0"/>
-  <p:tag name="KSO_WM_UNIT_DIAGRAM_ISNUMVISUAL" val="0"/>
-  <p:tag name="KSO_WM_UNIT_DIAGRAM_ISREFERUNIT" val="0"/>
-  <p:tag name="KSO_WM_UNIT_ID" val="_11**"/>
-  <p:tag name="KSO_WM_UNIT_LAYERLEVEL" val="1"/>
-  <p:tag name="KSO_WM_TAG_VERSION" val="1.0"/>
-  <p:tag name="KSO_WM_BEAUTIFY_FLAG" val="#wm#"/>
-</p:tagLst>
-</file>
-
-<file path=ppt/tags/tag7.xml><?xml version="1.0" encoding="utf-8"?>
-<p:tagLst xmlns:p="http://schemas.openxmlformats.org/presentationml/2006/main">
-  <p:tag name="KSO_WM_UNIT_HIGHLIGHT" val="0"/>
-  <p:tag name="KSO_WM_UNIT_COMPATIBLE" val="0"/>
-  <p:tag name="KSO_WM_UNIT_DIAGRAM_ISNUMVISUAL" val="0"/>
-  <p:tag name="KSO_WM_UNIT_DIAGRAM_ISREFERUNIT" val="0"/>
-  <p:tag name="KSO_WM_UNIT_ID" val="_1**"/>
-  <p:tag name="KSO_WM_UNIT_LAYERLEVEL" val="1"/>
-  <p:tag name="KSO_WM_TAG_VERSION" val="1.0"/>
-  <p:tag name="KSO_WM_BEAUTIFY_FLAG" val="#wm#"/>
-</p:tagLst>
-</file>
-
-<file path=ppt/tags/tag70.xml><?xml version="1.0" encoding="utf-8"?>
-<p:tagLst xmlns:p="http://schemas.openxmlformats.org/presentationml/2006/main">
-  <p:tag name="KSO_WM_BEAUTIFY_FLAG" val=""/>
-</p:tagLst>
-</file>
-
-<file path=ppt/tags/tag71.xml><?xml version="1.0" encoding="utf-8"?>
-<p:tagLst xmlns:p="http://schemas.openxmlformats.org/presentationml/2006/main">
-  <p:tag name="KSO_WM_BEAUTIFY_FLAG" val=""/>
-</p:tagLst>
-</file>
-
-<file path=ppt/tags/tag72.xml><?xml version="1.0" encoding="utf-8"?>
-<p:tagLst xmlns:p="http://schemas.openxmlformats.org/presentationml/2006/main">
-  <p:tag name="KSO_WM_BEAUTIFY_FLAG" val=""/>
-</p:tagLst>
-</file>
-
-<file path=ppt/tags/tag73.xml><?xml version="1.0" encoding="utf-8"?>
-<p:tagLst xmlns:p="http://schemas.openxmlformats.org/presentationml/2006/main">
-  <p:tag name="KSO_WM_BEAUTIFY_FLAG" val=""/>
-</p:tagLst>
-</file>
-
-<file path=ppt/tags/tag74.xml><?xml version="1.0" encoding="utf-8"?>
-<p:tagLst xmlns:p="http://schemas.openxmlformats.org/presentationml/2006/main">
-  <p:tag name="KSO_WM_BEAUTIFY_FLAG" val=""/>
-</p:tagLst>
-</file>
-
-<file path=ppt/tags/tag75.xml><?xml version="1.0" encoding="utf-8"?>
-<p:tagLst xmlns:p="http://schemas.openxmlformats.org/presentationml/2006/main">
-  <p:tag name="KSO_WM_BEAUTIFY_FLAG" val=""/>
-</p:tagLst>
-</file>
-
-<file path=ppt/tags/tag76.xml><?xml version="1.0" encoding="utf-8"?>
-<p:tagLst xmlns:p="http://schemas.openxmlformats.org/presentationml/2006/main">
-  <p:tag name="KSO_WM_BEAUTIFY_FLAG" val=""/>
-</p:tagLst>
-</file>
-
-<file path=ppt/tags/tag77.xml><?xml version="1.0" encoding="utf-8"?>
-<p:tagLst xmlns:p="http://schemas.openxmlformats.org/presentationml/2006/main">
-  <p:tag name="KSO_WM_BEAUTIFY_FLAG" val=""/>
-</p:tagLst>
-</file>
-
-<file path=ppt/tags/tag78.xml><?xml version="1.0" encoding="utf-8"?>
-<p:tagLst xmlns:p="http://schemas.openxmlformats.org/presentationml/2006/main">
-  <p:tag name="KSO_WM_BEAUTIFY_FLAG" val=""/>
-</p:tagLst>
-</file>
-
-<file path=ppt/tags/tag79.xml><?xml version="1.0" encoding="utf-8"?>
-<p:tagLst xmlns:p="http://schemas.openxmlformats.org/presentationml/2006/main">
-  <p:tag name="KSO_WM_BEAUTIFY_FLAG" val=""/>
-</p:tagLst>
-</file>
-
-<file path=ppt/tags/tag8.xml><?xml version="1.0" encoding="utf-8"?>
-<p:tagLst xmlns:p="http://schemas.openxmlformats.org/presentationml/2006/main">
-  <p:tag name="KSO_WM_UNIT_HIGHLIGHT" val="0"/>
-  <p:tag name="KSO_WM_UNIT_COMPATIBLE" val="0"/>
-  <p:tag name="KSO_WM_UNIT_DIAGRAM_ISNUMVISUAL" val="0"/>
-  <p:tag name="KSO_WM_UNIT_DIAGRAM_ISREFERUNIT" val="0"/>
-  <p:tag name="KSO_WM_UNIT_ID" val="_1**"/>
-  <p:tag name="KSO_WM_UNIT_LAYERLEVEL" val="1"/>
-  <p:tag name="KSO_WM_TAG_VERSION" val="1.0"/>
-  <p:tag name="KSO_WM_BEAUTIFY_FLAG" val="#wm#"/>
-</p:tagLst>
-</file>
-
-<file path=ppt/tags/tag80.xml><?xml version="1.0" encoding="utf-8"?>
-<p:tagLst xmlns:p="http://schemas.openxmlformats.org/presentationml/2006/main">
-  <p:tag name="KSO_WM_BEAUTIFY_FLAG" val=""/>
 </p:tagLst>
 </file>
 
@@ -14731,6 +14321,109 @@
 
 <file path=ppt/tags/tag82.xml><?xml version="1.0" encoding="utf-8"?>
 <p:tagLst xmlns:p="http://schemas.openxmlformats.org/presentationml/2006/main">
+  <p:tag name="KSO_WM_BEAUTIFY_FLAG" val=""/>
+</p:tagLst>
+</file>
+
+<file path=ppt/tags/tag83.xml><?xml version="1.0" encoding="utf-8"?>
+<p:tagLst xmlns:p="http://schemas.openxmlformats.org/presentationml/2006/main">
+  <p:tag name="KSO_WM_BEAUTIFY_FLAG" val=""/>
+</p:tagLst>
+</file>
+
+<file path=ppt/tags/tag84.xml><?xml version="1.0" encoding="utf-8"?>
+<p:tagLst xmlns:p="http://schemas.openxmlformats.org/presentationml/2006/main">
+  <p:tag name="KSO_WM_BEAUTIFY_FLAG" val=""/>
+</p:tagLst>
+</file>
+
+<file path=ppt/tags/tag85.xml><?xml version="1.0" encoding="utf-8"?>
+<p:tagLst xmlns:p="http://schemas.openxmlformats.org/presentationml/2006/main">
+  <p:tag name="KSO_WM_BEAUTIFY_FLAG" val=""/>
+</p:tagLst>
+</file>
+
+<file path=ppt/tags/tag86.xml><?xml version="1.0" encoding="utf-8"?>
+<p:tagLst xmlns:p="http://schemas.openxmlformats.org/presentationml/2006/main">
+  <p:tag name="KSO_WM_BEAUTIFY_FLAG" val=""/>
+</p:tagLst>
+</file>
+
+<file path=ppt/tags/tag87.xml><?xml version="1.0" encoding="utf-8"?>
+<p:tagLst xmlns:p="http://schemas.openxmlformats.org/presentationml/2006/main">
+  <p:tag name="KSO_WM_BEAUTIFY_FLAG" val=""/>
+</p:tagLst>
+</file>
+
+<file path=ppt/tags/tag88.xml><?xml version="1.0" encoding="utf-8"?>
+<p:tagLst xmlns:p="http://schemas.openxmlformats.org/presentationml/2006/main">
+  <p:tag name="KSO_WM_BEAUTIFY_FLAG" val=""/>
+</p:tagLst>
+</file>
+
+<file path=ppt/tags/tag89.xml><?xml version="1.0" encoding="utf-8"?>
+<p:tagLst xmlns:p="http://schemas.openxmlformats.org/presentationml/2006/main">
+  <p:tag name="KSO_WM_BEAUTIFY_FLAG" val=""/>
+</p:tagLst>
+</file>
+
+<file path=ppt/tags/tag9.xml><?xml version="1.0" encoding="utf-8"?>
+<p:tagLst xmlns:p="http://schemas.openxmlformats.org/presentationml/2006/main">
+  <p:tag name="KSO_WM_UNIT_HIGHLIGHT" val="0"/>
+  <p:tag name="KSO_WM_UNIT_COMPATIBLE" val="0"/>
+  <p:tag name="KSO_WM_UNIT_DIAGRAM_ISNUMVISUAL" val="0"/>
+  <p:tag name="KSO_WM_UNIT_DIAGRAM_ISREFERUNIT" val="0"/>
+  <p:tag name="KSO_WM_UNIT_ID" val="_1**"/>
+  <p:tag name="KSO_WM_UNIT_LAYERLEVEL" val="1"/>
+  <p:tag name="KSO_WM_TAG_VERSION" val="1.0"/>
+  <p:tag name="KSO_WM_BEAUTIFY_FLAG" val="#wm#"/>
+</p:tagLst>
+</file>
+
+<file path=ppt/tags/tag90.xml><?xml version="1.0" encoding="utf-8"?>
+<p:tagLst xmlns:p="http://schemas.openxmlformats.org/presentationml/2006/main">
+  <p:tag name="KSO_WM_BEAUTIFY_FLAG" val=""/>
+</p:tagLst>
+</file>
+
+<file path=ppt/tags/tag91.xml><?xml version="1.0" encoding="utf-8"?>
+<p:tagLst xmlns:p="http://schemas.openxmlformats.org/presentationml/2006/main">
+  <p:tag name="KSO_WM_BEAUTIFY_FLAG" val=""/>
+</p:tagLst>
+</file>
+
+<file path=ppt/tags/tag92.xml><?xml version="1.0" encoding="utf-8"?>
+<p:tagLst xmlns:p="http://schemas.openxmlformats.org/presentationml/2006/main">
+  <p:tag name="KSO_WM_BEAUTIFY_FLAG" val=""/>
+</p:tagLst>
+</file>
+
+<file path=ppt/tags/tag93.xml><?xml version="1.0" encoding="utf-8"?>
+<p:tagLst xmlns:p="http://schemas.openxmlformats.org/presentationml/2006/main">
+  <p:tag name="KSO_WM_BEAUTIFY_FLAG" val=""/>
+</p:tagLst>
+</file>
+
+<file path=ppt/tags/tag94.xml><?xml version="1.0" encoding="utf-8"?>
+<p:tagLst xmlns:p="http://schemas.openxmlformats.org/presentationml/2006/main">
+  <p:tag name="KSO_WM_BEAUTIFY_FLAG" val=""/>
+</p:tagLst>
+</file>
+
+<file path=ppt/tags/tag95.xml><?xml version="1.0" encoding="utf-8"?>
+<p:tagLst xmlns:p="http://schemas.openxmlformats.org/presentationml/2006/main">
+  <p:tag name="KSO_WM_BEAUTIFY_FLAG" val=""/>
+</p:tagLst>
+</file>
+
+<file path=ppt/tags/tag96.xml><?xml version="1.0" encoding="utf-8"?>
+<p:tagLst xmlns:p="http://schemas.openxmlformats.org/presentationml/2006/main">
+  <p:tag name="KSO_WM_BEAUTIFY_FLAG" val=""/>
+</p:tagLst>
+</file>
+
+<file path=ppt/tags/tag97.xml><?xml version="1.0" encoding="utf-8"?>
+<p:tagLst xmlns:p="http://schemas.openxmlformats.org/presentationml/2006/main">
   <p:tag name="KSO_WM_UNIT_NOCLEAR" val="0"/>
   <p:tag name="KSO_WM_UNIT_HIGHLIGHT" val="0"/>
   <p:tag name="KSO_WM_UNIT_COMPATIBLE" val="0"/>
@@ -14754,112 +14447,28 @@
 </p:tagLst>
 </file>
 
-<file path=ppt/tags/tag83.xml><?xml version="1.0" encoding="utf-8"?>
+<file path=ppt/tags/tag98.xml><?xml version="1.0" encoding="utf-8"?>
 <p:tagLst xmlns:p="http://schemas.openxmlformats.org/presentationml/2006/main">
-  <p:tag name="KSO_WM_BEAUTIFY_FLAG" val=""/>
-</p:tagLst>
-</file>
-
-<file path=ppt/tags/tag84.xml><?xml version="1.0" encoding="utf-8"?>
-<p:tagLst xmlns:p="http://schemas.openxmlformats.org/presentationml/2006/main">
-  <p:tag name="KSO_WM_BEAUTIFY_FLAG" val=""/>
-</p:tagLst>
-</file>
-
-<file path=ppt/tags/tag85.xml><?xml version="1.0" encoding="utf-8"?>
-<p:tagLst xmlns:p="http://schemas.openxmlformats.org/presentationml/2006/main">
-  <p:tag name="KSO_WM_BEAUTIFY_FLAG" val=""/>
-</p:tagLst>
-</file>
-
-<file path=ppt/tags/tag86.xml><?xml version="1.0" encoding="utf-8"?>
-<p:tagLst xmlns:p="http://schemas.openxmlformats.org/presentationml/2006/main">
-  <p:tag name="KSO_WM_BEAUTIFY_FLAG" val=""/>
-</p:tagLst>
-</file>
-
-<file path=ppt/tags/tag87.xml><?xml version="1.0" encoding="utf-8"?>
-<p:tagLst xmlns:p="http://schemas.openxmlformats.org/presentationml/2006/main">
-  <p:tag name="KSO_WM_BEAUTIFY_FLAG" val=""/>
-</p:tagLst>
-</file>
-
-<file path=ppt/tags/tag88.xml><?xml version="1.0" encoding="utf-8"?>
-<p:tagLst xmlns:p="http://schemas.openxmlformats.org/presentationml/2006/main">
-  <p:tag name="KSO_WM_BEAUTIFY_FLAG" val=""/>
-</p:tagLst>
-</file>
-
-<file path=ppt/tags/tag89.xml><?xml version="1.0" encoding="utf-8"?>
-<p:tagLst xmlns:p="http://schemas.openxmlformats.org/presentationml/2006/main">
-  <p:tag name="KSO_WM_BEAUTIFY_FLAG" val=""/>
-</p:tagLst>
-</file>
-
-<file path=ppt/tags/tag9.xml><?xml version="1.0" encoding="utf-8"?>
-<p:tagLst xmlns:p="http://schemas.openxmlformats.org/presentationml/2006/main">
+  <p:tag name="KSO_WM_UNIT_NOCLEAR" val="0"/>
   <p:tag name="KSO_WM_UNIT_HIGHLIGHT" val="0"/>
   <p:tag name="KSO_WM_UNIT_COMPATIBLE" val="0"/>
   <p:tag name="KSO_WM_UNIT_DIAGRAM_ISNUMVISUAL" val="0"/>
   <p:tag name="KSO_WM_UNIT_DIAGRAM_ISREFERUNIT" val="0"/>
-  <p:tag name="KSO_WM_UNIT_ID" val="_1**"/>
-  <p:tag name="KSO_WM_UNIT_LAYERLEVEL" val="1"/>
+  <p:tag name="KSO_WM_UNIT_TYPE" val="m_h_i"/>
+  <p:tag name="KSO_WM_UNIT_INDEX" val="1_1_1"/>
+  <p:tag name="KSO_WM_UNIT_ID" val="diagram726_1*m_h_i*1_1_1"/>
+  <p:tag name="KSO_WM_TEMPLATE_CATEGORY" val="diagram"/>
+  <p:tag name="KSO_WM_TEMPLATE_INDEX" val="726"/>
+  <p:tag name="KSO_WM_UNIT_LAYERLEVEL" val="1_1_1"/>
   <p:tag name="KSO_WM_TAG_VERSION" val="1.0"/>
-  <p:tag name="KSO_WM_BEAUTIFY_FLAG" val="#wm#"/>
-</p:tagLst>
-</file>
-
-<file path=ppt/tags/tag90.xml><?xml version="1.0" encoding="utf-8"?>
-<p:tagLst xmlns:p="http://schemas.openxmlformats.org/presentationml/2006/main">
   <p:tag name="KSO_WM_BEAUTIFY_FLAG" val=""/>
-</p:tagLst>
-</file>
-
-<file path=ppt/tags/tag91.xml><?xml version="1.0" encoding="utf-8"?>
-<p:tagLst xmlns:p="http://schemas.openxmlformats.org/presentationml/2006/main">
-  <p:tag name="KSO_WM_BEAUTIFY_FLAG" val=""/>
-</p:tagLst>
-</file>
-
-<file path=ppt/tags/tag92.xml><?xml version="1.0" encoding="utf-8"?>
-<p:tagLst xmlns:p="http://schemas.openxmlformats.org/presentationml/2006/main">
-  <p:tag name="KSO_WM_BEAUTIFY_FLAG" val=""/>
-</p:tagLst>
-</file>
-
-<file path=ppt/tags/tag93.xml><?xml version="1.0" encoding="utf-8"?>
-<p:tagLst xmlns:p="http://schemas.openxmlformats.org/presentationml/2006/main">
-  <p:tag name="KSO_WM_BEAUTIFY_FLAG" val=""/>
-</p:tagLst>
-</file>
-
-<file path=ppt/tags/tag94.xml><?xml version="1.0" encoding="utf-8"?>
-<p:tagLst xmlns:p="http://schemas.openxmlformats.org/presentationml/2006/main">
-  <p:tag name="KSO_WM_BEAUTIFY_FLAG" val=""/>
-</p:tagLst>
-</file>
-
-<file path=ppt/tags/tag95.xml><?xml version="1.0" encoding="utf-8"?>
-<p:tagLst xmlns:p="http://schemas.openxmlformats.org/presentationml/2006/main">
-  <p:tag name="KSO_WM_BEAUTIFY_FLAG" val=""/>
-</p:tagLst>
-</file>
-
-<file path=ppt/tags/tag96.xml><?xml version="1.0" encoding="utf-8"?>
-<p:tagLst xmlns:p="http://schemas.openxmlformats.org/presentationml/2006/main">
-  <p:tag name="KSO_WM_BEAUTIFY_FLAG" val=""/>
-</p:tagLst>
-</file>
-
-<file path=ppt/tags/tag97.xml><?xml version="1.0" encoding="utf-8"?>
-<p:tagLst xmlns:p="http://schemas.openxmlformats.org/presentationml/2006/main">
-  <p:tag name="KSO_WM_BEAUTIFY_FLAG" val=""/>
-</p:tagLst>
-</file>
-
-<file path=ppt/tags/tag98.xml><?xml version="1.0" encoding="utf-8"?>
-<p:tagLst xmlns:p="http://schemas.openxmlformats.org/presentationml/2006/main">
-  <p:tag name="KSO_WM_BEAUTIFY_FLAG" val=""/>
+  <p:tag name="KSO_WM_DIAGRAM_GROUP_CODE" val="m1-1"/>
+  <p:tag name="KSO_WM_UNIT_FILL_FORE_SCHEMECOLOR_INDEX" val="5"/>
+  <p:tag name="KSO_WM_UNIT_FILL_TYPE" val="1"/>
+  <p:tag name="KSO_WM_UNIT_TEXT_FILL_FORE_SCHEMECOLOR_INDEX" val="2"/>
+  <p:tag name="KSO_WM_UNIT_TEXT_FILL_TYPE" val="1"/>
+  <p:tag name="KSO_WM_UNIT_DIAGRAM_SCHEMECOLOR_ID" val="1"/>
+  <p:tag name="KSO_WM_UNIT_USESOURCEFORMAT_APPLY" val="1"/>
 </p:tagLst>
 </file>
 
